--- a/presentaciones/TaTa_Estado_y_Pedido_Omar.pptx
+++ b/presentaciones/TaTa_Estado_y_Pedido_Omar.pptx
@@ -14,9 +14,11 @@
     <p:sldId id="262" r:id="rId8"/>
     <p:sldId id="263" r:id="rId9"/>
     <p:sldId id="264" r:id="rId10"/>
+    <p:sldId id="265" r:id="rId11"/>
+    <p:sldId id="266" r:id="rId12"/>
   </p:sldIdLst>
   <p:notesMasterIdLst>
-    <p:notesMasterId r:id="rId11"/>
+    <p:notesMasterId r:id="rId13"/>
   </p:notesMasterIdLst>
   <p:sldSz cx="12192000" cy="6858000"/>
   <p:notesSz cx="6858000" cy="12192000"/>
@@ -510,7 +512,7 @@
           <a:p>
             <a:r>
               <a:rPr lang="en-US" dirty="0"/>
-              <a:t>Seguimiento, no el caso de negocio completo. Tres números arriba: el avance, el presupuesto que baja, y el pedido de un equipo. Abrir diciendo que el software ya está y que lo unico que frena es la maquina.</a:t>
+              <a:t>Seguimiento, no el caso de negocio completo. El mensaje: el software ya esta, el NRE lo pongo yo, y lo unico que frena es la maquina.</a:t>
             </a:r>
             <a:endParaRPr lang="en-US" dirty="0"/>
           </a:p>
@@ -534,6 +536,182 @@
             <a:fld id="{F7021451-1387-4CA6-816F-3879F97B5CBC}" type="slidenum">
               <a:rPr lang="en-US"/>
               <a:t>1</a:t>
+            </a:fld>
+            <a:endParaRPr lang="en-US"/>
+          </a:p>
+        </p:txBody>
+      </p:sp>
+    </p:spTree>
+    <p:extLst>
+      <p:ext uri="{BB962C8B-B14F-4D97-AF65-F5344CB8AC3E}">
+        <p14:creationId xmlns:p14="http://schemas.microsoft.com/office/powerpoint/2010/main" val="1024086991"/>
+      </p:ext>
+    </p:extLst>
+  </p:cSld>
+  <p:clrMapOvr>
+    <a:masterClrMapping/>
+  </p:clrMapOvr>
+</p:notes>
+</file>
+
+<file path=ppt/notesSlides/notesSlide10.xml><?xml version="1.0" encoding="utf-8"?>
+<p:notes xmlns:a="http://schemas.openxmlformats.org/drawingml/2006/main" xmlns:r="http://schemas.openxmlformats.org/officeDocument/2006/relationships" xmlns:p="http://schemas.openxmlformats.org/presentationml/2006/main">
+  <p:cSld>
+    <p:spTree>
+      <p:nvGrpSpPr>
+        <p:cNvPr id="1" name=""/>
+        <p:cNvGrpSpPr/>
+        <p:nvPr/>
+      </p:nvGrpSpPr>
+      <p:grpSpPr>
+        <a:xfrm>
+          <a:off x="0" y="0"/>
+          <a:ext cx="0" cy="0"/>
+          <a:chOff x="0" y="0"/>
+          <a:chExt cx="0" cy="0"/>
+        </a:xfrm>
+      </p:grpSpPr>
+      <p:sp>
+        <p:nvSpPr>
+          <p:cNvPr id="2" name="Slide Image Placeholder 1"/>
+          <p:cNvSpPr>
+            <a:spLocks noGrp="1" noRot="1" noChangeAspect="1"/>
+          </p:cNvSpPr>
+          <p:nvPr>
+            <p:ph type="sldImg"/>
+          </p:nvPr>
+        </p:nvSpPr>
+        <p:spPr/>
+      </p:sp>
+      <p:sp>
+        <p:nvSpPr>
+          <p:cNvPr id="3" name="Notes Placeholder 2"/>
+          <p:cNvSpPr>
+            <a:spLocks noGrp="1"/>
+          </p:cNvSpPr>
+          <p:nvPr>
+            <p:ph type="body" idx="1"/>
+          </p:nvPr>
+        </p:nvSpPr>
+        <p:spPr/>
+        <p:txBody>
+          <a:bodyPr/>
+          <a:lstStyle/>
+          <a:p>
+            <a:r>
+              <a:rPr lang="en-US" dirty="0"/>
+              <a:t>El ahorro es el titular, y el remate es que lo pago yo: cero riesgo de hardware para Montasa. El LiDAR no se descarta, es expansion.</a:t>
+            </a:r>
+            <a:endParaRPr lang="en-US" dirty="0"/>
+          </a:p>
+        </p:txBody>
+      </p:sp>
+      <p:sp>
+        <p:nvSpPr>
+          <p:cNvPr id="4" name="Slide Number Placeholder 3"/>
+          <p:cNvSpPr>
+            <a:spLocks noGrp="1"/>
+          </p:cNvSpPr>
+          <p:nvPr>
+            <p:ph type="sldNum" sz="quarter" idx="10"/>
+          </p:nvPr>
+        </p:nvSpPr>
+        <p:spPr/>
+        <p:txBody>
+          <a:bodyPr/>
+          <a:lstStyle/>
+          <a:p>
+            <a:fld id="{F7021451-1387-4CA6-816F-3879F97B5CBC}" type="slidenum">
+              <a:rPr lang="en-US"/>
+              <a:t>10</a:t>
+            </a:fld>
+            <a:endParaRPr lang="en-US"/>
+          </a:p>
+        </p:txBody>
+      </p:sp>
+    </p:spTree>
+    <p:extLst>
+      <p:ext uri="{BB962C8B-B14F-4D97-AF65-F5344CB8AC3E}">
+        <p14:creationId xmlns:p14="http://schemas.microsoft.com/office/powerpoint/2010/main" val="1024086991"/>
+      </p:ext>
+    </p:extLst>
+  </p:cSld>
+  <p:clrMapOvr>
+    <a:masterClrMapping/>
+  </p:clrMapOvr>
+</p:notes>
+</file>
+
+<file path=ppt/notesSlides/notesSlide11.xml><?xml version="1.0" encoding="utf-8"?>
+<p:notes xmlns:a="http://schemas.openxmlformats.org/drawingml/2006/main" xmlns:r="http://schemas.openxmlformats.org/officeDocument/2006/relationships" xmlns:p="http://schemas.openxmlformats.org/presentationml/2006/main">
+  <p:cSld>
+    <p:spTree>
+      <p:nvGrpSpPr>
+        <p:cNvPr id="1" name=""/>
+        <p:cNvGrpSpPr/>
+        <p:nvPr/>
+      </p:nvGrpSpPr>
+      <p:grpSpPr>
+        <a:xfrm>
+          <a:off x="0" y="0"/>
+          <a:ext cx="0" cy="0"/>
+          <a:chOff x="0" y="0"/>
+          <a:chExt cx="0" cy="0"/>
+        </a:xfrm>
+      </p:grpSpPr>
+      <p:sp>
+        <p:nvSpPr>
+          <p:cNvPr id="2" name="Slide Image Placeholder 1"/>
+          <p:cNvSpPr>
+            <a:spLocks noGrp="1" noRot="1" noChangeAspect="1"/>
+          </p:cNvSpPr>
+          <p:nvPr>
+            <p:ph type="sldImg"/>
+          </p:nvPr>
+        </p:nvSpPr>
+        <p:spPr/>
+      </p:sp>
+      <p:sp>
+        <p:nvSpPr>
+          <p:cNvPr id="3" name="Notes Placeholder 2"/>
+          <p:cNvSpPr>
+            <a:spLocks noGrp="1"/>
+          </p:cNvSpPr>
+          <p:nvPr>
+            <p:ph type="body" idx="1"/>
+          </p:nvPr>
+        </p:nvSpPr>
+        <p:spPr/>
+        <p:txBody>
+          <a:bodyPr/>
+          <a:lstStyle/>
+          <a:p>
+            <a:r>
+              <a:rPr lang="en-US" dirty="0"/>
+              <a:t>Cerrar con la frase. Los tres pedidos: uno recupera un activo, otro es logistica de taller, el tercero no cuesta nada. Ninguno es comprar hardware.</a:t>
+            </a:r>
+            <a:endParaRPr lang="en-US" dirty="0"/>
+          </a:p>
+        </p:txBody>
+      </p:sp>
+      <p:sp>
+        <p:nvSpPr>
+          <p:cNvPr id="4" name="Slide Number Placeholder 3"/>
+          <p:cNvSpPr>
+            <a:spLocks noGrp="1"/>
+          </p:cNvSpPr>
+          <p:nvPr>
+            <p:ph type="sldNum" sz="quarter" idx="10"/>
+          </p:nvPr>
+        </p:nvSpPr>
+        <p:spPr/>
+        <p:txBody>
+          <a:bodyPr/>
+          <a:lstStyle/>
+          <a:p>
+            <a:fld id="{F7021451-1387-4CA6-816F-3879F97B5CBC}" type="slidenum">
+              <a:rPr lang="en-US"/>
+              <a:t>11</a:t>
             </a:fld>
             <a:endParaRPr lang="en-US"/>
           </a:p>
@@ -598,7 +776,7 @@
           <a:p>
             <a:r>
               <a:rPr lang="en-US" dirty="0"/>
-              <a:t>Las tres cajas son la conversacion entera: algo real ya hecho, un freno que no es mio, y dos pedidos concretos.</a:t>
+              <a:t>Las tres cajas son la conversacion entera: algo real ya hecho, un freno que no es mio, y un solo pedido que ademas recupera un activo suyo.</a:t>
             </a:r>
             <a:endParaRPr lang="en-US" dirty="0"/>
           </a:p>
@@ -686,7 +864,7 @@
           <a:p>
             <a:r>
               <a:rPr lang="en-US" dirty="0"/>
-              <a:t>El punto para un financiero: esto es NRE, ingenieria que se paga una vez para todo el modelo, no por unidad. Y no costo efectivo.</a:t>
+              <a:t>El punto para un financiero: esto es NRE, ingenieria que se paga una vez para todo el modelo, no por unidad. Y cero costo efectivo para Montasa.</a:t>
             </a:r>
             <a:endParaRPr lang="en-US" dirty="0"/>
           </a:p>
@@ -774,7 +952,7 @@
           <a:p>
             <a:r>
               <a:rPr lang="en-US" dirty="0"/>
-              <a:t>Honestidad: no estoy pidiendo tiempo ni plata para programar mas. Estoy pidiendo la maquina. Es un bloqueo externo, no de ejecucion.</a:t>
+              <a:t>Anticipar "cambiaron de plan, perdieron tiempo". Al reves: el plan mecanico habria seguido fabricando el primer actuador. El EDR ya tiene 2/3 del teleop.</a:t>
             </a:r>
             <a:endParaRPr lang="en-US" dirty="0"/>
           </a:p>
@@ -862,7 +1040,7 @@
           <a:p>
             <a:r>
               <a:rPr lang="en-US" dirty="0"/>
-              <a:t>Aca es donde se desafia la mentalidad de "un equipo dañado es repuesto gratis". El argumento es de plata, no de principio: canibalizar sale mas caro y mata un activo que podria rentar.</a:t>
+              <a:t>La linea de tiempo es la prueba de "on track". Dos de los tres canales de mando probados, el bus entero leido, en tres meses.</a:t>
             </a:r>
             <a:endParaRPr lang="en-US" dirty="0"/>
           </a:p>
@@ -950,7 +1128,7 @@
           <a:p>
             <a:r>
               <a:rPr lang="en-US" dirty="0"/>
-              <a:t>Clave para Omar: el gasto no se lo cargas al proyecto, se lo cargas a recuperar un activo. El proyecto es el bonus.</a:t>
+              <a:t>Honestidad: no pido tiempo ni plata para programar mas. Pido la maquina. Bloqueo externo, no de ejecucion.</a:t>
             </a:r>
             <a:endParaRPr lang="en-US" dirty="0"/>
           </a:p>
@@ -1038,7 +1216,7 @@
           <a:p>
             <a:r>
               <a:rPr lang="en-US" dirty="0"/>
-              <a:t>La historia: no necesitamos el sensor caro para el primer nivel. Odometria + camara alcanzan. El LiDAR es a donde se puede llegar, no por donde se empieza.</a:t>
+              <a:t>El argumento es de plata, no de principio: canibalizar sale mas caro y mata un activo que podria rentar.</a:t>
             </a:r>
             <a:endParaRPr lang="en-US" dirty="0"/>
           </a:p>
@@ -1126,7 +1304,7 @@
           <a:p>
             <a:r>
               <a:rPr lang="en-US" dirty="0"/>
-              <a:t>El ahorro es el titular. Y el matiz honesto: no es que el LiDAR no sirva, es que no hace falta para arrancar. Las cifras son cotizacion mia, hay que confirmarlas.</a:t>
+              <a:t>El gasto no se lo cargas al proyecto, se lo cargas a recuperar un activo. El proyecto es el bonus.</a:t>
             </a:r>
             <a:endParaRPr lang="en-US" dirty="0"/>
           </a:p>
@@ -1214,7 +1392,7 @@
           <a:p>
             <a:r>
               <a:rPr lang="en-US" dirty="0"/>
-              <a:t>Cerrar con la frase. Ninguno de los tres pedidos es un cheque grande: uno recupera un activo, otro es logistica de taller, el tercero es aprobar MENOS plata que antes.</a:t>
+              <a:t>Este es el slide que desarma el riesgo para Omar: no se le pide comprar hardware. El NRE y el computo los pone maje. Montasa solo recupera un activo propio.</a:t>
             </a:r>
             <a:endParaRPr lang="en-US" dirty="0"/>
           </a:p>
@@ -1840,7 +2018,7 @@
               <a:buNone/>
             </a:pPr>
             <a:r>
-              <a:rPr lang="en-US" sz="2800" b="1" dirty="0">
+              <a:rPr lang="en-US" sz="2500" b="1" dirty="0">
                 <a:solidFill>
                   <a:srgbClr val="ECEBE6"/>
                 </a:solidFill>
@@ -1850,7 +2028,7 @@
               </a:rPr>
               <a:t>2/3</a:t>
             </a:r>
-            <a:endParaRPr lang="en-US" sz="2800" dirty="0"/>
+            <a:endParaRPr lang="en-US" sz="2500" dirty="0"/>
           </a:p>
         </p:txBody>
       </p:sp>
@@ -1862,7 +2040,7 @@
         </p:nvSpPr>
         <p:spPr>
           <a:xfrm>
-            <a:off x="1097280" y="5138928"/>
+            <a:off x="1097280" y="5157216"/>
             <a:ext cx="2834640" cy="274320"/>
           </a:xfrm>
           <a:prstGeom prst="rect">
@@ -1955,7 +2133,7 @@
                 <a:ea typeface="Calibri" pitchFamily="34" charset="-122"/>
                 <a:cs typeface="Calibri" pitchFamily="34" charset="-120"/>
               </a:rPr>
-              <a:t>Presupuesto de cómputo</a:t>
+              <a:t>Cómputo + NRE</a:t>
             </a:r>
             <a:endParaRPr lang="en-US" sz="1000" dirty="0"/>
           </a:p>
@@ -1986,7 +2164,7 @@
               <a:buNone/>
             </a:pPr>
             <a:r>
-              <a:rPr lang="en-US" sz="2800" b="1" dirty="0">
+              <a:rPr lang="en-US" sz="2500" b="1" dirty="0">
                 <a:solidFill>
                   <a:srgbClr val="ECEBE6"/>
                 </a:solidFill>
@@ -1994,9 +2172,9 @@
                 <a:ea typeface="Cambria" pitchFamily="34" charset="-122"/>
                 <a:cs typeface="Cambria" pitchFamily="34" charset="-120"/>
               </a:rPr>
-              <a:t>$500</a:t>
-            </a:r>
-            <a:endParaRPr lang="en-US" sz="2800" dirty="0"/>
+              <a:t>lo pongo yo</a:t>
+            </a:r>
+            <a:endParaRPr lang="en-US" sz="2500" dirty="0"/>
           </a:p>
         </p:txBody>
       </p:sp>
@@ -2008,7 +2186,7 @@
         </p:nvSpPr>
         <p:spPr>
           <a:xfrm>
-            <a:off x="4663440" y="5138928"/>
+            <a:off x="4663440" y="5157216"/>
             <a:ext cx="2834640" cy="274320"/>
           </a:xfrm>
           <a:prstGeom prst="rect">
@@ -2033,7 +2211,7 @@
                 <a:ea typeface="Calibri" pitchFamily="34" charset="-122"/>
                 <a:cs typeface="Calibri" pitchFamily="34" charset="-120"/>
               </a:rPr>
-              <a:t>antes $1,400</a:t>
+              <a:t>cómputo bajado a $500</a:t>
             </a:r>
             <a:endParaRPr lang="en-US" sz="1050" dirty="0"/>
           </a:p>
@@ -2101,7 +2279,7 @@
                 <a:ea typeface="Calibri" pitchFamily="34" charset="-122"/>
                 <a:cs typeface="Calibri" pitchFamily="34" charset="-120"/>
               </a:rPr>
-              <a:t>Para destrabar</a:t>
+              <a:t>A Montasa</a:t>
             </a:r>
             <a:endParaRPr lang="en-US" sz="1000" dirty="0"/>
           </a:p>
@@ -2132,7 +2310,7 @@
               <a:buNone/>
             </a:pPr>
             <a:r>
-              <a:rPr lang="en-US" sz="2800" b="1" dirty="0">
+              <a:rPr lang="en-US" sz="2500" b="1" dirty="0">
                 <a:solidFill>
                   <a:srgbClr val="ECEBE6"/>
                 </a:solidFill>
@@ -2140,9 +2318,9 @@
                 <a:ea typeface="Cambria" pitchFamily="34" charset="-122"/>
                 <a:cs typeface="Cambria" pitchFamily="34" charset="-120"/>
               </a:rPr>
-              <a:t>1 equipo</a:t>
-            </a:r>
-            <a:endParaRPr lang="en-US" sz="2800" dirty="0"/>
+              <a:t>reparar</a:t>
+            </a:r>
+            <a:endParaRPr lang="en-US" sz="2500" dirty="0"/>
           </a:p>
         </p:txBody>
       </p:sp>
@@ -2154,7 +2332,7 @@
         </p:nvSpPr>
         <p:spPr>
           <a:xfrm>
-            <a:off x="8229600" y="5138928"/>
+            <a:off x="8229600" y="5157216"/>
             <a:ext cx="2834640" cy="274320"/>
           </a:xfrm>
           <a:prstGeom prst="rect">
@@ -2179,7 +2357,7 @@
                 <a:ea typeface="Calibri" pitchFamily="34" charset="-122"/>
                 <a:cs typeface="Calibri" pitchFamily="34" charset="-120"/>
               </a:rPr>
-              <a:t>reparar el MT 122</a:t>
+              <a:t>el MT 122</a:t>
             </a:r>
             <a:endParaRPr lang="en-US" sz="1050" dirty="0"/>
           </a:p>
@@ -2260,6 +2438,1641 @@
               <a:t>Octubre 2026 · San Pedro Sula</a:t>
             </a:r>
             <a:endParaRPr lang="en-US" sz="1100" dirty="0"/>
+          </a:p>
+        </p:txBody>
+      </p:sp>
+    </p:spTree>
+  </p:cSld>
+  <p:clrMapOvr>
+    <a:masterClrMapping/>
+  </p:clrMapOvr>
+</p:sld>
+</file>
+
+<file path=ppt/slides/slide10.xml><?xml version="1.0" encoding="utf-8"?>
+<p:sld xmlns:a="http://schemas.openxmlformats.org/drawingml/2006/main" xmlns:r="http://schemas.openxmlformats.org/officeDocument/2006/relationships" xmlns:p="http://schemas.openxmlformats.org/presentationml/2006/main">
+  <p:cSld name="Slide 10">
+    <p:bg>
+      <p:bgPr>
+        <a:solidFill>
+          <a:srgbClr val="F4F5F7"/>
+        </a:solidFill>
+      </p:bgPr>
+    </p:bg>
+    <p:spTree>
+      <p:nvGrpSpPr>
+        <p:cNvPr id="1" name=""/>
+        <p:cNvGrpSpPr/>
+        <p:nvPr/>
+      </p:nvGrpSpPr>
+      <p:grpSpPr>
+        <a:xfrm>
+          <a:off x="0" y="0"/>
+          <a:ext cx="0" cy="0"/>
+          <a:chOff x="0" y="0"/>
+          <a:chExt cx="0" cy="0"/>
+        </a:xfrm>
+      </p:grpSpPr>
+      <p:sp>
+        <p:nvSpPr>
+          <p:cNvPr id="2" name="Text 0"/>
+          <p:cNvSpPr/>
+          <p:nvPr/>
+        </p:nvSpPr>
+        <p:spPr>
+          <a:xfrm>
+            <a:off x="594360" y="384048"/>
+            <a:ext cx="10972800" cy="777240"/>
+          </a:xfrm>
+          <a:prstGeom prst="rect">
+            <a:avLst/>
+          </a:prstGeom>
+          <a:noFill/>
+          <a:ln/>
+        </p:spPr>
+        <p:txBody>
+          <a:bodyPr wrap="square" lIns="0" tIns="0" rIns="0" bIns="0" rtlCol="0" anchor="ctr"/>
+          <a:lstStyle/>
+          <a:p>
+            <a:pPr indent="0" marL="0">
+              <a:buNone/>
+            </a:pPr>
+            <a:r>
+              <a:rPr lang="en-US" sz="3300" b="1" dirty="0">
+                <a:solidFill>
+                  <a:srgbClr val="1A1D23"/>
+                </a:solidFill>
+                <a:latin typeface="Cambria" pitchFamily="34" charset="0"/>
+                <a:ea typeface="Cambria" pitchFamily="34" charset="-122"/>
+                <a:cs typeface="Cambria" pitchFamily="34" charset="-120"/>
+              </a:rPr>
+              <a:t>El cómputo: lo bajé de $1,400 a $500 — y lo pago yo</a:t>
+            </a:r>
+            <a:endParaRPr lang="en-US" sz="3300" dirty="0"/>
+          </a:p>
+        </p:txBody>
+      </p:sp>
+      <p:sp>
+        <p:nvSpPr>
+          <p:cNvPr id="3" name="Text 1"/>
+          <p:cNvSpPr/>
+          <p:nvPr/>
+        </p:nvSpPr>
+        <p:spPr>
+          <a:xfrm>
+            <a:off x="594360" y="1115568"/>
+            <a:ext cx="10972800" cy="365760"/>
+          </a:xfrm>
+          <a:prstGeom prst="rect">
+            <a:avLst/>
+          </a:prstGeom>
+          <a:noFill/>
+          <a:ln/>
+        </p:spPr>
+        <p:txBody>
+          <a:bodyPr wrap="square" lIns="0" tIns="0" rIns="0" bIns="0" rtlCol="0" anchor="ctr"/>
+          <a:lstStyle/>
+          <a:p>
+            <a:pPr indent="0" marL="0">
+              <a:buNone/>
+            </a:pPr>
+            <a:r>
+              <a:rPr lang="en-US" sz="1350" dirty="0">
+                <a:solidFill>
+                  <a:srgbClr val="5B6470"/>
+                </a:solidFill>
+                <a:latin typeface="Calibri" pitchFamily="34" charset="0"/>
+                <a:ea typeface="Calibri" pitchFamily="34" charset="-122"/>
+                <a:cs typeface="Calibri" pitchFamily="34" charset="-120"/>
+              </a:rPr>
+              <a:t>Con sólo cámaras no hace falta el equipo grande ni el LiDAR</a:t>
+            </a:r>
+            <a:endParaRPr lang="en-US" sz="1350" dirty="0"/>
+          </a:p>
+        </p:txBody>
+      </p:sp>
+      <p:sp>
+        <p:nvSpPr>
+          <p:cNvPr id="4" name="Shape 2"/>
+          <p:cNvSpPr/>
+          <p:nvPr/>
+        </p:nvSpPr>
+        <p:spPr>
+          <a:xfrm>
+            <a:off x="594360" y="1920240"/>
+            <a:ext cx="10972800" cy="457200"/>
+          </a:xfrm>
+          <a:prstGeom prst="rect">
+            <a:avLst/>
+          </a:prstGeom>
+          <a:solidFill>
+            <a:srgbClr val="E7E9EC"/>
+          </a:solidFill>
+          <a:ln w="7620">
+            <a:solidFill>
+              <a:srgbClr val="D8DADE"/>
+            </a:solidFill>
+            <a:prstDash val="solid"/>
+          </a:ln>
+        </p:spPr>
+      </p:sp>
+      <p:sp>
+        <p:nvSpPr>
+          <p:cNvPr id="5" name="Text 3"/>
+          <p:cNvSpPr/>
+          <p:nvPr/>
+        </p:nvSpPr>
+        <p:spPr>
+          <a:xfrm>
+            <a:off x="722376" y="1920240"/>
+            <a:ext cx="3401568" cy="457200"/>
+          </a:xfrm>
+          <a:prstGeom prst="rect">
+            <a:avLst/>
+          </a:prstGeom>
+          <a:noFill/>
+          <a:ln/>
+        </p:spPr>
+        <p:txBody>
+          <a:bodyPr wrap="square" lIns="0" tIns="0" rIns="0" bIns="0" rtlCol="0" anchor="ctr"/>
+          <a:lstStyle/>
+          <a:p>
+            <a:pPr algn="l" indent="0" marL="0">
+              <a:buNone/>
+            </a:pPr>
+            <a:endParaRPr lang="en-US" sz="1000" dirty="0"/>
+          </a:p>
+        </p:txBody>
+      </p:sp>
+      <p:sp>
+        <p:nvSpPr>
+          <p:cNvPr id="6" name="Text 4"/>
+          <p:cNvSpPr/>
+          <p:nvPr/>
+        </p:nvSpPr>
+        <p:spPr>
+          <a:xfrm>
+            <a:off x="4379976" y="1920240"/>
+            <a:ext cx="3401568" cy="457200"/>
+          </a:xfrm>
+          <a:prstGeom prst="rect">
+            <a:avLst/>
+          </a:prstGeom>
+          <a:noFill/>
+          <a:ln/>
+        </p:spPr>
+        <p:txBody>
+          <a:bodyPr wrap="square" lIns="0" tIns="0" rIns="0" bIns="0" rtlCol="0" anchor="ctr"/>
+          <a:lstStyle/>
+          <a:p>
+            <a:pPr algn="l" indent="0" marL="0">
+              <a:buNone/>
+            </a:pPr>
+            <a:r>
+              <a:rPr lang="en-US" sz="1000" b="1" dirty="0">
+                <a:solidFill>
+                  <a:srgbClr val="5B6470"/>
+                </a:solidFill>
+                <a:latin typeface="Calibri" pitchFamily="34" charset="0"/>
+                <a:ea typeface="Calibri" pitchFamily="34" charset="-122"/>
+                <a:cs typeface="Calibri" pitchFamily="34" charset="-120"/>
+              </a:rPr>
+              <a:t>ANTES</a:t>
+            </a:r>
+            <a:endParaRPr lang="en-US" sz="1000" dirty="0"/>
+          </a:p>
+        </p:txBody>
+      </p:sp>
+      <p:sp>
+        <p:nvSpPr>
+          <p:cNvPr id="7" name="Text 5"/>
+          <p:cNvSpPr/>
+          <p:nvPr/>
+        </p:nvSpPr>
+        <p:spPr>
+          <a:xfrm>
+            <a:off x="8037576" y="1920240"/>
+            <a:ext cx="3401568" cy="457200"/>
+          </a:xfrm>
+          <a:prstGeom prst="rect">
+            <a:avLst/>
+          </a:prstGeom>
+          <a:noFill/>
+          <a:ln/>
+        </p:spPr>
+        <p:txBody>
+          <a:bodyPr wrap="square" lIns="0" tIns="0" rIns="0" bIns="0" rtlCol="0" anchor="ctr"/>
+          <a:lstStyle/>
+          <a:p>
+            <a:pPr algn="l" indent="0" marL="0">
+              <a:buNone/>
+            </a:pPr>
+            <a:r>
+              <a:rPr lang="en-US" sz="1000" b="1" dirty="0">
+                <a:solidFill>
+                  <a:srgbClr val="5B6470"/>
+                </a:solidFill>
+                <a:latin typeface="Calibri" pitchFamily="34" charset="0"/>
+                <a:ea typeface="Calibri" pitchFamily="34" charset="-122"/>
+                <a:cs typeface="Calibri" pitchFamily="34" charset="-120"/>
+              </a:rPr>
+              <a:t>AHORA</a:t>
+            </a:r>
+            <a:endParaRPr lang="en-US" sz="1000" dirty="0"/>
+          </a:p>
+        </p:txBody>
+      </p:sp>
+      <p:sp>
+        <p:nvSpPr>
+          <p:cNvPr id="8" name="Shape 6"/>
+          <p:cNvSpPr/>
+          <p:nvPr/>
+        </p:nvSpPr>
+        <p:spPr>
+          <a:xfrm>
+            <a:off x="594360" y="2377440"/>
+            <a:ext cx="10972800" cy="548640"/>
+          </a:xfrm>
+          <a:prstGeom prst="rect">
+            <a:avLst/>
+          </a:prstGeom>
+          <a:solidFill>
+            <a:srgbClr val="FFFFFF"/>
+          </a:solidFill>
+          <a:ln w="7620">
+            <a:solidFill>
+              <a:srgbClr val="D8DADE"/>
+            </a:solidFill>
+            <a:prstDash val="solid"/>
+          </a:ln>
+        </p:spPr>
+      </p:sp>
+      <p:sp>
+        <p:nvSpPr>
+          <p:cNvPr id="9" name="Text 7"/>
+          <p:cNvSpPr/>
+          <p:nvPr/>
+        </p:nvSpPr>
+        <p:spPr>
+          <a:xfrm>
+            <a:off x="722376" y="2377440"/>
+            <a:ext cx="3401568" cy="548640"/>
+          </a:xfrm>
+          <a:prstGeom prst="rect">
+            <a:avLst/>
+          </a:prstGeom>
+          <a:noFill/>
+          <a:ln/>
+        </p:spPr>
+        <p:txBody>
+          <a:bodyPr wrap="square" lIns="0" tIns="0" rIns="0" bIns="0" rtlCol="0" anchor="ctr"/>
+          <a:lstStyle/>
+          <a:p>
+            <a:pPr algn="l" indent="0" marL="0">
+              <a:buNone/>
+            </a:pPr>
+            <a:r>
+              <a:rPr lang="en-US" sz="1100" b="1" dirty="0">
+                <a:solidFill>
+                  <a:srgbClr val="1A1D23"/>
+                </a:solidFill>
+                <a:latin typeface="Calibri" pitchFamily="34" charset="0"/>
+                <a:ea typeface="Calibri" pitchFamily="34" charset="-122"/>
+                <a:cs typeface="Calibri" pitchFamily="34" charset="-120"/>
+              </a:rPr>
+              <a:t>Sensor</a:t>
+            </a:r>
+            <a:endParaRPr lang="en-US" sz="1100" dirty="0"/>
+          </a:p>
+        </p:txBody>
+      </p:sp>
+      <p:sp>
+        <p:nvSpPr>
+          <p:cNvPr id="10" name="Text 8"/>
+          <p:cNvSpPr/>
+          <p:nvPr/>
+        </p:nvSpPr>
+        <p:spPr>
+          <a:xfrm>
+            <a:off x="4379976" y="2377440"/>
+            <a:ext cx="3401568" cy="548640"/>
+          </a:xfrm>
+          <a:prstGeom prst="rect">
+            <a:avLst/>
+          </a:prstGeom>
+          <a:noFill/>
+          <a:ln/>
+        </p:spPr>
+        <p:txBody>
+          <a:bodyPr wrap="square" lIns="0" tIns="0" rIns="0" bIns="0" rtlCol="0" anchor="ctr"/>
+          <a:lstStyle/>
+          <a:p>
+            <a:pPr algn="l" indent="0" marL="0">
+              <a:buNone/>
+            </a:pPr>
+            <a:r>
+              <a:rPr lang="en-US" sz="1100" dirty="0">
+                <a:solidFill>
+                  <a:srgbClr val="1A1D23"/>
+                </a:solidFill>
+                <a:latin typeface="Calibri" pitchFamily="34" charset="0"/>
+                <a:ea typeface="Calibri" pitchFamily="34" charset="-122"/>
+                <a:cs typeface="Calibri" pitchFamily="34" charset="-120"/>
+              </a:rPr>
+              <a:t>LiDAR 3D (Unitree L2)</a:t>
+            </a:r>
+            <a:endParaRPr lang="en-US" sz="1100" dirty="0"/>
+          </a:p>
+        </p:txBody>
+      </p:sp>
+      <p:sp>
+        <p:nvSpPr>
+          <p:cNvPr id="11" name="Text 9"/>
+          <p:cNvSpPr/>
+          <p:nvPr/>
+        </p:nvSpPr>
+        <p:spPr>
+          <a:xfrm>
+            <a:off x="8037576" y="2377440"/>
+            <a:ext cx="3401568" cy="548640"/>
+          </a:xfrm>
+          <a:prstGeom prst="rect">
+            <a:avLst/>
+          </a:prstGeom>
+          <a:noFill/>
+          <a:ln/>
+        </p:spPr>
+        <p:txBody>
+          <a:bodyPr wrap="square" lIns="0" tIns="0" rIns="0" bIns="0" rtlCol="0" anchor="ctr"/>
+          <a:lstStyle/>
+          <a:p>
+            <a:pPr algn="l" indent="0" marL="0">
+              <a:buNone/>
+            </a:pPr>
+            <a:r>
+              <a:rPr lang="en-US" sz="1100" b="1" dirty="0">
+                <a:solidFill>
+                  <a:srgbClr val="1A1D23"/>
+                </a:solidFill>
+                <a:latin typeface="Calibri" pitchFamily="34" charset="0"/>
+                <a:ea typeface="Calibri" pitchFamily="34" charset="-122"/>
+                <a:cs typeface="Calibri" pitchFamily="34" charset="-120"/>
+              </a:rPr>
+              <a:t>2 cámaras USB</a:t>
+            </a:r>
+            <a:endParaRPr lang="en-US" sz="1100" dirty="0"/>
+          </a:p>
+        </p:txBody>
+      </p:sp>
+      <p:sp>
+        <p:nvSpPr>
+          <p:cNvPr id="12" name="Shape 10"/>
+          <p:cNvSpPr/>
+          <p:nvPr/>
+        </p:nvSpPr>
+        <p:spPr>
+          <a:xfrm>
+            <a:off x="594360" y="2926080"/>
+            <a:ext cx="10972800" cy="548640"/>
+          </a:xfrm>
+          <a:prstGeom prst="rect">
+            <a:avLst/>
+          </a:prstGeom>
+          <a:solidFill>
+            <a:srgbClr val="FFFFFF"/>
+          </a:solidFill>
+          <a:ln w="7620">
+            <a:solidFill>
+              <a:srgbClr val="D8DADE"/>
+            </a:solidFill>
+            <a:prstDash val="solid"/>
+          </a:ln>
+        </p:spPr>
+      </p:sp>
+      <p:sp>
+        <p:nvSpPr>
+          <p:cNvPr id="13" name="Text 11"/>
+          <p:cNvSpPr/>
+          <p:nvPr/>
+        </p:nvSpPr>
+        <p:spPr>
+          <a:xfrm>
+            <a:off x="722376" y="2926080"/>
+            <a:ext cx="3401568" cy="548640"/>
+          </a:xfrm>
+          <a:prstGeom prst="rect">
+            <a:avLst/>
+          </a:prstGeom>
+          <a:noFill/>
+          <a:ln/>
+        </p:spPr>
+        <p:txBody>
+          <a:bodyPr wrap="square" lIns="0" tIns="0" rIns="0" bIns="0" rtlCol="0" anchor="ctr"/>
+          <a:lstStyle/>
+          <a:p>
+            <a:pPr algn="l" indent="0" marL="0">
+              <a:buNone/>
+            </a:pPr>
+            <a:r>
+              <a:rPr lang="en-US" sz="1100" b="1" dirty="0">
+                <a:solidFill>
+                  <a:srgbClr val="1A1D23"/>
+                </a:solidFill>
+                <a:latin typeface="Calibri" pitchFamily="34" charset="0"/>
+                <a:ea typeface="Calibri" pitchFamily="34" charset="-122"/>
+                <a:cs typeface="Calibri" pitchFamily="34" charset="-120"/>
+              </a:rPr>
+              <a:t>Cómputo</a:t>
+            </a:r>
+            <a:endParaRPr lang="en-US" sz="1100" dirty="0"/>
+          </a:p>
+        </p:txBody>
+      </p:sp>
+      <p:sp>
+        <p:nvSpPr>
+          <p:cNvPr id="14" name="Text 12"/>
+          <p:cNvSpPr/>
+          <p:nvPr/>
+        </p:nvSpPr>
+        <p:spPr>
+          <a:xfrm>
+            <a:off x="4379976" y="2926080"/>
+            <a:ext cx="3401568" cy="548640"/>
+          </a:xfrm>
+          <a:prstGeom prst="rect">
+            <a:avLst/>
+          </a:prstGeom>
+          <a:noFill/>
+          <a:ln/>
+        </p:spPr>
+        <p:txBody>
+          <a:bodyPr wrap="square" lIns="0" tIns="0" rIns="0" bIns="0" rtlCol="0" anchor="ctr"/>
+          <a:lstStyle/>
+          <a:p>
+            <a:pPr algn="l" indent="0" marL="0">
+              <a:buNone/>
+            </a:pPr>
+            <a:r>
+              <a:rPr lang="en-US" sz="1100" dirty="0">
+                <a:solidFill>
+                  <a:srgbClr val="1A1D23"/>
+                </a:solidFill>
+                <a:latin typeface="Calibri" pitchFamily="34" charset="0"/>
+                <a:ea typeface="Calibri" pitchFamily="34" charset="-122"/>
+                <a:cs typeface="Calibri" pitchFamily="34" charset="-120"/>
+              </a:rPr>
+              <a:t>Jetson Orin NX · 16 GB</a:t>
+            </a:r>
+            <a:endParaRPr lang="en-US" sz="1100" dirty="0"/>
+          </a:p>
+        </p:txBody>
+      </p:sp>
+      <p:sp>
+        <p:nvSpPr>
+          <p:cNvPr id="15" name="Text 13"/>
+          <p:cNvSpPr/>
+          <p:nvPr/>
+        </p:nvSpPr>
+        <p:spPr>
+          <a:xfrm>
+            <a:off x="8037576" y="2926080"/>
+            <a:ext cx="3401568" cy="548640"/>
+          </a:xfrm>
+          <a:prstGeom prst="rect">
+            <a:avLst/>
+          </a:prstGeom>
+          <a:noFill/>
+          <a:ln/>
+        </p:spPr>
+        <p:txBody>
+          <a:bodyPr wrap="square" lIns="0" tIns="0" rIns="0" bIns="0" rtlCol="0" anchor="ctr"/>
+          <a:lstStyle/>
+          <a:p>
+            <a:pPr algn="l" indent="0" marL="0">
+              <a:buNone/>
+            </a:pPr>
+            <a:r>
+              <a:rPr lang="en-US" sz="1100" b="1" dirty="0">
+                <a:solidFill>
+                  <a:srgbClr val="1A1D23"/>
+                </a:solidFill>
+                <a:latin typeface="Calibri" pitchFamily="34" charset="0"/>
+                <a:ea typeface="Calibri" pitchFamily="34" charset="-122"/>
+                <a:cs typeface="Calibri" pitchFamily="34" charset="-120"/>
+              </a:rPr>
+              <a:t>Jetson · 8 GB</a:t>
+            </a:r>
+            <a:endParaRPr lang="en-US" sz="1100" dirty="0"/>
+          </a:p>
+        </p:txBody>
+      </p:sp>
+      <p:sp>
+        <p:nvSpPr>
+          <p:cNvPr id="16" name="Shape 14"/>
+          <p:cNvSpPr/>
+          <p:nvPr/>
+        </p:nvSpPr>
+        <p:spPr>
+          <a:xfrm>
+            <a:off x="594360" y="3474720"/>
+            <a:ext cx="10972800" cy="548640"/>
+          </a:xfrm>
+          <a:prstGeom prst="rect">
+            <a:avLst/>
+          </a:prstGeom>
+          <a:solidFill>
+            <a:srgbClr val="FFFFFF"/>
+          </a:solidFill>
+          <a:ln w="7620">
+            <a:solidFill>
+              <a:srgbClr val="D8DADE"/>
+            </a:solidFill>
+            <a:prstDash val="solid"/>
+          </a:ln>
+        </p:spPr>
+      </p:sp>
+      <p:sp>
+        <p:nvSpPr>
+          <p:cNvPr id="17" name="Text 15"/>
+          <p:cNvSpPr/>
+          <p:nvPr/>
+        </p:nvSpPr>
+        <p:spPr>
+          <a:xfrm>
+            <a:off x="722376" y="3474720"/>
+            <a:ext cx="3401568" cy="548640"/>
+          </a:xfrm>
+          <a:prstGeom prst="rect">
+            <a:avLst/>
+          </a:prstGeom>
+          <a:noFill/>
+          <a:ln/>
+        </p:spPr>
+        <p:txBody>
+          <a:bodyPr wrap="square" lIns="0" tIns="0" rIns="0" bIns="0" rtlCol="0" anchor="ctr"/>
+          <a:lstStyle/>
+          <a:p>
+            <a:pPr algn="l" indent="0" marL="0">
+              <a:buNone/>
+            </a:pPr>
+            <a:r>
+              <a:rPr lang="en-US" sz="1100" b="1" dirty="0">
+                <a:solidFill>
+                  <a:srgbClr val="1A1D23"/>
+                </a:solidFill>
+                <a:latin typeface="Calibri" pitchFamily="34" charset="0"/>
+                <a:ea typeface="Calibri" pitchFamily="34" charset="-122"/>
+                <a:cs typeface="Calibri" pitchFamily="34" charset="-120"/>
+              </a:rPr>
+              <a:t>Costo del paquete</a:t>
+            </a:r>
+            <a:endParaRPr lang="en-US" sz="1100" dirty="0"/>
+          </a:p>
+        </p:txBody>
+      </p:sp>
+      <p:sp>
+        <p:nvSpPr>
+          <p:cNvPr id="18" name="Text 16"/>
+          <p:cNvSpPr/>
+          <p:nvPr/>
+        </p:nvSpPr>
+        <p:spPr>
+          <a:xfrm>
+            <a:off x="4379976" y="3474720"/>
+            <a:ext cx="3401568" cy="548640"/>
+          </a:xfrm>
+          <a:prstGeom prst="rect">
+            <a:avLst/>
+          </a:prstGeom>
+          <a:noFill/>
+          <a:ln/>
+        </p:spPr>
+        <p:txBody>
+          <a:bodyPr wrap="square" lIns="0" tIns="0" rIns="0" bIns="0" rtlCol="0" anchor="ctr"/>
+          <a:lstStyle/>
+          <a:p>
+            <a:pPr algn="l" indent="0" marL="0">
+              <a:buNone/>
+            </a:pPr>
+            <a:r>
+              <a:rPr lang="en-US" sz="1100" b="1" dirty="0">
+                <a:solidFill>
+                  <a:srgbClr val="5B6470"/>
+                </a:solidFill>
+                <a:latin typeface="Calibri" pitchFamily="34" charset="0"/>
+                <a:ea typeface="Calibri" pitchFamily="34" charset="-122"/>
+                <a:cs typeface="Calibri" pitchFamily="34" charset="-120"/>
+              </a:rPr>
+              <a:t>$1,400</a:t>
+            </a:r>
+            <a:endParaRPr lang="en-US" sz="1100" dirty="0"/>
+          </a:p>
+        </p:txBody>
+      </p:sp>
+      <p:sp>
+        <p:nvSpPr>
+          <p:cNvPr id="19" name="Text 17"/>
+          <p:cNvSpPr/>
+          <p:nvPr/>
+        </p:nvSpPr>
+        <p:spPr>
+          <a:xfrm>
+            <a:off x="8037576" y="3474720"/>
+            <a:ext cx="3401568" cy="548640"/>
+          </a:xfrm>
+          <a:prstGeom prst="rect">
+            <a:avLst/>
+          </a:prstGeom>
+          <a:noFill/>
+          <a:ln/>
+        </p:spPr>
+        <p:txBody>
+          <a:bodyPr wrap="square" lIns="0" tIns="0" rIns="0" bIns="0" rtlCol="0" anchor="ctr"/>
+          <a:lstStyle/>
+          <a:p>
+            <a:pPr algn="l" indent="0" marL="0">
+              <a:buNone/>
+            </a:pPr>
+            <a:r>
+              <a:rPr lang="en-US" sz="1100" b="1" dirty="0">
+                <a:solidFill>
+                  <a:srgbClr val="39D98A"/>
+                </a:solidFill>
+                <a:latin typeface="Calibri" pitchFamily="34" charset="0"/>
+                <a:ea typeface="Calibri" pitchFamily="34" charset="-122"/>
+                <a:cs typeface="Calibri" pitchFamily="34" charset="-120"/>
+              </a:rPr>
+              <a:t>$500</a:t>
+            </a:r>
+            <a:endParaRPr lang="en-US" sz="1100" dirty="0"/>
+          </a:p>
+        </p:txBody>
+      </p:sp>
+      <p:sp>
+        <p:nvSpPr>
+          <p:cNvPr id="20" name="Shape 18"/>
+          <p:cNvSpPr/>
+          <p:nvPr/>
+        </p:nvSpPr>
+        <p:spPr>
+          <a:xfrm>
+            <a:off x="594360" y="4343400"/>
+            <a:ext cx="5349240" cy="1005840"/>
+          </a:xfrm>
+          <a:prstGeom prst="roundRect">
+            <a:avLst>
+              <a:gd name="adj" fmla="val 8182"/>
+            </a:avLst>
+          </a:prstGeom>
+          <a:solidFill>
+            <a:srgbClr val="FFFFFF"/>
+          </a:solidFill>
+          <a:ln/>
+          <a:effectLst>
+            <a:outerShdw sx="100000" sy="100000" kx="0" ky="0" algn="bl" rotWithShape="0" blurRad="152400" dist="38100" dir="5400000">
+              <a:srgbClr val="000000">
+                <a:alpha val="28000"/>
+              </a:srgbClr>
+            </a:outerShdw>
+          </a:effectLst>
+        </p:spPr>
+      </p:sp>
+      <p:sp>
+        <p:nvSpPr>
+          <p:cNvPr id="21" name="Text 19"/>
+          <p:cNvSpPr/>
+          <p:nvPr/>
+        </p:nvSpPr>
+        <p:spPr>
+          <a:xfrm>
+            <a:off x="914400" y="4526280"/>
+            <a:ext cx="4572000" cy="658368"/>
+          </a:xfrm>
+          <a:prstGeom prst="rect">
+            <a:avLst/>
+          </a:prstGeom>
+          <a:noFill/>
+          <a:ln/>
+        </p:spPr>
+        <p:txBody>
+          <a:bodyPr wrap="square" lIns="0" tIns="0" rIns="0" bIns="0" rtlCol="0" anchor="ctr"/>
+          <a:lstStyle/>
+          <a:p>
+            <a:pPr algn="l" indent="0" marL="0">
+              <a:buNone/>
+            </a:pPr>
+            <a:r>
+              <a:rPr lang="en-US" sz="3600" b="1" dirty="0">
+                <a:solidFill>
+                  <a:srgbClr val="39D98A"/>
+                </a:solidFill>
+                <a:latin typeface="Cambria" pitchFamily="34" charset="0"/>
+                <a:ea typeface="Cambria" pitchFamily="34" charset="-122"/>
+                <a:cs typeface="Cambria" pitchFamily="34" charset="-120"/>
+              </a:rPr>
+              <a:t>− $900</a:t>
+            </a:r>
+            <a:endParaRPr lang="en-US" sz="3600" dirty="0"/>
+          </a:p>
+        </p:txBody>
+      </p:sp>
+      <p:sp>
+        <p:nvSpPr>
+          <p:cNvPr id="22" name="Text 20"/>
+          <p:cNvSpPr/>
+          <p:nvPr/>
+        </p:nvSpPr>
+        <p:spPr>
+          <a:xfrm>
+            <a:off x="914400" y="5184648"/>
+            <a:ext cx="4572000" cy="457200"/>
+          </a:xfrm>
+          <a:prstGeom prst="rect">
+            <a:avLst/>
+          </a:prstGeom>
+          <a:noFill/>
+          <a:ln/>
+        </p:spPr>
+        <p:txBody>
+          <a:bodyPr wrap="square" lIns="0" tIns="0" rIns="0" bIns="0" rtlCol="0" anchor="ctr"/>
+          <a:lstStyle/>
+          <a:p>
+            <a:pPr indent="0" marL="0">
+              <a:buNone/>
+            </a:pPr>
+            <a:r>
+              <a:rPr lang="en-US" sz="1100" dirty="0">
+                <a:solidFill>
+                  <a:srgbClr val="5B6470"/>
+                </a:solidFill>
+                <a:latin typeface="Calibri" pitchFamily="34" charset="0"/>
+                <a:ea typeface="Calibri" pitchFamily="34" charset="-122"/>
+                <a:cs typeface="Calibri" pitchFamily="34" charset="-120"/>
+              </a:rPr>
+              <a:t>más barato que el plan original</a:t>
+            </a:r>
+            <a:endParaRPr lang="en-US" sz="1100" dirty="0"/>
+          </a:p>
+        </p:txBody>
+      </p:sp>
+      <p:sp>
+        <p:nvSpPr>
+          <p:cNvPr id="23" name="Shape 21"/>
+          <p:cNvSpPr/>
+          <p:nvPr/>
+        </p:nvSpPr>
+        <p:spPr>
+          <a:xfrm>
+            <a:off x="6217920" y="4343400"/>
+            <a:ext cx="5349240" cy="1005840"/>
+          </a:xfrm>
+          <a:prstGeom prst="roundRect">
+            <a:avLst>
+              <a:gd name="adj" fmla="val 8182"/>
+            </a:avLst>
+          </a:prstGeom>
+          <a:solidFill>
+            <a:srgbClr val="FFFFFF"/>
+          </a:solidFill>
+          <a:ln/>
+          <a:effectLst>
+            <a:outerShdw sx="100000" sy="100000" kx="0" ky="0" algn="bl" rotWithShape="0" blurRad="152400" dist="38100" dir="5400000">
+              <a:srgbClr val="000000">
+                <a:alpha val="28000"/>
+              </a:srgbClr>
+            </a:outerShdw>
+          </a:effectLst>
+        </p:spPr>
+      </p:sp>
+      <p:sp>
+        <p:nvSpPr>
+          <p:cNvPr id="24" name="Text 22"/>
+          <p:cNvSpPr/>
+          <p:nvPr/>
+        </p:nvSpPr>
+        <p:spPr>
+          <a:xfrm>
+            <a:off x="6537960" y="4526280"/>
+            <a:ext cx="4572000" cy="658368"/>
+          </a:xfrm>
+          <a:prstGeom prst="rect">
+            <a:avLst/>
+          </a:prstGeom>
+          <a:noFill/>
+          <a:ln/>
+        </p:spPr>
+        <p:txBody>
+          <a:bodyPr wrap="square" lIns="0" tIns="0" rIns="0" bIns="0" rtlCol="0" anchor="ctr"/>
+          <a:lstStyle/>
+          <a:p>
+            <a:pPr algn="l" indent="0" marL="0">
+              <a:buNone/>
+            </a:pPr>
+            <a:r>
+              <a:rPr lang="en-US" sz="3600" b="1" dirty="0">
+                <a:solidFill>
+                  <a:srgbClr val="39D98A"/>
+                </a:solidFill>
+                <a:latin typeface="Cambria" pitchFamily="34" charset="0"/>
+                <a:ea typeface="Cambria" pitchFamily="34" charset="-122"/>
+                <a:cs typeface="Cambria" pitchFamily="34" charset="-120"/>
+              </a:rPr>
+              <a:t>$0</a:t>
+            </a:r>
+            <a:endParaRPr lang="en-US" sz="3600" dirty="0"/>
+          </a:p>
+        </p:txBody>
+      </p:sp>
+      <p:sp>
+        <p:nvSpPr>
+          <p:cNvPr id="25" name="Text 23"/>
+          <p:cNvSpPr/>
+          <p:nvPr/>
+        </p:nvSpPr>
+        <p:spPr>
+          <a:xfrm>
+            <a:off x="6537960" y="5184648"/>
+            <a:ext cx="4572000" cy="457200"/>
+          </a:xfrm>
+          <a:prstGeom prst="rect">
+            <a:avLst/>
+          </a:prstGeom>
+          <a:noFill/>
+          <a:ln/>
+        </p:spPr>
+        <p:txBody>
+          <a:bodyPr wrap="square" lIns="0" tIns="0" rIns="0" bIns="0" rtlCol="0" anchor="ctr"/>
+          <a:lstStyle/>
+          <a:p>
+            <a:pPr indent="0" marL="0">
+              <a:buNone/>
+            </a:pPr>
+            <a:r>
+              <a:rPr lang="en-US" sz="1100" dirty="0">
+                <a:solidFill>
+                  <a:srgbClr val="5B6470"/>
+                </a:solidFill>
+                <a:latin typeface="Calibri" pitchFamily="34" charset="0"/>
+                <a:ea typeface="Calibri" pitchFamily="34" charset="-122"/>
+                <a:cs typeface="Calibri" pitchFamily="34" charset="-120"/>
+              </a:rPr>
+              <a:t>que gasta Montasa en cómputo</a:t>
+            </a:r>
+            <a:endParaRPr lang="en-US" sz="1100" dirty="0"/>
+          </a:p>
+        </p:txBody>
+      </p:sp>
+      <p:sp>
+        <p:nvSpPr>
+          <p:cNvPr id="26" name="Text 24"/>
+          <p:cNvSpPr/>
+          <p:nvPr/>
+        </p:nvSpPr>
+        <p:spPr>
+          <a:xfrm>
+            <a:off x="594360" y="5577840"/>
+            <a:ext cx="10972800" cy="457200"/>
+          </a:xfrm>
+          <a:prstGeom prst="rect">
+            <a:avLst/>
+          </a:prstGeom>
+          <a:noFill/>
+          <a:ln/>
+        </p:spPr>
+        <p:txBody>
+          <a:bodyPr wrap="square" lIns="0" tIns="0" rIns="0" bIns="0" rtlCol="0" anchor="ctr"/>
+          <a:lstStyle/>
+          <a:p>
+            <a:pPr indent="0" marL="0">
+              <a:buNone/>
+            </a:pPr>
+            <a:r>
+              <a:rPr lang="en-US" sz="1300" b="1" dirty="0">
+                <a:solidFill>
+                  <a:srgbClr val="5B6470"/>
+                </a:solidFill>
+                <a:latin typeface="Calibri" pitchFamily="34" charset="0"/>
+                <a:ea typeface="Calibri" pitchFamily="34" charset="-122"/>
+                <a:cs typeface="Calibri" pitchFamily="34" charset="-120"/>
+              </a:rPr>
+              <a:t>El LiDAR no se descarta: pasa a ser expansión opcional. Para el primer nivel, cámaras + Jetson 8 GB alcanzan — y corren por mi cuenta.</a:t>
+            </a:r>
+            <a:endParaRPr lang="en-US" sz="1300" dirty="0"/>
+          </a:p>
+        </p:txBody>
+      </p:sp>
+      <p:sp>
+        <p:nvSpPr>
+          <p:cNvPr id="27" name="Text 25"/>
+          <p:cNvSpPr/>
+          <p:nvPr/>
+        </p:nvSpPr>
+        <p:spPr>
+          <a:xfrm>
+            <a:off x="594360" y="6355080"/>
+            <a:ext cx="10972800" cy="320040"/>
+          </a:xfrm>
+          <a:prstGeom prst="rect">
+            <a:avLst/>
+          </a:prstGeom>
+          <a:noFill/>
+          <a:ln/>
+        </p:spPr>
+        <p:txBody>
+          <a:bodyPr wrap="square" lIns="0" tIns="0" rIns="0" bIns="0" rtlCol="0" anchor="ctr"/>
+          <a:lstStyle/>
+          <a:p>
+            <a:pPr indent="0" marL="0">
+              <a:buNone/>
+            </a:pPr>
+            <a:r>
+              <a:rPr lang="en-US" sz="1050" i="1" dirty="0">
+                <a:solidFill>
+                  <a:srgbClr val="5B6470"/>
+                </a:solidFill>
+                <a:latin typeface="Calibri" pitchFamily="34" charset="0"/>
+                <a:ea typeface="Calibri" pitchFamily="34" charset="-122"/>
+                <a:cs typeface="Calibri" pitchFamily="34" charset="-120"/>
+              </a:rPr>
+              <a:t>Cifras de cotización, por confirmar antes de comprar.</a:t>
+            </a:r>
+            <a:endParaRPr lang="en-US" sz="1050" dirty="0"/>
+          </a:p>
+        </p:txBody>
+      </p:sp>
+    </p:spTree>
+  </p:cSld>
+  <p:clrMapOvr>
+    <a:masterClrMapping/>
+  </p:clrMapOvr>
+</p:sld>
+</file>
+
+<file path=ppt/slides/slide11.xml><?xml version="1.0" encoding="utf-8"?>
+<p:sld xmlns:a="http://schemas.openxmlformats.org/drawingml/2006/main" xmlns:r="http://schemas.openxmlformats.org/officeDocument/2006/relationships" xmlns:p="http://schemas.openxmlformats.org/presentationml/2006/main">
+  <p:cSld name="Slide 11">
+    <p:bg>
+      <p:bgPr>
+        <a:solidFill>
+          <a:srgbClr val="14171C"/>
+        </a:solidFill>
+      </p:bgPr>
+    </p:bg>
+    <p:spTree>
+      <p:nvGrpSpPr>
+        <p:cNvPr id="1" name=""/>
+        <p:cNvGrpSpPr/>
+        <p:nvPr/>
+      </p:nvGrpSpPr>
+      <p:grpSpPr>
+        <a:xfrm>
+          <a:off x="0" y="0"/>
+          <a:ext cx="0" cy="0"/>
+          <a:chOff x="0" y="0"/>
+          <a:chExt cx="0" cy="0"/>
+        </a:xfrm>
+      </p:grpSpPr>
+      <p:sp>
+        <p:nvSpPr>
+          <p:cNvPr id="2" name="Text 0"/>
+          <p:cNvSpPr/>
+          <p:nvPr/>
+        </p:nvSpPr>
+        <p:spPr>
+          <a:xfrm>
+            <a:off x="594360" y="384048"/>
+            <a:ext cx="10972800" cy="777240"/>
+          </a:xfrm>
+          <a:prstGeom prst="rect">
+            <a:avLst/>
+          </a:prstGeom>
+          <a:noFill/>
+          <a:ln/>
+        </p:spPr>
+        <p:txBody>
+          <a:bodyPr wrap="square" lIns="0" tIns="0" rIns="0" bIns="0" rtlCol="0" anchor="ctr"/>
+          <a:lstStyle/>
+          <a:p>
+            <a:pPr indent="0" marL="0">
+              <a:buNone/>
+            </a:pPr>
+            <a:r>
+              <a:rPr lang="en-US" sz="3300" b="1" dirty="0">
+                <a:solidFill>
+                  <a:srgbClr val="ECEBE6"/>
+                </a:solidFill>
+                <a:latin typeface="Cambria" pitchFamily="34" charset="0"/>
+                <a:ea typeface="Cambria" pitchFamily="34" charset="-122"/>
+                <a:cs typeface="Cambria" pitchFamily="34" charset="-120"/>
+              </a:rPr>
+              <a:t>Lo que necesito de vos</a:t>
+            </a:r>
+            <a:endParaRPr lang="en-US" sz="3300" dirty="0"/>
+          </a:p>
+        </p:txBody>
+      </p:sp>
+      <p:sp>
+        <p:nvSpPr>
+          <p:cNvPr id="3" name="Text 1"/>
+          <p:cNvSpPr/>
+          <p:nvPr/>
+        </p:nvSpPr>
+        <p:spPr>
+          <a:xfrm>
+            <a:off x="594360" y="1115568"/>
+            <a:ext cx="10972800" cy="365760"/>
+          </a:xfrm>
+          <a:prstGeom prst="rect">
+            <a:avLst/>
+          </a:prstGeom>
+          <a:noFill/>
+          <a:ln/>
+        </p:spPr>
+        <p:txBody>
+          <a:bodyPr wrap="square" lIns="0" tIns="0" rIns="0" bIns="0" rtlCol="0" anchor="ctr"/>
+          <a:lstStyle/>
+          <a:p>
+            <a:pPr indent="0" marL="0">
+              <a:buNone/>
+            </a:pPr>
+            <a:r>
+              <a:rPr lang="en-US" sz="1350" dirty="0">
+                <a:solidFill>
+                  <a:srgbClr val="8B949E"/>
+                </a:solidFill>
+                <a:latin typeface="Calibri" pitchFamily="34" charset="0"/>
+                <a:ea typeface="Calibri" pitchFamily="34" charset="-122"/>
+                <a:cs typeface="Calibri" pitchFamily="34" charset="-120"/>
+              </a:rPr>
+              <a:t>Nada de esto es un cheque por hardware</a:t>
+            </a:r>
+            <a:endParaRPr lang="en-US" sz="1350" dirty="0"/>
+          </a:p>
+        </p:txBody>
+      </p:sp>
+      <p:sp>
+        <p:nvSpPr>
+          <p:cNvPr id="4" name="Shape 2"/>
+          <p:cNvSpPr/>
+          <p:nvPr/>
+        </p:nvSpPr>
+        <p:spPr>
+          <a:xfrm>
+            <a:off x="594360" y="1828800"/>
+            <a:ext cx="10972800" cy="896112"/>
+          </a:xfrm>
+          <a:prstGeom prst="roundRect">
+            <a:avLst>
+              <a:gd name="adj" fmla="val 9184"/>
+            </a:avLst>
+          </a:prstGeom>
+          <a:solidFill>
+            <a:srgbClr val="20242B"/>
+          </a:solidFill>
+          <a:ln/>
+          <a:effectLst>
+            <a:outerShdw sx="100000" sy="100000" kx="0" ky="0" algn="bl" rotWithShape="0" blurRad="152400" dist="38100" dir="5400000">
+              <a:srgbClr val="000000">
+                <a:alpha val="28000"/>
+              </a:srgbClr>
+            </a:outerShdw>
+          </a:effectLst>
+        </p:spPr>
+      </p:sp>
+      <p:sp>
+        <p:nvSpPr>
+          <p:cNvPr id="5" name="Shape 3"/>
+          <p:cNvSpPr/>
+          <p:nvPr/>
+        </p:nvSpPr>
+        <p:spPr>
+          <a:xfrm>
+            <a:off x="914400" y="2084832"/>
+            <a:ext cx="384048" cy="384048"/>
+          </a:xfrm>
+          <a:prstGeom prst="ellipse">
+            <a:avLst/>
+          </a:prstGeom>
+          <a:solidFill>
+            <a:srgbClr val="39D98A"/>
+          </a:solidFill>
+          <a:ln/>
+        </p:spPr>
+      </p:sp>
+      <p:sp>
+        <p:nvSpPr>
+          <p:cNvPr id="6" name="Text 4"/>
+          <p:cNvSpPr/>
+          <p:nvPr/>
+        </p:nvSpPr>
+        <p:spPr>
+          <a:xfrm>
+            <a:off x="914400" y="2084832"/>
+            <a:ext cx="384048" cy="384048"/>
+          </a:xfrm>
+          <a:prstGeom prst="rect">
+            <a:avLst/>
+          </a:prstGeom>
+          <a:noFill/>
+          <a:ln/>
+        </p:spPr>
+        <p:txBody>
+          <a:bodyPr wrap="square" lIns="0" tIns="0" rIns="0" bIns="0" rtlCol="0" anchor="ctr"/>
+          <a:lstStyle/>
+          <a:p>
+            <a:pPr algn="ctr" indent="0" marL="0">
+              <a:buNone/>
+            </a:pPr>
+            <a:r>
+              <a:rPr lang="en-US" sz="1500" b="1" dirty="0">
+                <a:solidFill>
+                  <a:srgbClr val="14171C"/>
+                </a:solidFill>
+                <a:latin typeface="Calibri" pitchFamily="34" charset="0"/>
+                <a:ea typeface="Calibri" pitchFamily="34" charset="-122"/>
+                <a:cs typeface="Calibri" pitchFamily="34" charset="-120"/>
+              </a:rPr>
+              <a:t>1</a:t>
+            </a:r>
+            <a:endParaRPr lang="en-US" sz="1500" dirty="0"/>
+          </a:p>
+        </p:txBody>
+      </p:sp>
+      <p:sp>
+        <p:nvSpPr>
+          <p:cNvPr id="7" name="Text 5"/>
+          <p:cNvSpPr/>
+          <p:nvPr/>
+        </p:nvSpPr>
+        <p:spPr>
+          <a:xfrm>
+            <a:off x="1481328" y="1965960"/>
+            <a:ext cx="4297680" cy="502920"/>
+          </a:xfrm>
+          <a:prstGeom prst="rect">
+            <a:avLst/>
+          </a:prstGeom>
+          <a:noFill/>
+          <a:ln/>
+        </p:spPr>
+        <p:txBody>
+          <a:bodyPr wrap="square" lIns="0" tIns="0" rIns="0" bIns="0" rtlCol="0" anchor="ctr"/>
+          <a:lstStyle/>
+          <a:p>
+            <a:pPr indent="0" marL="0">
+              <a:buNone/>
+            </a:pPr>
+            <a:r>
+              <a:rPr lang="en-US" sz="1500" b="1" dirty="0">
+                <a:solidFill>
+                  <a:srgbClr val="ECEBE6"/>
+                </a:solidFill>
+                <a:latin typeface="Calibri" pitchFamily="34" charset="0"/>
+                <a:ea typeface="Calibri" pitchFamily="34" charset="-122"/>
+                <a:cs typeface="Calibri" pitchFamily="34" charset="-120"/>
+              </a:rPr>
+              <a:t>Aprobar reparar el MT 122</a:t>
+            </a:r>
+            <a:endParaRPr lang="en-US" sz="1500" dirty="0"/>
+          </a:p>
+        </p:txBody>
+      </p:sp>
+      <p:sp>
+        <p:nvSpPr>
+          <p:cNvPr id="8" name="Text 6"/>
+          <p:cNvSpPr/>
+          <p:nvPr/>
+        </p:nvSpPr>
+        <p:spPr>
+          <a:xfrm>
+            <a:off x="5852160" y="1956816"/>
+            <a:ext cx="5486400" cy="658368"/>
+          </a:xfrm>
+          <a:prstGeom prst="rect">
+            <a:avLst/>
+          </a:prstGeom>
+          <a:noFill/>
+          <a:ln/>
+        </p:spPr>
+        <p:txBody>
+          <a:bodyPr wrap="square" lIns="0" tIns="0" rIns="0" bIns="0" rtlCol="0" anchor="ctr"/>
+          <a:lstStyle/>
+          <a:p>
+            <a:pPr indent="0" marL="0">
+              <a:buNone/>
+            </a:pPr>
+            <a:r>
+              <a:rPr lang="en-US" sz="1100" dirty="0">
+                <a:solidFill>
+                  <a:srgbClr val="8B949E"/>
+                </a:solidFill>
+                <a:latin typeface="Calibri" pitchFamily="34" charset="0"/>
+                <a:ea typeface="Calibri" pitchFamily="34" charset="-122"/>
+                <a:cs typeface="Calibri" pitchFamily="34" charset="-120"/>
+              </a:rPr>
+              <a:t>Que Miguel actualice la lista de repuestos y se ordene. Vuelve a renta y queda de plataforma del proyecto.</a:t>
+            </a:r>
+            <a:endParaRPr lang="en-US" sz="1100" dirty="0"/>
+          </a:p>
+        </p:txBody>
+      </p:sp>
+      <p:sp>
+        <p:nvSpPr>
+          <p:cNvPr id="9" name="Shape 7"/>
+          <p:cNvSpPr/>
+          <p:nvPr/>
+        </p:nvSpPr>
+        <p:spPr>
+          <a:xfrm>
+            <a:off x="594360" y="2880360"/>
+            <a:ext cx="10972800" cy="896112"/>
+          </a:xfrm>
+          <a:prstGeom prst="roundRect">
+            <a:avLst>
+              <a:gd name="adj" fmla="val 9184"/>
+            </a:avLst>
+          </a:prstGeom>
+          <a:solidFill>
+            <a:srgbClr val="20242B"/>
+          </a:solidFill>
+          <a:ln/>
+          <a:effectLst>
+            <a:outerShdw sx="100000" sy="100000" kx="0" ky="0" algn="bl" rotWithShape="0" blurRad="152400" dist="38100" dir="5400000">
+              <a:srgbClr val="000000">
+                <a:alpha val="28000"/>
+              </a:srgbClr>
+            </a:outerShdw>
+          </a:effectLst>
+        </p:spPr>
+      </p:sp>
+      <p:sp>
+        <p:nvSpPr>
+          <p:cNvPr id="10" name="Shape 8"/>
+          <p:cNvSpPr/>
+          <p:nvPr/>
+        </p:nvSpPr>
+        <p:spPr>
+          <a:xfrm>
+            <a:off x="914400" y="3136392"/>
+            <a:ext cx="384048" cy="384048"/>
+          </a:xfrm>
+          <a:prstGeom prst="ellipse">
+            <a:avLst/>
+          </a:prstGeom>
+          <a:solidFill>
+            <a:srgbClr val="37C3FF"/>
+          </a:solidFill>
+          <a:ln/>
+        </p:spPr>
+      </p:sp>
+      <p:sp>
+        <p:nvSpPr>
+          <p:cNvPr id="11" name="Text 9"/>
+          <p:cNvSpPr/>
+          <p:nvPr/>
+        </p:nvSpPr>
+        <p:spPr>
+          <a:xfrm>
+            <a:off x="914400" y="3136392"/>
+            <a:ext cx="384048" cy="384048"/>
+          </a:xfrm>
+          <a:prstGeom prst="rect">
+            <a:avLst/>
+          </a:prstGeom>
+          <a:noFill/>
+          <a:ln/>
+        </p:spPr>
+        <p:txBody>
+          <a:bodyPr wrap="square" lIns="0" tIns="0" rIns="0" bIns="0" rtlCol="0" anchor="ctr"/>
+          <a:lstStyle/>
+          <a:p>
+            <a:pPr algn="ctr" indent="0" marL="0">
+              <a:buNone/>
+            </a:pPr>
+            <a:r>
+              <a:rPr lang="en-US" sz="1500" b="1" dirty="0">
+                <a:solidFill>
+                  <a:srgbClr val="14171C"/>
+                </a:solidFill>
+                <a:latin typeface="Calibri" pitchFamily="34" charset="0"/>
+                <a:ea typeface="Calibri" pitchFamily="34" charset="-122"/>
+                <a:cs typeface="Calibri" pitchFamily="34" charset="-120"/>
+              </a:rPr>
+              <a:t>2</a:t>
+            </a:r>
+            <a:endParaRPr lang="en-US" sz="1500" dirty="0"/>
+          </a:p>
+        </p:txBody>
+      </p:sp>
+      <p:sp>
+        <p:nvSpPr>
+          <p:cNvPr id="12" name="Text 10"/>
+          <p:cNvSpPr/>
+          <p:nvPr/>
+        </p:nvSpPr>
+        <p:spPr>
+          <a:xfrm>
+            <a:off x="1481328" y="3017520"/>
+            <a:ext cx="4297680" cy="502920"/>
+          </a:xfrm>
+          <a:prstGeom prst="rect">
+            <a:avLst/>
+          </a:prstGeom>
+          <a:noFill/>
+          <a:ln/>
+        </p:spPr>
+        <p:txBody>
+          <a:bodyPr wrap="square" lIns="0" tIns="0" rIns="0" bIns="0" rtlCol="0" anchor="ctr"/>
+          <a:lstStyle/>
+          <a:p>
+            <a:pPr indent="0" marL="0">
+              <a:buNone/>
+            </a:pPr>
+            <a:r>
+              <a:rPr lang="en-US" sz="1500" b="1" dirty="0">
+                <a:solidFill>
+                  <a:srgbClr val="ECEBE6"/>
+                </a:solidFill>
+                <a:latin typeface="Calibri" pitchFamily="34" charset="0"/>
+                <a:ea typeface="Calibri" pitchFamily="34" charset="-122"/>
+                <a:cs typeface="Calibri" pitchFamily="34" charset="-120"/>
+              </a:rPr>
+              <a:t>Que el MT 118 de Agrolibano pase por acá</a:t>
+            </a:r>
+            <a:endParaRPr lang="en-US" sz="1500" dirty="0"/>
+          </a:p>
+        </p:txBody>
+      </p:sp>
+      <p:sp>
+        <p:nvSpPr>
+          <p:cNvPr id="13" name="Text 11"/>
+          <p:cNvSpPr/>
+          <p:nvPr/>
+        </p:nvSpPr>
+        <p:spPr>
+          <a:xfrm>
+            <a:off x="5852160" y="3008376"/>
+            <a:ext cx="5486400" cy="658368"/>
+          </a:xfrm>
+          <a:prstGeom prst="rect">
+            <a:avLst/>
+          </a:prstGeom>
+          <a:noFill/>
+          <a:ln/>
+        </p:spPr>
+        <p:txBody>
+          <a:bodyPr wrap="square" lIns="0" tIns="0" rIns="0" bIns="0" rtlCol="0" anchor="ctr"/>
+          <a:lstStyle/>
+          <a:p>
+            <a:pPr indent="0" marL="0">
+              <a:buNone/>
+            </a:pPr>
+            <a:r>
+              <a:rPr lang="en-US" sz="1100" dirty="0">
+                <a:solidFill>
+                  <a:srgbClr val="8B949E"/>
+                </a:solidFill>
+                <a:latin typeface="Calibri" pitchFamily="34" charset="0"/>
+                <a:ea typeface="Calibri" pitchFamily="34" charset="-122"/>
+                <a:cs typeface="Calibri" pitchFamily="34" charset="-120"/>
+              </a:rPr>
+              <a:t>Cuando venga a mantenimiento: probar multipiloto y timón, y empezar a emular el pedal de hombre-muerto.</a:t>
+            </a:r>
+            <a:endParaRPr lang="en-US" sz="1100" dirty="0"/>
+          </a:p>
+        </p:txBody>
+      </p:sp>
+      <p:sp>
+        <p:nvSpPr>
+          <p:cNvPr id="14" name="Shape 12"/>
+          <p:cNvSpPr/>
+          <p:nvPr/>
+        </p:nvSpPr>
+        <p:spPr>
+          <a:xfrm>
+            <a:off x="594360" y="3931920"/>
+            <a:ext cx="10972800" cy="896112"/>
+          </a:xfrm>
+          <a:prstGeom prst="roundRect">
+            <a:avLst>
+              <a:gd name="adj" fmla="val 9184"/>
+            </a:avLst>
+          </a:prstGeom>
+          <a:solidFill>
+            <a:srgbClr val="20242B"/>
+          </a:solidFill>
+          <a:ln/>
+          <a:effectLst>
+            <a:outerShdw sx="100000" sy="100000" kx="0" ky="0" algn="bl" rotWithShape="0" blurRad="152400" dist="38100" dir="5400000">
+              <a:srgbClr val="000000">
+                <a:alpha val="28000"/>
+              </a:srgbClr>
+            </a:outerShdw>
+          </a:effectLst>
+        </p:spPr>
+      </p:sp>
+      <p:sp>
+        <p:nvSpPr>
+          <p:cNvPr id="15" name="Shape 13"/>
+          <p:cNvSpPr/>
+          <p:nvPr/>
+        </p:nvSpPr>
+        <p:spPr>
+          <a:xfrm>
+            <a:off x="914400" y="4187952"/>
+            <a:ext cx="384048" cy="384048"/>
+          </a:xfrm>
+          <a:prstGeom prst="ellipse">
+            <a:avLst/>
+          </a:prstGeom>
+          <a:solidFill>
+            <a:srgbClr val="F5C518"/>
+          </a:solidFill>
+          <a:ln/>
+        </p:spPr>
+      </p:sp>
+      <p:sp>
+        <p:nvSpPr>
+          <p:cNvPr id="16" name="Text 14"/>
+          <p:cNvSpPr/>
+          <p:nvPr/>
+        </p:nvSpPr>
+        <p:spPr>
+          <a:xfrm>
+            <a:off x="914400" y="4187952"/>
+            <a:ext cx="384048" cy="384048"/>
+          </a:xfrm>
+          <a:prstGeom prst="rect">
+            <a:avLst/>
+          </a:prstGeom>
+          <a:noFill/>
+          <a:ln/>
+        </p:spPr>
+        <p:txBody>
+          <a:bodyPr wrap="square" lIns="0" tIns="0" rIns="0" bIns="0" rtlCol="0" anchor="ctr"/>
+          <a:lstStyle/>
+          <a:p>
+            <a:pPr algn="ctr" indent="0" marL="0">
+              <a:buNone/>
+            </a:pPr>
+            <a:r>
+              <a:rPr lang="en-US" sz="1500" b="1" dirty="0">
+                <a:solidFill>
+                  <a:srgbClr val="14171C"/>
+                </a:solidFill>
+                <a:latin typeface="Calibri" pitchFamily="34" charset="0"/>
+                <a:ea typeface="Calibri" pitchFamily="34" charset="-122"/>
+                <a:cs typeface="Calibri" pitchFamily="34" charset="-120"/>
+              </a:rPr>
+              <a:t>3</a:t>
+            </a:r>
+            <a:endParaRPr lang="en-US" sz="1500" dirty="0"/>
+          </a:p>
+        </p:txBody>
+      </p:sp>
+      <p:sp>
+        <p:nvSpPr>
+          <p:cNvPr id="17" name="Text 15"/>
+          <p:cNvSpPr/>
+          <p:nvPr/>
+        </p:nvSpPr>
+        <p:spPr>
+          <a:xfrm>
+            <a:off x="1481328" y="4069080"/>
+            <a:ext cx="4297680" cy="502920"/>
+          </a:xfrm>
+          <a:prstGeom prst="rect">
+            <a:avLst/>
+          </a:prstGeom>
+          <a:noFill/>
+          <a:ln/>
+        </p:spPr>
+        <p:txBody>
+          <a:bodyPr wrap="square" lIns="0" tIns="0" rIns="0" bIns="0" rtlCol="0" anchor="ctr"/>
+          <a:lstStyle/>
+          <a:p>
+            <a:pPr indent="0" marL="0">
+              <a:buNone/>
+            </a:pPr>
+            <a:r>
+              <a:rPr lang="en-US" sz="1500" b="1" dirty="0">
+                <a:solidFill>
+                  <a:srgbClr val="ECEBE6"/>
+                </a:solidFill>
+                <a:latin typeface="Calibri" pitchFamily="34" charset="0"/>
+                <a:ea typeface="Calibri" pitchFamily="34" charset="-122"/>
+                <a:cs typeface="Calibri" pitchFamily="34" charset="-120"/>
+              </a:rPr>
+              <a:t>Visto bueno estratégico</a:t>
+            </a:r>
+            <a:endParaRPr lang="en-US" sz="1500" dirty="0"/>
+          </a:p>
+        </p:txBody>
+      </p:sp>
+      <p:sp>
+        <p:nvSpPr>
+          <p:cNvPr id="18" name="Text 16"/>
+          <p:cNvSpPr/>
+          <p:nvPr/>
+        </p:nvSpPr>
+        <p:spPr>
+          <a:xfrm>
+            <a:off x="5852160" y="4059936"/>
+            <a:ext cx="5486400" cy="658368"/>
+          </a:xfrm>
+          <a:prstGeom prst="rect">
+            <a:avLst/>
+          </a:prstGeom>
+          <a:noFill/>
+          <a:ln/>
+        </p:spPr>
+        <p:txBody>
+          <a:bodyPr wrap="square" lIns="0" tIns="0" rIns="0" bIns="0" rtlCol="0" anchor="ctr"/>
+          <a:lstStyle/>
+          <a:p>
+            <a:pPr indent="0" marL="0">
+              <a:buNone/>
+            </a:pPr>
+            <a:r>
+              <a:rPr lang="en-US" sz="1100" dirty="0">
+                <a:solidFill>
+                  <a:srgbClr val="8B949E"/>
+                </a:solidFill>
+                <a:latin typeface="Calibri" pitchFamily="34" charset="0"/>
+                <a:ea typeface="Calibri" pitchFamily="34" charset="-122"/>
+                <a:cs typeface="Calibri" pitchFamily="34" charset="-120"/>
+              </a:rPr>
+              <a:t>Que TaTa siga como línea de Montasa. El NRE y el cómputo los pongo yo.</a:t>
+            </a:r>
+            <a:endParaRPr lang="en-US" sz="1100" dirty="0"/>
+          </a:p>
+        </p:txBody>
+      </p:sp>
+      <p:sp>
+        <p:nvSpPr>
+          <p:cNvPr id="19" name="Shape 17"/>
+          <p:cNvSpPr/>
+          <p:nvPr/>
+        </p:nvSpPr>
+        <p:spPr>
+          <a:xfrm>
+            <a:off x="594360" y="5257800"/>
+            <a:ext cx="10972800" cy="868680"/>
+          </a:xfrm>
+          <a:prstGeom prst="roundRect">
+            <a:avLst>
+              <a:gd name="adj" fmla="val 9474"/>
+            </a:avLst>
+          </a:prstGeom>
+          <a:solidFill>
+            <a:srgbClr val="20242B"/>
+          </a:solidFill>
+          <a:ln/>
+          <a:effectLst>
+            <a:outerShdw sx="100000" sy="100000" kx="0" ky="0" algn="bl" rotWithShape="0" blurRad="152400" dist="38100" dir="5400000">
+              <a:srgbClr val="000000">
+                <a:alpha val="28000"/>
+              </a:srgbClr>
+            </a:outerShdw>
+          </a:effectLst>
+        </p:spPr>
+      </p:sp>
+      <p:sp>
+        <p:nvSpPr>
+          <p:cNvPr id="20" name="Text 18"/>
+          <p:cNvSpPr/>
+          <p:nvPr/>
+        </p:nvSpPr>
+        <p:spPr>
+          <a:xfrm>
+            <a:off x="960120" y="5257800"/>
+            <a:ext cx="10241280" cy="868680"/>
+          </a:xfrm>
+          <a:prstGeom prst="rect">
+            <a:avLst/>
+          </a:prstGeom>
+          <a:noFill/>
+          <a:ln/>
+        </p:spPr>
+        <p:txBody>
+          <a:bodyPr wrap="square" lIns="0" tIns="0" rIns="0" bIns="0" rtlCol="0" anchor="ctr"/>
+          <a:lstStyle/>
+          <a:p>
+            <a:pPr indent="0" marL="0">
+              <a:buNone/>
+            </a:pPr>
+            <a:r>
+              <a:rPr lang="en-US" sz="1600" b="1" dirty="0">
+                <a:solidFill>
+                  <a:srgbClr val="F5C518"/>
+                </a:solidFill>
+                <a:latin typeface="Calibri" pitchFamily="34" charset="0"/>
+                <a:ea typeface="Calibri" pitchFamily="34" charset="-122"/>
+                <a:cs typeface="Calibri" pitchFamily="34" charset="-120"/>
+              </a:rPr>
+              <a:t>El software ya está, y el NRE lo pongo yo. Lo único que falta es un equipo que encienda.</a:t>
+            </a:r>
+            <a:endParaRPr lang="en-US" sz="1600" dirty="0"/>
           </a:p>
         </p:txBody>
       </p:sp>
@@ -2320,7 +4133,7 @@
               <a:buNone/>
             </a:pPr>
             <a:r>
-              <a:rPr lang="en-US" sz="3400" b="1" dirty="0">
+              <a:rPr lang="en-US" sz="3300" b="1" dirty="0">
                 <a:solidFill>
                   <a:srgbClr val="1A1D23"/>
                 </a:solidFill>
@@ -2330,7 +4143,7 @@
               </a:rPr>
               <a:t>En una página</a:t>
             </a:r>
-            <a:endParaRPr lang="en-US" sz="3400" dirty="0"/>
+            <a:endParaRPr lang="en-US" sz="3300" dirty="0"/>
           </a:p>
         </p:txBody>
       </p:sp>
@@ -2342,7 +4155,7 @@
         </p:nvSpPr>
         <p:spPr>
           <a:xfrm>
-            <a:off x="594360" y="1133856"/>
+            <a:off x="594360" y="1115568"/>
             <a:ext cx="10972800" cy="365760"/>
           </a:xfrm>
           <a:prstGeom prst="rect">
@@ -2494,7 +4307,7 @@
                 <a:ea typeface="Calibri" pitchFamily="34" charset="-122"/>
                 <a:cs typeface="Calibri" pitchFamily="34" charset="-120"/>
               </a:rPr>
-              <a:t>Leí la computadora del montacargas y logré comandar la marcha y la dirección. Probado en mi mesa. Es 2/3 del teleop, sin gastar un dólar.</a:t>
+              <a:t>Leí la computadora del montacargas y logré comandar la marcha y la dirección. Probado en banco. Es 2/3 del teleop, y el cambio de plan al EDR nos puso on-track.</a:t>
             </a:r>
             <a:endParaRPr lang="en-US" sz="1300" dirty="0"/>
           </a:p>
@@ -2621,7 +4434,7 @@
                 <a:ea typeface="Calibri" pitchFamily="34" charset="-122"/>
                 <a:cs typeface="Calibri" pitchFamily="34" charset="-120"/>
               </a:rPr>
-              <a:t>Estoy parado: no hay un equipo funcional dedicado. Al que probaba le quitaron la llanta de dirección, y el pedal de hombre-muerto que me iban a traer se lo pusieron a otro equipo.</a:t>
+              <a:t>Estoy parado: no hay un equipo funcional dedicado. Al que probaba le quitaron la llanta de dirección, y el pedal de hombre-muerto se lo pusieron a otro equipo.</a:t>
             </a:r>
             <a:endParaRPr lang="en-US" sz="1300" dirty="0"/>
           </a:p>
@@ -2748,7 +4561,7 @@
                 <a:ea typeface="Calibri" pitchFamily="34" charset="-122"/>
                 <a:cs typeface="Calibri" pitchFamily="34" charset="-120"/>
               </a:rPr>
-              <a:t>Reparar el MT 122 (hoy usado como banco de repuestos) para tenerlo en renta y de plataforma; y bajar el presupuesto de cómputo de $1,400 a $500.</a:t>
+              <a:t>Reparar el MT 122 (hoy banco de repuestos) — un activo de Montasa que vuelve a rentar. El NRE y el cómputo los pongo yo.</a:t>
             </a:r>
             <a:endParaRPr lang="en-US" sz="1300" dirty="0"/>
           </a:p>
@@ -2811,7 +4624,7 @@
               <a:buNone/>
             </a:pPr>
             <a:r>
-              <a:rPr lang="en-US" sz="3400" b="1" dirty="0">
+              <a:rPr lang="en-US" sz="3300" b="1" dirty="0">
                 <a:solidFill>
                   <a:srgbClr val="ECEBE6"/>
                 </a:solidFill>
@@ -2819,9 +4632,9 @@
                 <a:ea typeface="Cambria" pitchFamily="34" charset="-122"/>
                 <a:cs typeface="Cambria" pitchFamily="34" charset="-120"/>
               </a:rPr>
-              <a:t>Lo que ya está hecho, sin gastar un dólar</a:t>
-            </a:r>
-            <a:endParaRPr lang="en-US" sz="3400" dirty="0"/>
+              <a:t>Lo que ya está hecho, sin gastar un dólar de Montasa</a:t>
+            </a:r>
+            <a:endParaRPr lang="en-US" sz="3300" dirty="0"/>
           </a:p>
         </p:txBody>
       </p:sp>
@@ -2833,7 +4646,7 @@
         </p:nvSpPr>
         <p:spPr>
           <a:xfrm>
-            <a:off x="594360" y="1133856"/>
+            <a:off x="594360" y="1115568"/>
             <a:ext cx="10972800" cy="365760"/>
           </a:xfrm>
           <a:prstGeom prst="rect">
@@ -3349,7 +5162,7 @@
               <a:buNone/>
             </a:pPr>
             <a:r>
-              <a:rPr lang="en-US" sz="3400" b="1" dirty="0">
+              <a:rPr lang="en-US" sz="3300" b="1" dirty="0">
                 <a:solidFill>
                   <a:srgbClr val="1A1D23"/>
                 </a:solidFill>
@@ -3357,9 +5170,9 @@
                 <a:ea typeface="Cambria" pitchFamily="34" charset="-122"/>
                 <a:cs typeface="Cambria" pitchFamily="34" charset="-120"/>
               </a:rPr>
-              <a:t>Por qué estoy parado — y no es el software</a:t>
-            </a:r>
-            <a:endParaRPr lang="en-US" sz="3400" dirty="0"/>
+              <a:t>El cambio de plan no fue un retraso — fue lo que nos puso on-track</a:t>
+            </a:r>
+            <a:endParaRPr lang="en-US" sz="3300" dirty="0"/>
           </a:p>
         </p:txBody>
       </p:sp>
@@ -3371,7 +5184,7 @@
         </p:nvSpPr>
         <p:spPr>
           <a:xfrm>
-            <a:off x="594360" y="1133856"/>
+            <a:off x="594360" y="1115568"/>
             <a:ext cx="10972800" cy="365760"/>
           </a:xfrm>
           <a:prstGeom prst="rect">
@@ -3396,7 +5209,7 @@
                 <a:ea typeface="Calibri" pitchFamily="34" charset="-122"/>
                 <a:cs typeface="Calibri" pitchFamily="34" charset="-120"/>
               </a:rPr>
-              <a:t>El código está. Lo que falta es una máquina que encienda</a:t>
+              <a:t>Plan original: un equipo mecánico.  Plan actual: el EDR, eléctrico y con bus abierto</a:t>
             </a:r>
             <a:endParaRPr lang="en-US" sz="1350" dirty="0"/>
           </a:p>
@@ -3410,73 +5223,180 @@
         </p:nvSpPr>
         <p:spPr>
           <a:xfrm>
-            <a:off x="594360" y="1920240"/>
-            <a:ext cx="10972800" cy="1051560"/>
-          </a:xfrm>
-          <a:prstGeom prst="roundRect">
-            <a:avLst>
-              <a:gd name="adj" fmla="val 7826"/>
-            </a:avLst>
+            <a:off x="594360" y="1828800"/>
+            <a:ext cx="10972800" cy="457200"/>
+          </a:xfrm>
+          <a:prstGeom prst="rect">
+            <a:avLst/>
+          </a:prstGeom>
+          <a:solidFill>
+            <a:srgbClr val="E7E9EC"/>
+          </a:solidFill>
+          <a:ln w="7620">
+            <a:solidFill>
+              <a:srgbClr val="D8DADE"/>
+            </a:solidFill>
+            <a:prstDash val="solid"/>
+          </a:ln>
+        </p:spPr>
+      </p:sp>
+      <p:sp>
+        <p:nvSpPr>
+          <p:cNvPr id="5" name="Text 3"/>
+          <p:cNvSpPr/>
+          <p:nvPr/>
+        </p:nvSpPr>
+        <p:spPr>
+          <a:xfrm>
+            <a:off x="722376" y="1828800"/>
+            <a:ext cx="2670048" cy="457200"/>
+          </a:xfrm>
+          <a:prstGeom prst="rect">
+            <a:avLst/>
+          </a:prstGeom>
+          <a:noFill/>
+          <a:ln/>
+        </p:spPr>
+        <p:txBody>
+          <a:bodyPr wrap="square" lIns="0" tIns="0" rIns="0" bIns="0" rtlCol="0" anchor="ctr"/>
+          <a:lstStyle/>
+          <a:p>
+            <a:pPr algn="l" indent="0" marL="0">
+              <a:buNone/>
+            </a:pPr>
+            <a:endParaRPr lang="en-US" sz="1000" dirty="0"/>
+          </a:p>
+        </p:txBody>
+      </p:sp>
+      <p:sp>
+        <p:nvSpPr>
+          <p:cNvPr id="6" name="Text 4"/>
+          <p:cNvSpPr/>
+          <p:nvPr/>
+        </p:nvSpPr>
+        <p:spPr>
+          <a:xfrm>
+            <a:off x="3648456" y="1828800"/>
+            <a:ext cx="3767328" cy="457200"/>
+          </a:xfrm>
+          <a:prstGeom prst="rect">
+            <a:avLst/>
+          </a:prstGeom>
+          <a:noFill/>
+          <a:ln/>
+        </p:spPr>
+        <p:txBody>
+          <a:bodyPr wrap="square" lIns="0" tIns="0" rIns="0" bIns="0" rtlCol="0" anchor="ctr"/>
+          <a:lstStyle/>
+          <a:p>
+            <a:pPr algn="l" indent="0" marL="0">
+              <a:buNone/>
+            </a:pPr>
+            <a:r>
+              <a:rPr lang="en-US" sz="1000" b="1" dirty="0">
+                <a:solidFill>
+                  <a:srgbClr val="FF5A52"/>
+                </a:solidFill>
+                <a:latin typeface="Calibri" pitchFamily="34" charset="0"/>
+                <a:ea typeface="Calibri" pitchFamily="34" charset="-122"/>
+                <a:cs typeface="Calibri" pitchFamily="34" charset="-120"/>
+              </a:rPr>
+              <a:t>PLAN MECÁNICO (Baoli)</a:t>
+            </a:r>
+            <a:endParaRPr lang="en-US" sz="1000" dirty="0"/>
+          </a:p>
+        </p:txBody>
+      </p:sp>
+      <p:sp>
+        <p:nvSpPr>
+          <p:cNvPr id="7" name="Text 5"/>
+          <p:cNvSpPr/>
+          <p:nvPr/>
+        </p:nvSpPr>
+        <p:spPr>
+          <a:xfrm>
+            <a:off x="7671816" y="1828800"/>
+            <a:ext cx="3767328" cy="457200"/>
+          </a:xfrm>
+          <a:prstGeom prst="rect">
+            <a:avLst/>
+          </a:prstGeom>
+          <a:noFill/>
+          <a:ln/>
+        </p:spPr>
+        <p:txBody>
+          <a:bodyPr wrap="square" lIns="0" tIns="0" rIns="0" bIns="0" rtlCol="0" anchor="ctr"/>
+          <a:lstStyle/>
+          <a:p>
+            <a:pPr algn="l" indent="0" marL="0">
+              <a:buNone/>
+            </a:pPr>
+            <a:r>
+              <a:rPr lang="en-US" sz="1000" b="1" dirty="0">
+                <a:solidFill>
+                  <a:srgbClr val="39D98A"/>
+                </a:solidFill>
+                <a:latin typeface="Calibri" pitchFamily="34" charset="0"/>
+                <a:ea typeface="Calibri" pitchFamily="34" charset="-122"/>
+                <a:cs typeface="Calibri" pitchFamily="34" charset="-120"/>
+              </a:rPr>
+              <a:t>EL EDR (el que se tomó)</a:t>
+            </a:r>
+            <a:endParaRPr lang="en-US" sz="1000" dirty="0"/>
+          </a:p>
+        </p:txBody>
+      </p:sp>
+      <p:sp>
+        <p:nvSpPr>
+          <p:cNvPr id="8" name="Shape 6"/>
+          <p:cNvSpPr/>
+          <p:nvPr/>
+        </p:nvSpPr>
+        <p:spPr>
+          <a:xfrm>
+            <a:off x="594360" y="2286000"/>
+            <a:ext cx="10972800" cy="457200"/>
+          </a:xfrm>
+          <a:prstGeom prst="rect">
+            <a:avLst/>
           </a:prstGeom>
           <a:solidFill>
             <a:srgbClr val="FFFFFF"/>
           </a:solidFill>
-          <a:ln/>
-          <a:effectLst>
-            <a:outerShdw sx="100000" sy="100000" kx="0" ky="0" algn="bl" rotWithShape="0" blurRad="152400" dist="38100" dir="5400000">
-              <a:srgbClr val="000000">
-                <a:alpha val="28000"/>
-              </a:srgbClr>
-            </a:outerShdw>
-          </a:effectLst>
-        </p:spPr>
-      </p:sp>
-      <p:sp>
-        <p:nvSpPr>
-          <p:cNvPr id="5" name="Shape 3"/>
-          <p:cNvSpPr/>
-          <p:nvPr/>
-        </p:nvSpPr>
-        <p:spPr>
-          <a:xfrm>
-            <a:off x="594360" y="1920240"/>
-            <a:ext cx="82296" cy="1051560"/>
-          </a:xfrm>
-          <a:prstGeom prst="rect">
-            <a:avLst/>
-          </a:prstGeom>
-          <a:solidFill>
-            <a:srgbClr val="FF5A52"/>
-          </a:solidFill>
-          <a:ln/>
-        </p:spPr>
-      </p:sp>
-      <p:sp>
-        <p:nvSpPr>
-          <p:cNvPr id="6" name="Text 4"/>
-          <p:cNvSpPr/>
-          <p:nvPr/>
-        </p:nvSpPr>
-        <p:spPr>
-          <a:xfrm>
-            <a:off x="914400" y="2084832"/>
-            <a:ext cx="10241280" cy="457200"/>
-          </a:xfrm>
-          <a:prstGeom prst="rect">
-            <a:avLst/>
-          </a:prstGeom>
-          <a:noFill/>
-          <a:ln/>
-        </p:spPr>
-        <p:txBody>
-          <a:bodyPr wrap="square" lIns="0" tIns="0" rIns="0" bIns="0" rtlCol="0" anchor="ctr"/>
-          <a:lstStyle/>
-          <a:p>
-            <a:pPr indent="0" marL="0">
-              <a:buNone/>
-            </a:pPr>
-            <a:r>
-              <a:rPr lang="en-US" sz="1550" b="1" dirty="0">
+          <a:ln w="7620">
+            <a:solidFill>
+              <a:srgbClr val="D8DADE"/>
+            </a:solidFill>
+            <a:prstDash val="solid"/>
+          </a:ln>
+        </p:spPr>
+      </p:sp>
+      <p:sp>
+        <p:nvSpPr>
+          <p:cNvPr id="9" name="Text 7"/>
+          <p:cNvSpPr/>
+          <p:nvPr/>
+        </p:nvSpPr>
+        <p:spPr>
+          <a:xfrm>
+            <a:off x="722376" y="2286000"/>
+            <a:ext cx="2670048" cy="457200"/>
+          </a:xfrm>
+          <a:prstGeom prst="rect">
+            <a:avLst/>
+          </a:prstGeom>
+          <a:noFill/>
+          <a:ln/>
+        </p:spPr>
+        <p:txBody>
+          <a:bodyPr wrap="square" lIns="0" tIns="0" rIns="0" bIns="0" rtlCol="0" anchor="ctr"/>
+          <a:lstStyle/>
+          <a:p>
+            <a:pPr algn="l" indent="0" marL="0">
+              <a:buNone/>
+            </a:pPr>
+            <a:r>
+              <a:rPr lang="en-US" sz="1100" b="1" dirty="0">
                 <a:solidFill>
                   <a:srgbClr val="1A1D23"/>
                 </a:solidFill>
@@ -3484,38 +5404,38 @@
                 <a:ea typeface="Calibri" pitchFamily="34" charset="-122"/>
                 <a:cs typeface="Calibri" pitchFamily="34" charset="-120"/>
               </a:rPr>
-              <a:t>Al equipo de prueba le quitaron la llanta de dirección</a:t>
-            </a:r>
-            <a:endParaRPr lang="en-US" sz="1550" dirty="0"/>
-          </a:p>
-        </p:txBody>
-      </p:sp>
-      <p:sp>
-        <p:nvSpPr>
-          <p:cNvPr id="7" name="Text 5"/>
-          <p:cNvSpPr/>
-          <p:nvPr/>
-        </p:nvSpPr>
-        <p:spPr>
-          <a:xfrm>
-            <a:off x="914400" y="2542032"/>
-            <a:ext cx="10241280" cy="365760"/>
-          </a:xfrm>
-          <a:prstGeom prst="rect">
-            <a:avLst/>
-          </a:prstGeom>
-          <a:noFill/>
-          <a:ln/>
-        </p:spPr>
-        <p:txBody>
-          <a:bodyPr wrap="square" lIns="0" tIns="0" rIns="0" bIns="0" rtlCol="0" anchor="ctr"/>
-          <a:lstStyle/>
-          <a:p>
-            <a:pPr indent="0" marL="0">
-              <a:buNone/>
-            </a:pPr>
-            <a:r>
-              <a:rPr lang="en-US" sz="1200" dirty="0">
+              <a:t>Pasillo de 3.00 m</a:t>
+            </a:r>
+            <a:endParaRPr lang="en-US" sz="1100" dirty="0"/>
+          </a:p>
+        </p:txBody>
+      </p:sp>
+      <p:sp>
+        <p:nvSpPr>
+          <p:cNvPr id="10" name="Text 8"/>
+          <p:cNvSpPr/>
+          <p:nvPr/>
+        </p:nvSpPr>
+        <p:spPr>
+          <a:xfrm>
+            <a:off x="3648456" y="2286000"/>
+            <a:ext cx="3767328" cy="457200"/>
+          </a:xfrm>
+          <a:prstGeom prst="rect">
+            <a:avLst/>
+          </a:prstGeom>
+          <a:noFill/>
+          <a:ln/>
+        </p:spPr>
+        <p:txBody>
+          <a:bodyPr wrap="square" lIns="0" tIns="0" rIns="0" bIns="0" rtlCol="0" anchor="ctr"/>
+          <a:lstStyle/>
+          <a:p>
+            <a:pPr algn="l" indent="0" marL="0">
+              <a:buNone/>
+            </a:pPr>
+            <a:r>
+              <a:rPr lang="en-US" sz="1100" dirty="0">
                 <a:solidFill>
                   <a:srgbClr val="5B6470"/>
                 </a:solidFill>
@@ -3523,87 +5443,244 @@
                 <a:ea typeface="Calibri" pitchFamily="34" charset="-122"/>
                 <a:cs typeface="Calibri" pitchFamily="34" charset="-120"/>
               </a:rPr>
-              <a:t>Sin ella no hay cómo ver el timón girar, que es la prueba que vine a hacer.</a:t>
-            </a:r>
-            <a:endParaRPr lang="en-US" sz="1200" dirty="0"/>
-          </a:p>
-        </p:txBody>
-      </p:sp>
-      <p:sp>
-        <p:nvSpPr>
-          <p:cNvPr id="8" name="Shape 6"/>
-          <p:cNvSpPr/>
-          <p:nvPr/>
-        </p:nvSpPr>
-        <p:spPr>
-          <a:xfrm>
-            <a:off x="594360" y="3154680"/>
-            <a:ext cx="10972800" cy="1051560"/>
-          </a:xfrm>
-          <a:prstGeom prst="roundRect">
-            <a:avLst>
-              <a:gd name="adj" fmla="val 7826"/>
-            </a:avLst>
+              <a:t>No cabe (pedía 3.82 m)</a:t>
+            </a:r>
+            <a:endParaRPr lang="en-US" sz="1100" dirty="0"/>
+          </a:p>
+        </p:txBody>
+      </p:sp>
+      <p:sp>
+        <p:nvSpPr>
+          <p:cNvPr id="11" name="Text 9"/>
+          <p:cNvSpPr/>
+          <p:nvPr/>
+        </p:nvSpPr>
+        <p:spPr>
+          <a:xfrm>
+            <a:off x="7671816" y="2286000"/>
+            <a:ext cx="3767328" cy="457200"/>
+          </a:xfrm>
+          <a:prstGeom prst="rect">
+            <a:avLst/>
+          </a:prstGeom>
+          <a:noFill/>
+          <a:ln/>
+        </p:spPr>
+        <p:txBody>
+          <a:bodyPr wrap="square" lIns="0" tIns="0" rIns="0" bIns="0" rtlCol="0" anchor="ctr"/>
+          <a:lstStyle/>
+          <a:p>
+            <a:pPr algn="l" indent="0" marL="0">
+              <a:buNone/>
+            </a:pPr>
+            <a:r>
+              <a:rPr lang="en-US" sz="1100" b="1" dirty="0">
+                <a:solidFill>
+                  <a:srgbClr val="1A1D23"/>
+                </a:solidFill>
+                <a:latin typeface="Calibri" pitchFamily="34" charset="0"/>
+                <a:ea typeface="Calibri" pitchFamily="34" charset="-122"/>
+                <a:cs typeface="Calibri" pitchFamily="34" charset="-120"/>
+              </a:rPr>
+              <a:t>Cabe</a:t>
+            </a:r>
+            <a:endParaRPr lang="en-US" sz="1100" dirty="0"/>
+          </a:p>
+        </p:txBody>
+      </p:sp>
+      <p:sp>
+        <p:nvSpPr>
+          <p:cNvPr id="12" name="Shape 10"/>
+          <p:cNvSpPr/>
+          <p:nvPr/>
+        </p:nvSpPr>
+        <p:spPr>
+          <a:xfrm>
+            <a:off x="594360" y="2743200"/>
+            <a:ext cx="10972800" cy="457200"/>
+          </a:xfrm>
+          <a:prstGeom prst="rect">
+            <a:avLst/>
           </a:prstGeom>
           <a:solidFill>
             <a:srgbClr val="FFFFFF"/>
           </a:solidFill>
-          <a:ln/>
-          <a:effectLst>
-            <a:outerShdw sx="100000" sy="100000" kx="0" ky="0" algn="bl" rotWithShape="0" blurRad="152400" dist="38100" dir="5400000">
-              <a:srgbClr val="000000">
-                <a:alpha val="28000"/>
-              </a:srgbClr>
-            </a:outerShdw>
-          </a:effectLst>
-        </p:spPr>
-      </p:sp>
-      <p:sp>
-        <p:nvSpPr>
-          <p:cNvPr id="9" name="Shape 7"/>
-          <p:cNvSpPr/>
-          <p:nvPr/>
-        </p:nvSpPr>
-        <p:spPr>
-          <a:xfrm>
-            <a:off x="594360" y="3154680"/>
-            <a:ext cx="82296" cy="1051560"/>
+          <a:ln w="7620">
+            <a:solidFill>
+              <a:srgbClr val="D8DADE"/>
+            </a:solidFill>
+            <a:prstDash val="solid"/>
+          </a:ln>
+        </p:spPr>
+      </p:sp>
+      <p:sp>
+        <p:nvSpPr>
+          <p:cNvPr id="13" name="Text 11"/>
+          <p:cNvSpPr/>
+          <p:nvPr/>
+        </p:nvSpPr>
+        <p:spPr>
+          <a:xfrm>
+            <a:off x="722376" y="2743200"/>
+            <a:ext cx="2670048" cy="457200"/>
+          </a:xfrm>
+          <a:prstGeom prst="rect">
+            <a:avLst/>
+          </a:prstGeom>
+          <a:noFill/>
+          <a:ln/>
+        </p:spPr>
+        <p:txBody>
+          <a:bodyPr wrap="square" lIns="0" tIns="0" rIns="0" bIns="0" rtlCol="0" anchor="ctr"/>
+          <a:lstStyle/>
+          <a:p>
+            <a:pPr algn="l" indent="0" marL="0">
+              <a:buNone/>
+            </a:pPr>
+            <a:r>
+              <a:rPr lang="en-US" sz="1100" b="1" dirty="0">
+                <a:solidFill>
+                  <a:srgbClr val="1A1D23"/>
+                </a:solidFill>
+                <a:latin typeface="Calibri" pitchFamily="34" charset="0"/>
+                <a:ea typeface="Calibri" pitchFamily="34" charset="-122"/>
+                <a:cs typeface="Calibri" pitchFamily="34" charset="-120"/>
+              </a:rPr>
+              <a:t>Dirección</a:t>
+            </a:r>
+            <a:endParaRPr lang="en-US" sz="1100" dirty="0"/>
+          </a:p>
+        </p:txBody>
+      </p:sp>
+      <p:sp>
+        <p:nvSpPr>
+          <p:cNvPr id="14" name="Text 12"/>
+          <p:cNvSpPr/>
+          <p:nvPr/>
+        </p:nvSpPr>
+        <p:spPr>
+          <a:xfrm>
+            <a:off x="3648456" y="2743200"/>
+            <a:ext cx="3767328" cy="457200"/>
+          </a:xfrm>
+          <a:prstGeom prst="rect">
+            <a:avLst/>
+          </a:prstGeom>
+          <a:noFill/>
+          <a:ln/>
+        </p:spPr>
+        <p:txBody>
+          <a:bodyPr wrap="square" lIns="0" tIns="0" rIns="0" bIns="0" rtlCol="0" anchor="ctr"/>
+          <a:lstStyle/>
+          <a:p>
+            <a:pPr algn="l" indent="0" marL="0">
+              <a:buNone/>
+            </a:pPr>
+            <a:r>
+              <a:rPr lang="en-US" sz="1100" dirty="0">
+                <a:solidFill>
+                  <a:srgbClr val="5B6470"/>
+                </a:solidFill>
+                <a:latin typeface="Calibri" pitchFamily="34" charset="0"/>
+                <a:ea typeface="Calibri" pitchFamily="34" charset="-122"/>
+                <a:cs typeface="Calibri" pitchFamily="34" charset="-120"/>
+              </a:rPr>
+              <a:t>Montar un servo sobre la columna</a:t>
+            </a:r>
+            <a:endParaRPr lang="en-US" sz="1100" dirty="0"/>
+          </a:p>
+        </p:txBody>
+      </p:sp>
+      <p:sp>
+        <p:nvSpPr>
+          <p:cNvPr id="15" name="Text 13"/>
+          <p:cNvSpPr/>
+          <p:nvPr/>
+        </p:nvSpPr>
+        <p:spPr>
+          <a:xfrm>
+            <a:off x="7671816" y="2743200"/>
+            <a:ext cx="3767328" cy="457200"/>
+          </a:xfrm>
+          <a:prstGeom prst="rect">
+            <a:avLst/>
+          </a:prstGeom>
+          <a:noFill/>
+          <a:ln/>
+        </p:spPr>
+        <p:txBody>
+          <a:bodyPr wrap="square" lIns="0" tIns="0" rIns="0" bIns="0" rtlCol="0" anchor="ctr"/>
+          <a:lstStyle/>
+          <a:p>
+            <a:pPr algn="l" indent="0" marL="0">
+              <a:buNone/>
+            </a:pPr>
+            <a:r>
+              <a:rPr lang="en-US" sz="1100" b="1" dirty="0">
+                <a:solidFill>
+                  <a:srgbClr val="1A1D23"/>
+                </a:solidFill>
+                <a:latin typeface="Calibri" pitchFamily="34" charset="0"/>
+                <a:ea typeface="Calibri" pitchFamily="34" charset="-122"/>
+                <a:cs typeface="Calibri" pitchFamily="34" charset="-120"/>
+              </a:rPr>
+              <a:t>EPS: se intercepta eléctrico</a:t>
+            </a:r>
+            <a:endParaRPr lang="en-US" sz="1100" dirty="0"/>
+          </a:p>
+        </p:txBody>
+      </p:sp>
+      <p:sp>
+        <p:nvSpPr>
+          <p:cNvPr id="16" name="Shape 14"/>
+          <p:cNvSpPr/>
+          <p:nvPr/>
+        </p:nvSpPr>
+        <p:spPr>
+          <a:xfrm>
+            <a:off x="594360" y="3200400"/>
+            <a:ext cx="10972800" cy="457200"/>
           </a:xfrm>
           <a:prstGeom prst="rect">
             <a:avLst/>
           </a:prstGeom>
           <a:solidFill>
-            <a:srgbClr val="FF5A52"/>
+            <a:srgbClr val="FFFFFF"/>
           </a:solidFill>
-          <a:ln/>
-        </p:spPr>
-      </p:sp>
-      <p:sp>
-        <p:nvSpPr>
-          <p:cNvPr id="10" name="Text 8"/>
-          <p:cNvSpPr/>
-          <p:nvPr/>
-        </p:nvSpPr>
-        <p:spPr>
-          <a:xfrm>
-            <a:off x="914400" y="3319272"/>
-            <a:ext cx="10241280" cy="457200"/>
-          </a:xfrm>
-          <a:prstGeom prst="rect">
-            <a:avLst/>
-          </a:prstGeom>
-          <a:noFill/>
-          <a:ln/>
-        </p:spPr>
-        <p:txBody>
-          <a:bodyPr wrap="square" lIns="0" tIns="0" rIns="0" bIns="0" rtlCol="0" anchor="ctr"/>
-          <a:lstStyle/>
-          <a:p>
-            <a:pPr indent="0" marL="0">
-              <a:buNone/>
-            </a:pPr>
-            <a:r>
-              <a:rPr lang="en-US" sz="1550" b="1" dirty="0">
+          <a:ln w="7620">
+            <a:solidFill>
+              <a:srgbClr val="D8DADE"/>
+            </a:solidFill>
+            <a:prstDash val="solid"/>
+          </a:ln>
+        </p:spPr>
+      </p:sp>
+      <p:sp>
+        <p:nvSpPr>
+          <p:cNvPr id="17" name="Text 15"/>
+          <p:cNvSpPr/>
+          <p:nvPr/>
+        </p:nvSpPr>
+        <p:spPr>
+          <a:xfrm>
+            <a:off x="722376" y="3200400"/>
+            <a:ext cx="2670048" cy="457200"/>
+          </a:xfrm>
+          <a:prstGeom prst="rect">
+            <a:avLst/>
+          </a:prstGeom>
+          <a:noFill/>
+          <a:ln/>
+        </p:spPr>
+        <p:txBody>
+          <a:bodyPr wrap="square" lIns="0" tIns="0" rIns="0" bIns="0" rtlCol="0" anchor="ctr"/>
+          <a:lstStyle/>
+          <a:p>
+            <a:pPr algn="l" indent="0" marL="0">
+              <a:buNone/>
+            </a:pPr>
+            <a:r>
+              <a:rPr lang="en-US" sz="1100" b="1" dirty="0">
                 <a:solidFill>
                   <a:srgbClr val="1A1D23"/>
                 </a:solidFill>
@@ -3611,38 +5688,38 @@
                 <a:ea typeface="Calibri" pitchFamily="34" charset="-122"/>
                 <a:cs typeface="Calibri" pitchFamily="34" charset="-120"/>
               </a:rPr>
-              <a:t>El pedal de hombre-muerto se lo pusieron a otro equipo</a:t>
-            </a:r>
-            <a:endParaRPr lang="en-US" sz="1550" dirty="0"/>
-          </a:p>
-        </p:txBody>
-      </p:sp>
-      <p:sp>
-        <p:nvSpPr>
-          <p:cNvPr id="11" name="Text 9"/>
-          <p:cNvSpPr/>
-          <p:nvPr/>
-        </p:nvSpPr>
-        <p:spPr>
-          <a:xfrm>
-            <a:off x="914400" y="3776472"/>
-            <a:ext cx="10241280" cy="365760"/>
-          </a:xfrm>
-          <a:prstGeom prst="rect">
-            <a:avLst/>
-          </a:prstGeom>
-          <a:noFill/>
-          <a:ln/>
-        </p:spPr>
-        <p:txBody>
-          <a:bodyPr wrap="square" lIns="0" tIns="0" rIns="0" bIns="0" rtlCol="0" anchor="ctr"/>
-          <a:lstStyle/>
-          <a:p>
-            <a:pPr indent="0" marL="0">
-              <a:buNone/>
-            </a:pPr>
-            <a:r>
-              <a:rPr lang="en-US" sz="1200" dirty="0">
+              <a:t>Reach / elevación / inclinación</a:t>
+            </a:r>
+            <a:endParaRPr lang="en-US" sz="1100" dirty="0"/>
+          </a:p>
+        </p:txBody>
+      </p:sp>
+      <p:sp>
+        <p:nvSpPr>
+          <p:cNvPr id="18" name="Text 16"/>
+          <p:cNvSpPr/>
+          <p:nvPr/>
+        </p:nvSpPr>
+        <p:spPr>
+          <a:xfrm>
+            <a:off x="3648456" y="3200400"/>
+            <a:ext cx="3767328" cy="457200"/>
+          </a:xfrm>
+          <a:prstGeom prst="rect">
+            <a:avLst/>
+          </a:prstGeom>
+          <a:noFill/>
+          <a:ln/>
+        </p:spPr>
+        <p:txBody>
+          <a:bodyPr wrap="square" lIns="0" tIns="0" rIns="0" bIns="0" rtlCol="0" anchor="ctr"/>
+          <a:lstStyle/>
+          <a:p>
+            <a:pPr algn="l" indent="0" marL="0">
+              <a:buNone/>
+            </a:pPr>
+            <a:r>
+              <a:rPr lang="en-US" sz="1100" dirty="0">
                 <a:solidFill>
                   <a:srgbClr val="5B6470"/>
                 </a:solidFill>
@@ -3650,77 +5727,513 @@
                 <a:ea typeface="Calibri" pitchFamily="34" charset="-122"/>
                 <a:cs typeface="Calibri" pitchFamily="34" charset="-120"/>
               </a:rPr>
-              <a:t>Era la pieza que faltaba para cerrar el teleop. Me lo iban a traer y se reasignó.</a:t>
-            </a:r>
-            <a:endParaRPr lang="en-US" sz="1200" dirty="0"/>
-          </a:p>
-        </p:txBody>
-      </p:sp>
-      <p:sp>
-        <p:nvSpPr>
-          <p:cNvPr id="12" name="Shape 10"/>
-          <p:cNvSpPr/>
-          <p:nvPr/>
-        </p:nvSpPr>
-        <p:spPr>
-          <a:xfrm>
-            <a:off x="594360" y="4709160"/>
-            <a:ext cx="10972800" cy="914400"/>
-          </a:xfrm>
-          <a:prstGeom prst="roundRect">
-            <a:avLst>
-              <a:gd name="adj" fmla="val 9000"/>
-            </a:avLst>
+              <a:t>Fabricar bloque de válvulas y actuadores</a:t>
+            </a:r>
+            <a:endParaRPr lang="en-US" sz="1100" dirty="0"/>
+          </a:p>
+        </p:txBody>
+      </p:sp>
+      <p:sp>
+        <p:nvSpPr>
+          <p:cNvPr id="19" name="Text 17"/>
+          <p:cNvSpPr/>
+          <p:nvPr/>
+        </p:nvSpPr>
+        <p:spPr>
+          <a:xfrm>
+            <a:off x="7671816" y="3200400"/>
+            <a:ext cx="3767328" cy="457200"/>
+          </a:xfrm>
+          <a:prstGeom prst="rect">
+            <a:avLst/>
+          </a:prstGeom>
+          <a:noFill/>
+          <a:ln/>
+        </p:spPr>
+        <p:txBody>
+          <a:bodyPr wrap="square" lIns="0" tIns="0" rIns="0" bIns="0" rtlCol="0" anchor="ctr"/>
+          <a:lstStyle/>
+          <a:p>
+            <a:pPr algn="l" indent="0" marL="0">
+              <a:buNone/>
+            </a:pPr>
+            <a:r>
+              <a:rPr lang="en-US" sz="1100" b="1" dirty="0">
+                <a:solidFill>
+                  <a:srgbClr val="1A1D23"/>
+                </a:solidFill>
+                <a:latin typeface="Calibri" pitchFamily="34" charset="0"/>
+                <a:ea typeface="Calibri" pitchFamily="34" charset="-122"/>
+                <a:cs typeface="Calibri" pitchFamily="34" charset="-120"/>
+              </a:rPr>
+              <a:t>Mando electrohidráulico de fábrica</a:t>
+            </a:r>
+            <a:endParaRPr lang="en-US" sz="1100" dirty="0"/>
+          </a:p>
+        </p:txBody>
+      </p:sp>
+      <p:sp>
+        <p:nvSpPr>
+          <p:cNvPr id="20" name="Shape 18"/>
+          <p:cNvSpPr/>
+          <p:nvPr/>
+        </p:nvSpPr>
+        <p:spPr>
+          <a:xfrm>
+            <a:off x="594360" y="3657600"/>
+            <a:ext cx="10972800" cy="457200"/>
+          </a:xfrm>
+          <a:prstGeom prst="rect">
+            <a:avLst/>
           </a:prstGeom>
           <a:solidFill>
-            <a:srgbClr val="20242B"/>
+            <a:srgbClr val="FFFFFF"/>
           </a:solidFill>
-          <a:ln/>
-          <a:effectLst>
-            <a:outerShdw sx="100000" sy="100000" kx="0" ky="0" algn="bl" rotWithShape="0" blurRad="152400" dist="38100" dir="5400000">
-              <a:srgbClr val="000000">
-                <a:alpha val="28000"/>
-              </a:srgbClr>
-            </a:outerShdw>
-          </a:effectLst>
-        </p:spPr>
-      </p:sp>
-      <p:sp>
-        <p:nvSpPr>
-          <p:cNvPr id="13" name="Text 11"/>
-          <p:cNvSpPr/>
-          <p:nvPr/>
-        </p:nvSpPr>
-        <p:spPr>
-          <a:xfrm>
-            <a:off x="960120" y="4709160"/>
-            <a:ext cx="10241280" cy="914400"/>
-          </a:xfrm>
-          <a:prstGeom prst="rect">
-            <a:avLst/>
-          </a:prstGeom>
-          <a:noFill/>
-          <a:ln/>
-        </p:spPr>
-        <p:txBody>
-          <a:bodyPr wrap="square" lIns="0" tIns="0" rIns="0" bIns="0" rtlCol="0" anchor="ctr"/>
-          <a:lstStyle/>
-          <a:p>
-            <a:pPr indent="0" marL="0">
-              <a:buNone/>
-            </a:pPr>
-            <a:r>
-              <a:rPr lang="en-US" sz="1500" b="1" dirty="0">
-                <a:solidFill>
-                  <a:srgbClr val="F5C518"/>
-                </a:solidFill>
-                <a:latin typeface="Calibri" pitchFamily="34" charset="0"/>
-                <a:ea typeface="Calibri" pitchFamily="34" charset="-122"/>
-                <a:cs typeface="Calibri" pitchFamily="34" charset="-120"/>
-              </a:rPr>
-              <a:t>El avance ya no depende de más tiempo en la computadora. Depende de un montacargas funcional dedicado al proyecto.</a:t>
-            </a:r>
-            <a:endParaRPr lang="en-US" sz="1500" dirty="0"/>
+          <a:ln w="7620">
+            <a:solidFill>
+              <a:srgbClr val="D8DADE"/>
+            </a:solidFill>
+            <a:prstDash val="solid"/>
+          </a:ln>
+        </p:spPr>
+      </p:sp>
+      <p:sp>
+        <p:nvSpPr>
+          <p:cNvPr id="21" name="Text 19"/>
+          <p:cNvSpPr/>
+          <p:nvPr/>
+        </p:nvSpPr>
+        <p:spPr>
+          <a:xfrm>
+            <a:off x="722376" y="3657600"/>
+            <a:ext cx="2670048" cy="457200"/>
+          </a:xfrm>
+          <a:prstGeom prst="rect">
+            <a:avLst/>
+          </a:prstGeom>
+          <a:noFill/>
+          <a:ln/>
+        </p:spPr>
+        <p:txBody>
+          <a:bodyPr wrap="square" lIns="0" tIns="0" rIns="0" bIns="0" rtlCol="0" anchor="ctr"/>
+          <a:lstStyle/>
+          <a:p>
+            <a:pPr algn="l" indent="0" marL="0">
+              <a:buNone/>
+            </a:pPr>
+            <a:r>
+              <a:rPr lang="en-US" sz="1100" b="1" dirty="0">
+                <a:solidFill>
+                  <a:srgbClr val="1A1D23"/>
+                </a:solidFill>
+                <a:latin typeface="Calibri" pitchFamily="34" charset="0"/>
+                <a:ea typeface="Calibri" pitchFamily="34" charset="-122"/>
+                <a:cs typeface="Calibri" pitchFamily="34" charset="-120"/>
+              </a:rPr>
+              <a:t>Freno</a:t>
+            </a:r>
+            <a:endParaRPr lang="en-US" sz="1100" dirty="0"/>
+          </a:p>
+        </p:txBody>
+      </p:sp>
+      <p:sp>
+        <p:nvSpPr>
+          <p:cNvPr id="22" name="Text 20"/>
+          <p:cNvSpPr/>
+          <p:nvPr/>
+        </p:nvSpPr>
+        <p:spPr>
+          <a:xfrm>
+            <a:off x="3648456" y="3657600"/>
+            <a:ext cx="3767328" cy="457200"/>
+          </a:xfrm>
+          <a:prstGeom prst="rect">
+            <a:avLst/>
+          </a:prstGeom>
+          <a:noFill/>
+          <a:ln/>
+        </p:spPr>
+        <p:txBody>
+          <a:bodyPr wrap="square" lIns="0" tIns="0" rIns="0" bIns="0" rtlCol="0" anchor="ctr"/>
+          <a:lstStyle/>
+          <a:p>
+            <a:pPr algn="l" indent="0" marL="0">
+              <a:buNone/>
+            </a:pPr>
+            <a:r>
+              <a:rPr lang="en-US" sz="1100" dirty="0">
+                <a:solidFill>
+                  <a:srgbClr val="5B6470"/>
+                </a:solidFill>
+                <a:latin typeface="Calibri" pitchFamily="34" charset="0"/>
+                <a:ea typeface="Calibri" pitchFamily="34" charset="-122"/>
+                <a:cs typeface="Calibri" pitchFamily="34" charset="-120"/>
+              </a:rPr>
+              <a:t>Actuador mecánico propio</a:t>
+            </a:r>
+            <a:endParaRPr lang="en-US" sz="1100" dirty="0"/>
+          </a:p>
+        </p:txBody>
+      </p:sp>
+      <p:sp>
+        <p:nvSpPr>
+          <p:cNvPr id="23" name="Text 21"/>
+          <p:cNvSpPr/>
+          <p:nvPr/>
+        </p:nvSpPr>
+        <p:spPr>
+          <a:xfrm>
+            <a:off x="7671816" y="3657600"/>
+            <a:ext cx="3767328" cy="457200"/>
+          </a:xfrm>
+          <a:prstGeom prst="rect">
+            <a:avLst/>
+          </a:prstGeom>
+          <a:noFill/>
+          <a:ln/>
+        </p:spPr>
+        <p:txBody>
+          <a:bodyPr wrap="square" lIns="0" tIns="0" rIns="0" bIns="0" rtlCol="0" anchor="ctr"/>
+          <a:lstStyle/>
+          <a:p>
+            <a:pPr algn="l" indent="0" marL="0">
+              <a:buNone/>
+            </a:pPr>
+            <a:r>
+              <a:rPr lang="en-US" sz="1100" b="1" dirty="0">
+                <a:solidFill>
+                  <a:srgbClr val="1A1D23"/>
+                </a:solidFill>
+                <a:latin typeface="Calibri" pitchFamily="34" charset="0"/>
+                <a:ea typeface="Calibri" pitchFamily="34" charset="-122"/>
+                <a:cs typeface="Calibri" pitchFamily="34" charset="-120"/>
+              </a:rPr>
+              <a:t>Frena solo al soltar</a:t>
+            </a:r>
+            <a:endParaRPr lang="en-US" sz="1100" dirty="0"/>
+          </a:p>
+        </p:txBody>
+      </p:sp>
+      <p:sp>
+        <p:nvSpPr>
+          <p:cNvPr id="24" name="Shape 22"/>
+          <p:cNvSpPr/>
+          <p:nvPr/>
+        </p:nvSpPr>
+        <p:spPr>
+          <a:xfrm>
+            <a:off x="594360" y="4114800"/>
+            <a:ext cx="10972800" cy="457200"/>
+          </a:xfrm>
+          <a:prstGeom prst="rect">
+            <a:avLst/>
+          </a:prstGeom>
+          <a:solidFill>
+            <a:srgbClr val="FFFFFF"/>
+          </a:solidFill>
+          <a:ln w="7620">
+            <a:solidFill>
+              <a:srgbClr val="D8DADE"/>
+            </a:solidFill>
+            <a:prstDash val="solid"/>
+          </a:ln>
+        </p:spPr>
+      </p:sp>
+      <p:sp>
+        <p:nvSpPr>
+          <p:cNvPr id="25" name="Text 23"/>
+          <p:cNvSpPr/>
+          <p:nvPr/>
+        </p:nvSpPr>
+        <p:spPr>
+          <a:xfrm>
+            <a:off x="722376" y="4114800"/>
+            <a:ext cx="2670048" cy="457200"/>
+          </a:xfrm>
+          <a:prstGeom prst="rect">
+            <a:avLst/>
+          </a:prstGeom>
+          <a:noFill/>
+          <a:ln/>
+        </p:spPr>
+        <p:txBody>
+          <a:bodyPr wrap="square" lIns="0" tIns="0" rIns="0" bIns="0" rtlCol="0" anchor="ctr"/>
+          <a:lstStyle/>
+          <a:p>
+            <a:pPr algn="l" indent="0" marL="0">
+              <a:buNone/>
+            </a:pPr>
+            <a:r>
+              <a:rPr lang="en-US" sz="1100" b="1" dirty="0">
+                <a:solidFill>
+                  <a:srgbClr val="1A1D23"/>
+                </a:solidFill>
+                <a:latin typeface="Calibri" pitchFamily="34" charset="0"/>
+                <a:ea typeface="Calibri" pitchFamily="34" charset="-122"/>
+                <a:cs typeface="Calibri" pitchFamily="34" charset="-120"/>
+              </a:rPr>
+              <a:t>Sensores</a:t>
+            </a:r>
+            <a:endParaRPr lang="en-US" sz="1100" dirty="0"/>
+          </a:p>
+        </p:txBody>
+      </p:sp>
+      <p:sp>
+        <p:nvSpPr>
+          <p:cNvPr id="26" name="Text 24"/>
+          <p:cNvSpPr/>
+          <p:nvPr/>
+        </p:nvSpPr>
+        <p:spPr>
+          <a:xfrm>
+            <a:off x="3648456" y="4114800"/>
+            <a:ext cx="3767328" cy="457200"/>
+          </a:xfrm>
+          <a:prstGeom prst="rect">
+            <a:avLst/>
+          </a:prstGeom>
+          <a:noFill/>
+          <a:ln/>
+        </p:spPr>
+        <p:txBody>
+          <a:bodyPr wrap="square" lIns="0" tIns="0" rIns="0" bIns="0" rtlCol="0" anchor="ctr"/>
+          <a:lstStyle/>
+          <a:p>
+            <a:pPr algn="l" indent="0" marL="0">
+              <a:buNone/>
+            </a:pPr>
+            <a:r>
+              <a:rPr lang="en-US" sz="1100" dirty="0">
+                <a:solidFill>
+                  <a:srgbClr val="5B6470"/>
+                </a:solidFill>
+                <a:latin typeface="Calibri" pitchFamily="34" charset="0"/>
+                <a:ea typeface="Calibri" pitchFamily="34" charset="-122"/>
+                <a:cs typeface="Calibri" pitchFamily="34" charset="-120"/>
+              </a:rPr>
+              <a:t>Todos desde cero</a:t>
+            </a:r>
+            <a:endParaRPr lang="en-US" sz="1100" dirty="0"/>
+          </a:p>
+        </p:txBody>
+      </p:sp>
+      <p:sp>
+        <p:nvSpPr>
+          <p:cNvPr id="27" name="Text 25"/>
+          <p:cNvSpPr/>
+          <p:nvPr/>
+        </p:nvSpPr>
+        <p:spPr>
+          <a:xfrm>
+            <a:off x="7671816" y="4114800"/>
+            <a:ext cx="3767328" cy="457200"/>
+          </a:xfrm>
+          <a:prstGeom prst="rect">
+            <a:avLst/>
+          </a:prstGeom>
+          <a:noFill/>
+          <a:ln/>
+        </p:spPr>
+        <p:txBody>
+          <a:bodyPr wrap="square" lIns="0" tIns="0" rIns="0" bIns="0" rtlCol="0" anchor="ctr"/>
+          <a:lstStyle/>
+          <a:p>
+            <a:pPr algn="l" indent="0" marL="0">
+              <a:buNone/>
+            </a:pPr>
+            <a:r>
+              <a:rPr lang="en-US" sz="1100" b="1" dirty="0">
+                <a:solidFill>
+                  <a:srgbClr val="1A1D23"/>
+                </a:solidFill>
+                <a:latin typeface="Calibri" pitchFamily="34" charset="0"/>
+                <a:ea typeface="Calibri" pitchFamily="34" charset="-122"/>
+                <a:cs typeface="Calibri" pitchFamily="34" charset="-120"/>
+              </a:rPr>
+              <a:t>Ya en el bus CAN — se leen</a:t>
+            </a:r>
+            <a:endParaRPr lang="en-US" sz="1100" dirty="0"/>
+          </a:p>
+        </p:txBody>
+      </p:sp>
+      <p:sp>
+        <p:nvSpPr>
+          <p:cNvPr id="28" name="Shape 26"/>
+          <p:cNvSpPr/>
+          <p:nvPr/>
+        </p:nvSpPr>
+        <p:spPr>
+          <a:xfrm>
+            <a:off x="594360" y="4572000"/>
+            <a:ext cx="10972800" cy="457200"/>
+          </a:xfrm>
+          <a:prstGeom prst="rect">
+            <a:avLst/>
+          </a:prstGeom>
+          <a:solidFill>
+            <a:srgbClr val="FFFFFF"/>
+          </a:solidFill>
+          <a:ln w="7620">
+            <a:solidFill>
+              <a:srgbClr val="D8DADE"/>
+            </a:solidFill>
+            <a:prstDash val="solid"/>
+          </a:ln>
+        </p:spPr>
+      </p:sp>
+      <p:sp>
+        <p:nvSpPr>
+          <p:cNvPr id="29" name="Text 27"/>
+          <p:cNvSpPr/>
+          <p:nvPr/>
+        </p:nvSpPr>
+        <p:spPr>
+          <a:xfrm>
+            <a:off x="722376" y="4572000"/>
+            <a:ext cx="2670048" cy="457200"/>
+          </a:xfrm>
+          <a:prstGeom prst="rect">
+            <a:avLst/>
+          </a:prstGeom>
+          <a:noFill/>
+          <a:ln/>
+        </p:spPr>
+        <p:txBody>
+          <a:bodyPr wrap="square" lIns="0" tIns="0" rIns="0" bIns="0" rtlCol="0" anchor="ctr"/>
+          <a:lstStyle/>
+          <a:p>
+            <a:pPr algn="l" indent="0" marL="0">
+              <a:buNone/>
+            </a:pPr>
+            <a:r>
+              <a:rPr lang="en-US" sz="1100" b="1" dirty="0">
+                <a:solidFill>
+                  <a:srgbClr val="1A1D23"/>
+                </a:solidFill>
+                <a:latin typeface="Calibri" pitchFamily="34" charset="0"/>
+                <a:ea typeface="Calibri" pitchFamily="34" charset="-122"/>
+                <a:cs typeface="Calibri" pitchFamily="34" charset="-120"/>
+              </a:rPr>
+              <a:t>El NRE es…</a:t>
+            </a:r>
+            <a:endParaRPr lang="en-US" sz="1100" dirty="0"/>
+          </a:p>
+        </p:txBody>
+      </p:sp>
+      <p:sp>
+        <p:nvSpPr>
+          <p:cNvPr id="30" name="Text 28"/>
+          <p:cNvSpPr/>
+          <p:nvPr/>
+        </p:nvSpPr>
+        <p:spPr>
+          <a:xfrm>
+            <a:off x="3648456" y="4572000"/>
+            <a:ext cx="3767328" cy="457200"/>
+          </a:xfrm>
+          <a:prstGeom prst="rect">
+            <a:avLst/>
+          </a:prstGeom>
+          <a:noFill/>
+          <a:ln/>
+        </p:spPr>
+        <p:txBody>
+          <a:bodyPr wrap="square" lIns="0" tIns="0" rIns="0" bIns="0" rtlCol="0" anchor="ctr"/>
+          <a:lstStyle/>
+          <a:p>
+            <a:pPr algn="l" indent="0" marL="0">
+              <a:buNone/>
+            </a:pPr>
+            <a:r>
+              <a:rPr lang="en-US" sz="1100" dirty="0">
+                <a:solidFill>
+                  <a:srgbClr val="5B6470"/>
+                </a:solidFill>
+                <a:latin typeface="Calibri" pitchFamily="34" charset="0"/>
+                <a:ea typeface="Calibri" pitchFamily="34" charset="-122"/>
+                <a:cs typeface="Calibri" pitchFamily="34" charset="-120"/>
+              </a:rPr>
+              <a:t>Fabricación mecánica · meses por eje</a:t>
+            </a:r>
+            <a:endParaRPr lang="en-US" sz="1100" dirty="0"/>
+          </a:p>
+        </p:txBody>
+      </p:sp>
+      <p:sp>
+        <p:nvSpPr>
+          <p:cNvPr id="31" name="Text 29"/>
+          <p:cNvSpPr/>
+          <p:nvPr/>
+        </p:nvSpPr>
+        <p:spPr>
+          <a:xfrm>
+            <a:off x="7671816" y="4572000"/>
+            <a:ext cx="3767328" cy="457200"/>
+          </a:xfrm>
+          <a:prstGeom prst="rect">
+            <a:avLst/>
+          </a:prstGeom>
+          <a:noFill/>
+          <a:ln/>
+        </p:spPr>
+        <p:txBody>
+          <a:bodyPr wrap="square" lIns="0" tIns="0" rIns="0" bIns="0" rtlCol="0" anchor="ctr"/>
+          <a:lstStyle/>
+          <a:p>
+            <a:pPr algn="l" indent="0" marL="0">
+              <a:buNone/>
+            </a:pPr>
+            <a:r>
+              <a:rPr lang="en-US" sz="1100" b="1" dirty="0">
+                <a:solidFill>
+                  <a:srgbClr val="1A1D23"/>
+                </a:solidFill>
+                <a:latin typeface="Calibri" pitchFamily="34" charset="0"/>
+                <a:ea typeface="Calibri" pitchFamily="34" charset="-122"/>
+                <a:cs typeface="Calibri" pitchFamily="34" charset="-120"/>
+              </a:rPr>
+              <a:t>Información: qué señal es cada cable</a:t>
+            </a:r>
+            <a:endParaRPr lang="en-US" sz="1100" dirty="0"/>
+          </a:p>
+        </p:txBody>
+      </p:sp>
+      <p:sp>
+        <p:nvSpPr>
+          <p:cNvPr id="32" name="Text 30"/>
+          <p:cNvSpPr/>
+          <p:nvPr/>
+        </p:nvSpPr>
+        <p:spPr>
+          <a:xfrm>
+            <a:off x="594360" y="5212080"/>
+            <a:ext cx="10972800" cy="548640"/>
+          </a:xfrm>
+          <a:prstGeom prst="rect">
+            <a:avLst/>
+          </a:prstGeom>
+          <a:noFill/>
+          <a:ln/>
+        </p:spPr>
+        <p:txBody>
+          <a:bodyPr wrap="square" lIns="0" tIns="0" rIns="0" bIns="0" rtlCol="0" anchor="ctr"/>
+          <a:lstStyle/>
+          <a:p>
+            <a:pPr indent="0" marL="0">
+              <a:buNone/>
+            </a:pPr>
+            <a:r>
+              <a:rPr lang="en-US" sz="1350" b="1" dirty="0">
+                <a:solidFill>
+                  <a:srgbClr val="1A1D23"/>
+                </a:solidFill>
+                <a:latin typeface="Calibri" pitchFamily="34" charset="0"/>
+                <a:ea typeface="Calibri" pitchFamily="34" charset="-122"/>
+                <a:cs typeface="Calibri" pitchFamily="34" charset="-120"/>
+              </a:rPr>
+              <a:t>Elegimos la arquitectura que convierte meses de fabricación en semanas de ingeniería. Ese fue el acierto que compró el calendario.</a:t>
+            </a:r>
+            <a:endParaRPr lang="en-US" sz="1350" dirty="0"/>
           </a:p>
         </p:txBody>
       </p:sp>
@@ -3781,7 +6294,7 @@
               <a:buNone/>
             </a:pPr>
             <a:r>
-              <a:rPr lang="en-US" sz="3400" b="1" dirty="0">
+              <a:rPr lang="en-US" sz="3300" b="1" dirty="0">
                 <a:solidFill>
                   <a:srgbClr val="ECEBE6"/>
                 </a:solidFill>
@@ -3789,9 +6302,9 @@
                 <a:ea typeface="Cambria" pitchFamily="34" charset="-122"/>
                 <a:cs typeface="Cambria" pitchFamily="34" charset="-120"/>
               </a:rPr>
-              <a:t>Pedido 1 · Reparar el MT 122</a:t>
-            </a:r>
-            <a:endParaRPr lang="en-US" sz="3400" dirty="0"/>
+              <a:t>Los hitos que hemos conseguido</a:t>
+            </a:r>
+            <a:endParaRPr lang="en-US" sz="3300" dirty="0"/>
           </a:p>
         </p:txBody>
       </p:sp>
@@ -3803,7 +6316,7 @@
         </p:nvSpPr>
         <p:spPr>
           <a:xfrm>
-            <a:off x="594360" y="1133856"/>
+            <a:off x="594360" y="1115568"/>
             <a:ext cx="10972800" cy="365760"/>
           </a:xfrm>
           <a:prstGeom prst="rect">
@@ -3828,7 +6341,7 @@
                 <a:ea typeface="Calibri" pitchFamily="34" charset="-122"/>
                 <a:cs typeface="Calibri" pitchFamily="34" charset="-120"/>
               </a:rPr>
-              <a:t>Hoy está detenido y se usa como banco de repuestos</a:t>
+              <a:t>Tres meses desde que se eligió el EDR. On time, on track</a:t>
             </a:r>
             <a:endParaRPr lang="en-US" sz="1350" dirty="0"/>
           </a:p>
@@ -3843,11 +6356,11 @@
         <p:spPr>
           <a:xfrm>
             <a:off x="594360" y="1828800"/>
-            <a:ext cx="10972800" cy="1371600"/>
+            <a:ext cx="3520440" cy="1097280"/>
           </a:xfrm>
           <a:prstGeom prst="roundRect">
             <a:avLst>
-              <a:gd name="adj" fmla="val 6000"/>
+              <a:gd name="adj" fmla="val 7500"/>
             </a:avLst>
           </a:prstGeom>
           <a:solidFill>
@@ -3871,34 +6384,34 @@
         </p:nvSpPr>
         <p:spPr>
           <a:xfrm>
-            <a:off x="960120" y="1965960"/>
-            <a:ext cx="10241280" cy="457200"/>
-          </a:xfrm>
-          <a:prstGeom prst="rect">
-            <a:avLst/>
-          </a:prstGeom>
-          <a:noFill/>
-          <a:ln/>
-        </p:spPr>
-        <p:txBody>
-          <a:bodyPr wrap="square" lIns="0" tIns="0" rIns="0" bIns="0" rtlCol="0" anchor="ctr"/>
-          <a:lstStyle/>
-          <a:p>
-            <a:pPr indent="0" marL="0">
-              <a:buNone/>
-            </a:pPr>
-            <a:r>
-              <a:rPr lang="en-US" sz="1600" b="1" i="1" dirty="0">
-                <a:solidFill>
-                  <a:srgbClr val="ECEBE6"/>
+            <a:off x="868680" y="1975104"/>
+            <a:ext cx="3017520" cy="320040"/>
+          </a:xfrm>
+          <a:prstGeom prst="rect">
+            <a:avLst/>
+          </a:prstGeom>
+          <a:noFill/>
+          <a:ln/>
+        </p:spPr>
+        <p:txBody>
+          <a:bodyPr wrap="square" lIns="0" tIns="0" rIns="0" bIns="0" rtlCol="0" anchor="ctr"/>
+          <a:lstStyle/>
+          <a:p>
+            <a:pPr indent="0" marL="0">
+              <a:buNone/>
+            </a:pPr>
+            <a:r>
+              <a:rPr lang="en-US" sz="1300" b="1" dirty="0">
+                <a:solidFill>
+                  <a:srgbClr val="39D98A"/>
                 </a:solidFill>
                 <a:latin typeface="Cambria" pitchFamily="34" charset="0"/>
                 <a:ea typeface="Cambria" pitchFamily="34" charset="-122"/>
                 <a:cs typeface="Cambria" pitchFamily="34" charset="-120"/>
               </a:rPr>
-              <a:t>“Ya agarramos ese equipo como banco de repuestos.”</a:t>
-            </a:r>
-            <a:endParaRPr lang="en-US" sz="1600" dirty="0"/>
+              <a:t>Ago</a:t>
+            </a:r>
+            <a:endParaRPr lang="en-US" sz="1300" dirty="0"/>
           </a:p>
         </p:txBody>
       </p:sp>
@@ -3910,8 +6423,8 @@
         </p:nvSpPr>
         <p:spPr>
           <a:xfrm>
-            <a:off x="960120" y="2487168"/>
-            <a:ext cx="10241280" cy="640080"/>
+            <a:off x="868680" y="2304288"/>
+            <a:ext cx="3017520" cy="566928"/>
           </a:xfrm>
           <a:prstGeom prst="rect">
             <a:avLst/>
@@ -3927,7 +6440,7 @@
               <a:buNone/>
             </a:pPr>
             <a:r>
-              <a:rPr lang="en-US" sz="1250" dirty="0">
+              <a:rPr lang="en-US" sz="1050" dirty="0">
                 <a:solidFill>
                   <a:srgbClr val="8B949E"/>
                 </a:solidFill>
@@ -3935,9 +6448,9 @@
                 <a:ea typeface="Calibri" pitchFamily="34" charset="-122"/>
                 <a:cs typeface="Calibri" pitchFamily="34" charset="-120"/>
               </a:rPr>
-              <a:t>— Miguel.  Un equipo dañado no es un cajón de piezas: es un activo detenido. Cada pieza que se le saca lo aleja de volver a generar renta, y encarece repararlo después.</a:t>
-            </a:r>
-            <a:endParaRPr lang="en-US" sz="1250" dirty="0"/>
+              <a:t>Se descarta el Baoli y se elige el EDR: cabe en el pasillo y es eléctrico</a:t>
+            </a:r>
+            <a:endParaRPr lang="en-US" sz="1050" dirty="0"/>
           </a:p>
         </p:txBody>
       </p:sp>
@@ -3949,12 +6462,12 @@
         </p:nvSpPr>
         <p:spPr>
           <a:xfrm>
-            <a:off x="594360" y="3520440"/>
-            <a:ext cx="5349240" cy="1783080"/>
+            <a:off x="4297680" y="1828800"/>
+            <a:ext cx="3520440" cy="1097280"/>
           </a:xfrm>
           <a:prstGeom prst="roundRect">
             <a:avLst>
-              <a:gd name="adj" fmla="val 4615"/>
+              <a:gd name="adj" fmla="val 7500"/>
             </a:avLst>
           </a:prstGeom>
           <a:solidFill>
@@ -3978,34 +6491,34 @@
         </p:nvSpPr>
         <p:spPr>
           <a:xfrm>
-            <a:off x="914400" y="3749040"/>
-            <a:ext cx="4754880" cy="457200"/>
-          </a:xfrm>
-          <a:prstGeom prst="rect">
-            <a:avLst/>
-          </a:prstGeom>
-          <a:noFill/>
-          <a:ln/>
-        </p:spPr>
-        <p:txBody>
-          <a:bodyPr wrap="square" lIns="0" tIns="0" rIns="0" bIns="0" rtlCol="0" anchor="ctr"/>
-          <a:lstStyle/>
-          <a:p>
-            <a:pPr indent="0" marL="0">
-              <a:buNone/>
-            </a:pPr>
-            <a:r>
-              <a:rPr lang="en-US" sz="1500" b="1" dirty="0">
-                <a:solidFill>
-                  <a:srgbClr val="37C3FF"/>
+            <a:off x="4572000" y="1975104"/>
+            <a:ext cx="3017520" cy="320040"/>
+          </a:xfrm>
+          <a:prstGeom prst="rect">
+            <a:avLst/>
+          </a:prstGeom>
+          <a:noFill/>
+          <a:ln/>
+        </p:spPr>
+        <p:txBody>
+          <a:bodyPr wrap="square" lIns="0" tIns="0" rIns="0" bIns="0" rtlCol="0" anchor="ctr"/>
+          <a:lstStyle/>
+          <a:p>
+            <a:pPr indent="0" marL="0">
+              <a:buNone/>
+            </a:pPr>
+            <a:r>
+              <a:rPr lang="en-US" sz="1300" b="1" dirty="0">
+                <a:solidFill>
+                  <a:srgbClr val="ECEBE6"/>
                 </a:solidFill>
                 <a:latin typeface="Cambria" pitchFamily="34" charset="0"/>
                 <a:ea typeface="Cambria" pitchFamily="34" charset="-122"/>
                 <a:cs typeface="Cambria" pitchFamily="34" charset="-120"/>
               </a:rPr>
-              <a:t>El costo real de canibalizar</a:t>
-            </a:r>
-            <a:endParaRPr lang="en-US" sz="1500" dirty="0"/>
+              <a:t>Sep</a:t>
+            </a:r>
+            <a:endParaRPr lang="en-US" sz="1300" dirty="0"/>
           </a:p>
         </p:txBody>
       </p:sp>
@@ -4017,8 +6530,8 @@
         </p:nvSpPr>
         <p:spPr>
           <a:xfrm>
-            <a:off x="914400" y="4270248"/>
-            <a:ext cx="4754880" cy="914400"/>
+            <a:off x="4572000" y="2304288"/>
+            <a:ext cx="3017520" cy="566928"/>
           </a:xfrm>
           <a:prstGeom prst="rect">
             <a:avLst/>
@@ -4034,7 +6547,7 @@
               <a:buNone/>
             </a:pPr>
             <a:r>
-              <a:rPr lang="en-US" sz="1200" dirty="0">
+              <a:rPr lang="en-US" sz="1050" dirty="0">
                 <a:solidFill>
                   <a:srgbClr val="8B949E"/>
                 </a:solidFill>
@@ -4042,9 +6555,9 @@
                 <a:ea typeface="Calibri" pitchFamily="34" charset="-122"/>
                 <a:cs typeface="Calibri" pitchFamily="34" charset="-120"/>
               </a:rPr>
-              <a:t>Cada repuesto que sale del MT 122 es una pieza que luego hay que comprar dos veces: para el equipo que la recibe hoy, y para el MT 122 cuando se quiera revivir.</a:t>
-            </a:r>
-            <a:endParaRPr lang="en-US" sz="1200" dirty="0"/>
+              <a:t>Puerto de servicio abierto · el equipo es un Jungheinrich (manual completo en mano)</a:t>
+            </a:r>
+            <a:endParaRPr lang="en-US" sz="1050" dirty="0"/>
           </a:p>
         </p:txBody>
       </p:sp>
@@ -4056,12 +6569,12 @@
         </p:nvSpPr>
         <p:spPr>
           <a:xfrm>
-            <a:off x="6217920" y="3520440"/>
-            <a:ext cx="5349240" cy="1783080"/>
+            <a:off x="8001000" y="1828800"/>
+            <a:ext cx="3520440" cy="1097280"/>
           </a:xfrm>
           <a:prstGeom prst="roundRect">
             <a:avLst>
-              <a:gd name="adj" fmla="val 4615"/>
+              <a:gd name="adj" fmla="val 7500"/>
             </a:avLst>
           </a:prstGeom>
           <a:solidFill>
@@ -4085,34 +6598,34 @@
         </p:nvSpPr>
         <p:spPr>
           <a:xfrm>
-            <a:off x="6537960" y="3749040"/>
-            <a:ext cx="4754880" cy="457200"/>
-          </a:xfrm>
-          <a:prstGeom prst="rect">
-            <a:avLst/>
-          </a:prstGeom>
-          <a:noFill/>
-          <a:ln/>
-        </p:spPr>
-        <p:txBody>
-          <a:bodyPr wrap="square" lIns="0" tIns="0" rIns="0" bIns="0" rtlCol="0" anchor="ctr"/>
-          <a:lstStyle/>
-          <a:p>
-            <a:pPr indent="0" marL="0">
-              <a:buNone/>
-            </a:pPr>
-            <a:r>
-              <a:rPr lang="en-US" sz="1500" b="1" dirty="0">
-                <a:solidFill>
-                  <a:srgbClr val="37C3FF"/>
+            <a:off x="8275320" y="1975104"/>
+            <a:ext cx="3017520" cy="320040"/>
+          </a:xfrm>
+          <a:prstGeom prst="rect">
+            <a:avLst/>
+          </a:prstGeom>
+          <a:noFill/>
+          <a:ln/>
+        </p:spPr>
+        <p:txBody>
+          <a:bodyPr wrap="square" lIns="0" tIns="0" rIns="0" bIns="0" rtlCol="0" anchor="ctr"/>
+          <a:lstStyle/>
+          <a:p>
+            <a:pPr indent="0" marL="0">
+              <a:buNone/>
+            </a:pPr>
+            <a:r>
+              <a:rPr lang="en-US" sz="1300" b="1" dirty="0">
+                <a:solidFill>
+                  <a:srgbClr val="ECEBE6"/>
                 </a:solidFill>
                 <a:latin typeface="Cambria" pitchFamily="34" charset="0"/>
                 <a:ea typeface="Cambria" pitchFamily="34" charset="-122"/>
                 <a:cs typeface="Cambria" pitchFamily="34" charset="-120"/>
               </a:rPr>
-              <a:t>La lista ya debería existir</a:t>
-            </a:r>
-            <a:endParaRPr lang="en-US" sz="1500" dirty="0"/>
+              <a:t>1–3 Oct</a:t>
+            </a:r>
+            <a:endParaRPr lang="en-US" sz="1300" dirty="0"/>
           </a:p>
         </p:txBody>
       </p:sp>
@@ -4124,8 +6637,8 @@
         </p:nvSpPr>
         <p:spPr>
           <a:xfrm>
-            <a:off x="6537960" y="4270248"/>
-            <a:ext cx="4754880" cy="914400"/>
+            <a:off x="8275320" y="2304288"/>
+            <a:ext cx="3017520" cy="566928"/>
           </a:xfrm>
           <a:prstGeom prst="rect">
             <a:avLst/>
@@ -4141,7 +6654,7 @@
               <a:buNone/>
             </a:pPr>
             <a:r>
-              <a:rPr lang="en-US" sz="1200" dirty="0">
+              <a:rPr lang="en-US" sz="1050" dirty="0">
                 <a:solidFill>
                   <a:srgbClr val="8B949E"/>
                 </a:solidFill>
@@ -4149,48 +6662,651 @@
                 <a:ea typeface="Calibri" pitchFamily="34" charset="-122"/>
                 <a:cs typeface="Calibri" pitchFamily="34" charset="-120"/>
               </a:rPr>
-              <a:t>Miguel dice que vos ya deberías tener la lista de lo necesario para repararlo. Se actualiza, se cotiza y se pide.</a:t>
-            </a:r>
-            <a:endParaRPr lang="en-US" sz="1200" dirty="0"/>
-          </a:p>
-        </p:txBody>
-      </p:sp>
-      <p:sp>
-        <p:nvSpPr>
-          <p:cNvPr id="13" name="Text 11"/>
-          <p:cNvSpPr/>
-          <p:nvPr/>
-        </p:nvSpPr>
-        <p:spPr>
-          <a:xfrm>
-            <a:off x="594360" y="5577840"/>
-            <a:ext cx="10972800" cy="457200"/>
-          </a:xfrm>
-          <a:prstGeom prst="rect">
-            <a:avLst/>
-          </a:prstGeom>
-          <a:noFill/>
-          <a:ln/>
-        </p:spPr>
-        <p:txBody>
-          <a:bodyPr wrap="square" lIns="0" tIns="0" rIns="0" bIns="0" rtlCol="0" anchor="ctr"/>
-          <a:lstStyle/>
-          <a:p>
-            <a:pPr indent="0" marL="0">
-              <a:buNone/>
-            </a:pPr>
-            <a:r>
-              <a:rPr lang="en-US" sz="1350" b="1" dirty="0">
+              <a:t>El bus interno es CAN — mapeado pin por pin</a:t>
+            </a:r>
+            <a:endParaRPr lang="en-US" sz="1050" dirty="0"/>
+          </a:p>
+        </p:txBody>
+      </p:sp>
+      <p:sp>
+        <p:nvSpPr>
+          <p:cNvPr id="13" name="Shape 11"/>
+          <p:cNvSpPr/>
+          <p:nvPr/>
+        </p:nvSpPr>
+        <p:spPr>
+          <a:xfrm>
+            <a:off x="594360" y="3063240"/>
+            <a:ext cx="3520440" cy="1097280"/>
+          </a:xfrm>
+          <a:prstGeom prst="roundRect">
+            <a:avLst>
+              <a:gd name="adj" fmla="val 7500"/>
+            </a:avLst>
+          </a:prstGeom>
+          <a:solidFill>
+            <a:srgbClr val="20242B"/>
+          </a:solidFill>
+          <a:ln/>
+          <a:effectLst>
+            <a:outerShdw sx="100000" sy="100000" kx="0" ky="0" algn="bl" rotWithShape="0" blurRad="152400" dist="38100" dir="5400000">
+              <a:srgbClr val="000000">
+                <a:alpha val="28000"/>
+              </a:srgbClr>
+            </a:outerShdw>
+          </a:effectLst>
+        </p:spPr>
+      </p:sp>
+      <p:sp>
+        <p:nvSpPr>
+          <p:cNvPr id="14" name="Text 12"/>
+          <p:cNvSpPr/>
+          <p:nvPr/>
+        </p:nvSpPr>
+        <p:spPr>
+          <a:xfrm>
+            <a:off x="868680" y="3209544"/>
+            <a:ext cx="3017520" cy="320040"/>
+          </a:xfrm>
+          <a:prstGeom prst="rect">
+            <a:avLst/>
+          </a:prstGeom>
+          <a:noFill/>
+          <a:ln/>
+        </p:spPr>
+        <p:txBody>
+          <a:bodyPr wrap="square" lIns="0" tIns="0" rIns="0" bIns="0" rtlCol="0" anchor="ctr"/>
+          <a:lstStyle/>
+          <a:p>
+            <a:pPr indent="0" marL="0">
+              <a:buNone/>
+            </a:pPr>
+            <a:r>
+              <a:rPr lang="en-US" sz="1300" b="1" dirty="0">
+                <a:solidFill>
+                  <a:srgbClr val="ECEBE6"/>
+                </a:solidFill>
+                <a:latin typeface="Cambria" pitchFamily="34" charset="0"/>
+                <a:ea typeface="Cambria" pitchFamily="34" charset="-122"/>
+                <a:cs typeface="Cambria" pitchFamily="34" charset="-120"/>
+              </a:rPr>
+              <a:t>5 Oct</a:t>
+            </a:r>
+            <a:endParaRPr lang="en-US" sz="1300" dirty="0"/>
+          </a:p>
+        </p:txBody>
+      </p:sp>
+      <p:sp>
+        <p:nvSpPr>
+          <p:cNvPr id="15" name="Text 13"/>
+          <p:cNvSpPr/>
+          <p:nvPr/>
+        </p:nvSpPr>
+        <p:spPr>
+          <a:xfrm>
+            <a:off x="868680" y="3538728"/>
+            <a:ext cx="3017520" cy="566928"/>
+          </a:xfrm>
+          <a:prstGeom prst="rect">
+            <a:avLst/>
+          </a:prstGeom>
+          <a:noFill/>
+          <a:ln/>
+        </p:spPr>
+        <p:txBody>
+          <a:bodyPr wrap="square" lIns="0" tIns="0" rIns="0" bIns="0" rtlCol="0" anchor="t"/>
+          <a:lstStyle/>
+          <a:p>
+            <a:pPr indent="0" marL="0">
+              <a:buNone/>
+            </a:pPr>
+            <a:r>
+              <a:rPr lang="en-US" sz="1050" dirty="0">
+                <a:solidFill>
+                  <a:srgbClr val="8B949E"/>
+                </a:solidFill>
+                <a:latin typeface="Calibri" pitchFamily="34" charset="0"/>
+                <a:ea typeface="Calibri" pitchFamily="34" charset="-122"/>
+                <a:cs typeface="Calibri" pitchFamily="34" charset="-120"/>
+              </a:rPr>
+              <a:t>Escucha del bus validada con instrumento propio</a:t>
+            </a:r>
+            <a:endParaRPr lang="en-US" sz="1050" dirty="0"/>
+          </a:p>
+        </p:txBody>
+      </p:sp>
+      <p:sp>
+        <p:nvSpPr>
+          <p:cNvPr id="16" name="Shape 14"/>
+          <p:cNvSpPr/>
+          <p:nvPr/>
+        </p:nvSpPr>
+        <p:spPr>
+          <a:xfrm>
+            <a:off x="4297680" y="3063240"/>
+            <a:ext cx="3520440" cy="1097280"/>
+          </a:xfrm>
+          <a:prstGeom prst="roundRect">
+            <a:avLst>
+              <a:gd name="adj" fmla="val 7500"/>
+            </a:avLst>
+          </a:prstGeom>
+          <a:solidFill>
+            <a:srgbClr val="20242B"/>
+          </a:solidFill>
+          <a:ln/>
+          <a:effectLst>
+            <a:outerShdw sx="100000" sy="100000" kx="0" ky="0" algn="bl" rotWithShape="0" blurRad="152400" dist="38100" dir="5400000">
+              <a:srgbClr val="000000">
+                <a:alpha val="28000"/>
+              </a:srgbClr>
+            </a:outerShdw>
+          </a:effectLst>
+        </p:spPr>
+      </p:sp>
+      <p:sp>
+        <p:nvSpPr>
+          <p:cNvPr id="17" name="Text 15"/>
+          <p:cNvSpPr/>
+          <p:nvPr/>
+        </p:nvSpPr>
+        <p:spPr>
+          <a:xfrm>
+            <a:off x="4572000" y="3209544"/>
+            <a:ext cx="3017520" cy="320040"/>
+          </a:xfrm>
+          <a:prstGeom prst="rect">
+            <a:avLst/>
+          </a:prstGeom>
+          <a:noFill/>
+          <a:ln/>
+        </p:spPr>
+        <p:txBody>
+          <a:bodyPr wrap="square" lIns="0" tIns="0" rIns="0" bIns="0" rtlCol="0" anchor="ctr"/>
+          <a:lstStyle/>
+          <a:p>
+            <a:pPr indent="0" marL="0">
+              <a:buNone/>
+            </a:pPr>
+            <a:r>
+              <a:rPr lang="en-US" sz="1300" b="1" dirty="0">
+                <a:solidFill>
+                  <a:srgbClr val="ECEBE6"/>
+                </a:solidFill>
+                <a:latin typeface="Cambria" pitchFamily="34" charset="0"/>
+                <a:ea typeface="Cambria" pitchFamily="34" charset="-122"/>
+                <a:cs typeface="Cambria" pitchFamily="34" charset="-120"/>
+              </a:rPr>
+              <a:t>14 Oct</a:t>
+            </a:r>
+            <a:endParaRPr lang="en-US" sz="1300" dirty="0"/>
+          </a:p>
+        </p:txBody>
+      </p:sp>
+      <p:sp>
+        <p:nvSpPr>
+          <p:cNvPr id="18" name="Text 16"/>
+          <p:cNvSpPr/>
+          <p:nvPr/>
+        </p:nvSpPr>
+        <p:spPr>
+          <a:xfrm>
+            <a:off x="4572000" y="3538728"/>
+            <a:ext cx="3017520" cy="566928"/>
+          </a:xfrm>
+          <a:prstGeom prst="rect">
+            <a:avLst/>
+          </a:prstGeom>
+          <a:noFill/>
+          <a:ln/>
+        </p:spPr>
+        <p:txBody>
+          <a:bodyPr wrap="square" lIns="0" tIns="0" rIns="0" bIns="0" rtlCol="0" anchor="t"/>
+          <a:lstStyle/>
+          <a:p>
+            <a:pPr indent="0" marL="0">
+              <a:buNone/>
+            </a:pPr>
+            <a:r>
+              <a:rPr lang="en-US" sz="1050" dirty="0">
+                <a:solidFill>
+                  <a:srgbClr val="8B949E"/>
+                </a:solidFill>
+                <a:latin typeface="Calibri" pitchFamily="34" charset="0"/>
+                <a:ea typeface="Calibri" pitchFamily="34" charset="-122"/>
+                <a:cs typeface="Calibri" pitchFamily="34" charset="-120"/>
+              </a:rPr>
+              <a:t>Transmisión al bus validada (20/20)</a:t>
+            </a:r>
+            <a:endParaRPr lang="en-US" sz="1050" dirty="0"/>
+          </a:p>
+        </p:txBody>
+      </p:sp>
+      <p:sp>
+        <p:nvSpPr>
+          <p:cNvPr id="19" name="Shape 17"/>
+          <p:cNvSpPr/>
+          <p:nvPr/>
+        </p:nvSpPr>
+        <p:spPr>
+          <a:xfrm>
+            <a:off x="8001000" y="3063240"/>
+            <a:ext cx="3520440" cy="1097280"/>
+          </a:xfrm>
+          <a:prstGeom prst="roundRect">
+            <a:avLst>
+              <a:gd name="adj" fmla="val 7500"/>
+            </a:avLst>
+          </a:prstGeom>
+          <a:solidFill>
+            <a:srgbClr val="20242B"/>
+          </a:solidFill>
+          <a:ln/>
+          <a:effectLst>
+            <a:outerShdw sx="100000" sy="100000" kx="0" ky="0" algn="bl" rotWithShape="0" blurRad="152400" dist="38100" dir="5400000">
+              <a:srgbClr val="000000">
+                <a:alpha val="28000"/>
+              </a:srgbClr>
+            </a:outerShdw>
+          </a:effectLst>
+        </p:spPr>
+      </p:sp>
+      <p:sp>
+        <p:nvSpPr>
+          <p:cNvPr id="20" name="Text 18"/>
+          <p:cNvSpPr/>
+          <p:nvPr/>
+        </p:nvSpPr>
+        <p:spPr>
+          <a:xfrm>
+            <a:off x="8275320" y="3209544"/>
+            <a:ext cx="3017520" cy="320040"/>
+          </a:xfrm>
+          <a:prstGeom prst="rect">
+            <a:avLst/>
+          </a:prstGeom>
+          <a:noFill/>
+          <a:ln/>
+        </p:spPr>
+        <p:txBody>
+          <a:bodyPr wrap="square" lIns="0" tIns="0" rIns="0" bIns="0" rtlCol="0" anchor="ctr"/>
+          <a:lstStyle/>
+          <a:p>
+            <a:pPr indent="0" marL="0">
+              <a:buNone/>
+            </a:pPr>
+            <a:r>
+              <a:rPr lang="en-US" sz="1300" b="1" dirty="0">
+                <a:solidFill>
+                  <a:srgbClr val="37C3FF"/>
+                </a:solidFill>
+                <a:latin typeface="Cambria" pitchFamily="34" charset="0"/>
+                <a:ea typeface="Cambria" pitchFamily="34" charset="-122"/>
+                <a:cs typeface="Cambria" pitchFamily="34" charset="-120"/>
+              </a:rPr>
+              <a:t>22 Oct</a:t>
+            </a:r>
+            <a:endParaRPr lang="en-US" sz="1300" dirty="0"/>
+          </a:p>
+        </p:txBody>
+      </p:sp>
+      <p:sp>
+        <p:nvSpPr>
+          <p:cNvPr id="21" name="Text 19"/>
+          <p:cNvSpPr/>
+          <p:nvPr/>
+        </p:nvSpPr>
+        <p:spPr>
+          <a:xfrm>
+            <a:off x="8275320" y="3538728"/>
+            <a:ext cx="3017520" cy="566928"/>
+          </a:xfrm>
+          <a:prstGeom prst="rect">
+            <a:avLst/>
+          </a:prstGeom>
+          <a:noFill/>
+          <a:ln/>
+        </p:spPr>
+        <p:txBody>
+          <a:bodyPr wrap="square" lIns="0" tIns="0" rIns="0" bIns="0" rtlCol="0" anchor="t"/>
+          <a:lstStyle/>
+          <a:p>
+            <a:pPr indent="0" marL="0">
+              <a:buNone/>
+            </a:pPr>
+            <a:r>
+              <a:rPr lang="en-US" sz="1050" dirty="0">
+                <a:solidFill>
+                  <a:srgbClr val="8B949E"/>
+                </a:solidFill>
+                <a:latin typeface="Calibri" pitchFamily="34" charset="0"/>
+                <a:ea typeface="Calibri" pitchFamily="34" charset="-122"/>
+                <a:cs typeface="Calibri" pitchFamily="34" charset="-120"/>
+              </a:rPr>
+              <a:t>Marcha comandable — probada: el equipo pidió el hombre-muerto</a:t>
+            </a:r>
+            <a:endParaRPr lang="en-US" sz="1050" dirty="0"/>
+          </a:p>
+        </p:txBody>
+      </p:sp>
+      <p:sp>
+        <p:nvSpPr>
+          <p:cNvPr id="22" name="Shape 20"/>
+          <p:cNvSpPr/>
+          <p:nvPr/>
+        </p:nvSpPr>
+        <p:spPr>
+          <a:xfrm>
+            <a:off x="594360" y="4297680"/>
+            <a:ext cx="3520440" cy="1097280"/>
+          </a:xfrm>
+          <a:prstGeom prst="roundRect">
+            <a:avLst>
+              <a:gd name="adj" fmla="val 7500"/>
+            </a:avLst>
+          </a:prstGeom>
+          <a:solidFill>
+            <a:srgbClr val="20242B"/>
+          </a:solidFill>
+          <a:ln/>
+          <a:effectLst>
+            <a:outerShdw sx="100000" sy="100000" kx="0" ky="0" algn="bl" rotWithShape="0" blurRad="152400" dist="38100" dir="5400000">
+              <a:srgbClr val="000000">
+                <a:alpha val="28000"/>
+              </a:srgbClr>
+            </a:outerShdw>
+          </a:effectLst>
+        </p:spPr>
+      </p:sp>
+      <p:sp>
+        <p:nvSpPr>
+          <p:cNvPr id="23" name="Text 21"/>
+          <p:cNvSpPr/>
+          <p:nvPr/>
+        </p:nvSpPr>
+        <p:spPr>
+          <a:xfrm>
+            <a:off x="868680" y="4443984"/>
+            <a:ext cx="3017520" cy="320040"/>
+          </a:xfrm>
+          <a:prstGeom prst="rect">
+            <a:avLst/>
+          </a:prstGeom>
+          <a:noFill/>
+          <a:ln/>
+        </p:spPr>
+        <p:txBody>
+          <a:bodyPr wrap="square" lIns="0" tIns="0" rIns="0" bIns="0" rtlCol="0" anchor="ctr"/>
+          <a:lstStyle/>
+          <a:p>
+            <a:pPr indent="0" marL="0">
+              <a:buNone/>
+            </a:pPr>
+            <a:r>
+              <a:rPr lang="en-US" sz="1300" b="1" dirty="0">
+                <a:solidFill>
+                  <a:srgbClr val="ECEBE6"/>
+                </a:solidFill>
+                <a:latin typeface="Cambria" pitchFamily="34" charset="0"/>
+                <a:ea typeface="Cambria" pitchFamily="34" charset="-122"/>
+                <a:cs typeface="Cambria" pitchFamily="34" charset="-120"/>
+              </a:rPr>
+              <a:t>24 Oct</a:t>
+            </a:r>
+            <a:endParaRPr lang="en-US" sz="1300" dirty="0"/>
+          </a:p>
+        </p:txBody>
+      </p:sp>
+      <p:sp>
+        <p:nvSpPr>
+          <p:cNvPr id="24" name="Text 22"/>
+          <p:cNvSpPr/>
+          <p:nvPr/>
+        </p:nvSpPr>
+        <p:spPr>
+          <a:xfrm>
+            <a:off x="868680" y="4773168"/>
+            <a:ext cx="3017520" cy="566928"/>
+          </a:xfrm>
+          <a:prstGeom prst="rect">
+            <a:avLst/>
+          </a:prstGeom>
+          <a:noFill/>
+          <a:ln/>
+        </p:spPr>
+        <p:txBody>
+          <a:bodyPr wrap="square" lIns="0" tIns="0" rIns="0" bIns="0" rtlCol="0" anchor="t"/>
+          <a:lstStyle/>
+          <a:p>
+            <a:pPr indent="0" marL="0">
+              <a:buNone/>
+            </a:pPr>
+            <a:r>
+              <a:rPr lang="en-US" sz="1050" dirty="0">
+                <a:solidFill>
+                  <a:srgbClr val="8B949E"/>
+                </a:solidFill>
+                <a:latin typeface="Calibri" pitchFamily="34" charset="0"/>
+                <a:ea typeface="Calibri" pitchFamily="34" charset="-122"/>
+                <a:cs typeface="Calibri" pitchFamily="34" charset="-120"/>
+              </a:rPr>
+              <a:t>Dirección descifrada: sensor del volante, no CAN</a:t>
+            </a:r>
+            <a:endParaRPr lang="en-US" sz="1050" dirty="0"/>
+          </a:p>
+        </p:txBody>
+      </p:sp>
+      <p:sp>
+        <p:nvSpPr>
+          <p:cNvPr id="25" name="Shape 23"/>
+          <p:cNvSpPr/>
+          <p:nvPr/>
+        </p:nvSpPr>
+        <p:spPr>
+          <a:xfrm>
+            <a:off x="4297680" y="4297680"/>
+            <a:ext cx="3520440" cy="1097280"/>
+          </a:xfrm>
+          <a:prstGeom prst="roundRect">
+            <a:avLst>
+              <a:gd name="adj" fmla="val 7500"/>
+            </a:avLst>
+          </a:prstGeom>
+          <a:solidFill>
+            <a:srgbClr val="20242B"/>
+          </a:solidFill>
+          <a:ln/>
+          <a:effectLst>
+            <a:outerShdw sx="100000" sy="100000" kx="0" ky="0" algn="bl" rotWithShape="0" blurRad="152400" dist="38100" dir="5400000">
+              <a:srgbClr val="000000">
+                <a:alpha val="28000"/>
+              </a:srgbClr>
+            </a:outerShdw>
+          </a:effectLst>
+        </p:spPr>
+      </p:sp>
+      <p:sp>
+        <p:nvSpPr>
+          <p:cNvPr id="26" name="Text 24"/>
+          <p:cNvSpPr/>
+          <p:nvPr/>
+        </p:nvSpPr>
+        <p:spPr>
+          <a:xfrm>
+            <a:off x="4572000" y="4443984"/>
+            <a:ext cx="3017520" cy="320040"/>
+          </a:xfrm>
+          <a:prstGeom prst="rect">
+            <a:avLst/>
+          </a:prstGeom>
+          <a:noFill/>
+          <a:ln/>
+        </p:spPr>
+        <p:txBody>
+          <a:bodyPr wrap="square" lIns="0" tIns="0" rIns="0" bIns="0" rtlCol="0" anchor="ctr"/>
+          <a:lstStyle/>
+          <a:p>
+            <a:pPr indent="0" marL="0">
+              <a:buNone/>
+            </a:pPr>
+            <a:r>
+              <a:rPr lang="en-US" sz="1300" b="1" dirty="0">
+                <a:solidFill>
+                  <a:srgbClr val="37C3FF"/>
+                </a:solidFill>
+                <a:latin typeface="Cambria" pitchFamily="34" charset="0"/>
+                <a:ea typeface="Cambria" pitchFamily="34" charset="-122"/>
+                <a:cs typeface="Cambria" pitchFamily="34" charset="-120"/>
+              </a:rPr>
+              <a:t>27 Oct</a:t>
+            </a:r>
+            <a:endParaRPr lang="en-US" sz="1300" dirty="0"/>
+          </a:p>
+        </p:txBody>
+      </p:sp>
+      <p:sp>
+        <p:nvSpPr>
+          <p:cNvPr id="27" name="Text 25"/>
+          <p:cNvSpPr/>
+          <p:nvPr/>
+        </p:nvSpPr>
+        <p:spPr>
+          <a:xfrm>
+            <a:off x="4572000" y="4773168"/>
+            <a:ext cx="3017520" cy="566928"/>
+          </a:xfrm>
+          <a:prstGeom prst="rect">
+            <a:avLst/>
+          </a:prstGeom>
+          <a:noFill/>
+          <a:ln/>
+        </p:spPr>
+        <p:txBody>
+          <a:bodyPr wrap="square" lIns="0" tIns="0" rIns="0" bIns="0" rtlCol="0" anchor="t"/>
+          <a:lstStyle/>
+          <a:p>
+            <a:pPr indent="0" marL="0">
+              <a:buNone/>
+            </a:pPr>
+            <a:r>
+              <a:rPr lang="en-US" sz="1050" dirty="0">
+                <a:solidFill>
+                  <a:srgbClr val="8B949E"/>
+                </a:solidFill>
+                <a:latin typeface="Calibri" pitchFamily="34" charset="0"/>
+                <a:ea typeface="Calibri" pitchFamily="34" charset="-122"/>
+                <a:cs typeface="Calibri" pitchFamily="34" charset="-120"/>
+              </a:rPr>
+              <a:t>Emulador de dirección validado en banco</a:t>
+            </a:r>
+            <a:endParaRPr lang="en-US" sz="1050" dirty="0"/>
+          </a:p>
+        </p:txBody>
+      </p:sp>
+      <p:sp>
+        <p:nvSpPr>
+          <p:cNvPr id="28" name="Shape 26"/>
+          <p:cNvSpPr/>
+          <p:nvPr/>
+        </p:nvSpPr>
+        <p:spPr>
+          <a:xfrm>
+            <a:off x="8001000" y="4297680"/>
+            <a:ext cx="3520440" cy="1097280"/>
+          </a:xfrm>
+          <a:prstGeom prst="roundRect">
+            <a:avLst>
+              <a:gd name="adj" fmla="val 7500"/>
+            </a:avLst>
+          </a:prstGeom>
+          <a:solidFill>
+            <a:srgbClr val="20242B"/>
+          </a:solidFill>
+          <a:ln/>
+          <a:effectLst>
+            <a:outerShdw sx="100000" sy="100000" kx="0" ky="0" algn="bl" rotWithShape="0" blurRad="152400" dist="38100" dir="5400000">
+              <a:srgbClr val="000000">
+                <a:alpha val="28000"/>
+              </a:srgbClr>
+            </a:outerShdw>
+          </a:effectLst>
+        </p:spPr>
+      </p:sp>
+      <p:sp>
+        <p:nvSpPr>
+          <p:cNvPr id="29" name="Text 27"/>
+          <p:cNvSpPr/>
+          <p:nvPr/>
+        </p:nvSpPr>
+        <p:spPr>
+          <a:xfrm>
+            <a:off x="8275320" y="4443984"/>
+            <a:ext cx="3017520" cy="320040"/>
+          </a:xfrm>
+          <a:prstGeom prst="rect">
+            <a:avLst/>
+          </a:prstGeom>
+          <a:noFill/>
+          <a:ln/>
+        </p:spPr>
+        <p:txBody>
+          <a:bodyPr wrap="square" lIns="0" tIns="0" rIns="0" bIns="0" rtlCol="0" anchor="ctr"/>
+          <a:lstStyle/>
+          <a:p>
+            <a:pPr indent="0" marL="0">
+              <a:buNone/>
+            </a:pPr>
+            <a:r>
+              <a:rPr lang="en-US" sz="1300" b="1" dirty="0">
                 <a:solidFill>
                   <a:srgbClr val="F5C518"/>
                 </a:solidFill>
-                <a:latin typeface="Calibri" pitchFamily="34" charset="0"/>
-                <a:ea typeface="Calibri" pitchFamily="34" charset="-122"/>
-                <a:cs typeface="Calibri" pitchFamily="34" charset="-120"/>
-              </a:rPr>
-              <a:t>El pedido: aprobar la reparación del MT 122 y dejar que Miguel actualice la lista para ordenarla.</a:t>
-            </a:r>
-            <a:endParaRPr lang="en-US" sz="1350" dirty="0"/>
+                <a:latin typeface="Cambria" pitchFamily="34" charset="0"/>
+                <a:ea typeface="Cambria" pitchFamily="34" charset="-122"/>
+                <a:cs typeface="Cambria" pitchFamily="34" charset="-120"/>
+              </a:rPr>
+              <a:t>Hoy</a:t>
+            </a:r>
+            <a:endParaRPr lang="en-US" sz="1300" dirty="0"/>
+          </a:p>
+        </p:txBody>
+      </p:sp>
+      <p:sp>
+        <p:nvSpPr>
+          <p:cNvPr id="30" name="Text 28"/>
+          <p:cNvSpPr/>
+          <p:nvPr/>
+        </p:nvSpPr>
+        <p:spPr>
+          <a:xfrm>
+            <a:off x="8275320" y="4773168"/>
+            <a:ext cx="3017520" cy="566928"/>
+          </a:xfrm>
+          <a:prstGeom prst="rect">
+            <a:avLst/>
+          </a:prstGeom>
+          <a:noFill/>
+          <a:ln/>
+        </p:spPr>
+        <p:txBody>
+          <a:bodyPr wrap="square" lIns="0" tIns="0" rIns="0" bIns="0" rtlCol="0" anchor="t"/>
+          <a:lstStyle/>
+          <a:p>
+            <a:pPr indent="0" marL="0">
+              <a:buNone/>
+            </a:pPr>
+            <a:r>
+              <a:rPr lang="en-US" sz="1050" dirty="0">
+                <a:solidFill>
+                  <a:srgbClr val="8B949E"/>
+                </a:solidFill>
+                <a:latin typeface="Calibri" pitchFamily="34" charset="0"/>
+                <a:ea typeface="Calibri" pitchFamily="34" charset="-122"/>
+                <a:cs typeface="Calibri" pitchFamily="34" charset="-120"/>
+              </a:rPr>
+              <a:t>2/3 del teleop · el freno es de hardware (equipo), no de ingeniería</a:t>
+            </a:r>
+            <a:endParaRPr lang="en-US" sz="1050" dirty="0"/>
           </a:p>
         </p:txBody>
       </p:sp>
@@ -4251,7 +7367,7 @@
               <a:buNone/>
             </a:pPr>
             <a:r>
-              <a:rPr lang="en-US" sz="3400" b="1" dirty="0">
+              <a:rPr lang="en-US" sz="3300" b="1" dirty="0">
                 <a:solidFill>
                   <a:srgbClr val="1A1D23"/>
                 </a:solidFill>
@@ -4259,9 +7375,9 @@
                 <a:ea typeface="Cambria" pitchFamily="34" charset="-122"/>
                 <a:cs typeface="Cambria" pitchFamily="34" charset="-120"/>
               </a:rPr>
-              <a:t>El MT 122 reparado paga dos veces</a:t>
-            </a:r>
-            <a:endParaRPr lang="en-US" sz="3400" dirty="0"/>
+              <a:t>Por qué estoy parado — y no es el software</a:t>
+            </a:r>
+            <a:endParaRPr lang="en-US" sz="3300" dirty="0"/>
           </a:p>
         </p:txBody>
       </p:sp>
@@ -4273,7 +7389,7 @@
         </p:nvSpPr>
         <p:spPr>
           <a:xfrm>
-            <a:off x="594360" y="1133856"/>
+            <a:off x="594360" y="1115568"/>
             <a:ext cx="10972800" cy="365760"/>
           </a:xfrm>
           <a:prstGeom prst="rect">
@@ -4298,7 +7414,7 @@
                 <a:ea typeface="Calibri" pitchFamily="34" charset="-122"/>
                 <a:cs typeface="Calibri" pitchFamily="34" charset="-120"/>
               </a:rPr>
-              <a:t>Un solo gasto de reparación, dos retornos</a:t>
+              <a:t>El código está. Lo que falta es una máquina que encienda</a:t>
             </a:r>
             <a:endParaRPr lang="en-US" sz="1350" dirty="0"/>
           </a:p>
@@ -4313,11 +7429,11 @@
         <p:spPr>
           <a:xfrm>
             <a:off x="594360" y="1920240"/>
-            <a:ext cx="5349240" cy="2377440"/>
+            <a:ext cx="10972800" cy="1051560"/>
           </a:xfrm>
           <a:prstGeom prst="roundRect">
             <a:avLst>
-              <a:gd name="adj" fmla="val 3462"/>
+              <a:gd name="adj" fmla="val 7826"/>
             </a:avLst>
           </a:prstGeom>
           <a:solidFill>
@@ -4342,13 +7458,13 @@
         <p:spPr>
           <a:xfrm>
             <a:off x="594360" y="1920240"/>
-            <a:ext cx="5349240" cy="109728"/>
+            <a:ext cx="82296" cy="1051560"/>
           </a:xfrm>
           <a:prstGeom prst="rect">
             <a:avLst/>
           </a:prstGeom>
           <a:solidFill>
-            <a:srgbClr val="39D98A"/>
+            <a:srgbClr val="FF5A52"/>
           </a:solidFill>
           <a:ln/>
         </p:spPr>
@@ -4361,34 +7477,34 @@
         </p:nvSpPr>
         <p:spPr>
           <a:xfrm>
-            <a:off x="960120" y="2286000"/>
-            <a:ext cx="4663440" cy="502920"/>
-          </a:xfrm>
-          <a:prstGeom prst="rect">
-            <a:avLst/>
-          </a:prstGeom>
-          <a:noFill/>
-          <a:ln/>
-        </p:spPr>
-        <p:txBody>
-          <a:bodyPr wrap="square" lIns="0" tIns="0" rIns="0" bIns="0" rtlCol="0" anchor="ctr"/>
-          <a:lstStyle/>
-          <a:p>
-            <a:pPr indent="0" marL="0">
-              <a:buNone/>
-            </a:pPr>
-            <a:r>
-              <a:rPr lang="en-US" sz="2000" b="1" dirty="0">
+            <a:off x="914400" y="2084832"/>
+            <a:ext cx="10241280" cy="457200"/>
+          </a:xfrm>
+          <a:prstGeom prst="rect">
+            <a:avLst/>
+          </a:prstGeom>
+          <a:noFill/>
+          <a:ln/>
+        </p:spPr>
+        <p:txBody>
+          <a:bodyPr wrap="square" lIns="0" tIns="0" rIns="0" bIns="0" rtlCol="0" anchor="ctr"/>
+          <a:lstStyle/>
+          <a:p>
+            <a:pPr indent="0" marL="0">
+              <a:buNone/>
+            </a:pPr>
+            <a:r>
+              <a:rPr lang="en-US" sz="1550" b="1" dirty="0">
                 <a:solidFill>
                   <a:srgbClr val="1A1D23"/>
                 </a:solidFill>
-                <a:latin typeface="Cambria" pitchFamily="34" charset="0"/>
-                <a:ea typeface="Cambria" pitchFamily="34" charset="-122"/>
-                <a:cs typeface="Cambria" pitchFamily="34" charset="-120"/>
-              </a:rPr>
-              <a:t>Vuelve a renta</a:t>
-            </a:r>
-            <a:endParaRPr lang="en-US" sz="2000" dirty="0"/>
+                <a:latin typeface="Calibri" pitchFamily="34" charset="0"/>
+                <a:ea typeface="Calibri" pitchFamily="34" charset="-122"/>
+                <a:cs typeface="Calibri" pitchFamily="34" charset="-120"/>
+              </a:rPr>
+              <a:t>Al equipo de prueba le quitaron la llanta de dirección</a:t>
+            </a:r>
+            <a:endParaRPr lang="en-US" sz="1550" dirty="0"/>
           </a:p>
         </p:txBody>
       </p:sp>
@@ -4400,24 +7516,24 @@
         </p:nvSpPr>
         <p:spPr>
           <a:xfrm>
-            <a:off x="960120" y="2926080"/>
-            <a:ext cx="4663440" cy="1188720"/>
-          </a:xfrm>
-          <a:prstGeom prst="rect">
-            <a:avLst/>
-          </a:prstGeom>
-          <a:noFill/>
-          <a:ln/>
-        </p:spPr>
-        <p:txBody>
-          <a:bodyPr wrap="square" lIns="0" tIns="0" rIns="0" bIns="0" rtlCol="0" anchor="t"/>
-          <a:lstStyle/>
-          <a:p>
-            <a:pPr indent="0" marL="0">
-              <a:buNone/>
-            </a:pPr>
-            <a:r>
-              <a:rPr lang="en-US" sz="1350" dirty="0">
+            <a:off x="914400" y="2542032"/>
+            <a:ext cx="10241280" cy="365760"/>
+          </a:xfrm>
+          <a:prstGeom prst="rect">
+            <a:avLst/>
+          </a:prstGeom>
+          <a:noFill/>
+          <a:ln/>
+        </p:spPr>
+        <p:txBody>
+          <a:bodyPr wrap="square" lIns="0" tIns="0" rIns="0" bIns="0" rtlCol="0" anchor="ctr"/>
+          <a:lstStyle/>
+          <a:p>
+            <a:pPr indent="0" marL="0">
+              <a:buNone/>
+            </a:pPr>
+            <a:r>
+              <a:rPr lang="en-US" sz="1200" dirty="0">
                 <a:solidFill>
                   <a:srgbClr val="5B6470"/>
                 </a:solidFill>
@@ -4425,9 +7541,9 @@
                 <a:ea typeface="Calibri" pitchFamily="34" charset="-122"/>
                 <a:cs typeface="Calibri" pitchFamily="34" charset="-120"/>
               </a:rPr>
-              <a:t>Reparado, regresa a la flota y genera ingreso de renta — en vez de $0 detenido ocupando espacio.</a:t>
-            </a:r>
-            <a:endParaRPr lang="en-US" sz="1350" dirty="0"/>
+              <a:t>Sin ella no hay cómo ver el timón girar, que es la prueba que vine a hacer.</a:t>
+            </a:r>
+            <a:endParaRPr lang="en-US" sz="1200" dirty="0"/>
           </a:p>
         </p:txBody>
       </p:sp>
@@ -4439,12 +7555,12 @@
         </p:nvSpPr>
         <p:spPr>
           <a:xfrm>
-            <a:off x="6217920" y="1920240"/>
-            <a:ext cx="5349240" cy="2377440"/>
+            <a:off x="594360" y="3154680"/>
+            <a:ext cx="10972800" cy="1051560"/>
           </a:xfrm>
           <a:prstGeom prst="roundRect">
             <a:avLst>
-              <a:gd name="adj" fmla="val 3462"/>
+              <a:gd name="adj" fmla="val 7826"/>
             </a:avLst>
           </a:prstGeom>
           <a:solidFill>
@@ -4468,14 +7584,14 @@
         </p:nvSpPr>
         <p:spPr>
           <a:xfrm>
-            <a:off x="6217920" y="1920240"/>
-            <a:ext cx="5349240" cy="109728"/>
+            <a:off x="594360" y="3154680"/>
+            <a:ext cx="82296" cy="1051560"/>
           </a:xfrm>
           <a:prstGeom prst="rect">
             <a:avLst/>
           </a:prstGeom>
           <a:solidFill>
-            <a:srgbClr val="37C3FF"/>
+            <a:srgbClr val="FF5A52"/>
           </a:solidFill>
           <a:ln/>
         </p:spPr>
@@ -4488,34 +7604,34 @@
         </p:nvSpPr>
         <p:spPr>
           <a:xfrm>
-            <a:off x="6583680" y="2286000"/>
-            <a:ext cx="4663440" cy="502920"/>
-          </a:xfrm>
-          <a:prstGeom prst="rect">
-            <a:avLst/>
-          </a:prstGeom>
-          <a:noFill/>
-          <a:ln/>
-        </p:spPr>
-        <p:txBody>
-          <a:bodyPr wrap="square" lIns="0" tIns="0" rIns="0" bIns="0" rtlCol="0" anchor="ctr"/>
-          <a:lstStyle/>
-          <a:p>
-            <a:pPr indent="0" marL="0">
-              <a:buNone/>
-            </a:pPr>
-            <a:r>
-              <a:rPr lang="en-US" sz="2000" b="1" dirty="0">
+            <a:off x="914400" y="3319272"/>
+            <a:ext cx="10241280" cy="457200"/>
+          </a:xfrm>
+          <a:prstGeom prst="rect">
+            <a:avLst/>
+          </a:prstGeom>
+          <a:noFill/>
+          <a:ln/>
+        </p:spPr>
+        <p:txBody>
+          <a:bodyPr wrap="square" lIns="0" tIns="0" rIns="0" bIns="0" rtlCol="0" anchor="ctr"/>
+          <a:lstStyle/>
+          <a:p>
+            <a:pPr indent="0" marL="0">
+              <a:buNone/>
+            </a:pPr>
+            <a:r>
+              <a:rPr lang="en-US" sz="1550" b="1" dirty="0">
                 <a:solidFill>
                   <a:srgbClr val="1A1D23"/>
                 </a:solidFill>
-                <a:latin typeface="Cambria" pitchFamily="34" charset="0"/>
-                <a:ea typeface="Cambria" pitchFamily="34" charset="-122"/>
-                <a:cs typeface="Cambria" pitchFamily="34" charset="-120"/>
-              </a:rPr>
-              <a:t>Plataforma de TaTa</a:t>
-            </a:r>
-            <a:endParaRPr lang="en-US" sz="2000" dirty="0"/>
+                <a:latin typeface="Calibri" pitchFamily="34" charset="0"/>
+                <a:ea typeface="Calibri" pitchFamily="34" charset="-122"/>
+                <a:cs typeface="Calibri" pitchFamily="34" charset="-120"/>
+              </a:rPr>
+              <a:t>El pedal de hombre-muerto se lo pusieron a otro equipo</a:t>
+            </a:r>
+            <a:endParaRPr lang="en-US" sz="1550" dirty="0"/>
           </a:p>
         </p:txBody>
       </p:sp>
@@ -4527,24 +7643,24 @@
         </p:nvSpPr>
         <p:spPr>
           <a:xfrm>
-            <a:off x="6583680" y="2926080"/>
-            <a:ext cx="4663440" cy="1188720"/>
-          </a:xfrm>
-          <a:prstGeom prst="rect">
-            <a:avLst/>
-          </a:prstGeom>
-          <a:noFill/>
-          <a:ln/>
-        </p:spPr>
-        <p:txBody>
-          <a:bodyPr wrap="square" lIns="0" tIns="0" rIns="0" bIns="0" rtlCol="0" anchor="t"/>
-          <a:lstStyle/>
-          <a:p>
-            <a:pPr indent="0" marL="0">
-              <a:buNone/>
-            </a:pPr>
-            <a:r>
-              <a:rPr lang="en-US" sz="1350" dirty="0">
+            <a:off x="914400" y="3776472"/>
+            <a:ext cx="10241280" cy="365760"/>
+          </a:xfrm>
+          <a:prstGeom prst="rect">
+            <a:avLst/>
+          </a:prstGeom>
+          <a:noFill/>
+          <a:ln/>
+        </p:spPr>
+        <p:txBody>
+          <a:bodyPr wrap="square" lIns="0" tIns="0" rIns="0" bIns="0" rtlCol="0" anchor="ctr"/>
+          <a:lstStyle/>
+          <a:p>
+            <a:pPr indent="0" marL="0">
+              <a:buNone/>
+            </a:pPr>
+            <a:r>
+              <a:rPr lang="en-US" sz="1200" dirty="0">
                 <a:solidFill>
                   <a:srgbClr val="5B6470"/>
                 </a:solidFill>
@@ -4552,9 +7668,9 @@
                 <a:ea typeface="Calibri" pitchFamily="34" charset="-122"/>
                 <a:cs typeface="Calibri" pitchFamily="34" charset="-120"/>
               </a:rPr>
-              <a:t>Es el equipo dedicado donde el proyecto avanza, sin tener que sacar de rotación un montacargas que sí está rentando.</a:t>
-            </a:r>
-            <a:endParaRPr lang="en-US" sz="1350" dirty="0"/>
+              <a:t>Era la pieza que faltaba para cerrar el teleop. Me lo iban a traer y se reasignó.</a:t>
+            </a:r>
+            <a:endParaRPr lang="en-US" sz="1200" dirty="0"/>
           </a:p>
         </p:txBody>
       </p:sp>
@@ -4620,7 +7736,7 @@
                 <a:ea typeface="Calibri" pitchFamily="34" charset="-122"/>
                 <a:cs typeface="Calibri" pitchFamily="34" charset="-120"/>
               </a:rPr>
-              <a:t>La misma reparación sirve a la flota y al proyecto. No es un gasto del proyecto: es un activo de Montasa que vuelve a producir.</a:t>
+              <a:t>El avance ya no depende de más tiempo en la computadora. Depende de un montacargas funcional dedicado al proyecto.</a:t>
             </a:r>
             <a:endParaRPr lang="en-US" sz="1500" dirty="0"/>
           </a:p>
@@ -4683,7 +7799,7 @@
               <a:buNone/>
             </a:pPr>
             <a:r>
-              <a:rPr lang="en-US" sz="3400" b="1" dirty="0">
+              <a:rPr lang="en-US" sz="3300" b="1" dirty="0">
                 <a:solidFill>
                   <a:srgbClr val="ECEBE6"/>
                 </a:solidFill>
@@ -4691,9 +7807,9 @@
                 <a:ea typeface="Cambria" pitchFamily="34" charset="-122"/>
                 <a:cs typeface="Cambria" pitchFamily="34" charset="-120"/>
               </a:rPr>
-              <a:t>El camino que sigue, por etapas</a:t>
-            </a:r>
-            <a:endParaRPr lang="en-US" sz="3400" dirty="0"/>
+              <a:t>Reparar el MT 122</a:t>
+            </a:r>
+            <a:endParaRPr lang="en-US" sz="3300" dirty="0"/>
           </a:p>
         </p:txBody>
       </p:sp>
@@ -4705,7 +7821,7 @@
         </p:nvSpPr>
         <p:spPr>
           <a:xfrm>
-            <a:off x="594360" y="1133856"/>
+            <a:off x="594360" y="1115568"/>
             <a:ext cx="10972800" cy="365760"/>
           </a:xfrm>
           <a:prstGeom prst="rect">
@@ -4730,7 +7846,7 @@
                 <a:ea typeface="Calibri" pitchFamily="34" charset="-122"/>
                 <a:cs typeface="Calibri" pitchFamily="34" charset="-120"/>
               </a:rPr>
-              <a:t>Empezamos con lo que el equipo ya trae. El sensor caro se suma sólo si hace falta</a:t>
+              <a:t>Hoy está detenido y se usa como banco de repuestos</a:t>
             </a:r>
             <a:endParaRPr lang="en-US" sz="1350" dirty="0"/>
           </a:p>
@@ -4745,11 +7861,11 @@
         <p:spPr>
           <a:xfrm>
             <a:off x="594360" y="1828800"/>
-            <a:ext cx="10972800" cy="1188720"/>
+            <a:ext cx="10972800" cy="1371600"/>
           </a:xfrm>
           <a:prstGeom prst="roundRect">
             <a:avLst>
-              <a:gd name="adj" fmla="val 6923"/>
+              <a:gd name="adj" fmla="val 6000"/>
             </a:avLst>
           </a:prstGeom>
           <a:solidFill>
@@ -4767,89 +7883,30 @@
       </p:sp>
       <p:sp>
         <p:nvSpPr>
-          <p:cNvPr id="5" name="Shape 3"/>
-          <p:cNvSpPr/>
-          <p:nvPr/>
-        </p:nvSpPr>
-        <p:spPr>
-          <a:xfrm>
-            <a:off x="914400" y="2231136"/>
-            <a:ext cx="384048" cy="384048"/>
-          </a:xfrm>
-          <a:prstGeom prst="ellipse">
-            <a:avLst/>
-          </a:prstGeom>
-          <a:solidFill>
-            <a:srgbClr val="37C3FF"/>
-          </a:solidFill>
-          <a:ln/>
-        </p:spPr>
-      </p:sp>
-      <p:sp>
-        <p:nvSpPr>
-          <p:cNvPr id="6" name="Text 4"/>
-          <p:cNvSpPr/>
-          <p:nvPr/>
-        </p:nvSpPr>
-        <p:spPr>
-          <a:xfrm>
-            <a:off x="914400" y="2231136"/>
-            <a:ext cx="384048" cy="384048"/>
-          </a:xfrm>
-          <a:prstGeom prst="rect">
-            <a:avLst/>
-          </a:prstGeom>
-          <a:noFill/>
-          <a:ln/>
-        </p:spPr>
-        <p:txBody>
-          <a:bodyPr wrap="square" lIns="0" tIns="0" rIns="0" bIns="0" rtlCol="0" anchor="ctr"/>
-          <a:lstStyle/>
-          <a:p>
-            <a:pPr algn="ctr" indent="0" marL="0">
-              <a:buNone/>
-            </a:pPr>
-            <a:r>
-              <a:rPr lang="en-US" sz="1500" b="1" dirty="0">
-                <a:solidFill>
-                  <a:srgbClr val="14171C"/>
-                </a:solidFill>
-                <a:latin typeface="Calibri" pitchFamily="34" charset="0"/>
-                <a:ea typeface="Calibri" pitchFamily="34" charset="-122"/>
-                <a:cs typeface="Calibri" pitchFamily="34" charset="-120"/>
-              </a:rPr>
-              <a:t>1</a:t>
-            </a:r>
-            <a:endParaRPr lang="en-US" sz="1500" dirty="0"/>
-          </a:p>
-        </p:txBody>
-      </p:sp>
-      <p:sp>
-        <p:nvSpPr>
-          <p:cNvPr id="7" name="Text 5"/>
-          <p:cNvSpPr/>
-          <p:nvPr/>
-        </p:nvSpPr>
-        <p:spPr>
-          <a:xfrm>
-            <a:off x="1508760" y="2084832"/>
-            <a:ext cx="3017520" cy="457200"/>
-          </a:xfrm>
-          <a:prstGeom prst="rect">
-            <a:avLst/>
-          </a:prstGeom>
-          <a:noFill/>
-          <a:ln/>
-        </p:spPr>
-        <p:txBody>
-          <a:bodyPr wrap="square" lIns="0" tIns="0" rIns="0" bIns="0" rtlCol="0" anchor="ctr"/>
-          <a:lstStyle/>
-          <a:p>
-            <a:pPr indent="0" marL="0">
-              <a:buNone/>
-            </a:pPr>
-            <a:r>
-              <a:rPr lang="en-US" sz="1700" b="1" dirty="0">
+          <p:cNvPr id="5" name="Text 3"/>
+          <p:cNvSpPr/>
+          <p:nvPr/>
+        </p:nvSpPr>
+        <p:spPr>
+          <a:xfrm>
+            <a:off x="960120" y="1965960"/>
+            <a:ext cx="10241280" cy="457200"/>
+          </a:xfrm>
+          <a:prstGeom prst="rect">
+            <a:avLst/>
+          </a:prstGeom>
+          <a:noFill/>
+          <a:ln/>
+        </p:spPr>
+        <p:txBody>
+          <a:bodyPr wrap="square" lIns="0" tIns="0" rIns="0" bIns="0" rtlCol="0" anchor="ctr"/>
+          <a:lstStyle/>
+          <a:p>
+            <a:pPr indent="0" marL="0">
+              <a:buNone/>
+            </a:pPr>
+            <a:r>
+              <a:rPr lang="en-US" sz="1600" b="1" i="1" dirty="0">
                 <a:solidFill>
                   <a:srgbClr val="ECEBE6"/>
                 </a:solidFill>
@@ -4857,31 +7914,31 @@
                 <a:ea typeface="Cambria" pitchFamily="34" charset="-122"/>
                 <a:cs typeface="Cambria" pitchFamily="34" charset="-120"/>
               </a:rPr>
-              <a:t>Odometría</a:t>
-            </a:r>
-            <a:endParaRPr lang="en-US" sz="1700" dirty="0"/>
-          </a:p>
-        </p:txBody>
-      </p:sp>
-      <p:sp>
-        <p:nvSpPr>
-          <p:cNvPr id="8" name="Text 6"/>
-          <p:cNvSpPr/>
-          <p:nvPr/>
-        </p:nvSpPr>
-        <p:spPr>
-          <a:xfrm>
-            <a:off x="4572000" y="2011680"/>
-            <a:ext cx="6766560" cy="914400"/>
-          </a:xfrm>
-          <a:prstGeom prst="rect">
-            <a:avLst/>
-          </a:prstGeom>
-          <a:noFill/>
-          <a:ln/>
-        </p:spPr>
-        <p:txBody>
-          <a:bodyPr wrap="square" lIns="0" tIns="0" rIns="0" bIns="0" rtlCol="0" anchor="ctr"/>
+              <a:t>“Ya agarramos ese equipo como banco de repuestos.”</a:t>
+            </a:r>
+            <a:endParaRPr lang="en-US" sz="1600" dirty="0"/>
+          </a:p>
+        </p:txBody>
+      </p:sp>
+      <p:sp>
+        <p:nvSpPr>
+          <p:cNvPr id="6" name="Text 4"/>
+          <p:cNvSpPr/>
+          <p:nvPr/>
+        </p:nvSpPr>
+        <p:spPr>
+          <a:xfrm>
+            <a:off x="960120" y="2487168"/>
+            <a:ext cx="10241280" cy="640080"/>
+          </a:xfrm>
+          <a:prstGeom prst="rect">
+            <a:avLst/>
+          </a:prstGeom>
+          <a:noFill/>
+          <a:ln/>
+        </p:spPr>
+        <p:txBody>
+          <a:bodyPr wrap="square" lIns="0" tIns="0" rIns="0" bIns="0" rtlCol="0" anchor="t"/>
           <a:lstStyle/>
           <a:p>
             <a:pPr indent="0" marL="0">
@@ -4896,7 +7953,7 @@
                 <a:ea typeface="Calibri" pitchFamily="34" charset="-122"/>
                 <a:cs typeface="Calibri" pitchFamily="34" charset="-120"/>
               </a:rPr>
-              <a:t>Leer velocidad y ángulo del propio bus del equipo — los sensores ya están adentro. Da una posición estimada por “cuánto me moví”.</a:t>
+              <a:t>— Miguel.  Un equipo dañado no es un cajón de piezas: es un activo detenido. Cada pieza que se le saca lo aleja de volver a generar renta, y encarece repararlo después.</a:t>
             </a:r>
             <a:endParaRPr lang="en-US" sz="1250" dirty="0"/>
           </a:p>
@@ -4904,18 +7961,18 @@
       </p:sp>
       <p:sp>
         <p:nvSpPr>
-          <p:cNvPr id="9" name="Shape 7"/>
-          <p:cNvSpPr/>
-          <p:nvPr/>
-        </p:nvSpPr>
-        <p:spPr>
-          <a:xfrm>
-            <a:off x="594360" y="3200400"/>
-            <a:ext cx="10972800" cy="1188720"/>
+          <p:cNvPr id="7" name="Shape 5"/>
+          <p:cNvSpPr/>
+          <p:nvPr/>
+        </p:nvSpPr>
+        <p:spPr>
+          <a:xfrm>
+            <a:off x="594360" y="3520440"/>
+            <a:ext cx="5349240" cy="1783080"/>
           </a:xfrm>
           <a:prstGeom prst="roundRect">
             <a:avLst>
-              <a:gd name="adj" fmla="val 6923"/>
+              <a:gd name="adj" fmla="val 4615"/>
             </a:avLst>
           </a:prstGeom>
           <a:solidFill>
@@ -4933,128 +7990,69 @@
       </p:sp>
       <p:sp>
         <p:nvSpPr>
-          <p:cNvPr id="10" name="Shape 8"/>
-          <p:cNvSpPr/>
-          <p:nvPr/>
-        </p:nvSpPr>
-        <p:spPr>
-          <a:xfrm>
-            <a:off x="914400" y="3602736"/>
-            <a:ext cx="384048" cy="384048"/>
-          </a:xfrm>
-          <a:prstGeom prst="ellipse">
-            <a:avLst/>
-          </a:prstGeom>
-          <a:solidFill>
-            <a:srgbClr val="F5C518"/>
-          </a:solidFill>
-          <a:ln/>
-        </p:spPr>
-      </p:sp>
-      <p:sp>
-        <p:nvSpPr>
-          <p:cNvPr id="11" name="Text 9"/>
-          <p:cNvSpPr/>
-          <p:nvPr/>
-        </p:nvSpPr>
-        <p:spPr>
-          <a:xfrm>
-            <a:off x="914400" y="3602736"/>
-            <a:ext cx="384048" cy="384048"/>
-          </a:xfrm>
-          <a:prstGeom prst="rect">
-            <a:avLst/>
-          </a:prstGeom>
-          <a:noFill/>
-          <a:ln/>
-        </p:spPr>
-        <p:txBody>
-          <a:bodyPr wrap="square" lIns="0" tIns="0" rIns="0" bIns="0" rtlCol="0" anchor="ctr"/>
-          <a:lstStyle/>
-          <a:p>
-            <a:pPr algn="ctr" indent="0" marL="0">
+          <p:cNvPr id="8" name="Text 6"/>
+          <p:cNvSpPr/>
+          <p:nvPr/>
+        </p:nvSpPr>
+        <p:spPr>
+          <a:xfrm>
+            <a:off x="914400" y="3749040"/>
+            <a:ext cx="4754880" cy="457200"/>
+          </a:xfrm>
+          <a:prstGeom prst="rect">
+            <a:avLst/>
+          </a:prstGeom>
+          <a:noFill/>
+          <a:ln/>
+        </p:spPr>
+        <p:txBody>
+          <a:bodyPr wrap="square" lIns="0" tIns="0" rIns="0" bIns="0" rtlCol="0" anchor="ctr"/>
+          <a:lstStyle/>
+          <a:p>
+            <a:pPr indent="0" marL="0">
               <a:buNone/>
             </a:pPr>
             <a:r>
               <a:rPr lang="en-US" sz="1500" b="1" dirty="0">
                 <a:solidFill>
-                  <a:srgbClr val="14171C"/>
-                </a:solidFill>
-                <a:latin typeface="Calibri" pitchFamily="34" charset="0"/>
-                <a:ea typeface="Calibri" pitchFamily="34" charset="-122"/>
-                <a:cs typeface="Calibri" pitchFamily="34" charset="-120"/>
-              </a:rPr>
-              <a:t>2</a:t>
-            </a:r>
-            <a:endParaRPr lang="en-US" sz="1500" dirty="0"/>
-          </a:p>
-        </p:txBody>
-      </p:sp>
-      <p:sp>
-        <p:nvSpPr>
-          <p:cNvPr id="12" name="Text 10"/>
-          <p:cNvSpPr/>
-          <p:nvPr/>
-        </p:nvSpPr>
-        <p:spPr>
-          <a:xfrm>
-            <a:off x="1508760" y="3456432"/>
-            <a:ext cx="3017520" cy="457200"/>
-          </a:xfrm>
-          <a:prstGeom prst="rect">
-            <a:avLst/>
-          </a:prstGeom>
-          <a:noFill/>
-          <a:ln/>
-        </p:spPr>
-        <p:txBody>
-          <a:bodyPr wrap="square" lIns="0" tIns="0" rIns="0" bIns="0" rtlCol="0" anchor="ctr"/>
-          <a:lstStyle/>
-          <a:p>
-            <a:pPr indent="0" marL="0">
-              <a:buNone/>
-            </a:pPr>
-            <a:r>
-              <a:rPr lang="en-US" sz="1700" b="1" dirty="0">
-                <a:solidFill>
-                  <a:srgbClr val="ECEBE6"/>
+                  <a:srgbClr val="37C3FF"/>
                 </a:solidFill>
                 <a:latin typeface="Cambria" pitchFamily="34" charset="0"/>
                 <a:ea typeface="Cambria" pitchFamily="34" charset="-122"/>
                 <a:cs typeface="Cambria" pitchFamily="34" charset="-120"/>
               </a:rPr>
-              <a:t>Cámara + ArUco</a:t>
-            </a:r>
-            <a:endParaRPr lang="en-US" sz="1700" dirty="0"/>
-          </a:p>
-        </p:txBody>
-      </p:sp>
-      <p:sp>
-        <p:nvSpPr>
-          <p:cNvPr id="13" name="Text 11"/>
-          <p:cNvSpPr/>
-          <p:nvPr/>
-        </p:nvSpPr>
-        <p:spPr>
-          <a:xfrm>
-            <a:off x="4572000" y="3383280"/>
-            <a:ext cx="6766560" cy="914400"/>
-          </a:xfrm>
-          <a:prstGeom prst="rect">
-            <a:avLst/>
-          </a:prstGeom>
-          <a:noFill/>
-          <a:ln/>
-        </p:spPr>
-        <p:txBody>
-          <a:bodyPr wrap="square" lIns="0" tIns="0" rIns="0" bIns="0" rtlCol="0" anchor="ctr"/>
-          <a:lstStyle/>
-          <a:p>
-            <a:pPr indent="0" marL="0">
-              <a:buNone/>
-            </a:pPr>
-            <a:r>
-              <a:rPr lang="en-US" sz="1250" dirty="0">
+              <a:t>El costo real de canibalizar</a:t>
+            </a:r>
+            <a:endParaRPr lang="en-US" sz="1500" dirty="0"/>
+          </a:p>
+        </p:txBody>
+      </p:sp>
+      <p:sp>
+        <p:nvSpPr>
+          <p:cNvPr id="9" name="Text 7"/>
+          <p:cNvSpPr/>
+          <p:nvPr/>
+        </p:nvSpPr>
+        <p:spPr>
+          <a:xfrm>
+            <a:off x="914400" y="4270248"/>
+            <a:ext cx="4754880" cy="914400"/>
+          </a:xfrm>
+          <a:prstGeom prst="rect">
+            <a:avLst/>
+          </a:prstGeom>
+          <a:noFill/>
+          <a:ln/>
+        </p:spPr>
+        <p:txBody>
+          <a:bodyPr wrap="square" lIns="0" tIns="0" rIns="0" bIns="0" rtlCol="0" anchor="t"/>
+          <a:lstStyle/>
+          <a:p>
+            <a:pPr indent="0" marL="0">
+              <a:buNone/>
+            </a:pPr>
+            <a:r>
+              <a:rPr lang="en-US" sz="1200" dirty="0">
                 <a:solidFill>
                   <a:srgbClr val="8B949E"/>
                 </a:solidFill>
@@ -5062,26 +8060,26 @@
                 <a:ea typeface="Calibri" pitchFamily="34" charset="-122"/>
                 <a:cs typeface="Calibri" pitchFamily="34" charset="-120"/>
               </a:rPr>
-              <a:t>Cámaras que leen marcas en los racks y corrigen la deriva de la odometría. Es el posicionamiento principal.</a:t>
-            </a:r>
-            <a:endParaRPr lang="en-US" sz="1250" dirty="0"/>
-          </a:p>
-        </p:txBody>
-      </p:sp>
-      <p:sp>
-        <p:nvSpPr>
-          <p:cNvPr id="14" name="Shape 12"/>
-          <p:cNvSpPr/>
-          <p:nvPr/>
-        </p:nvSpPr>
-        <p:spPr>
-          <a:xfrm>
-            <a:off x="594360" y="4572000"/>
-            <a:ext cx="10972800" cy="1188720"/>
+              <a:t>Cada repuesto que sale del MT 122 es una pieza que luego hay que comprar dos veces: para el equipo que la recibe hoy, y para el MT 122 cuando se quiera revivir.</a:t>
+            </a:r>
+            <a:endParaRPr lang="en-US" sz="1200" dirty="0"/>
+          </a:p>
+        </p:txBody>
+      </p:sp>
+      <p:sp>
+        <p:nvSpPr>
+          <p:cNvPr id="10" name="Shape 8"/>
+          <p:cNvSpPr/>
+          <p:nvPr/>
+        </p:nvSpPr>
+        <p:spPr>
+          <a:xfrm>
+            <a:off x="6217920" y="3520440"/>
+            <a:ext cx="5349240" cy="1783080"/>
           </a:xfrm>
           <a:prstGeom prst="roundRect">
             <a:avLst>
-              <a:gd name="adj" fmla="val 6923"/>
+              <a:gd name="adj" fmla="val 4615"/>
             </a:avLst>
           </a:prstGeom>
           <a:solidFill>
@@ -5099,128 +8097,69 @@
       </p:sp>
       <p:sp>
         <p:nvSpPr>
-          <p:cNvPr id="15" name="Shape 13"/>
-          <p:cNvSpPr/>
-          <p:nvPr/>
-        </p:nvSpPr>
-        <p:spPr>
-          <a:xfrm>
-            <a:off x="914400" y="4974336"/>
-            <a:ext cx="384048" cy="384048"/>
-          </a:xfrm>
-          <a:prstGeom prst="ellipse">
-            <a:avLst/>
-          </a:prstGeom>
-          <a:solidFill>
-            <a:srgbClr val="8B949E"/>
-          </a:solidFill>
-          <a:ln/>
-        </p:spPr>
-      </p:sp>
-      <p:sp>
-        <p:nvSpPr>
-          <p:cNvPr id="16" name="Text 14"/>
-          <p:cNvSpPr/>
-          <p:nvPr/>
-        </p:nvSpPr>
-        <p:spPr>
-          <a:xfrm>
-            <a:off x="914400" y="4974336"/>
-            <a:ext cx="384048" cy="384048"/>
-          </a:xfrm>
-          <a:prstGeom prst="rect">
-            <a:avLst/>
-          </a:prstGeom>
-          <a:noFill/>
-          <a:ln/>
-        </p:spPr>
-        <p:txBody>
-          <a:bodyPr wrap="square" lIns="0" tIns="0" rIns="0" bIns="0" rtlCol="0" anchor="ctr"/>
-          <a:lstStyle/>
-          <a:p>
-            <a:pPr algn="ctr" indent="0" marL="0">
+          <p:cNvPr id="11" name="Text 9"/>
+          <p:cNvSpPr/>
+          <p:nvPr/>
+        </p:nvSpPr>
+        <p:spPr>
+          <a:xfrm>
+            <a:off x="6537960" y="3749040"/>
+            <a:ext cx="4754880" cy="457200"/>
+          </a:xfrm>
+          <a:prstGeom prst="rect">
+            <a:avLst/>
+          </a:prstGeom>
+          <a:noFill/>
+          <a:ln/>
+        </p:spPr>
+        <p:txBody>
+          <a:bodyPr wrap="square" lIns="0" tIns="0" rIns="0" bIns="0" rtlCol="0" anchor="ctr"/>
+          <a:lstStyle/>
+          <a:p>
+            <a:pPr indent="0" marL="0">
               <a:buNone/>
             </a:pPr>
             <a:r>
               <a:rPr lang="en-US" sz="1500" b="1" dirty="0">
                 <a:solidFill>
-                  <a:srgbClr val="14171C"/>
-                </a:solidFill>
-                <a:latin typeface="Calibri" pitchFamily="34" charset="0"/>
-                <a:ea typeface="Calibri" pitchFamily="34" charset="-122"/>
-                <a:cs typeface="Calibri" pitchFamily="34" charset="-120"/>
-              </a:rPr>
-              <a:t>3</a:t>
-            </a:r>
-            <a:endParaRPr lang="en-US" sz="1500" dirty="0"/>
-          </a:p>
-        </p:txBody>
-      </p:sp>
-      <p:sp>
-        <p:nvSpPr>
-          <p:cNvPr id="17" name="Text 15"/>
-          <p:cNvSpPr/>
-          <p:nvPr/>
-        </p:nvSpPr>
-        <p:spPr>
-          <a:xfrm>
-            <a:off x="1508760" y="4828032"/>
-            <a:ext cx="3017520" cy="457200"/>
-          </a:xfrm>
-          <a:prstGeom prst="rect">
-            <a:avLst/>
-          </a:prstGeom>
-          <a:noFill/>
-          <a:ln/>
-        </p:spPr>
-        <p:txBody>
-          <a:bodyPr wrap="square" lIns="0" tIns="0" rIns="0" bIns="0" rtlCol="0" anchor="ctr"/>
-          <a:lstStyle/>
-          <a:p>
-            <a:pPr indent="0" marL="0">
-              <a:buNone/>
-            </a:pPr>
-            <a:r>
-              <a:rPr lang="en-US" sz="1700" b="1" dirty="0">
-                <a:solidFill>
-                  <a:srgbClr val="ECEBE6"/>
+                  <a:srgbClr val="37C3FF"/>
                 </a:solidFill>
                 <a:latin typeface="Cambria" pitchFamily="34" charset="0"/>
                 <a:ea typeface="Cambria" pitchFamily="34" charset="-122"/>
                 <a:cs typeface="Cambria" pitchFamily="34" charset="-120"/>
               </a:rPr>
-              <a:t>LiDAR (después)</a:t>
-            </a:r>
-            <a:endParaRPr lang="en-US" sz="1700" dirty="0"/>
-          </a:p>
-        </p:txBody>
-      </p:sp>
-      <p:sp>
-        <p:nvSpPr>
-          <p:cNvPr id="18" name="Text 16"/>
-          <p:cNvSpPr/>
-          <p:nvPr/>
-        </p:nvSpPr>
-        <p:spPr>
-          <a:xfrm>
-            <a:off x="4572000" y="4754880"/>
-            <a:ext cx="6766560" cy="914400"/>
-          </a:xfrm>
-          <a:prstGeom prst="rect">
-            <a:avLst/>
-          </a:prstGeom>
-          <a:noFill/>
-          <a:ln/>
-        </p:spPr>
-        <p:txBody>
-          <a:bodyPr wrap="square" lIns="0" tIns="0" rIns="0" bIns="0" rtlCol="0" anchor="ctr"/>
-          <a:lstStyle/>
-          <a:p>
-            <a:pPr indent="0" marL="0">
-              <a:buNone/>
-            </a:pPr>
-            <a:r>
-              <a:rPr lang="en-US" sz="1250" dirty="0">
+              <a:t>La lista ya debería existir</a:t>
+            </a:r>
+            <a:endParaRPr lang="en-US" sz="1500" dirty="0"/>
+          </a:p>
+        </p:txBody>
+      </p:sp>
+      <p:sp>
+        <p:nvSpPr>
+          <p:cNvPr id="12" name="Text 10"/>
+          <p:cNvSpPr/>
+          <p:nvPr/>
+        </p:nvSpPr>
+        <p:spPr>
+          <a:xfrm>
+            <a:off x="6537960" y="4270248"/>
+            <a:ext cx="4754880" cy="914400"/>
+          </a:xfrm>
+          <a:prstGeom prst="rect">
+            <a:avLst/>
+          </a:prstGeom>
+          <a:noFill/>
+          <a:ln/>
+        </p:spPr>
+        <p:txBody>
+          <a:bodyPr wrap="square" lIns="0" tIns="0" rIns="0" bIns="0" rtlCol="0" anchor="t"/>
+          <a:lstStyle/>
+          <a:p>
+            <a:pPr indent="0" marL="0">
+              <a:buNone/>
+            </a:pPr>
+            <a:r>
+              <a:rPr lang="en-US" sz="1200" dirty="0">
                 <a:solidFill>
                   <a:srgbClr val="8B949E"/>
                 </a:solidFill>
@@ -5228,9 +8167,48 @@
                 <a:ea typeface="Calibri" pitchFamily="34" charset="-122"/>
                 <a:cs typeface="Calibri" pitchFamily="34" charset="-120"/>
               </a:rPr>
-              <a:t>Mapeo en vivo del pasillo. Es expansión futura, no requisito para arrancar. Se agrega cuando el proyecto lo justifique.</a:t>
-            </a:r>
-            <a:endParaRPr lang="en-US" sz="1250" dirty="0"/>
+              <a:t>Miguel dice que vos ya deberías tener la lista de lo necesario para repararlo. Se actualiza, se cotiza y se pide.</a:t>
+            </a:r>
+            <a:endParaRPr lang="en-US" sz="1200" dirty="0"/>
+          </a:p>
+        </p:txBody>
+      </p:sp>
+      <p:sp>
+        <p:nvSpPr>
+          <p:cNvPr id="13" name="Text 11"/>
+          <p:cNvSpPr/>
+          <p:nvPr/>
+        </p:nvSpPr>
+        <p:spPr>
+          <a:xfrm>
+            <a:off x="594360" y="5577840"/>
+            <a:ext cx="10972800" cy="457200"/>
+          </a:xfrm>
+          <a:prstGeom prst="rect">
+            <a:avLst/>
+          </a:prstGeom>
+          <a:noFill/>
+          <a:ln/>
+        </p:spPr>
+        <p:txBody>
+          <a:bodyPr wrap="square" lIns="0" tIns="0" rIns="0" bIns="0" rtlCol="0" anchor="ctr"/>
+          <a:lstStyle/>
+          <a:p>
+            <a:pPr indent="0" marL="0">
+              <a:buNone/>
+            </a:pPr>
+            <a:r>
+              <a:rPr lang="en-US" sz="1350" b="1" dirty="0">
+                <a:solidFill>
+                  <a:srgbClr val="F5C518"/>
+                </a:solidFill>
+                <a:latin typeface="Calibri" pitchFamily="34" charset="0"/>
+                <a:ea typeface="Calibri" pitchFamily="34" charset="-122"/>
+                <a:cs typeface="Calibri" pitchFamily="34" charset="-120"/>
+              </a:rPr>
+              <a:t>El pedido: aprobar la reparación del MT 122 y dejar que Miguel actualice la lista para ordenarla.</a:t>
+            </a:r>
+            <a:endParaRPr lang="en-US" sz="1350" dirty="0"/>
           </a:p>
         </p:txBody>
       </p:sp>
@@ -5291,7 +8269,7 @@
               <a:buNone/>
             </a:pPr>
             <a:r>
-              <a:rPr lang="en-US" sz="3400" b="1" dirty="0">
+              <a:rPr lang="en-US" sz="3300" b="1" dirty="0">
                 <a:solidFill>
                   <a:srgbClr val="1A1D23"/>
                 </a:solidFill>
@@ -5299,9 +8277,9 @@
                 <a:ea typeface="Cambria" pitchFamily="34" charset="-122"/>
                 <a:cs typeface="Cambria" pitchFamily="34" charset="-120"/>
               </a:rPr>
-              <a:t>Pedido 2 · Bajar el presupuesto de cómputo</a:t>
-            </a:r>
-            <a:endParaRPr lang="en-US" sz="3400" dirty="0"/>
+              <a:t>El MT 122 reparado paga dos veces</a:t>
+            </a:r>
+            <a:endParaRPr lang="en-US" sz="3300" dirty="0"/>
           </a:p>
         </p:txBody>
       </p:sp>
@@ -5313,7 +8291,7 @@
         </p:nvSpPr>
         <p:spPr>
           <a:xfrm>
-            <a:off x="594360" y="1133856"/>
+            <a:off x="594360" y="1115568"/>
             <a:ext cx="10972800" cy="365760"/>
           </a:xfrm>
           <a:prstGeom prst="rect">
@@ -5338,7 +8316,7 @@
                 <a:ea typeface="Calibri" pitchFamily="34" charset="-122"/>
                 <a:cs typeface="Calibri" pitchFamily="34" charset="-120"/>
               </a:rPr>
-              <a:t>De $1,400 a $500 — porque con sólo cámaras no hace falta el equipo grande</a:t>
+              <a:t>Un solo gasto de reparación, dos retornos</a:t>
             </a:r>
             <a:endParaRPr lang="en-US" sz="1350" dirty="0"/>
           </a:p>
@@ -5353,568 +8331,11 @@
         <p:spPr>
           <a:xfrm>
             <a:off x="594360" y="1920240"/>
-            <a:ext cx="10972800" cy="457200"/>
-          </a:xfrm>
-          <a:prstGeom prst="rect">
-            <a:avLst/>
-          </a:prstGeom>
-          <a:solidFill>
-            <a:srgbClr val="E7E9EC"/>
-          </a:solidFill>
-          <a:ln w="7620">
-            <a:solidFill>
-              <a:srgbClr val="D8DADE"/>
-            </a:solidFill>
-            <a:prstDash val="solid"/>
-          </a:ln>
-        </p:spPr>
-      </p:sp>
-      <p:sp>
-        <p:nvSpPr>
-          <p:cNvPr id="5" name="Text 3"/>
-          <p:cNvSpPr/>
-          <p:nvPr/>
-        </p:nvSpPr>
-        <p:spPr>
-          <a:xfrm>
-            <a:off x="722376" y="1920240"/>
-            <a:ext cx="3401568" cy="457200"/>
-          </a:xfrm>
-          <a:prstGeom prst="rect">
-            <a:avLst/>
-          </a:prstGeom>
-          <a:noFill/>
-          <a:ln/>
-        </p:spPr>
-        <p:txBody>
-          <a:bodyPr wrap="square" lIns="0" tIns="0" rIns="0" bIns="0" rtlCol="0" anchor="ctr"/>
-          <a:lstStyle/>
-          <a:p>
-            <a:pPr algn="l" indent="0" marL="0">
-              <a:buNone/>
-            </a:pPr>
-            <a:endParaRPr lang="en-US" sz="1000" dirty="0"/>
-          </a:p>
-        </p:txBody>
-      </p:sp>
-      <p:sp>
-        <p:nvSpPr>
-          <p:cNvPr id="6" name="Text 4"/>
-          <p:cNvSpPr/>
-          <p:nvPr/>
-        </p:nvSpPr>
-        <p:spPr>
-          <a:xfrm>
-            <a:off x="4379976" y="1920240"/>
-            <a:ext cx="3401568" cy="457200"/>
-          </a:xfrm>
-          <a:prstGeom prst="rect">
-            <a:avLst/>
-          </a:prstGeom>
-          <a:noFill/>
-          <a:ln/>
-        </p:spPr>
-        <p:txBody>
-          <a:bodyPr wrap="square" lIns="0" tIns="0" rIns="0" bIns="0" rtlCol="0" anchor="ctr"/>
-          <a:lstStyle/>
-          <a:p>
-            <a:pPr algn="l" indent="0" marL="0">
-              <a:buNone/>
-            </a:pPr>
-            <a:r>
-              <a:rPr lang="en-US" sz="1000" b="1" dirty="0">
-                <a:solidFill>
-                  <a:srgbClr val="5B6470"/>
-                </a:solidFill>
-                <a:latin typeface="Calibri" pitchFamily="34" charset="0"/>
-                <a:ea typeface="Calibri" pitchFamily="34" charset="-122"/>
-                <a:cs typeface="Calibri" pitchFamily="34" charset="-120"/>
-              </a:rPr>
-              <a:t>ANTES</a:t>
-            </a:r>
-            <a:endParaRPr lang="en-US" sz="1000" dirty="0"/>
-          </a:p>
-        </p:txBody>
-      </p:sp>
-      <p:sp>
-        <p:nvSpPr>
-          <p:cNvPr id="7" name="Text 5"/>
-          <p:cNvSpPr/>
-          <p:nvPr/>
-        </p:nvSpPr>
-        <p:spPr>
-          <a:xfrm>
-            <a:off x="8037576" y="1920240"/>
-            <a:ext cx="3401568" cy="457200"/>
-          </a:xfrm>
-          <a:prstGeom prst="rect">
-            <a:avLst/>
-          </a:prstGeom>
-          <a:noFill/>
-          <a:ln/>
-        </p:spPr>
-        <p:txBody>
-          <a:bodyPr wrap="square" lIns="0" tIns="0" rIns="0" bIns="0" rtlCol="0" anchor="ctr"/>
-          <a:lstStyle/>
-          <a:p>
-            <a:pPr algn="l" indent="0" marL="0">
-              <a:buNone/>
-            </a:pPr>
-            <a:r>
-              <a:rPr lang="en-US" sz="1000" b="1" dirty="0">
-                <a:solidFill>
-                  <a:srgbClr val="5B6470"/>
-                </a:solidFill>
-                <a:latin typeface="Calibri" pitchFamily="34" charset="0"/>
-                <a:ea typeface="Calibri" pitchFamily="34" charset="-122"/>
-                <a:cs typeface="Calibri" pitchFamily="34" charset="-120"/>
-              </a:rPr>
-              <a:t>AHORA</a:t>
-            </a:r>
-            <a:endParaRPr lang="en-US" sz="1000" dirty="0"/>
-          </a:p>
-        </p:txBody>
-      </p:sp>
-      <p:sp>
-        <p:nvSpPr>
-          <p:cNvPr id="8" name="Shape 6"/>
-          <p:cNvSpPr/>
-          <p:nvPr/>
-        </p:nvSpPr>
-        <p:spPr>
-          <a:xfrm>
-            <a:off x="594360" y="2377440"/>
-            <a:ext cx="10972800" cy="548640"/>
-          </a:xfrm>
-          <a:prstGeom prst="rect">
-            <a:avLst/>
-          </a:prstGeom>
-          <a:solidFill>
-            <a:srgbClr val="FFFFFF"/>
-          </a:solidFill>
-          <a:ln w="7620">
-            <a:solidFill>
-              <a:srgbClr val="D8DADE"/>
-            </a:solidFill>
-            <a:prstDash val="solid"/>
-          </a:ln>
-        </p:spPr>
-      </p:sp>
-      <p:sp>
-        <p:nvSpPr>
-          <p:cNvPr id="9" name="Text 7"/>
-          <p:cNvSpPr/>
-          <p:nvPr/>
-        </p:nvSpPr>
-        <p:spPr>
-          <a:xfrm>
-            <a:off x="722376" y="2377440"/>
-            <a:ext cx="3401568" cy="548640"/>
-          </a:xfrm>
-          <a:prstGeom prst="rect">
-            <a:avLst/>
-          </a:prstGeom>
-          <a:noFill/>
-          <a:ln/>
-        </p:spPr>
-        <p:txBody>
-          <a:bodyPr wrap="square" lIns="0" tIns="0" rIns="0" bIns="0" rtlCol="0" anchor="ctr"/>
-          <a:lstStyle/>
-          <a:p>
-            <a:pPr algn="l" indent="0" marL="0">
-              <a:buNone/>
-            </a:pPr>
-            <a:r>
-              <a:rPr lang="en-US" sz="1100" b="1" dirty="0">
-                <a:solidFill>
-                  <a:srgbClr val="1A1D23"/>
-                </a:solidFill>
-                <a:latin typeface="Calibri" pitchFamily="34" charset="0"/>
-                <a:ea typeface="Calibri" pitchFamily="34" charset="-122"/>
-                <a:cs typeface="Calibri" pitchFamily="34" charset="-120"/>
-              </a:rPr>
-              <a:t>Sensor</a:t>
-            </a:r>
-            <a:endParaRPr lang="en-US" sz="1100" dirty="0"/>
-          </a:p>
-        </p:txBody>
-      </p:sp>
-      <p:sp>
-        <p:nvSpPr>
-          <p:cNvPr id="10" name="Text 8"/>
-          <p:cNvSpPr/>
-          <p:nvPr/>
-        </p:nvSpPr>
-        <p:spPr>
-          <a:xfrm>
-            <a:off x="4379976" y="2377440"/>
-            <a:ext cx="3401568" cy="548640"/>
-          </a:xfrm>
-          <a:prstGeom prst="rect">
-            <a:avLst/>
-          </a:prstGeom>
-          <a:noFill/>
-          <a:ln/>
-        </p:spPr>
-        <p:txBody>
-          <a:bodyPr wrap="square" lIns="0" tIns="0" rIns="0" bIns="0" rtlCol="0" anchor="ctr"/>
-          <a:lstStyle/>
-          <a:p>
-            <a:pPr algn="l" indent="0" marL="0">
-              <a:buNone/>
-            </a:pPr>
-            <a:r>
-              <a:rPr lang="en-US" sz="1100" dirty="0">
-                <a:solidFill>
-                  <a:srgbClr val="1A1D23"/>
-                </a:solidFill>
-                <a:latin typeface="Calibri" pitchFamily="34" charset="0"/>
-                <a:ea typeface="Calibri" pitchFamily="34" charset="-122"/>
-                <a:cs typeface="Calibri" pitchFamily="34" charset="-120"/>
-              </a:rPr>
-              <a:t>LiDAR 3D (Unitree L2)</a:t>
-            </a:r>
-            <a:endParaRPr lang="en-US" sz="1100" dirty="0"/>
-          </a:p>
-        </p:txBody>
-      </p:sp>
-      <p:sp>
-        <p:nvSpPr>
-          <p:cNvPr id="11" name="Text 9"/>
-          <p:cNvSpPr/>
-          <p:nvPr/>
-        </p:nvSpPr>
-        <p:spPr>
-          <a:xfrm>
-            <a:off x="8037576" y="2377440"/>
-            <a:ext cx="3401568" cy="548640"/>
-          </a:xfrm>
-          <a:prstGeom prst="rect">
-            <a:avLst/>
-          </a:prstGeom>
-          <a:noFill/>
-          <a:ln/>
-        </p:spPr>
-        <p:txBody>
-          <a:bodyPr wrap="square" lIns="0" tIns="0" rIns="0" bIns="0" rtlCol="0" anchor="ctr"/>
-          <a:lstStyle/>
-          <a:p>
-            <a:pPr algn="l" indent="0" marL="0">
-              <a:buNone/>
-            </a:pPr>
-            <a:r>
-              <a:rPr lang="en-US" sz="1100" b="1" dirty="0">
-                <a:solidFill>
-                  <a:srgbClr val="1A1D23"/>
-                </a:solidFill>
-                <a:latin typeface="Calibri" pitchFamily="34" charset="0"/>
-                <a:ea typeface="Calibri" pitchFamily="34" charset="-122"/>
-                <a:cs typeface="Calibri" pitchFamily="34" charset="-120"/>
-              </a:rPr>
-              <a:t>2 cámaras USB</a:t>
-            </a:r>
-            <a:endParaRPr lang="en-US" sz="1100" dirty="0"/>
-          </a:p>
-        </p:txBody>
-      </p:sp>
-      <p:sp>
-        <p:nvSpPr>
-          <p:cNvPr id="12" name="Shape 10"/>
-          <p:cNvSpPr/>
-          <p:nvPr/>
-        </p:nvSpPr>
-        <p:spPr>
-          <a:xfrm>
-            <a:off x="594360" y="2926080"/>
-            <a:ext cx="10972800" cy="548640"/>
-          </a:xfrm>
-          <a:prstGeom prst="rect">
-            <a:avLst/>
-          </a:prstGeom>
-          <a:solidFill>
-            <a:srgbClr val="FFFFFF"/>
-          </a:solidFill>
-          <a:ln w="7620">
-            <a:solidFill>
-              <a:srgbClr val="D8DADE"/>
-            </a:solidFill>
-            <a:prstDash val="solid"/>
-          </a:ln>
-        </p:spPr>
-      </p:sp>
-      <p:sp>
-        <p:nvSpPr>
-          <p:cNvPr id="13" name="Text 11"/>
-          <p:cNvSpPr/>
-          <p:nvPr/>
-        </p:nvSpPr>
-        <p:spPr>
-          <a:xfrm>
-            <a:off x="722376" y="2926080"/>
-            <a:ext cx="3401568" cy="548640"/>
-          </a:xfrm>
-          <a:prstGeom prst="rect">
-            <a:avLst/>
-          </a:prstGeom>
-          <a:noFill/>
-          <a:ln/>
-        </p:spPr>
-        <p:txBody>
-          <a:bodyPr wrap="square" lIns="0" tIns="0" rIns="0" bIns="0" rtlCol="0" anchor="ctr"/>
-          <a:lstStyle/>
-          <a:p>
-            <a:pPr algn="l" indent="0" marL="0">
-              <a:buNone/>
-            </a:pPr>
-            <a:r>
-              <a:rPr lang="en-US" sz="1100" b="1" dirty="0">
-                <a:solidFill>
-                  <a:srgbClr val="1A1D23"/>
-                </a:solidFill>
-                <a:latin typeface="Calibri" pitchFamily="34" charset="0"/>
-                <a:ea typeface="Calibri" pitchFamily="34" charset="-122"/>
-                <a:cs typeface="Calibri" pitchFamily="34" charset="-120"/>
-              </a:rPr>
-              <a:t>Cómputo</a:t>
-            </a:r>
-            <a:endParaRPr lang="en-US" sz="1100" dirty="0"/>
-          </a:p>
-        </p:txBody>
-      </p:sp>
-      <p:sp>
-        <p:nvSpPr>
-          <p:cNvPr id="14" name="Text 12"/>
-          <p:cNvSpPr/>
-          <p:nvPr/>
-        </p:nvSpPr>
-        <p:spPr>
-          <a:xfrm>
-            <a:off x="4379976" y="2926080"/>
-            <a:ext cx="3401568" cy="548640"/>
-          </a:xfrm>
-          <a:prstGeom prst="rect">
-            <a:avLst/>
-          </a:prstGeom>
-          <a:noFill/>
-          <a:ln/>
-        </p:spPr>
-        <p:txBody>
-          <a:bodyPr wrap="square" lIns="0" tIns="0" rIns="0" bIns="0" rtlCol="0" anchor="ctr"/>
-          <a:lstStyle/>
-          <a:p>
-            <a:pPr algn="l" indent="0" marL="0">
-              <a:buNone/>
-            </a:pPr>
-            <a:r>
-              <a:rPr lang="en-US" sz="1100" dirty="0">
-                <a:solidFill>
-                  <a:srgbClr val="1A1D23"/>
-                </a:solidFill>
-                <a:latin typeface="Calibri" pitchFamily="34" charset="0"/>
-                <a:ea typeface="Calibri" pitchFamily="34" charset="-122"/>
-                <a:cs typeface="Calibri" pitchFamily="34" charset="-120"/>
-              </a:rPr>
-              <a:t>Jetson Orin NX · 16 GB</a:t>
-            </a:r>
-            <a:endParaRPr lang="en-US" sz="1100" dirty="0"/>
-          </a:p>
-        </p:txBody>
-      </p:sp>
-      <p:sp>
-        <p:nvSpPr>
-          <p:cNvPr id="15" name="Text 13"/>
-          <p:cNvSpPr/>
-          <p:nvPr/>
-        </p:nvSpPr>
-        <p:spPr>
-          <a:xfrm>
-            <a:off x="8037576" y="2926080"/>
-            <a:ext cx="3401568" cy="548640"/>
-          </a:xfrm>
-          <a:prstGeom prst="rect">
-            <a:avLst/>
-          </a:prstGeom>
-          <a:noFill/>
-          <a:ln/>
-        </p:spPr>
-        <p:txBody>
-          <a:bodyPr wrap="square" lIns="0" tIns="0" rIns="0" bIns="0" rtlCol="0" anchor="ctr"/>
-          <a:lstStyle/>
-          <a:p>
-            <a:pPr algn="l" indent="0" marL="0">
-              <a:buNone/>
-            </a:pPr>
-            <a:r>
-              <a:rPr lang="en-US" sz="1100" b="1" dirty="0">
-                <a:solidFill>
-                  <a:srgbClr val="1A1D23"/>
-                </a:solidFill>
-                <a:latin typeface="Calibri" pitchFamily="34" charset="0"/>
-                <a:ea typeface="Calibri" pitchFamily="34" charset="-122"/>
-                <a:cs typeface="Calibri" pitchFamily="34" charset="-120"/>
-              </a:rPr>
-              <a:t>Jetson · 8 GB</a:t>
-            </a:r>
-            <a:endParaRPr lang="en-US" sz="1100" dirty="0"/>
-          </a:p>
-        </p:txBody>
-      </p:sp>
-      <p:sp>
-        <p:nvSpPr>
-          <p:cNvPr id="16" name="Shape 14"/>
-          <p:cNvSpPr/>
-          <p:nvPr/>
-        </p:nvSpPr>
-        <p:spPr>
-          <a:xfrm>
-            <a:off x="594360" y="3474720"/>
-            <a:ext cx="10972800" cy="548640"/>
-          </a:xfrm>
-          <a:prstGeom prst="rect">
-            <a:avLst/>
-          </a:prstGeom>
-          <a:solidFill>
-            <a:srgbClr val="FFFFFF"/>
-          </a:solidFill>
-          <a:ln w="7620">
-            <a:solidFill>
-              <a:srgbClr val="D8DADE"/>
-            </a:solidFill>
-            <a:prstDash val="solid"/>
-          </a:ln>
-        </p:spPr>
-      </p:sp>
-      <p:sp>
-        <p:nvSpPr>
-          <p:cNvPr id="17" name="Text 15"/>
-          <p:cNvSpPr/>
-          <p:nvPr/>
-        </p:nvSpPr>
-        <p:spPr>
-          <a:xfrm>
-            <a:off x="722376" y="3474720"/>
-            <a:ext cx="3401568" cy="548640"/>
-          </a:xfrm>
-          <a:prstGeom prst="rect">
-            <a:avLst/>
-          </a:prstGeom>
-          <a:noFill/>
-          <a:ln/>
-        </p:spPr>
-        <p:txBody>
-          <a:bodyPr wrap="square" lIns="0" tIns="0" rIns="0" bIns="0" rtlCol="0" anchor="ctr"/>
-          <a:lstStyle/>
-          <a:p>
-            <a:pPr algn="l" indent="0" marL="0">
-              <a:buNone/>
-            </a:pPr>
-            <a:r>
-              <a:rPr lang="en-US" sz="1100" b="1" dirty="0">
-                <a:solidFill>
-                  <a:srgbClr val="1A1D23"/>
-                </a:solidFill>
-                <a:latin typeface="Calibri" pitchFamily="34" charset="0"/>
-                <a:ea typeface="Calibri" pitchFamily="34" charset="-122"/>
-                <a:cs typeface="Calibri" pitchFamily="34" charset="-120"/>
-              </a:rPr>
-              <a:t>Costo del paquete</a:t>
-            </a:r>
-            <a:endParaRPr lang="en-US" sz="1100" dirty="0"/>
-          </a:p>
-        </p:txBody>
-      </p:sp>
-      <p:sp>
-        <p:nvSpPr>
-          <p:cNvPr id="18" name="Text 16"/>
-          <p:cNvSpPr/>
-          <p:nvPr/>
-        </p:nvSpPr>
-        <p:spPr>
-          <a:xfrm>
-            <a:off x="4379976" y="3474720"/>
-            <a:ext cx="3401568" cy="548640"/>
-          </a:xfrm>
-          <a:prstGeom prst="rect">
-            <a:avLst/>
-          </a:prstGeom>
-          <a:noFill/>
-          <a:ln/>
-        </p:spPr>
-        <p:txBody>
-          <a:bodyPr wrap="square" lIns="0" tIns="0" rIns="0" bIns="0" rtlCol="0" anchor="ctr"/>
-          <a:lstStyle/>
-          <a:p>
-            <a:pPr algn="l" indent="0" marL="0">
-              <a:buNone/>
-            </a:pPr>
-            <a:r>
-              <a:rPr lang="en-US" sz="1100" b="1" dirty="0">
-                <a:solidFill>
-                  <a:srgbClr val="5B6470"/>
-                </a:solidFill>
-                <a:latin typeface="Calibri" pitchFamily="34" charset="0"/>
-                <a:ea typeface="Calibri" pitchFamily="34" charset="-122"/>
-                <a:cs typeface="Calibri" pitchFamily="34" charset="-120"/>
-              </a:rPr>
-              <a:t>$1,400</a:t>
-            </a:r>
-            <a:endParaRPr lang="en-US" sz="1100" dirty="0"/>
-          </a:p>
-        </p:txBody>
-      </p:sp>
-      <p:sp>
-        <p:nvSpPr>
-          <p:cNvPr id="19" name="Text 17"/>
-          <p:cNvSpPr/>
-          <p:nvPr/>
-        </p:nvSpPr>
-        <p:spPr>
-          <a:xfrm>
-            <a:off x="8037576" y="3474720"/>
-            <a:ext cx="3401568" cy="548640"/>
-          </a:xfrm>
-          <a:prstGeom prst="rect">
-            <a:avLst/>
-          </a:prstGeom>
-          <a:noFill/>
-          <a:ln/>
-        </p:spPr>
-        <p:txBody>
-          <a:bodyPr wrap="square" lIns="0" tIns="0" rIns="0" bIns="0" rtlCol="0" anchor="ctr"/>
-          <a:lstStyle/>
-          <a:p>
-            <a:pPr algn="l" indent="0" marL="0">
-              <a:buNone/>
-            </a:pPr>
-            <a:r>
-              <a:rPr lang="en-US" sz="1100" b="1" dirty="0">
-                <a:solidFill>
-                  <a:srgbClr val="39D98A"/>
-                </a:solidFill>
-                <a:latin typeface="Calibri" pitchFamily="34" charset="0"/>
-                <a:ea typeface="Calibri" pitchFamily="34" charset="-122"/>
-                <a:cs typeface="Calibri" pitchFamily="34" charset="-120"/>
-              </a:rPr>
-              <a:t>$500</a:t>
-            </a:r>
-            <a:endParaRPr lang="en-US" sz="1100" dirty="0"/>
-          </a:p>
-        </p:txBody>
-      </p:sp>
-      <p:sp>
-        <p:nvSpPr>
-          <p:cNvPr id="20" name="Shape 18"/>
-          <p:cNvSpPr/>
-          <p:nvPr/>
-        </p:nvSpPr>
-        <p:spPr>
-          <a:xfrm>
-            <a:off x="594360" y="4343400"/>
-            <a:ext cx="5349240" cy="1005840"/>
+            <a:ext cx="5349240" cy="2377440"/>
           </a:xfrm>
           <a:prstGeom prst="roundRect">
             <a:avLst>
-              <a:gd name="adj" fmla="val 8182"/>
+              <a:gd name="adj" fmla="val 3462"/>
             </a:avLst>
           </a:prstGeom>
           <a:solidFill>
@@ -5932,69 +8353,89 @@
       </p:sp>
       <p:sp>
         <p:nvSpPr>
-          <p:cNvPr id="21" name="Text 19"/>
-          <p:cNvSpPr/>
-          <p:nvPr/>
-        </p:nvSpPr>
-        <p:spPr>
-          <a:xfrm>
-            <a:off x="914400" y="4526280"/>
-            <a:ext cx="4572000" cy="658368"/>
-          </a:xfrm>
-          <a:prstGeom prst="rect">
-            <a:avLst/>
-          </a:prstGeom>
-          <a:noFill/>
-          <a:ln/>
-        </p:spPr>
-        <p:txBody>
-          <a:bodyPr wrap="square" lIns="0" tIns="0" rIns="0" bIns="0" rtlCol="0" anchor="ctr"/>
-          <a:lstStyle/>
-          <a:p>
-            <a:pPr algn="l" indent="0" marL="0">
-              <a:buNone/>
-            </a:pPr>
-            <a:r>
-              <a:rPr lang="en-US" sz="3800" b="1" dirty="0">
-                <a:solidFill>
-                  <a:srgbClr val="39D98A"/>
+          <p:cNvPr id="5" name="Shape 3"/>
+          <p:cNvSpPr/>
+          <p:nvPr/>
+        </p:nvSpPr>
+        <p:spPr>
+          <a:xfrm>
+            <a:off x="594360" y="1920240"/>
+            <a:ext cx="5349240" cy="109728"/>
+          </a:xfrm>
+          <a:prstGeom prst="rect">
+            <a:avLst/>
+          </a:prstGeom>
+          <a:solidFill>
+            <a:srgbClr val="39D98A"/>
+          </a:solidFill>
+          <a:ln/>
+        </p:spPr>
+      </p:sp>
+      <p:sp>
+        <p:nvSpPr>
+          <p:cNvPr id="6" name="Text 4"/>
+          <p:cNvSpPr/>
+          <p:nvPr/>
+        </p:nvSpPr>
+        <p:spPr>
+          <a:xfrm>
+            <a:off x="960120" y="2286000"/>
+            <a:ext cx="4663440" cy="502920"/>
+          </a:xfrm>
+          <a:prstGeom prst="rect">
+            <a:avLst/>
+          </a:prstGeom>
+          <a:noFill/>
+          <a:ln/>
+        </p:spPr>
+        <p:txBody>
+          <a:bodyPr wrap="square" lIns="0" tIns="0" rIns="0" bIns="0" rtlCol="0" anchor="ctr"/>
+          <a:lstStyle/>
+          <a:p>
+            <a:pPr indent="0" marL="0">
+              <a:buNone/>
+            </a:pPr>
+            <a:r>
+              <a:rPr lang="en-US" sz="2000" b="1" dirty="0">
+                <a:solidFill>
+                  <a:srgbClr val="1A1D23"/>
                 </a:solidFill>
                 <a:latin typeface="Cambria" pitchFamily="34" charset="0"/>
                 <a:ea typeface="Cambria" pitchFamily="34" charset="-122"/>
                 <a:cs typeface="Cambria" pitchFamily="34" charset="-120"/>
               </a:rPr>
-              <a:t>− $900</a:t>
-            </a:r>
-            <a:endParaRPr lang="en-US" sz="3800" dirty="0"/>
-          </a:p>
-        </p:txBody>
-      </p:sp>
-      <p:sp>
-        <p:nvSpPr>
-          <p:cNvPr id="22" name="Text 20"/>
-          <p:cNvSpPr/>
-          <p:nvPr/>
-        </p:nvSpPr>
-        <p:spPr>
-          <a:xfrm>
-            <a:off x="914400" y="5202936"/>
-            <a:ext cx="4572000" cy="457200"/>
-          </a:xfrm>
-          <a:prstGeom prst="rect">
-            <a:avLst/>
-          </a:prstGeom>
-          <a:noFill/>
-          <a:ln/>
-        </p:spPr>
-        <p:txBody>
-          <a:bodyPr wrap="square" lIns="0" tIns="0" rIns="0" bIns="0" rtlCol="0" anchor="ctr"/>
-          <a:lstStyle/>
-          <a:p>
-            <a:pPr indent="0" marL="0">
-              <a:buNone/>
-            </a:pPr>
-            <a:r>
-              <a:rPr lang="en-US" sz="1100" dirty="0">
+              <a:t>Vuelve a renta</a:t>
+            </a:r>
+            <a:endParaRPr lang="en-US" sz="2000" dirty="0"/>
+          </a:p>
+        </p:txBody>
+      </p:sp>
+      <p:sp>
+        <p:nvSpPr>
+          <p:cNvPr id="7" name="Text 5"/>
+          <p:cNvSpPr/>
+          <p:nvPr/>
+        </p:nvSpPr>
+        <p:spPr>
+          <a:xfrm>
+            <a:off x="960120" y="2926080"/>
+            <a:ext cx="4663440" cy="1188720"/>
+          </a:xfrm>
+          <a:prstGeom prst="rect">
+            <a:avLst/>
+          </a:prstGeom>
+          <a:noFill/>
+          <a:ln/>
+        </p:spPr>
+        <p:txBody>
+          <a:bodyPr wrap="square" lIns="0" tIns="0" rIns="0" bIns="0" rtlCol="0" anchor="t"/>
+          <a:lstStyle/>
+          <a:p>
+            <a:pPr indent="0" marL="0">
+              <a:buNone/>
+            </a:pPr>
+            <a:r>
+              <a:rPr lang="en-US" sz="1350" dirty="0">
                 <a:solidFill>
                   <a:srgbClr val="5B6470"/>
                 </a:solidFill>
@@ -6002,26 +8443,26 @@
                 <a:ea typeface="Calibri" pitchFamily="34" charset="-122"/>
                 <a:cs typeface="Calibri" pitchFamily="34" charset="-120"/>
               </a:rPr>
-              <a:t>menos que el plan original</a:t>
-            </a:r>
-            <a:endParaRPr lang="en-US" sz="1100" dirty="0"/>
-          </a:p>
-        </p:txBody>
-      </p:sp>
-      <p:sp>
-        <p:nvSpPr>
-          <p:cNvPr id="23" name="Shape 21"/>
-          <p:cNvSpPr/>
-          <p:nvPr/>
-        </p:nvSpPr>
-        <p:spPr>
-          <a:xfrm>
-            <a:off x="6217920" y="4343400"/>
-            <a:ext cx="5349240" cy="1005840"/>
+              <a:t>Reparado, regresa a la flota y genera ingreso de renta — en vez de $0 detenido ocupando espacio.</a:t>
+            </a:r>
+            <a:endParaRPr lang="en-US" sz="1350" dirty="0"/>
+          </a:p>
+        </p:txBody>
+      </p:sp>
+      <p:sp>
+        <p:nvSpPr>
+          <p:cNvPr id="8" name="Shape 6"/>
+          <p:cNvSpPr/>
+          <p:nvPr/>
+        </p:nvSpPr>
+        <p:spPr>
+          <a:xfrm>
+            <a:off x="6217920" y="1920240"/>
+            <a:ext cx="5349240" cy="2377440"/>
           </a:xfrm>
           <a:prstGeom prst="roundRect">
             <a:avLst>
-              <a:gd name="adj" fmla="val 8182"/>
+              <a:gd name="adj" fmla="val 3462"/>
             </a:avLst>
           </a:prstGeom>
           <a:solidFill>
@@ -6039,69 +8480,89 @@
       </p:sp>
       <p:sp>
         <p:nvSpPr>
-          <p:cNvPr id="24" name="Text 22"/>
-          <p:cNvSpPr/>
-          <p:nvPr/>
-        </p:nvSpPr>
-        <p:spPr>
-          <a:xfrm>
-            <a:off x="6537960" y="4526280"/>
-            <a:ext cx="4572000" cy="658368"/>
-          </a:xfrm>
-          <a:prstGeom prst="rect">
-            <a:avLst/>
-          </a:prstGeom>
-          <a:noFill/>
-          <a:ln/>
-        </p:spPr>
-        <p:txBody>
-          <a:bodyPr wrap="square" lIns="0" tIns="0" rIns="0" bIns="0" rtlCol="0" anchor="ctr"/>
-          <a:lstStyle/>
-          <a:p>
-            <a:pPr algn="l" indent="0" marL="0">
-              <a:buNone/>
-            </a:pPr>
-            <a:r>
-              <a:rPr lang="en-US" sz="3800" b="1" dirty="0">
-                <a:solidFill>
-                  <a:srgbClr val="39D98A"/>
+          <p:cNvPr id="9" name="Shape 7"/>
+          <p:cNvSpPr/>
+          <p:nvPr/>
+        </p:nvSpPr>
+        <p:spPr>
+          <a:xfrm>
+            <a:off x="6217920" y="1920240"/>
+            <a:ext cx="5349240" cy="109728"/>
+          </a:xfrm>
+          <a:prstGeom prst="rect">
+            <a:avLst/>
+          </a:prstGeom>
+          <a:solidFill>
+            <a:srgbClr val="37C3FF"/>
+          </a:solidFill>
+          <a:ln/>
+        </p:spPr>
+      </p:sp>
+      <p:sp>
+        <p:nvSpPr>
+          <p:cNvPr id="10" name="Text 8"/>
+          <p:cNvSpPr/>
+          <p:nvPr/>
+        </p:nvSpPr>
+        <p:spPr>
+          <a:xfrm>
+            <a:off x="6583680" y="2286000"/>
+            <a:ext cx="4663440" cy="502920"/>
+          </a:xfrm>
+          <a:prstGeom prst="rect">
+            <a:avLst/>
+          </a:prstGeom>
+          <a:noFill/>
+          <a:ln/>
+        </p:spPr>
+        <p:txBody>
+          <a:bodyPr wrap="square" lIns="0" tIns="0" rIns="0" bIns="0" rtlCol="0" anchor="ctr"/>
+          <a:lstStyle/>
+          <a:p>
+            <a:pPr indent="0" marL="0">
+              <a:buNone/>
+            </a:pPr>
+            <a:r>
+              <a:rPr lang="en-US" sz="2000" b="1" dirty="0">
+                <a:solidFill>
+                  <a:srgbClr val="1A1D23"/>
                 </a:solidFill>
                 <a:latin typeface="Cambria" pitchFamily="34" charset="0"/>
                 <a:ea typeface="Cambria" pitchFamily="34" charset="-122"/>
                 <a:cs typeface="Cambria" pitchFamily="34" charset="-120"/>
               </a:rPr>
-              <a:t>− 64%</a:t>
-            </a:r>
-            <a:endParaRPr lang="en-US" sz="3800" dirty="0"/>
-          </a:p>
-        </p:txBody>
-      </p:sp>
-      <p:sp>
-        <p:nvSpPr>
-          <p:cNvPr id="25" name="Text 23"/>
-          <p:cNvSpPr/>
-          <p:nvPr/>
-        </p:nvSpPr>
-        <p:spPr>
-          <a:xfrm>
-            <a:off x="6537960" y="5202936"/>
-            <a:ext cx="4572000" cy="457200"/>
-          </a:xfrm>
-          <a:prstGeom prst="rect">
-            <a:avLst/>
-          </a:prstGeom>
-          <a:noFill/>
-          <a:ln/>
-        </p:spPr>
-        <p:txBody>
-          <a:bodyPr wrap="square" lIns="0" tIns="0" rIns="0" bIns="0" rtlCol="0" anchor="ctr"/>
-          <a:lstStyle/>
-          <a:p>
-            <a:pPr indent="0" marL="0">
-              <a:buNone/>
-            </a:pPr>
-            <a:r>
-              <a:rPr lang="en-US" sz="1100" dirty="0">
+              <a:t>Plataforma de TaTa</a:t>
+            </a:r>
+            <a:endParaRPr lang="en-US" sz="2000" dirty="0"/>
+          </a:p>
+        </p:txBody>
+      </p:sp>
+      <p:sp>
+        <p:nvSpPr>
+          <p:cNvPr id="11" name="Text 9"/>
+          <p:cNvSpPr/>
+          <p:nvPr/>
+        </p:nvSpPr>
+        <p:spPr>
+          <a:xfrm>
+            <a:off x="6583680" y="2926080"/>
+            <a:ext cx="4663440" cy="1188720"/>
+          </a:xfrm>
+          <a:prstGeom prst="rect">
+            <a:avLst/>
+          </a:prstGeom>
+          <a:noFill/>
+          <a:ln/>
+        </p:spPr>
+        <p:txBody>
+          <a:bodyPr wrap="square" lIns="0" tIns="0" rIns="0" bIns="0" rtlCol="0" anchor="t"/>
+          <a:lstStyle/>
+          <a:p>
+            <a:pPr indent="0" marL="0">
+              <a:buNone/>
+            </a:pPr>
+            <a:r>
+              <a:rPr lang="en-US" sz="1350" dirty="0">
                 <a:solidFill>
                   <a:srgbClr val="5B6470"/>
                 </a:solidFill>
@@ -6109,87 +8570,77 @@
                 <a:ea typeface="Calibri" pitchFamily="34" charset="-122"/>
                 <a:cs typeface="Calibri" pitchFamily="34" charset="-120"/>
               </a:rPr>
-              <a:t>del presupuesto de cómputo</a:t>
-            </a:r>
-            <a:endParaRPr lang="en-US" sz="1100" dirty="0"/>
-          </a:p>
-        </p:txBody>
-      </p:sp>
-      <p:sp>
-        <p:nvSpPr>
-          <p:cNvPr id="26" name="Text 24"/>
-          <p:cNvSpPr/>
-          <p:nvPr/>
-        </p:nvSpPr>
-        <p:spPr>
-          <a:xfrm>
-            <a:off x="594360" y="5577840"/>
-            <a:ext cx="10972800" cy="457200"/>
-          </a:xfrm>
-          <a:prstGeom prst="rect">
-            <a:avLst/>
-          </a:prstGeom>
-          <a:noFill/>
-          <a:ln/>
-        </p:spPr>
-        <p:txBody>
-          <a:bodyPr wrap="square" lIns="0" tIns="0" rIns="0" bIns="0" rtlCol="0" anchor="ctr"/>
-          <a:lstStyle/>
-          <a:p>
-            <a:pPr indent="0" marL="0">
-              <a:buNone/>
-            </a:pPr>
-            <a:r>
-              <a:rPr lang="en-US" sz="1300" b="1" dirty="0">
-                <a:solidFill>
-                  <a:srgbClr val="5B6470"/>
-                </a:solidFill>
-                <a:latin typeface="Calibri" pitchFamily="34" charset="0"/>
-                <a:ea typeface="Calibri" pitchFamily="34" charset="-122"/>
-                <a:cs typeface="Calibri" pitchFamily="34" charset="-120"/>
-              </a:rPr>
-              <a:t>El LiDAR no se descarta: pasa a ser expansión opcional. Para el primer nivel, cámaras + Jetson 8 GB alcanzan.</a:t>
-            </a:r>
-            <a:endParaRPr lang="en-US" sz="1300" dirty="0"/>
-          </a:p>
-        </p:txBody>
-      </p:sp>
-      <p:sp>
-        <p:nvSpPr>
-          <p:cNvPr id="27" name="Text 25"/>
-          <p:cNvSpPr/>
-          <p:nvPr/>
-        </p:nvSpPr>
-        <p:spPr>
-          <a:xfrm>
-            <a:off x="594360" y="6355080"/>
-            <a:ext cx="10972800" cy="320040"/>
-          </a:xfrm>
-          <a:prstGeom prst="rect">
-            <a:avLst/>
-          </a:prstGeom>
-          <a:noFill/>
-          <a:ln/>
-        </p:spPr>
-        <p:txBody>
-          <a:bodyPr wrap="square" lIns="0" tIns="0" rIns="0" bIns="0" rtlCol="0" anchor="ctr"/>
-          <a:lstStyle/>
-          <a:p>
-            <a:pPr indent="0" marL="0">
-              <a:buNone/>
-            </a:pPr>
-            <a:r>
-              <a:rPr lang="en-US" sz="1050" i="1" dirty="0">
-                <a:solidFill>
-                  <a:srgbClr val="5B6470"/>
-                </a:solidFill>
-                <a:latin typeface="Calibri" pitchFamily="34" charset="0"/>
-                <a:ea typeface="Calibri" pitchFamily="34" charset="-122"/>
-                <a:cs typeface="Calibri" pitchFamily="34" charset="-120"/>
-              </a:rPr>
-              <a:t>Cifras de cotización, por confirmar antes de comprometer la compra.</a:t>
-            </a:r>
-            <a:endParaRPr lang="en-US" sz="1050" dirty="0"/>
+              <a:t>Es el equipo dedicado donde el proyecto avanza, sin tener que sacar de rotación un montacargas que sí está rentando.</a:t>
+            </a:r>
+            <a:endParaRPr lang="en-US" sz="1350" dirty="0"/>
+          </a:p>
+        </p:txBody>
+      </p:sp>
+      <p:sp>
+        <p:nvSpPr>
+          <p:cNvPr id="12" name="Shape 10"/>
+          <p:cNvSpPr/>
+          <p:nvPr/>
+        </p:nvSpPr>
+        <p:spPr>
+          <a:xfrm>
+            <a:off x="594360" y="4709160"/>
+            <a:ext cx="10972800" cy="914400"/>
+          </a:xfrm>
+          <a:prstGeom prst="roundRect">
+            <a:avLst>
+              <a:gd name="adj" fmla="val 9000"/>
+            </a:avLst>
+          </a:prstGeom>
+          <a:solidFill>
+            <a:srgbClr val="20242B"/>
+          </a:solidFill>
+          <a:ln/>
+          <a:effectLst>
+            <a:outerShdw sx="100000" sy="100000" kx="0" ky="0" algn="bl" rotWithShape="0" blurRad="152400" dist="38100" dir="5400000">
+              <a:srgbClr val="000000">
+                <a:alpha val="28000"/>
+              </a:srgbClr>
+            </a:outerShdw>
+          </a:effectLst>
+        </p:spPr>
+      </p:sp>
+      <p:sp>
+        <p:nvSpPr>
+          <p:cNvPr id="13" name="Text 11"/>
+          <p:cNvSpPr/>
+          <p:nvPr/>
+        </p:nvSpPr>
+        <p:spPr>
+          <a:xfrm>
+            <a:off x="960120" y="4709160"/>
+            <a:ext cx="10241280" cy="914400"/>
+          </a:xfrm>
+          <a:prstGeom prst="rect">
+            <a:avLst/>
+          </a:prstGeom>
+          <a:noFill/>
+          <a:ln/>
+        </p:spPr>
+        <p:txBody>
+          <a:bodyPr wrap="square" lIns="0" tIns="0" rIns="0" bIns="0" rtlCol="0" anchor="ctr"/>
+          <a:lstStyle/>
+          <a:p>
+            <a:pPr indent="0" marL="0">
+              <a:buNone/>
+            </a:pPr>
+            <a:r>
+              <a:rPr lang="en-US" sz="1500" b="1" dirty="0">
+                <a:solidFill>
+                  <a:srgbClr val="F5C518"/>
+                </a:solidFill>
+                <a:latin typeface="Calibri" pitchFamily="34" charset="0"/>
+                <a:ea typeface="Calibri" pitchFamily="34" charset="-122"/>
+                <a:cs typeface="Calibri" pitchFamily="34" charset="-120"/>
+              </a:rPr>
+              <a:t>La misma reparación sirve a la flota y al proyecto. No es un gasto del proyecto: es un activo de Montasa que vuelve a producir.</a:t>
+            </a:r>
+            <a:endParaRPr lang="en-US" sz="1500" dirty="0"/>
           </a:p>
         </p:txBody>
       </p:sp>
@@ -6250,7 +8701,7 @@
               <a:buNone/>
             </a:pPr>
             <a:r>
-              <a:rPr lang="en-US" sz="3400" b="1" dirty="0">
+              <a:rPr lang="en-US" sz="3300" b="1" dirty="0">
                 <a:solidFill>
                   <a:srgbClr val="ECEBE6"/>
                 </a:solidFill>
@@ -6258,9 +8709,9 @@
                 <a:ea typeface="Cambria" pitchFamily="34" charset="-122"/>
                 <a:cs typeface="Cambria" pitchFamily="34" charset="-120"/>
               </a:rPr>
-              <a:t>Lo que necesito de vos</a:t>
-            </a:r>
-            <a:endParaRPr lang="en-US" sz="3400" dirty="0"/>
+              <a:t>Quién pone qué</a:t>
+            </a:r>
+            <a:endParaRPr lang="en-US" sz="3300" dirty="0"/>
           </a:p>
         </p:txBody>
       </p:sp>
@@ -6272,7 +8723,7 @@
         </p:nvSpPr>
         <p:spPr>
           <a:xfrm>
-            <a:off x="594360" y="1133856"/>
+            <a:off x="594360" y="1115568"/>
             <a:ext cx="10972800" cy="365760"/>
           </a:xfrm>
           <a:prstGeom prst="rect">
@@ -6297,7 +8748,7 @@
                 <a:ea typeface="Calibri" pitchFamily="34" charset="-122"/>
                 <a:cs typeface="Calibri" pitchFamily="34" charset="-120"/>
               </a:rPr>
-              <a:t>Tres cosas concretas para destrabar el proyecto</a:t>
+              <a:t>Pongo mi plata en lo que es mío. A Montasa le pido recuperar un activo suyo</a:t>
             </a:r>
             <a:endParaRPr lang="en-US" sz="1350" dirty="0"/>
           </a:p>
@@ -6312,11 +8763,11 @@
         <p:spPr>
           <a:xfrm>
             <a:off x="594360" y="1828800"/>
-            <a:ext cx="10972800" cy="896112"/>
+            <a:ext cx="5440680" cy="3383280"/>
           </a:xfrm>
           <a:prstGeom prst="roundRect">
             <a:avLst>
-              <a:gd name="adj" fmla="val 9184"/>
+              <a:gd name="adj" fmla="val 2432"/>
             </a:avLst>
           </a:prstGeom>
           <a:solidFill>
@@ -6340,14 +8791,14 @@
         </p:nvSpPr>
         <p:spPr>
           <a:xfrm>
-            <a:off x="914400" y="2084832"/>
-            <a:ext cx="384048" cy="384048"/>
-          </a:xfrm>
-          <a:prstGeom prst="ellipse">
+            <a:off x="594360" y="1828800"/>
+            <a:ext cx="5440680" cy="109728"/>
+          </a:xfrm>
+          <a:prstGeom prst="rect">
             <a:avLst/>
           </a:prstGeom>
           <a:solidFill>
-            <a:srgbClr val="39D98A"/>
+            <a:srgbClr val="F5C518"/>
           </a:solidFill>
           <a:ln/>
         </p:spPr>
@@ -6360,34 +8811,34 @@
         </p:nvSpPr>
         <p:spPr>
           <a:xfrm>
-            <a:off x="914400" y="2084832"/>
-            <a:ext cx="384048" cy="384048"/>
-          </a:xfrm>
-          <a:prstGeom prst="rect">
-            <a:avLst/>
-          </a:prstGeom>
-          <a:noFill/>
-          <a:ln/>
-        </p:spPr>
-        <p:txBody>
-          <a:bodyPr wrap="square" lIns="0" tIns="0" rIns="0" bIns="0" rtlCol="0" anchor="ctr"/>
-          <a:lstStyle/>
-          <a:p>
-            <a:pPr algn="ctr" indent="0" marL="0">
-              <a:buNone/>
-            </a:pPr>
-            <a:r>
-              <a:rPr lang="en-US" sz="1500" b="1" dirty="0">
-                <a:solidFill>
-                  <a:srgbClr val="14171C"/>
-                </a:solidFill>
-                <a:latin typeface="Calibri" pitchFamily="34" charset="0"/>
-                <a:ea typeface="Calibri" pitchFamily="34" charset="-122"/>
-                <a:cs typeface="Calibri" pitchFamily="34" charset="-120"/>
-              </a:rPr>
-              <a:t>1</a:t>
-            </a:r>
-            <a:endParaRPr lang="en-US" sz="1500" dirty="0"/>
+            <a:off x="914400" y="2103120"/>
+            <a:ext cx="4846320" cy="457200"/>
+          </a:xfrm>
+          <a:prstGeom prst="rect">
+            <a:avLst/>
+          </a:prstGeom>
+          <a:noFill/>
+          <a:ln/>
+        </p:spPr>
+        <p:txBody>
+          <a:bodyPr wrap="square" lIns="0" tIns="0" rIns="0" bIns="0" rtlCol="0" anchor="ctr"/>
+          <a:lstStyle/>
+          <a:p>
+            <a:pPr indent="0" marL="0">
+              <a:buNone/>
+            </a:pPr>
+            <a:r>
+              <a:rPr lang="en-US" sz="1900" b="1" dirty="0">
+                <a:solidFill>
+                  <a:srgbClr val="F5C518"/>
+                </a:solidFill>
+                <a:latin typeface="Cambria" pitchFamily="34" charset="0"/>
+                <a:ea typeface="Cambria" pitchFamily="34" charset="-122"/>
+                <a:cs typeface="Cambria" pitchFamily="34" charset="-120"/>
+              </a:rPr>
+              <a:t>Lo pongo yo</a:t>
+            </a:r>
+            <a:endParaRPr lang="en-US" sz="1900" dirty="0"/>
           </a:p>
         </p:txBody>
       </p:sp>
@@ -6399,24 +8850,24 @@
         </p:nvSpPr>
         <p:spPr>
           <a:xfrm>
-            <a:off x="1481328" y="1965960"/>
-            <a:ext cx="4206240" cy="502920"/>
-          </a:xfrm>
-          <a:prstGeom prst="rect">
-            <a:avLst/>
-          </a:prstGeom>
-          <a:noFill/>
-          <a:ln/>
-        </p:spPr>
-        <p:txBody>
-          <a:bodyPr wrap="square" lIns="0" tIns="0" rIns="0" bIns="0" rtlCol="0" anchor="ctr"/>
-          <a:lstStyle/>
-          <a:p>
-            <a:pPr indent="0" marL="0">
-              <a:buNone/>
-            </a:pPr>
-            <a:r>
-              <a:rPr lang="en-US" sz="1500" b="1" dirty="0">
+            <a:off x="914400" y="2697480"/>
+            <a:ext cx="4846320" cy="320040"/>
+          </a:xfrm>
+          <a:prstGeom prst="rect">
+            <a:avLst/>
+          </a:prstGeom>
+          <a:noFill/>
+          <a:ln/>
+        </p:spPr>
+        <p:txBody>
+          <a:bodyPr wrap="square" lIns="0" tIns="0" rIns="0" bIns="0" rtlCol="0" anchor="ctr"/>
+          <a:lstStyle/>
+          <a:p>
+            <a:pPr indent="0" marL="0">
+              <a:buNone/>
+            </a:pPr>
+            <a:r>
+              <a:rPr lang="en-US" sz="1350" b="1" dirty="0">
                 <a:solidFill>
                   <a:srgbClr val="ECEBE6"/>
                 </a:solidFill>
@@ -6424,9 +8875,9 @@
                 <a:ea typeface="Calibri" pitchFamily="34" charset="-122"/>
                 <a:cs typeface="Calibri" pitchFamily="34" charset="-120"/>
               </a:rPr>
-              <a:t>Aprobar reparar el MT 122</a:t>
-            </a:r>
-            <a:endParaRPr lang="en-US" sz="1500" dirty="0"/>
+              <a:t>NRE / ingeniería</a:t>
+            </a:r>
+            <a:endParaRPr lang="en-US" sz="1350" dirty="0"/>
           </a:p>
         </p:txBody>
       </p:sp>
@@ -6438,17 +8889,17 @@
         </p:nvSpPr>
         <p:spPr>
           <a:xfrm>
-            <a:off x="5760720" y="1956816"/>
-            <a:ext cx="5577840" cy="658368"/>
-          </a:xfrm>
-          <a:prstGeom prst="rect">
-            <a:avLst/>
-          </a:prstGeom>
-          <a:noFill/>
-          <a:ln/>
-        </p:spPr>
-        <p:txBody>
-          <a:bodyPr wrap="square" lIns="0" tIns="0" rIns="0" bIns="0" rtlCol="0" anchor="ctr"/>
+            <a:off x="914400" y="2990088"/>
+            <a:ext cx="4846320" cy="502920"/>
+          </a:xfrm>
+          <a:prstGeom prst="rect">
+            <a:avLst/>
+          </a:prstGeom>
+          <a:noFill/>
+          <a:ln/>
+        </p:spPr>
+        <p:txBody>
+          <a:bodyPr wrap="square" lIns="0" tIns="0" rIns="0" bIns="0" rtlCol="0" anchor="t"/>
           <a:lstStyle/>
           <a:p>
             <a:pPr indent="0" marL="0">
@@ -6463,7 +8914,7 @@
                 <a:ea typeface="Calibri" pitchFamily="34" charset="-122"/>
                 <a:cs typeface="Calibri" pitchFamily="34" charset="-120"/>
               </a:rPr>
-              <a:t>Que Miguel actualice la lista de repuestos y se ordene. Vuelve a renta y queda de plataforma del proyecto.</a:t>
+              <a:t>Todo lo comprado en C&amp;D: transceptores, el emulador, el ESP32, componentes.</a:t>
             </a:r>
             <a:endParaRPr lang="en-US" sz="1100" dirty="0"/>
           </a:p>
@@ -6471,18 +8922,174 @@
       </p:sp>
       <p:sp>
         <p:nvSpPr>
-          <p:cNvPr id="9" name="Shape 7"/>
-          <p:cNvSpPr/>
-          <p:nvPr/>
-        </p:nvSpPr>
-        <p:spPr>
-          <a:xfrm>
-            <a:off x="594360" y="2880360"/>
-            <a:ext cx="10972800" cy="896112"/>
+          <p:cNvPr id="9" name="Text 7"/>
+          <p:cNvSpPr/>
+          <p:nvPr/>
+        </p:nvSpPr>
+        <p:spPr>
+          <a:xfrm>
+            <a:off x="914400" y="3520440"/>
+            <a:ext cx="4846320" cy="320040"/>
+          </a:xfrm>
+          <a:prstGeom prst="rect">
+            <a:avLst/>
+          </a:prstGeom>
+          <a:noFill/>
+          <a:ln/>
+        </p:spPr>
+        <p:txBody>
+          <a:bodyPr wrap="square" lIns="0" tIns="0" rIns="0" bIns="0" rtlCol="0" anchor="ctr"/>
+          <a:lstStyle/>
+          <a:p>
+            <a:pPr indent="0" marL="0">
+              <a:buNone/>
+            </a:pPr>
+            <a:r>
+              <a:rPr lang="en-US" sz="1350" b="1" dirty="0">
+                <a:solidFill>
+                  <a:srgbClr val="ECEBE6"/>
+                </a:solidFill>
+                <a:latin typeface="Calibri" pitchFamily="34" charset="0"/>
+                <a:ea typeface="Calibri" pitchFamily="34" charset="-122"/>
+                <a:cs typeface="Calibri" pitchFamily="34" charset="-120"/>
+              </a:rPr>
+              <a:t>El cómputo (la Jetson)</a:t>
+            </a:r>
+            <a:endParaRPr lang="en-US" sz="1350" dirty="0"/>
+          </a:p>
+        </p:txBody>
+      </p:sp>
+      <p:sp>
+        <p:nvSpPr>
+          <p:cNvPr id="10" name="Text 8"/>
+          <p:cNvSpPr/>
+          <p:nvPr/>
+        </p:nvSpPr>
+        <p:spPr>
+          <a:xfrm>
+            <a:off x="914400" y="3813048"/>
+            <a:ext cx="4846320" cy="502920"/>
+          </a:xfrm>
+          <a:prstGeom prst="rect">
+            <a:avLst/>
+          </a:prstGeom>
+          <a:noFill/>
+          <a:ln/>
+        </p:spPr>
+        <p:txBody>
+          <a:bodyPr wrap="square" lIns="0" tIns="0" rIns="0" bIns="0" rtlCol="0" anchor="t"/>
+          <a:lstStyle/>
+          <a:p>
+            <a:pPr indent="0" marL="0">
+              <a:buNone/>
+            </a:pPr>
+            <a:r>
+              <a:rPr lang="en-US" sz="1100" dirty="0">
+                <a:solidFill>
+                  <a:srgbClr val="8B949E"/>
+                </a:solidFill>
+                <a:latin typeface="Calibri" pitchFamily="34" charset="0"/>
+                <a:ea typeface="Calibri" pitchFamily="34" charset="-122"/>
+                <a:cs typeface="Calibri" pitchFamily="34" charset="-120"/>
+              </a:rPr>
+              <a:t>También es parte del NRE. Lo cubro yo.</a:t>
+            </a:r>
+            <a:endParaRPr lang="en-US" sz="1100" dirty="0"/>
+          </a:p>
+        </p:txBody>
+      </p:sp>
+      <p:sp>
+        <p:nvSpPr>
+          <p:cNvPr id="11" name="Text 9"/>
+          <p:cNvSpPr/>
+          <p:nvPr/>
+        </p:nvSpPr>
+        <p:spPr>
+          <a:xfrm>
+            <a:off x="914400" y="4343400"/>
+            <a:ext cx="4846320" cy="320040"/>
+          </a:xfrm>
+          <a:prstGeom prst="rect">
+            <a:avLst/>
+          </a:prstGeom>
+          <a:noFill/>
+          <a:ln/>
+        </p:spPr>
+        <p:txBody>
+          <a:bodyPr wrap="square" lIns="0" tIns="0" rIns="0" bIns="0" rtlCol="0" anchor="ctr"/>
+          <a:lstStyle/>
+          <a:p>
+            <a:pPr indent="0" marL="0">
+              <a:buNone/>
+            </a:pPr>
+            <a:r>
+              <a:rPr lang="en-US" sz="1350" b="1" dirty="0">
+                <a:solidFill>
+                  <a:srgbClr val="ECEBE6"/>
+                </a:solidFill>
+                <a:latin typeface="Calibri" pitchFamily="34" charset="0"/>
+                <a:ea typeface="Calibri" pitchFamily="34" charset="-122"/>
+                <a:cs typeface="Calibri" pitchFamily="34" charset="-120"/>
+              </a:rPr>
+              <a:t>Por qué</a:t>
+            </a:r>
+            <a:endParaRPr lang="en-US" sz="1350" dirty="0"/>
+          </a:p>
+        </p:txBody>
+      </p:sp>
+      <p:sp>
+        <p:nvSpPr>
+          <p:cNvPr id="12" name="Text 10"/>
+          <p:cNvSpPr/>
+          <p:nvPr/>
+        </p:nvSpPr>
+        <p:spPr>
+          <a:xfrm>
+            <a:off x="914400" y="4636008"/>
+            <a:ext cx="4846320" cy="502920"/>
+          </a:xfrm>
+          <a:prstGeom prst="rect">
+            <a:avLst/>
+          </a:prstGeom>
+          <a:noFill/>
+          <a:ln/>
+        </p:spPr>
+        <p:txBody>
+          <a:bodyPr wrap="square" lIns="0" tIns="0" rIns="0" bIns="0" rtlCol="0" anchor="t"/>
+          <a:lstStyle/>
+          <a:p>
+            <a:pPr indent="0" marL="0">
+              <a:buNone/>
+            </a:pPr>
+            <a:r>
+              <a:rPr lang="en-US" sz="1100" dirty="0">
+                <a:solidFill>
+                  <a:srgbClr val="8B949E"/>
+                </a:solidFill>
+                <a:latin typeface="Calibri" pitchFamily="34" charset="0"/>
+                <a:ea typeface="Calibri" pitchFamily="34" charset="-122"/>
+                <a:cs typeface="Calibri" pitchFamily="34" charset="-120"/>
+              </a:rPr>
+              <a:t>Es mi idea, mi proyecto, mi sueño. El riesgo de la apuesta es mío.</a:t>
+            </a:r>
+            <a:endParaRPr lang="en-US" sz="1100" dirty="0"/>
+          </a:p>
+        </p:txBody>
+      </p:sp>
+      <p:sp>
+        <p:nvSpPr>
+          <p:cNvPr id="13" name="Shape 11"/>
+          <p:cNvSpPr/>
+          <p:nvPr/>
+        </p:nvSpPr>
+        <p:spPr>
+          <a:xfrm>
+            <a:off x="6263640" y="1828800"/>
+            <a:ext cx="5303520" cy="3383280"/>
           </a:xfrm>
           <a:prstGeom prst="roundRect">
             <a:avLst>
-              <a:gd name="adj" fmla="val 9184"/>
+              <a:gd name="adj" fmla="val 2432"/>
             </a:avLst>
           </a:prstGeom>
           <a:solidFill>
@@ -6500,16 +9107,16 @@
       </p:sp>
       <p:sp>
         <p:nvSpPr>
-          <p:cNvPr id="10" name="Shape 8"/>
-          <p:cNvSpPr/>
-          <p:nvPr/>
-        </p:nvSpPr>
-        <p:spPr>
-          <a:xfrm>
-            <a:off x="914400" y="3136392"/>
-            <a:ext cx="384048" cy="384048"/>
-          </a:xfrm>
-          <a:prstGeom prst="ellipse">
+          <p:cNvPr id="14" name="Shape 12"/>
+          <p:cNvSpPr/>
+          <p:nvPr/>
+        </p:nvSpPr>
+        <p:spPr>
+          <a:xfrm>
+            <a:off x="6263640" y="1828800"/>
+            <a:ext cx="5303520" cy="109728"/>
+          </a:xfrm>
+          <a:prstGeom prst="rect">
             <a:avLst/>
           </a:prstGeom>
           <a:solidFill>
@@ -6520,69 +9127,69 @@
       </p:sp>
       <p:sp>
         <p:nvSpPr>
-          <p:cNvPr id="11" name="Text 9"/>
-          <p:cNvSpPr/>
-          <p:nvPr/>
-        </p:nvSpPr>
-        <p:spPr>
-          <a:xfrm>
-            <a:off x="914400" y="3136392"/>
-            <a:ext cx="384048" cy="384048"/>
-          </a:xfrm>
-          <a:prstGeom prst="rect">
-            <a:avLst/>
-          </a:prstGeom>
-          <a:noFill/>
-          <a:ln/>
-        </p:spPr>
-        <p:txBody>
-          <a:bodyPr wrap="square" lIns="0" tIns="0" rIns="0" bIns="0" rtlCol="0" anchor="ctr"/>
-          <a:lstStyle/>
-          <a:p>
-            <a:pPr algn="ctr" indent="0" marL="0">
-              <a:buNone/>
-            </a:pPr>
-            <a:r>
-              <a:rPr lang="en-US" sz="1500" b="1" dirty="0">
-                <a:solidFill>
-                  <a:srgbClr val="14171C"/>
-                </a:solidFill>
-                <a:latin typeface="Calibri" pitchFamily="34" charset="0"/>
-                <a:ea typeface="Calibri" pitchFamily="34" charset="-122"/>
-                <a:cs typeface="Calibri" pitchFamily="34" charset="-120"/>
-              </a:rPr>
-              <a:t>2</a:t>
-            </a:r>
-            <a:endParaRPr lang="en-US" sz="1500" dirty="0"/>
-          </a:p>
-        </p:txBody>
-      </p:sp>
-      <p:sp>
-        <p:nvSpPr>
-          <p:cNvPr id="12" name="Text 10"/>
-          <p:cNvSpPr/>
-          <p:nvPr/>
-        </p:nvSpPr>
-        <p:spPr>
-          <a:xfrm>
-            <a:off x="1481328" y="3017520"/>
-            <a:ext cx="4206240" cy="502920"/>
-          </a:xfrm>
-          <a:prstGeom prst="rect">
-            <a:avLst/>
-          </a:prstGeom>
-          <a:noFill/>
-          <a:ln/>
-        </p:spPr>
-        <p:txBody>
-          <a:bodyPr wrap="square" lIns="0" tIns="0" rIns="0" bIns="0" rtlCol="0" anchor="ctr"/>
-          <a:lstStyle/>
-          <a:p>
-            <a:pPr indent="0" marL="0">
-              <a:buNone/>
-            </a:pPr>
-            <a:r>
-              <a:rPr lang="en-US" sz="1500" b="1" dirty="0">
+          <p:cNvPr id="15" name="Text 13"/>
+          <p:cNvSpPr/>
+          <p:nvPr/>
+        </p:nvSpPr>
+        <p:spPr>
+          <a:xfrm>
+            <a:off x="6583680" y="2103120"/>
+            <a:ext cx="4663440" cy="457200"/>
+          </a:xfrm>
+          <a:prstGeom prst="rect">
+            <a:avLst/>
+          </a:prstGeom>
+          <a:noFill/>
+          <a:ln/>
+        </p:spPr>
+        <p:txBody>
+          <a:bodyPr wrap="square" lIns="0" tIns="0" rIns="0" bIns="0" rtlCol="0" anchor="ctr"/>
+          <a:lstStyle/>
+          <a:p>
+            <a:pPr indent="0" marL="0">
+              <a:buNone/>
+            </a:pPr>
+            <a:r>
+              <a:rPr lang="en-US" sz="1900" b="1" dirty="0">
+                <a:solidFill>
+                  <a:srgbClr val="37C3FF"/>
+                </a:solidFill>
+                <a:latin typeface="Cambria" pitchFamily="34" charset="0"/>
+                <a:ea typeface="Cambria" pitchFamily="34" charset="-122"/>
+                <a:cs typeface="Cambria" pitchFamily="34" charset="-120"/>
+              </a:rPr>
+              <a:t>Lo pone Montasa</a:t>
+            </a:r>
+            <a:endParaRPr lang="en-US" sz="1900" dirty="0"/>
+          </a:p>
+        </p:txBody>
+      </p:sp>
+      <p:sp>
+        <p:nvSpPr>
+          <p:cNvPr id="16" name="Text 14"/>
+          <p:cNvSpPr/>
+          <p:nvPr/>
+        </p:nvSpPr>
+        <p:spPr>
+          <a:xfrm>
+            <a:off x="6583680" y="2697480"/>
+            <a:ext cx="4663440" cy="320040"/>
+          </a:xfrm>
+          <a:prstGeom prst="rect">
+            <a:avLst/>
+          </a:prstGeom>
+          <a:noFill/>
+          <a:ln/>
+        </p:spPr>
+        <p:txBody>
+          <a:bodyPr wrap="square" lIns="0" tIns="0" rIns="0" bIns="0" rtlCol="0" anchor="ctr"/>
+          <a:lstStyle/>
+          <a:p>
+            <a:pPr indent="0" marL="0">
+              <a:buNone/>
+            </a:pPr>
+            <a:r>
+              <a:rPr lang="en-US" sz="1350" b="1" dirty="0">
                 <a:solidFill>
                   <a:srgbClr val="ECEBE6"/>
                 </a:solidFill>
@@ -6590,31 +9197,31 @@
                 <a:ea typeface="Calibri" pitchFamily="34" charset="-122"/>
                 <a:cs typeface="Calibri" pitchFamily="34" charset="-120"/>
               </a:rPr>
-              <a:t>Que el MT 118 de Agrolibano pase por acá</a:t>
-            </a:r>
-            <a:endParaRPr lang="en-US" sz="1500" dirty="0"/>
-          </a:p>
-        </p:txBody>
-      </p:sp>
-      <p:sp>
-        <p:nvSpPr>
-          <p:cNvPr id="13" name="Text 11"/>
-          <p:cNvSpPr/>
-          <p:nvPr/>
-        </p:nvSpPr>
-        <p:spPr>
-          <a:xfrm>
-            <a:off x="5760720" y="3008376"/>
-            <a:ext cx="5577840" cy="658368"/>
-          </a:xfrm>
-          <a:prstGeom prst="rect">
-            <a:avLst/>
-          </a:prstGeom>
-          <a:noFill/>
-          <a:ln/>
-        </p:spPr>
-        <p:txBody>
-          <a:bodyPr wrap="square" lIns="0" tIns="0" rIns="0" bIns="0" rtlCol="0" anchor="ctr"/>
+              <a:t>Reparar el MT 122</a:t>
+            </a:r>
+            <a:endParaRPr lang="en-US" sz="1350" dirty="0"/>
+          </a:p>
+        </p:txBody>
+      </p:sp>
+      <p:sp>
+        <p:nvSpPr>
+          <p:cNvPr id="17" name="Text 15"/>
+          <p:cNvSpPr/>
+          <p:nvPr/>
+        </p:nvSpPr>
+        <p:spPr>
+          <a:xfrm>
+            <a:off x="6583680" y="2990088"/>
+            <a:ext cx="4663440" cy="685800"/>
+          </a:xfrm>
+          <a:prstGeom prst="rect">
+            <a:avLst/>
+          </a:prstGeom>
+          <a:noFill/>
+          <a:ln/>
+        </p:spPr>
+        <p:txBody>
+          <a:bodyPr wrap="square" lIns="0" tIns="0" rIns="0" bIns="0" rtlCol="0" anchor="t"/>
           <a:lstStyle/>
           <a:p>
             <a:pPr indent="0" marL="0">
@@ -6629,7 +9236,7 @@
                 <a:ea typeface="Calibri" pitchFamily="34" charset="-122"/>
                 <a:cs typeface="Calibri" pitchFamily="34" charset="-120"/>
               </a:rPr>
-              <a:t>Cuando venga a mantenimiento: probar multipiloto y timón, y empezar a emular el pedal de hombre-muerto.</a:t>
+              <a:t>Su propio activo, que vuelve a rentar. No es gasto del proyecto.</a:t>
             </a:r>
             <a:endParaRPr lang="en-US" sz="1100" dirty="0"/>
           </a:p>
@@ -6637,18 +9244,96 @@
       </p:sp>
       <p:sp>
         <p:nvSpPr>
-          <p:cNvPr id="14" name="Shape 12"/>
-          <p:cNvSpPr/>
-          <p:nvPr/>
-        </p:nvSpPr>
-        <p:spPr>
-          <a:xfrm>
-            <a:off x="594360" y="3931920"/>
-            <a:ext cx="10972800" cy="896112"/>
+          <p:cNvPr id="18" name="Text 16"/>
+          <p:cNvSpPr/>
+          <p:nvPr/>
+        </p:nvSpPr>
+        <p:spPr>
+          <a:xfrm>
+            <a:off x="6583680" y="3886200"/>
+            <a:ext cx="4663440" cy="320040"/>
+          </a:xfrm>
+          <a:prstGeom prst="rect">
+            <a:avLst/>
+          </a:prstGeom>
+          <a:noFill/>
+          <a:ln/>
+        </p:spPr>
+        <p:txBody>
+          <a:bodyPr wrap="square" lIns="0" tIns="0" rIns="0" bIns="0" rtlCol="0" anchor="ctr"/>
+          <a:lstStyle/>
+          <a:p>
+            <a:pPr indent="0" marL="0">
+              <a:buNone/>
+            </a:pPr>
+            <a:r>
+              <a:rPr lang="en-US" sz="1350" b="1" dirty="0">
+                <a:solidFill>
+                  <a:srgbClr val="ECEBE6"/>
+                </a:solidFill>
+                <a:latin typeface="Calibri" pitchFamily="34" charset="0"/>
+                <a:ea typeface="Calibri" pitchFamily="34" charset="-122"/>
+                <a:cs typeface="Calibri" pitchFamily="34" charset="-120"/>
+              </a:rPr>
+              <a:t>Salario y confianza</a:t>
+            </a:r>
+            <a:endParaRPr lang="en-US" sz="1350" dirty="0"/>
+          </a:p>
+        </p:txBody>
+      </p:sp>
+      <p:sp>
+        <p:nvSpPr>
+          <p:cNvPr id="19" name="Text 17"/>
+          <p:cNvSpPr/>
+          <p:nvPr/>
+        </p:nvSpPr>
+        <p:spPr>
+          <a:xfrm>
+            <a:off x="6583680" y="4178808"/>
+            <a:ext cx="4663440" cy="685800"/>
+          </a:xfrm>
+          <a:prstGeom prst="rect">
+            <a:avLst/>
+          </a:prstGeom>
+          <a:noFill/>
+          <a:ln/>
+        </p:spPr>
+        <p:txBody>
+          <a:bodyPr wrap="square" lIns="0" tIns="0" rIns="0" bIns="0" rtlCol="0" anchor="t"/>
+          <a:lstStyle/>
+          <a:p>
+            <a:pPr indent="0" marL="0">
+              <a:buNone/>
+            </a:pPr>
+            <a:r>
+              <a:rPr lang="en-US" sz="1100" dirty="0">
+                <a:solidFill>
+                  <a:srgbClr val="8B949E"/>
+                </a:solidFill>
+                <a:latin typeface="Calibri" pitchFamily="34" charset="0"/>
+                <a:ea typeface="Calibri" pitchFamily="34" charset="-122"/>
+                <a:cs typeface="Calibri" pitchFamily="34" charset="-120"/>
+              </a:rPr>
+              <a:t>Lo que Montasa ya me ha dado. Lo tomo como su inversión en esto.</a:t>
+            </a:r>
+            <a:endParaRPr lang="en-US" sz="1100" dirty="0"/>
+          </a:p>
+        </p:txBody>
+      </p:sp>
+      <p:sp>
+        <p:nvSpPr>
+          <p:cNvPr id="20" name="Shape 18"/>
+          <p:cNvSpPr/>
+          <p:nvPr/>
+        </p:nvSpPr>
+        <p:spPr>
+          <a:xfrm>
+            <a:off x="594360" y="5486400"/>
+            <a:ext cx="10972800" cy="777240"/>
           </a:xfrm>
           <a:prstGeom prst="roundRect">
             <a:avLst>
-              <a:gd name="adj" fmla="val 9184"/>
+              <a:gd name="adj" fmla="val 10588"/>
             </a:avLst>
           </a:prstGeom>
           <a:solidFill>
@@ -6666,196 +9351,30 @@
       </p:sp>
       <p:sp>
         <p:nvSpPr>
-          <p:cNvPr id="15" name="Shape 13"/>
-          <p:cNvSpPr/>
-          <p:nvPr/>
-        </p:nvSpPr>
-        <p:spPr>
-          <a:xfrm>
-            <a:off x="914400" y="4187952"/>
-            <a:ext cx="384048" cy="384048"/>
-          </a:xfrm>
-          <a:prstGeom prst="ellipse">
-            <a:avLst/>
-          </a:prstGeom>
-          <a:solidFill>
-            <a:srgbClr val="F5C518"/>
-          </a:solidFill>
-          <a:ln/>
-        </p:spPr>
-      </p:sp>
-      <p:sp>
-        <p:nvSpPr>
-          <p:cNvPr id="16" name="Text 14"/>
-          <p:cNvSpPr/>
-          <p:nvPr/>
-        </p:nvSpPr>
-        <p:spPr>
-          <a:xfrm>
-            <a:off x="914400" y="4187952"/>
-            <a:ext cx="384048" cy="384048"/>
-          </a:xfrm>
-          <a:prstGeom prst="rect">
-            <a:avLst/>
-          </a:prstGeom>
-          <a:noFill/>
-          <a:ln/>
-        </p:spPr>
-        <p:txBody>
-          <a:bodyPr wrap="square" lIns="0" tIns="0" rIns="0" bIns="0" rtlCol="0" anchor="ctr"/>
-          <a:lstStyle/>
-          <a:p>
-            <a:pPr algn="ctr" indent="0" marL="0">
-              <a:buNone/>
-            </a:pPr>
-            <a:r>
-              <a:rPr lang="en-US" sz="1500" b="1" dirty="0">
-                <a:solidFill>
-                  <a:srgbClr val="14171C"/>
-                </a:solidFill>
-                <a:latin typeface="Calibri" pitchFamily="34" charset="0"/>
-                <a:ea typeface="Calibri" pitchFamily="34" charset="-122"/>
-                <a:cs typeface="Calibri" pitchFamily="34" charset="-120"/>
-              </a:rPr>
-              <a:t>3</a:t>
-            </a:r>
-            <a:endParaRPr lang="en-US" sz="1500" dirty="0"/>
-          </a:p>
-        </p:txBody>
-      </p:sp>
-      <p:sp>
-        <p:nvSpPr>
-          <p:cNvPr id="17" name="Text 15"/>
-          <p:cNvSpPr/>
-          <p:nvPr/>
-        </p:nvSpPr>
-        <p:spPr>
-          <a:xfrm>
-            <a:off x="1481328" y="4069080"/>
-            <a:ext cx="4206240" cy="502920"/>
-          </a:xfrm>
-          <a:prstGeom prst="rect">
-            <a:avLst/>
-          </a:prstGeom>
-          <a:noFill/>
-          <a:ln/>
-        </p:spPr>
-        <p:txBody>
-          <a:bodyPr wrap="square" lIns="0" tIns="0" rIns="0" bIns="0" rtlCol="0" anchor="ctr"/>
-          <a:lstStyle/>
-          <a:p>
-            <a:pPr indent="0" marL="0">
-              <a:buNone/>
-            </a:pPr>
-            <a:r>
-              <a:rPr lang="en-US" sz="1500" b="1" dirty="0">
-                <a:solidFill>
-                  <a:srgbClr val="ECEBE6"/>
-                </a:solidFill>
-                <a:latin typeface="Calibri" pitchFamily="34" charset="0"/>
-                <a:ea typeface="Calibri" pitchFamily="34" charset="-122"/>
-                <a:cs typeface="Calibri" pitchFamily="34" charset="-120"/>
-              </a:rPr>
-              <a:t>Visto bueno al presupuesto de $500</a:t>
-            </a:r>
-            <a:endParaRPr lang="en-US" sz="1500" dirty="0"/>
-          </a:p>
-        </p:txBody>
-      </p:sp>
-      <p:sp>
-        <p:nvSpPr>
-          <p:cNvPr id="18" name="Text 16"/>
-          <p:cNvSpPr/>
-          <p:nvPr/>
-        </p:nvSpPr>
-        <p:spPr>
-          <a:xfrm>
-            <a:off x="5760720" y="4059936"/>
-            <a:ext cx="5577840" cy="658368"/>
-          </a:xfrm>
-          <a:prstGeom prst="rect">
-            <a:avLst/>
-          </a:prstGeom>
-          <a:noFill/>
-          <a:ln/>
-        </p:spPr>
-        <p:txBody>
-          <a:bodyPr wrap="square" lIns="0" tIns="0" rIns="0" bIns="0" rtlCol="0" anchor="ctr"/>
-          <a:lstStyle/>
-          <a:p>
-            <a:pPr indent="0" marL="0">
-              <a:buNone/>
-            </a:pPr>
-            <a:r>
-              <a:rPr lang="en-US" sz="1100" dirty="0">
-                <a:solidFill>
-                  <a:srgbClr val="8B949E"/>
-                </a:solidFill>
-                <a:latin typeface="Calibri" pitchFamily="34" charset="0"/>
-                <a:ea typeface="Calibri" pitchFamily="34" charset="-122"/>
-                <a:cs typeface="Calibri" pitchFamily="34" charset="-120"/>
-              </a:rPr>
-              <a:t>El paquete reducido (cámaras + Jetson 8 GB). El LiDAR queda para después.</a:t>
-            </a:r>
-            <a:endParaRPr lang="en-US" sz="1100" dirty="0"/>
-          </a:p>
-        </p:txBody>
-      </p:sp>
-      <p:sp>
-        <p:nvSpPr>
-          <p:cNvPr id="19" name="Shape 17"/>
-          <p:cNvSpPr/>
-          <p:nvPr/>
-        </p:nvSpPr>
-        <p:spPr>
-          <a:xfrm>
-            <a:off x="594360" y="5257800"/>
-            <a:ext cx="10972800" cy="868680"/>
-          </a:xfrm>
-          <a:prstGeom prst="roundRect">
-            <a:avLst>
-              <a:gd name="adj" fmla="val 9474"/>
-            </a:avLst>
-          </a:prstGeom>
-          <a:solidFill>
-            <a:srgbClr val="20242B"/>
-          </a:solidFill>
-          <a:ln/>
-          <a:effectLst>
-            <a:outerShdw sx="100000" sy="100000" kx="0" ky="0" algn="bl" rotWithShape="0" blurRad="152400" dist="38100" dir="5400000">
-              <a:srgbClr val="000000">
-                <a:alpha val="28000"/>
-              </a:srgbClr>
-            </a:outerShdw>
-          </a:effectLst>
-        </p:spPr>
-      </p:sp>
-      <p:sp>
-        <p:nvSpPr>
-          <p:cNvPr id="20" name="Text 18"/>
-          <p:cNvSpPr/>
-          <p:nvPr/>
-        </p:nvSpPr>
-        <p:spPr>
-          <a:xfrm>
-            <a:off x="960120" y="5257800"/>
-            <a:ext cx="10241280" cy="868680"/>
-          </a:xfrm>
-          <a:prstGeom prst="rect">
-            <a:avLst/>
-          </a:prstGeom>
-          <a:noFill/>
-          <a:ln/>
-        </p:spPr>
-        <p:txBody>
-          <a:bodyPr wrap="square" lIns="0" tIns="0" rIns="0" bIns="0" rtlCol="0" anchor="ctr"/>
-          <a:lstStyle/>
-          <a:p>
-            <a:pPr indent="0" marL="0">
-              <a:buNone/>
-            </a:pPr>
-            <a:r>
-              <a:rPr lang="en-US" sz="1600" b="1" dirty="0">
+          <p:cNvPr id="21" name="Text 19"/>
+          <p:cNvSpPr/>
+          <p:nvPr/>
+        </p:nvSpPr>
+        <p:spPr>
+          <a:xfrm>
+            <a:off x="960120" y="5486400"/>
+            <a:ext cx="10241280" cy="777240"/>
+          </a:xfrm>
+          <a:prstGeom prst="rect">
+            <a:avLst/>
+          </a:prstGeom>
+          <a:noFill/>
+          <a:ln/>
+        </p:spPr>
+        <p:txBody>
+          <a:bodyPr wrap="square" lIns="0" tIns="0" rIns="0" bIns="0" rtlCol="0" anchor="ctr"/>
+          <a:lstStyle/>
+          <a:p>
+            <a:pPr indent="0" marL="0">
+              <a:buNone/>
+            </a:pPr>
+            <a:r>
+              <a:rPr lang="en-US" sz="1400" b="1" dirty="0">
                 <a:solidFill>
                   <a:srgbClr val="F5C518"/>
                 </a:solidFill>
@@ -6863,9 +9382,9 @@
                 <a:ea typeface="Calibri" pitchFamily="34" charset="-122"/>
                 <a:cs typeface="Calibri" pitchFamily="34" charset="-120"/>
               </a:rPr>
-              <a:t>El software ya está. Lo único que falta es un equipo que encienda.</a:t>
-            </a:r>
-            <a:endParaRPr lang="en-US" sz="1600" dirty="0"/>
+              <a:t>No le pido a Montasa que financie mi sueño. Le pido que recupere una máquina suya — y yo pongo todo lo demás.</a:t>
+            </a:r>
+            <a:endParaRPr lang="en-US" sz="1400" dirty="0"/>
           </a:p>
         </p:txBody>
       </p:sp>

--- a/presentaciones/TaTa_Estado_y_Pedido_Omar.pptx
+++ b/presentaciones/TaTa_Estado_y_Pedido_Omar.pptx
@@ -16,9 +16,10 @@
     <p:sldId id="264" r:id="rId10"/>
     <p:sldId id="265" r:id="rId11"/>
     <p:sldId id="266" r:id="rId12"/>
+    <p:sldId id="267" r:id="rId13"/>
   </p:sldIdLst>
   <p:notesMasterIdLst>
-    <p:notesMasterId r:id="rId13"/>
+    <p:notesMasterId r:id="rId14"/>
   </p:notesMasterIdLst>
   <p:sldSz cx="12192000" cy="6858000"/>
   <p:notesSz cx="6858000" cy="12192000"/>
@@ -600,7 +601,7 @@
           <a:p>
             <a:r>
               <a:rPr lang="en-US" dirty="0"/>
-              <a:t>El ahorro es el titular, y el remate es que lo pago yo: cero riesgo de hardware para Montasa. El LiDAR no se descarta, es expansion.</a:t>
+              <a:t>Este es el slide que desarma el riesgo para Omar: no se le pide comprar hardware. El NRE y el computo los pone maje. Montasa solo recupera un activo propio.</a:t>
             </a:r>
             <a:endParaRPr lang="en-US" dirty="0"/>
           </a:p>
@@ -688,7 +689,7 @@
           <a:p>
             <a:r>
               <a:rPr lang="en-US" dirty="0"/>
-              <a:t>Cerrar con la frase. Los tres pedidos: uno recupera un activo, otro es logistica de taller, el tercero no cuesta nada. Ninguno es comprar hardware.</a:t>
+              <a:t>El ahorro es el titular, y el remate es que lo pago yo: cero riesgo de hardware para Montasa. El LiDAR no se descarta, es expansion.</a:t>
             </a:r>
             <a:endParaRPr lang="en-US" dirty="0"/>
           </a:p>
@@ -712,6 +713,94 @@
             <a:fld id="{F7021451-1387-4CA6-816F-3879F97B5CBC}" type="slidenum">
               <a:rPr lang="en-US"/>
               <a:t>11</a:t>
+            </a:fld>
+            <a:endParaRPr lang="en-US"/>
+          </a:p>
+        </p:txBody>
+      </p:sp>
+    </p:spTree>
+    <p:extLst>
+      <p:ext uri="{BB962C8B-B14F-4D97-AF65-F5344CB8AC3E}">
+        <p14:creationId xmlns:p14="http://schemas.microsoft.com/office/powerpoint/2010/main" val="1024086991"/>
+      </p:ext>
+    </p:extLst>
+  </p:cSld>
+  <p:clrMapOvr>
+    <a:masterClrMapping/>
+  </p:clrMapOvr>
+</p:notes>
+</file>
+
+<file path=ppt/notesSlides/notesSlide12.xml><?xml version="1.0" encoding="utf-8"?>
+<p:notes xmlns:a="http://schemas.openxmlformats.org/drawingml/2006/main" xmlns:r="http://schemas.openxmlformats.org/officeDocument/2006/relationships" xmlns:p="http://schemas.openxmlformats.org/presentationml/2006/main">
+  <p:cSld>
+    <p:spTree>
+      <p:nvGrpSpPr>
+        <p:cNvPr id="1" name=""/>
+        <p:cNvGrpSpPr/>
+        <p:nvPr/>
+      </p:nvGrpSpPr>
+      <p:grpSpPr>
+        <a:xfrm>
+          <a:off x="0" y="0"/>
+          <a:ext cx="0" cy="0"/>
+          <a:chOff x="0" y="0"/>
+          <a:chExt cx="0" cy="0"/>
+        </a:xfrm>
+      </p:grpSpPr>
+      <p:sp>
+        <p:nvSpPr>
+          <p:cNvPr id="2" name="Slide Image Placeholder 1"/>
+          <p:cNvSpPr>
+            <a:spLocks noGrp="1" noRot="1" noChangeAspect="1"/>
+          </p:cNvSpPr>
+          <p:nvPr>
+            <p:ph type="sldImg"/>
+          </p:nvPr>
+        </p:nvSpPr>
+        <p:spPr/>
+      </p:sp>
+      <p:sp>
+        <p:nvSpPr>
+          <p:cNvPr id="3" name="Notes Placeholder 2"/>
+          <p:cNvSpPr>
+            <a:spLocks noGrp="1"/>
+          </p:cNvSpPr>
+          <p:nvPr>
+            <p:ph type="body" idx="1"/>
+          </p:nvPr>
+        </p:nvSpPr>
+        <p:spPr/>
+        <p:txBody>
+          <a:bodyPr/>
+          <a:lstStyle/>
+          <a:p>
+            <a:r>
+              <a:rPr lang="en-US" dirty="0"/>
+              <a:t>Cerrar con la frase. Los tres pedidos: uno recupera un activo, otro es logistica de taller, el tercero no cuesta nada. Ninguno es comprar hardware.</a:t>
+            </a:r>
+            <a:endParaRPr lang="en-US" dirty="0"/>
+          </a:p>
+        </p:txBody>
+      </p:sp>
+      <p:sp>
+        <p:nvSpPr>
+          <p:cNvPr id="4" name="Slide Number Placeholder 3"/>
+          <p:cNvSpPr>
+            <a:spLocks noGrp="1"/>
+          </p:cNvSpPr>
+          <p:nvPr>
+            <p:ph type="sldNum" sz="quarter" idx="10"/>
+          </p:nvPr>
+        </p:nvSpPr>
+        <p:spPr/>
+        <p:txBody>
+          <a:bodyPr/>
+          <a:lstStyle/>
+          <a:p>
+            <a:fld id="{F7021451-1387-4CA6-816F-3879F97B5CBC}" type="slidenum">
+              <a:rPr lang="en-US"/>
+              <a:t>12</a:t>
             </a:fld>
             <a:endParaRPr lang="en-US"/>
           </a:p>
@@ -1392,7 +1481,7 @@
           <a:p>
             <a:r>
               <a:rPr lang="en-US" dirty="0"/>
-              <a:t>Este es el slide que desarma el riesgo para Omar: no se le pide comprar hardware. El NRE y el computo los pone maje. Montasa solo recupera un activo propio.</a:t>
+              <a:t>El siguiente paso usa solo camaras + el bus: odometria + EKF/ArUco. El LiDAR/SLAM sigue en el plan, se secuencia despues de formalizar. No se descarta.</a:t>
             </a:r>
             <a:endParaRPr lang="en-US" dirty="0"/>
           </a:p>
@@ -2455,6 +2544,750 @@
     <p:bg>
       <p:bgPr>
         <a:solidFill>
+          <a:srgbClr val="14171C"/>
+        </a:solidFill>
+      </p:bgPr>
+    </p:bg>
+    <p:spTree>
+      <p:nvGrpSpPr>
+        <p:cNvPr id="1" name=""/>
+        <p:cNvGrpSpPr/>
+        <p:nvPr/>
+      </p:nvGrpSpPr>
+      <p:grpSpPr>
+        <a:xfrm>
+          <a:off x="0" y="0"/>
+          <a:ext cx="0" cy="0"/>
+          <a:chOff x="0" y="0"/>
+          <a:chExt cx="0" cy="0"/>
+        </a:xfrm>
+      </p:grpSpPr>
+      <p:sp>
+        <p:nvSpPr>
+          <p:cNvPr id="2" name="Text 0"/>
+          <p:cNvSpPr/>
+          <p:nvPr/>
+        </p:nvSpPr>
+        <p:spPr>
+          <a:xfrm>
+            <a:off x="594360" y="384048"/>
+            <a:ext cx="10972800" cy="777240"/>
+          </a:xfrm>
+          <a:prstGeom prst="rect">
+            <a:avLst/>
+          </a:prstGeom>
+          <a:noFill/>
+          <a:ln/>
+        </p:spPr>
+        <p:txBody>
+          <a:bodyPr wrap="square" lIns="0" tIns="0" rIns="0" bIns="0" rtlCol="0" anchor="ctr"/>
+          <a:lstStyle/>
+          <a:p>
+            <a:pPr indent="0" marL="0">
+              <a:buNone/>
+            </a:pPr>
+            <a:r>
+              <a:rPr lang="en-US" sz="3300" b="1" dirty="0">
+                <a:solidFill>
+                  <a:srgbClr val="ECEBE6"/>
+                </a:solidFill>
+                <a:latin typeface="Cambria" pitchFamily="34" charset="0"/>
+                <a:ea typeface="Cambria" pitchFamily="34" charset="-122"/>
+                <a:cs typeface="Cambria" pitchFamily="34" charset="-120"/>
+              </a:rPr>
+              <a:t>Quién pone qué</a:t>
+            </a:r>
+            <a:endParaRPr lang="en-US" sz="3300" dirty="0"/>
+          </a:p>
+        </p:txBody>
+      </p:sp>
+      <p:sp>
+        <p:nvSpPr>
+          <p:cNvPr id="3" name="Text 1"/>
+          <p:cNvSpPr/>
+          <p:nvPr/>
+        </p:nvSpPr>
+        <p:spPr>
+          <a:xfrm>
+            <a:off x="594360" y="1115568"/>
+            <a:ext cx="10972800" cy="365760"/>
+          </a:xfrm>
+          <a:prstGeom prst="rect">
+            <a:avLst/>
+          </a:prstGeom>
+          <a:noFill/>
+          <a:ln/>
+        </p:spPr>
+        <p:txBody>
+          <a:bodyPr wrap="square" lIns="0" tIns="0" rIns="0" bIns="0" rtlCol="0" anchor="ctr"/>
+          <a:lstStyle/>
+          <a:p>
+            <a:pPr indent="0" marL="0">
+              <a:buNone/>
+            </a:pPr>
+            <a:r>
+              <a:rPr lang="en-US" sz="1350" dirty="0">
+                <a:solidFill>
+                  <a:srgbClr val="8B949E"/>
+                </a:solidFill>
+                <a:latin typeface="Calibri" pitchFamily="34" charset="0"/>
+                <a:ea typeface="Calibri" pitchFamily="34" charset="-122"/>
+                <a:cs typeface="Calibri" pitchFamily="34" charset="-120"/>
+              </a:rPr>
+              <a:t>Pongo mi plata en lo que es mío. A Montasa le pido recuperar un activo suyo</a:t>
+            </a:r>
+            <a:endParaRPr lang="en-US" sz="1350" dirty="0"/>
+          </a:p>
+        </p:txBody>
+      </p:sp>
+      <p:sp>
+        <p:nvSpPr>
+          <p:cNvPr id="4" name="Shape 2"/>
+          <p:cNvSpPr/>
+          <p:nvPr/>
+        </p:nvSpPr>
+        <p:spPr>
+          <a:xfrm>
+            <a:off x="594360" y="1828800"/>
+            <a:ext cx="5440680" cy="3383280"/>
+          </a:xfrm>
+          <a:prstGeom prst="roundRect">
+            <a:avLst>
+              <a:gd name="adj" fmla="val 2432"/>
+            </a:avLst>
+          </a:prstGeom>
+          <a:solidFill>
+            <a:srgbClr val="20242B"/>
+          </a:solidFill>
+          <a:ln/>
+          <a:effectLst>
+            <a:outerShdw sx="100000" sy="100000" kx="0" ky="0" algn="bl" rotWithShape="0" blurRad="152400" dist="38100" dir="5400000">
+              <a:srgbClr val="000000">
+                <a:alpha val="28000"/>
+              </a:srgbClr>
+            </a:outerShdw>
+          </a:effectLst>
+        </p:spPr>
+      </p:sp>
+      <p:sp>
+        <p:nvSpPr>
+          <p:cNvPr id="5" name="Shape 3"/>
+          <p:cNvSpPr/>
+          <p:nvPr/>
+        </p:nvSpPr>
+        <p:spPr>
+          <a:xfrm>
+            <a:off x="594360" y="1828800"/>
+            <a:ext cx="5440680" cy="109728"/>
+          </a:xfrm>
+          <a:prstGeom prst="rect">
+            <a:avLst/>
+          </a:prstGeom>
+          <a:solidFill>
+            <a:srgbClr val="F5C518"/>
+          </a:solidFill>
+          <a:ln/>
+        </p:spPr>
+      </p:sp>
+      <p:sp>
+        <p:nvSpPr>
+          <p:cNvPr id="6" name="Text 4"/>
+          <p:cNvSpPr/>
+          <p:nvPr/>
+        </p:nvSpPr>
+        <p:spPr>
+          <a:xfrm>
+            <a:off x="914400" y="2103120"/>
+            <a:ext cx="4846320" cy="457200"/>
+          </a:xfrm>
+          <a:prstGeom prst="rect">
+            <a:avLst/>
+          </a:prstGeom>
+          <a:noFill/>
+          <a:ln/>
+        </p:spPr>
+        <p:txBody>
+          <a:bodyPr wrap="square" lIns="0" tIns="0" rIns="0" bIns="0" rtlCol="0" anchor="ctr"/>
+          <a:lstStyle/>
+          <a:p>
+            <a:pPr indent="0" marL="0">
+              <a:buNone/>
+            </a:pPr>
+            <a:r>
+              <a:rPr lang="en-US" sz="1900" b="1" dirty="0">
+                <a:solidFill>
+                  <a:srgbClr val="F5C518"/>
+                </a:solidFill>
+                <a:latin typeface="Cambria" pitchFamily="34" charset="0"/>
+                <a:ea typeface="Cambria" pitchFamily="34" charset="-122"/>
+                <a:cs typeface="Cambria" pitchFamily="34" charset="-120"/>
+              </a:rPr>
+              <a:t>Lo pongo yo</a:t>
+            </a:r>
+            <a:endParaRPr lang="en-US" sz="1900" dirty="0"/>
+          </a:p>
+        </p:txBody>
+      </p:sp>
+      <p:sp>
+        <p:nvSpPr>
+          <p:cNvPr id="7" name="Text 5"/>
+          <p:cNvSpPr/>
+          <p:nvPr/>
+        </p:nvSpPr>
+        <p:spPr>
+          <a:xfrm>
+            <a:off x="914400" y="2697480"/>
+            <a:ext cx="4846320" cy="320040"/>
+          </a:xfrm>
+          <a:prstGeom prst="rect">
+            <a:avLst/>
+          </a:prstGeom>
+          <a:noFill/>
+          <a:ln/>
+        </p:spPr>
+        <p:txBody>
+          <a:bodyPr wrap="square" lIns="0" tIns="0" rIns="0" bIns="0" rtlCol="0" anchor="ctr"/>
+          <a:lstStyle/>
+          <a:p>
+            <a:pPr indent="0" marL="0">
+              <a:buNone/>
+            </a:pPr>
+            <a:r>
+              <a:rPr lang="en-US" sz="1350" b="1" dirty="0">
+                <a:solidFill>
+                  <a:srgbClr val="ECEBE6"/>
+                </a:solidFill>
+                <a:latin typeface="Calibri" pitchFamily="34" charset="0"/>
+                <a:ea typeface="Calibri" pitchFamily="34" charset="-122"/>
+                <a:cs typeface="Calibri" pitchFamily="34" charset="-120"/>
+              </a:rPr>
+              <a:t>NRE / ingeniería</a:t>
+            </a:r>
+            <a:endParaRPr lang="en-US" sz="1350" dirty="0"/>
+          </a:p>
+        </p:txBody>
+      </p:sp>
+      <p:sp>
+        <p:nvSpPr>
+          <p:cNvPr id="8" name="Text 6"/>
+          <p:cNvSpPr/>
+          <p:nvPr/>
+        </p:nvSpPr>
+        <p:spPr>
+          <a:xfrm>
+            <a:off x="914400" y="2990088"/>
+            <a:ext cx="4846320" cy="502920"/>
+          </a:xfrm>
+          <a:prstGeom prst="rect">
+            <a:avLst/>
+          </a:prstGeom>
+          <a:noFill/>
+          <a:ln/>
+        </p:spPr>
+        <p:txBody>
+          <a:bodyPr wrap="square" lIns="0" tIns="0" rIns="0" bIns="0" rtlCol="0" anchor="t"/>
+          <a:lstStyle/>
+          <a:p>
+            <a:pPr indent="0" marL="0">
+              <a:buNone/>
+            </a:pPr>
+            <a:r>
+              <a:rPr lang="en-US" sz="1100" dirty="0">
+                <a:solidFill>
+                  <a:srgbClr val="8B949E"/>
+                </a:solidFill>
+                <a:latin typeface="Calibri" pitchFamily="34" charset="0"/>
+                <a:ea typeface="Calibri" pitchFamily="34" charset="-122"/>
+                <a:cs typeface="Calibri" pitchFamily="34" charset="-120"/>
+              </a:rPr>
+              <a:t>Todo lo comprado en C&amp;D: transceptores, el emulador, el ESP32, componentes.</a:t>
+            </a:r>
+            <a:endParaRPr lang="en-US" sz="1100" dirty="0"/>
+          </a:p>
+        </p:txBody>
+      </p:sp>
+      <p:sp>
+        <p:nvSpPr>
+          <p:cNvPr id="9" name="Text 7"/>
+          <p:cNvSpPr/>
+          <p:nvPr/>
+        </p:nvSpPr>
+        <p:spPr>
+          <a:xfrm>
+            <a:off x="914400" y="3520440"/>
+            <a:ext cx="4846320" cy="320040"/>
+          </a:xfrm>
+          <a:prstGeom prst="rect">
+            <a:avLst/>
+          </a:prstGeom>
+          <a:noFill/>
+          <a:ln/>
+        </p:spPr>
+        <p:txBody>
+          <a:bodyPr wrap="square" lIns="0" tIns="0" rIns="0" bIns="0" rtlCol="0" anchor="ctr"/>
+          <a:lstStyle/>
+          <a:p>
+            <a:pPr indent="0" marL="0">
+              <a:buNone/>
+            </a:pPr>
+            <a:r>
+              <a:rPr lang="en-US" sz="1350" b="1" dirty="0">
+                <a:solidFill>
+                  <a:srgbClr val="ECEBE6"/>
+                </a:solidFill>
+                <a:latin typeface="Calibri" pitchFamily="34" charset="0"/>
+                <a:ea typeface="Calibri" pitchFamily="34" charset="-122"/>
+                <a:cs typeface="Calibri" pitchFamily="34" charset="-120"/>
+              </a:rPr>
+              <a:t>El cómputo (la Jetson)</a:t>
+            </a:r>
+            <a:endParaRPr lang="en-US" sz="1350" dirty="0"/>
+          </a:p>
+        </p:txBody>
+      </p:sp>
+      <p:sp>
+        <p:nvSpPr>
+          <p:cNvPr id="10" name="Text 8"/>
+          <p:cNvSpPr/>
+          <p:nvPr/>
+        </p:nvSpPr>
+        <p:spPr>
+          <a:xfrm>
+            <a:off x="914400" y="3813048"/>
+            <a:ext cx="4846320" cy="502920"/>
+          </a:xfrm>
+          <a:prstGeom prst="rect">
+            <a:avLst/>
+          </a:prstGeom>
+          <a:noFill/>
+          <a:ln/>
+        </p:spPr>
+        <p:txBody>
+          <a:bodyPr wrap="square" lIns="0" tIns="0" rIns="0" bIns="0" rtlCol="0" anchor="t"/>
+          <a:lstStyle/>
+          <a:p>
+            <a:pPr indent="0" marL="0">
+              <a:buNone/>
+            </a:pPr>
+            <a:r>
+              <a:rPr lang="en-US" sz="1100" dirty="0">
+                <a:solidFill>
+                  <a:srgbClr val="8B949E"/>
+                </a:solidFill>
+                <a:latin typeface="Calibri" pitchFamily="34" charset="0"/>
+                <a:ea typeface="Calibri" pitchFamily="34" charset="-122"/>
+                <a:cs typeface="Calibri" pitchFamily="34" charset="-120"/>
+              </a:rPr>
+              <a:t>También es parte del NRE. Lo cubro yo.</a:t>
+            </a:r>
+            <a:endParaRPr lang="en-US" sz="1100" dirty="0"/>
+          </a:p>
+        </p:txBody>
+      </p:sp>
+      <p:sp>
+        <p:nvSpPr>
+          <p:cNvPr id="11" name="Text 9"/>
+          <p:cNvSpPr/>
+          <p:nvPr/>
+        </p:nvSpPr>
+        <p:spPr>
+          <a:xfrm>
+            <a:off x="914400" y="4343400"/>
+            <a:ext cx="4846320" cy="320040"/>
+          </a:xfrm>
+          <a:prstGeom prst="rect">
+            <a:avLst/>
+          </a:prstGeom>
+          <a:noFill/>
+          <a:ln/>
+        </p:spPr>
+        <p:txBody>
+          <a:bodyPr wrap="square" lIns="0" tIns="0" rIns="0" bIns="0" rtlCol="0" anchor="ctr"/>
+          <a:lstStyle/>
+          <a:p>
+            <a:pPr indent="0" marL="0">
+              <a:buNone/>
+            </a:pPr>
+            <a:r>
+              <a:rPr lang="en-US" sz="1350" b="1" dirty="0">
+                <a:solidFill>
+                  <a:srgbClr val="ECEBE6"/>
+                </a:solidFill>
+                <a:latin typeface="Calibri" pitchFamily="34" charset="0"/>
+                <a:ea typeface="Calibri" pitchFamily="34" charset="-122"/>
+                <a:cs typeface="Calibri" pitchFamily="34" charset="-120"/>
+              </a:rPr>
+              <a:t>Por qué</a:t>
+            </a:r>
+            <a:endParaRPr lang="en-US" sz="1350" dirty="0"/>
+          </a:p>
+        </p:txBody>
+      </p:sp>
+      <p:sp>
+        <p:nvSpPr>
+          <p:cNvPr id="12" name="Text 10"/>
+          <p:cNvSpPr/>
+          <p:nvPr/>
+        </p:nvSpPr>
+        <p:spPr>
+          <a:xfrm>
+            <a:off x="914400" y="4636008"/>
+            <a:ext cx="4846320" cy="502920"/>
+          </a:xfrm>
+          <a:prstGeom prst="rect">
+            <a:avLst/>
+          </a:prstGeom>
+          <a:noFill/>
+          <a:ln/>
+        </p:spPr>
+        <p:txBody>
+          <a:bodyPr wrap="square" lIns="0" tIns="0" rIns="0" bIns="0" rtlCol="0" anchor="t"/>
+          <a:lstStyle/>
+          <a:p>
+            <a:pPr indent="0" marL="0">
+              <a:buNone/>
+            </a:pPr>
+            <a:r>
+              <a:rPr lang="en-US" sz="1100" dirty="0">
+                <a:solidFill>
+                  <a:srgbClr val="8B949E"/>
+                </a:solidFill>
+                <a:latin typeface="Calibri" pitchFamily="34" charset="0"/>
+                <a:ea typeface="Calibri" pitchFamily="34" charset="-122"/>
+                <a:cs typeface="Calibri" pitchFamily="34" charset="-120"/>
+              </a:rPr>
+              <a:t>Es mi idea, mi proyecto, mi sueño. El riesgo de la apuesta es mío.</a:t>
+            </a:r>
+            <a:endParaRPr lang="en-US" sz="1100" dirty="0"/>
+          </a:p>
+        </p:txBody>
+      </p:sp>
+      <p:sp>
+        <p:nvSpPr>
+          <p:cNvPr id="13" name="Shape 11"/>
+          <p:cNvSpPr/>
+          <p:nvPr/>
+        </p:nvSpPr>
+        <p:spPr>
+          <a:xfrm>
+            <a:off x="6263640" y="1828800"/>
+            <a:ext cx="5303520" cy="3383280"/>
+          </a:xfrm>
+          <a:prstGeom prst="roundRect">
+            <a:avLst>
+              <a:gd name="adj" fmla="val 2432"/>
+            </a:avLst>
+          </a:prstGeom>
+          <a:solidFill>
+            <a:srgbClr val="20242B"/>
+          </a:solidFill>
+          <a:ln/>
+          <a:effectLst>
+            <a:outerShdw sx="100000" sy="100000" kx="0" ky="0" algn="bl" rotWithShape="0" blurRad="152400" dist="38100" dir="5400000">
+              <a:srgbClr val="000000">
+                <a:alpha val="28000"/>
+              </a:srgbClr>
+            </a:outerShdw>
+          </a:effectLst>
+        </p:spPr>
+      </p:sp>
+      <p:sp>
+        <p:nvSpPr>
+          <p:cNvPr id="14" name="Shape 12"/>
+          <p:cNvSpPr/>
+          <p:nvPr/>
+        </p:nvSpPr>
+        <p:spPr>
+          <a:xfrm>
+            <a:off x="6263640" y="1828800"/>
+            <a:ext cx="5303520" cy="109728"/>
+          </a:xfrm>
+          <a:prstGeom prst="rect">
+            <a:avLst/>
+          </a:prstGeom>
+          <a:solidFill>
+            <a:srgbClr val="37C3FF"/>
+          </a:solidFill>
+          <a:ln/>
+        </p:spPr>
+      </p:sp>
+      <p:sp>
+        <p:nvSpPr>
+          <p:cNvPr id="15" name="Text 13"/>
+          <p:cNvSpPr/>
+          <p:nvPr/>
+        </p:nvSpPr>
+        <p:spPr>
+          <a:xfrm>
+            <a:off x="6583680" y="2103120"/>
+            <a:ext cx="4663440" cy="457200"/>
+          </a:xfrm>
+          <a:prstGeom prst="rect">
+            <a:avLst/>
+          </a:prstGeom>
+          <a:noFill/>
+          <a:ln/>
+        </p:spPr>
+        <p:txBody>
+          <a:bodyPr wrap="square" lIns="0" tIns="0" rIns="0" bIns="0" rtlCol="0" anchor="ctr"/>
+          <a:lstStyle/>
+          <a:p>
+            <a:pPr indent="0" marL="0">
+              <a:buNone/>
+            </a:pPr>
+            <a:r>
+              <a:rPr lang="en-US" sz="1900" b="1" dirty="0">
+                <a:solidFill>
+                  <a:srgbClr val="37C3FF"/>
+                </a:solidFill>
+                <a:latin typeface="Cambria" pitchFamily="34" charset="0"/>
+                <a:ea typeface="Cambria" pitchFamily="34" charset="-122"/>
+                <a:cs typeface="Cambria" pitchFamily="34" charset="-120"/>
+              </a:rPr>
+              <a:t>Lo pone Montasa</a:t>
+            </a:r>
+            <a:endParaRPr lang="en-US" sz="1900" dirty="0"/>
+          </a:p>
+        </p:txBody>
+      </p:sp>
+      <p:sp>
+        <p:nvSpPr>
+          <p:cNvPr id="16" name="Text 14"/>
+          <p:cNvSpPr/>
+          <p:nvPr/>
+        </p:nvSpPr>
+        <p:spPr>
+          <a:xfrm>
+            <a:off x="6583680" y="2697480"/>
+            <a:ext cx="4663440" cy="320040"/>
+          </a:xfrm>
+          <a:prstGeom prst="rect">
+            <a:avLst/>
+          </a:prstGeom>
+          <a:noFill/>
+          <a:ln/>
+        </p:spPr>
+        <p:txBody>
+          <a:bodyPr wrap="square" lIns="0" tIns="0" rIns="0" bIns="0" rtlCol="0" anchor="ctr"/>
+          <a:lstStyle/>
+          <a:p>
+            <a:pPr indent="0" marL="0">
+              <a:buNone/>
+            </a:pPr>
+            <a:r>
+              <a:rPr lang="en-US" sz="1350" b="1" dirty="0">
+                <a:solidFill>
+                  <a:srgbClr val="ECEBE6"/>
+                </a:solidFill>
+                <a:latin typeface="Calibri" pitchFamily="34" charset="0"/>
+                <a:ea typeface="Calibri" pitchFamily="34" charset="-122"/>
+                <a:cs typeface="Calibri" pitchFamily="34" charset="-120"/>
+              </a:rPr>
+              <a:t>Reparar el MT 122</a:t>
+            </a:r>
+            <a:endParaRPr lang="en-US" sz="1350" dirty="0"/>
+          </a:p>
+        </p:txBody>
+      </p:sp>
+      <p:sp>
+        <p:nvSpPr>
+          <p:cNvPr id="17" name="Text 15"/>
+          <p:cNvSpPr/>
+          <p:nvPr/>
+        </p:nvSpPr>
+        <p:spPr>
+          <a:xfrm>
+            <a:off x="6583680" y="2990088"/>
+            <a:ext cx="4663440" cy="685800"/>
+          </a:xfrm>
+          <a:prstGeom prst="rect">
+            <a:avLst/>
+          </a:prstGeom>
+          <a:noFill/>
+          <a:ln/>
+        </p:spPr>
+        <p:txBody>
+          <a:bodyPr wrap="square" lIns="0" tIns="0" rIns="0" bIns="0" rtlCol="0" anchor="t"/>
+          <a:lstStyle/>
+          <a:p>
+            <a:pPr indent="0" marL="0">
+              <a:buNone/>
+            </a:pPr>
+            <a:r>
+              <a:rPr lang="en-US" sz="1100" dirty="0">
+                <a:solidFill>
+                  <a:srgbClr val="8B949E"/>
+                </a:solidFill>
+                <a:latin typeface="Calibri" pitchFamily="34" charset="0"/>
+                <a:ea typeface="Calibri" pitchFamily="34" charset="-122"/>
+                <a:cs typeface="Calibri" pitchFamily="34" charset="-120"/>
+              </a:rPr>
+              <a:t>Su propio activo, que vuelve a rentar. No es gasto del proyecto.</a:t>
+            </a:r>
+            <a:endParaRPr lang="en-US" sz="1100" dirty="0"/>
+          </a:p>
+        </p:txBody>
+      </p:sp>
+      <p:sp>
+        <p:nvSpPr>
+          <p:cNvPr id="18" name="Text 16"/>
+          <p:cNvSpPr/>
+          <p:nvPr/>
+        </p:nvSpPr>
+        <p:spPr>
+          <a:xfrm>
+            <a:off x="6583680" y="3886200"/>
+            <a:ext cx="4663440" cy="320040"/>
+          </a:xfrm>
+          <a:prstGeom prst="rect">
+            <a:avLst/>
+          </a:prstGeom>
+          <a:noFill/>
+          <a:ln/>
+        </p:spPr>
+        <p:txBody>
+          <a:bodyPr wrap="square" lIns="0" tIns="0" rIns="0" bIns="0" rtlCol="0" anchor="ctr"/>
+          <a:lstStyle/>
+          <a:p>
+            <a:pPr indent="0" marL="0">
+              <a:buNone/>
+            </a:pPr>
+            <a:r>
+              <a:rPr lang="en-US" sz="1350" b="1" dirty="0">
+                <a:solidFill>
+                  <a:srgbClr val="ECEBE6"/>
+                </a:solidFill>
+                <a:latin typeface="Calibri" pitchFamily="34" charset="0"/>
+                <a:ea typeface="Calibri" pitchFamily="34" charset="-122"/>
+                <a:cs typeface="Calibri" pitchFamily="34" charset="-120"/>
+              </a:rPr>
+              <a:t>Salario y confianza</a:t>
+            </a:r>
+            <a:endParaRPr lang="en-US" sz="1350" dirty="0"/>
+          </a:p>
+        </p:txBody>
+      </p:sp>
+      <p:sp>
+        <p:nvSpPr>
+          <p:cNvPr id="19" name="Text 17"/>
+          <p:cNvSpPr/>
+          <p:nvPr/>
+        </p:nvSpPr>
+        <p:spPr>
+          <a:xfrm>
+            <a:off x="6583680" y="4178808"/>
+            <a:ext cx="4663440" cy="685800"/>
+          </a:xfrm>
+          <a:prstGeom prst="rect">
+            <a:avLst/>
+          </a:prstGeom>
+          <a:noFill/>
+          <a:ln/>
+        </p:spPr>
+        <p:txBody>
+          <a:bodyPr wrap="square" lIns="0" tIns="0" rIns="0" bIns="0" rtlCol="0" anchor="t"/>
+          <a:lstStyle/>
+          <a:p>
+            <a:pPr indent="0" marL="0">
+              <a:buNone/>
+            </a:pPr>
+            <a:r>
+              <a:rPr lang="en-US" sz="1100" dirty="0">
+                <a:solidFill>
+                  <a:srgbClr val="8B949E"/>
+                </a:solidFill>
+                <a:latin typeface="Calibri" pitchFamily="34" charset="0"/>
+                <a:ea typeface="Calibri" pitchFamily="34" charset="-122"/>
+                <a:cs typeface="Calibri" pitchFamily="34" charset="-120"/>
+              </a:rPr>
+              <a:t>Lo que Montasa ya me ha dado. Lo tomo como su inversión en esto.</a:t>
+            </a:r>
+            <a:endParaRPr lang="en-US" sz="1100" dirty="0"/>
+          </a:p>
+        </p:txBody>
+      </p:sp>
+      <p:sp>
+        <p:nvSpPr>
+          <p:cNvPr id="20" name="Shape 18"/>
+          <p:cNvSpPr/>
+          <p:nvPr/>
+        </p:nvSpPr>
+        <p:spPr>
+          <a:xfrm>
+            <a:off x="594360" y="5486400"/>
+            <a:ext cx="10972800" cy="777240"/>
+          </a:xfrm>
+          <a:prstGeom prst="roundRect">
+            <a:avLst>
+              <a:gd name="adj" fmla="val 10588"/>
+            </a:avLst>
+          </a:prstGeom>
+          <a:solidFill>
+            <a:srgbClr val="20242B"/>
+          </a:solidFill>
+          <a:ln/>
+          <a:effectLst>
+            <a:outerShdw sx="100000" sy="100000" kx="0" ky="0" algn="bl" rotWithShape="0" blurRad="152400" dist="38100" dir="5400000">
+              <a:srgbClr val="000000">
+                <a:alpha val="28000"/>
+              </a:srgbClr>
+            </a:outerShdw>
+          </a:effectLst>
+        </p:spPr>
+      </p:sp>
+      <p:sp>
+        <p:nvSpPr>
+          <p:cNvPr id="21" name="Text 19"/>
+          <p:cNvSpPr/>
+          <p:nvPr/>
+        </p:nvSpPr>
+        <p:spPr>
+          <a:xfrm>
+            <a:off x="960120" y="5486400"/>
+            <a:ext cx="10241280" cy="777240"/>
+          </a:xfrm>
+          <a:prstGeom prst="rect">
+            <a:avLst/>
+          </a:prstGeom>
+          <a:noFill/>
+          <a:ln/>
+        </p:spPr>
+        <p:txBody>
+          <a:bodyPr wrap="square" lIns="0" tIns="0" rIns="0" bIns="0" rtlCol="0" anchor="ctr"/>
+          <a:lstStyle/>
+          <a:p>
+            <a:pPr indent="0" marL="0">
+              <a:buNone/>
+            </a:pPr>
+            <a:r>
+              <a:rPr lang="en-US" sz="1400" b="1" dirty="0">
+                <a:solidFill>
+                  <a:srgbClr val="F5C518"/>
+                </a:solidFill>
+                <a:latin typeface="Calibri" pitchFamily="34" charset="0"/>
+                <a:ea typeface="Calibri" pitchFamily="34" charset="-122"/>
+                <a:cs typeface="Calibri" pitchFamily="34" charset="-120"/>
+              </a:rPr>
+              <a:t>No le pido a Montasa que financie mi sueño. Le pido que recupere una máquina suya — y yo pongo todo lo demás.</a:t>
+            </a:r>
+            <a:endParaRPr lang="en-US" sz="1400" dirty="0"/>
+          </a:p>
+        </p:txBody>
+      </p:sp>
+    </p:spTree>
+  </p:cSld>
+  <p:clrMapOvr>
+    <a:masterClrMapping/>
+  </p:clrMapOvr>
+</p:sld>
+</file>
+
+<file path=ppt/slides/slide11.xml><?xml version="1.0" encoding="utf-8"?>
+<p:sld xmlns:a="http://schemas.openxmlformats.org/drawingml/2006/main" xmlns:r="http://schemas.openxmlformats.org/officeDocument/2006/relationships" xmlns:p="http://schemas.openxmlformats.org/presentationml/2006/main">
+  <p:cSld name="Slide 11">
+    <p:bg>
+      <p:bgPr>
+        <a:solidFill>
           <a:srgbClr val="F4F5F7"/>
         </a:solidFill>
       </p:bgPr>
@@ -3355,7 +4188,7 @@
                 <a:ea typeface="Calibri" pitchFamily="34" charset="-122"/>
                 <a:cs typeface="Calibri" pitchFamily="34" charset="-120"/>
               </a:rPr>
-              <a:t>El LiDAR no se descarta: pasa a ser expansión opcional. Para el primer nivel, cámaras + Jetson 8 GB alcanzan — y corren por mi cuenta.</a:t>
+              <a:t>El LiDAR no se descarta: entra después de formalizar. Para el primer nivel (odometría + Kalman/ArUco), cámaras + Jetson 8 GB alcanzan — y corren por mi cuenta.</a:t>
             </a:r>
             <a:endParaRPr lang="en-US" sz="1300" dirty="0"/>
           </a:p>
@@ -3408,9 +4241,9 @@
 </p:sld>
 </file>
 
-<file path=ppt/slides/slide11.xml><?xml version="1.0" encoding="utf-8"?>
+<file path=ppt/slides/slide12.xml><?xml version="1.0" encoding="utf-8"?>
 <p:sld xmlns:a="http://schemas.openxmlformats.org/drawingml/2006/main" xmlns:r="http://schemas.openxmlformats.org/officeDocument/2006/relationships" xmlns:p="http://schemas.openxmlformats.org/presentationml/2006/main">
-  <p:cSld name="Slide 11">
+  <p:cSld name="Slide 12">
     <p:bg>
       <p:bgPr>
         <a:solidFill>
@@ -8709,7 +9542,7 @@
                 <a:ea typeface="Cambria" pitchFamily="34" charset="-122"/>
                 <a:cs typeface="Cambria" pitchFamily="34" charset="-120"/>
               </a:rPr>
-              <a:t>Quién pone qué</a:t>
+              <a:t>El camino que sigue</a:t>
             </a:r>
             <a:endParaRPr lang="en-US" sz="3300" dirty="0"/>
           </a:p>
@@ -8748,7 +9581,7 @@
                 <a:ea typeface="Calibri" pitchFamily="34" charset="-122"/>
                 <a:cs typeface="Calibri" pitchFamily="34" charset="-120"/>
               </a:rPr>
-              <a:t>Pongo mi plata en lo que es mío. A Montasa le pido recuperar un activo suyo</a:t>
+              <a:t>El siguiente paso es odometría + Kalman con ArUco. El LiDAR sigue en el plan, después de formalizar</a:t>
             </a:r>
             <a:endParaRPr lang="en-US" sz="1350" dirty="0"/>
           </a:p>
@@ -8763,11 +9596,11 @@
         <p:spPr>
           <a:xfrm>
             <a:off x="594360" y="1828800"/>
-            <a:ext cx="5440680" cy="3383280"/>
+            <a:ext cx="10972800" cy="1188720"/>
           </a:xfrm>
           <a:prstGeom prst="roundRect">
             <a:avLst>
-              <a:gd name="adj" fmla="val 2432"/>
+              <a:gd name="adj" fmla="val 6923"/>
             </a:avLst>
           </a:prstGeom>
           <a:solidFill>
@@ -8791,14 +9624,14 @@
         </p:nvSpPr>
         <p:spPr>
           <a:xfrm>
-            <a:off x="594360" y="1828800"/>
-            <a:ext cx="5440680" cy="109728"/>
-          </a:xfrm>
-          <a:prstGeom prst="rect">
+            <a:off x="914400" y="2231136"/>
+            <a:ext cx="384048" cy="384048"/>
+          </a:xfrm>
+          <a:prstGeom prst="ellipse">
             <a:avLst/>
           </a:prstGeom>
           <a:solidFill>
-            <a:srgbClr val="F5C518"/>
+            <a:srgbClr val="37C3FF"/>
           </a:solidFill>
           <a:ln/>
         </p:spPr>
@@ -8811,73 +9644,73 @@
         </p:nvSpPr>
         <p:spPr>
           <a:xfrm>
-            <a:off x="914400" y="2103120"/>
-            <a:ext cx="4846320" cy="457200"/>
-          </a:xfrm>
-          <a:prstGeom prst="rect">
-            <a:avLst/>
-          </a:prstGeom>
-          <a:noFill/>
-          <a:ln/>
-        </p:spPr>
-        <p:txBody>
-          <a:bodyPr wrap="square" lIns="0" tIns="0" rIns="0" bIns="0" rtlCol="0" anchor="ctr"/>
-          <a:lstStyle/>
-          <a:p>
-            <a:pPr indent="0" marL="0">
-              <a:buNone/>
-            </a:pPr>
-            <a:r>
-              <a:rPr lang="en-US" sz="1900" b="1" dirty="0">
-                <a:solidFill>
-                  <a:srgbClr val="F5C518"/>
+            <a:off x="914400" y="2231136"/>
+            <a:ext cx="384048" cy="384048"/>
+          </a:xfrm>
+          <a:prstGeom prst="rect">
+            <a:avLst/>
+          </a:prstGeom>
+          <a:noFill/>
+          <a:ln/>
+        </p:spPr>
+        <p:txBody>
+          <a:bodyPr wrap="square" lIns="0" tIns="0" rIns="0" bIns="0" rtlCol="0" anchor="ctr"/>
+          <a:lstStyle/>
+          <a:p>
+            <a:pPr algn="ctr" indent="0" marL="0">
+              <a:buNone/>
+            </a:pPr>
+            <a:r>
+              <a:rPr lang="en-US" sz="1500" b="1" dirty="0">
+                <a:solidFill>
+                  <a:srgbClr val="14171C"/>
+                </a:solidFill>
+                <a:latin typeface="Calibri" pitchFamily="34" charset="0"/>
+                <a:ea typeface="Calibri" pitchFamily="34" charset="-122"/>
+                <a:cs typeface="Calibri" pitchFamily="34" charset="-120"/>
+              </a:rPr>
+              <a:t>1</a:t>
+            </a:r>
+            <a:endParaRPr lang="en-US" sz="1500" dirty="0"/>
+          </a:p>
+        </p:txBody>
+      </p:sp>
+      <p:sp>
+        <p:nvSpPr>
+          <p:cNvPr id="7" name="Text 5"/>
+          <p:cNvSpPr/>
+          <p:nvPr/>
+        </p:nvSpPr>
+        <p:spPr>
+          <a:xfrm>
+            <a:off x="1508760" y="2084832"/>
+            <a:ext cx="3200400" cy="457200"/>
+          </a:xfrm>
+          <a:prstGeom prst="rect">
+            <a:avLst/>
+          </a:prstGeom>
+          <a:noFill/>
+          <a:ln/>
+        </p:spPr>
+        <p:txBody>
+          <a:bodyPr wrap="square" lIns="0" tIns="0" rIns="0" bIns="0" rtlCol="0" anchor="ctr"/>
+          <a:lstStyle/>
+          <a:p>
+            <a:pPr indent="0" marL="0">
+              <a:buNone/>
+            </a:pPr>
+            <a:r>
+              <a:rPr lang="en-US" sz="1600" b="1" dirty="0">
+                <a:solidFill>
+                  <a:srgbClr val="ECEBE6"/>
                 </a:solidFill>
                 <a:latin typeface="Cambria" pitchFamily="34" charset="0"/>
                 <a:ea typeface="Cambria" pitchFamily="34" charset="-122"/>
                 <a:cs typeface="Cambria" pitchFamily="34" charset="-120"/>
               </a:rPr>
-              <a:t>Lo pongo yo</a:t>
-            </a:r>
-            <a:endParaRPr lang="en-US" sz="1900" dirty="0"/>
-          </a:p>
-        </p:txBody>
-      </p:sp>
-      <p:sp>
-        <p:nvSpPr>
-          <p:cNvPr id="7" name="Text 5"/>
-          <p:cNvSpPr/>
-          <p:nvPr/>
-        </p:nvSpPr>
-        <p:spPr>
-          <a:xfrm>
-            <a:off x="914400" y="2697480"/>
-            <a:ext cx="4846320" cy="320040"/>
-          </a:xfrm>
-          <a:prstGeom prst="rect">
-            <a:avLst/>
-          </a:prstGeom>
-          <a:noFill/>
-          <a:ln/>
-        </p:spPr>
-        <p:txBody>
-          <a:bodyPr wrap="square" lIns="0" tIns="0" rIns="0" bIns="0" rtlCol="0" anchor="ctr"/>
-          <a:lstStyle/>
-          <a:p>
-            <a:pPr indent="0" marL="0">
-              <a:buNone/>
-            </a:pPr>
-            <a:r>
-              <a:rPr lang="en-US" sz="1350" b="1" dirty="0">
-                <a:solidFill>
-                  <a:srgbClr val="ECEBE6"/>
-                </a:solidFill>
-                <a:latin typeface="Calibri" pitchFamily="34" charset="0"/>
-                <a:ea typeface="Calibri" pitchFamily="34" charset="-122"/>
-                <a:cs typeface="Calibri" pitchFamily="34" charset="-120"/>
-              </a:rPr>
-              <a:t>NRE / ingeniería</a:t>
-            </a:r>
-            <a:endParaRPr lang="en-US" sz="1350" dirty="0"/>
+              <a:t>Odometría</a:t>
+            </a:r>
+            <a:endParaRPr lang="en-US" sz="1600" dirty="0"/>
           </a:p>
         </p:txBody>
       </p:sp>
@@ -8889,24 +9722,24 @@
         </p:nvSpPr>
         <p:spPr>
           <a:xfrm>
-            <a:off x="914400" y="2990088"/>
-            <a:ext cx="4846320" cy="502920"/>
-          </a:xfrm>
-          <a:prstGeom prst="rect">
-            <a:avLst/>
-          </a:prstGeom>
-          <a:noFill/>
-          <a:ln/>
-        </p:spPr>
-        <p:txBody>
-          <a:bodyPr wrap="square" lIns="0" tIns="0" rIns="0" bIns="0" rtlCol="0" anchor="t"/>
-          <a:lstStyle/>
-          <a:p>
-            <a:pPr indent="0" marL="0">
-              <a:buNone/>
-            </a:pPr>
-            <a:r>
-              <a:rPr lang="en-US" sz="1100" dirty="0">
+            <a:off x="4754880" y="2011680"/>
+            <a:ext cx="6583680" cy="914400"/>
+          </a:xfrm>
+          <a:prstGeom prst="rect">
+            <a:avLst/>
+          </a:prstGeom>
+          <a:noFill/>
+          <a:ln/>
+        </p:spPr>
+        <p:txBody>
+          <a:bodyPr wrap="square" lIns="0" tIns="0" rIns="0" bIns="0" rtlCol="0" anchor="ctr"/>
+          <a:lstStyle/>
+          <a:p>
+            <a:pPr indent="0" marL="0">
+              <a:buNone/>
+            </a:pPr>
+            <a:r>
+              <a:rPr lang="en-US" sz="1200" dirty="0">
                 <a:solidFill>
                   <a:srgbClr val="8B949E"/>
                 </a:solidFill>
@@ -8914,182 +9747,26 @@
                 <a:ea typeface="Calibri" pitchFamily="34" charset="-122"/>
                 <a:cs typeface="Calibri" pitchFamily="34" charset="-120"/>
               </a:rPr>
-              <a:t>Todo lo comprado en C&amp;D: transceptores, el emulador, el ESP32, componentes.</a:t>
-            </a:r>
-            <a:endParaRPr lang="en-US" sz="1100" dirty="0"/>
-          </a:p>
-        </p:txBody>
-      </p:sp>
-      <p:sp>
-        <p:nvSpPr>
-          <p:cNvPr id="9" name="Text 7"/>
-          <p:cNvSpPr/>
-          <p:nvPr/>
-        </p:nvSpPr>
-        <p:spPr>
-          <a:xfrm>
-            <a:off x="914400" y="3520440"/>
-            <a:ext cx="4846320" cy="320040"/>
-          </a:xfrm>
-          <a:prstGeom prst="rect">
-            <a:avLst/>
-          </a:prstGeom>
-          <a:noFill/>
-          <a:ln/>
-        </p:spPr>
-        <p:txBody>
-          <a:bodyPr wrap="square" lIns="0" tIns="0" rIns="0" bIns="0" rtlCol="0" anchor="ctr"/>
-          <a:lstStyle/>
-          <a:p>
-            <a:pPr indent="0" marL="0">
-              <a:buNone/>
-            </a:pPr>
-            <a:r>
-              <a:rPr lang="en-US" sz="1350" b="1" dirty="0">
-                <a:solidFill>
-                  <a:srgbClr val="ECEBE6"/>
-                </a:solidFill>
-                <a:latin typeface="Calibri" pitchFamily="34" charset="0"/>
-                <a:ea typeface="Calibri" pitchFamily="34" charset="-122"/>
-                <a:cs typeface="Calibri" pitchFamily="34" charset="-120"/>
-              </a:rPr>
-              <a:t>El cómputo (la Jetson)</a:t>
-            </a:r>
-            <a:endParaRPr lang="en-US" sz="1350" dirty="0"/>
-          </a:p>
-        </p:txBody>
-      </p:sp>
-      <p:sp>
-        <p:nvSpPr>
-          <p:cNvPr id="10" name="Text 8"/>
-          <p:cNvSpPr/>
-          <p:nvPr/>
-        </p:nvSpPr>
-        <p:spPr>
-          <a:xfrm>
-            <a:off x="914400" y="3813048"/>
-            <a:ext cx="4846320" cy="502920"/>
-          </a:xfrm>
-          <a:prstGeom prst="rect">
-            <a:avLst/>
-          </a:prstGeom>
-          <a:noFill/>
-          <a:ln/>
-        </p:spPr>
-        <p:txBody>
-          <a:bodyPr wrap="square" lIns="0" tIns="0" rIns="0" bIns="0" rtlCol="0" anchor="t"/>
-          <a:lstStyle/>
-          <a:p>
-            <a:pPr indent="0" marL="0">
-              <a:buNone/>
-            </a:pPr>
-            <a:r>
-              <a:rPr lang="en-US" sz="1100" dirty="0">
-                <a:solidFill>
-                  <a:srgbClr val="8B949E"/>
-                </a:solidFill>
-                <a:latin typeface="Calibri" pitchFamily="34" charset="0"/>
-                <a:ea typeface="Calibri" pitchFamily="34" charset="-122"/>
-                <a:cs typeface="Calibri" pitchFamily="34" charset="-120"/>
-              </a:rPr>
-              <a:t>También es parte del NRE. Lo cubro yo.</a:t>
-            </a:r>
-            <a:endParaRPr lang="en-US" sz="1100" dirty="0"/>
-          </a:p>
-        </p:txBody>
-      </p:sp>
-      <p:sp>
-        <p:nvSpPr>
-          <p:cNvPr id="11" name="Text 9"/>
-          <p:cNvSpPr/>
-          <p:nvPr/>
-        </p:nvSpPr>
-        <p:spPr>
-          <a:xfrm>
-            <a:off x="914400" y="4343400"/>
-            <a:ext cx="4846320" cy="320040"/>
-          </a:xfrm>
-          <a:prstGeom prst="rect">
-            <a:avLst/>
-          </a:prstGeom>
-          <a:noFill/>
-          <a:ln/>
-        </p:spPr>
-        <p:txBody>
-          <a:bodyPr wrap="square" lIns="0" tIns="0" rIns="0" bIns="0" rtlCol="0" anchor="ctr"/>
-          <a:lstStyle/>
-          <a:p>
-            <a:pPr indent="0" marL="0">
-              <a:buNone/>
-            </a:pPr>
-            <a:r>
-              <a:rPr lang="en-US" sz="1350" b="1" dirty="0">
-                <a:solidFill>
-                  <a:srgbClr val="ECEBE6"/>
-                </a:solidFill>
-                <a:latin typeface="Calibri" pitchFamily="34" charset="0"/>
-                <a:ea typeface="Calibri" pitchFamily="34" charset="-122"/>
-                <a:cs typeface="Calibri" pitchFamily="34" charset="-120"/>
-              </a:rPr>
-              <a:t>Por qué</a:t>
-            </a:r>
-            <a:endParaRPr lang="en-US" sz="1350" dirty="0"/>
-          </a:p>
-        </p:txBody>
-      </p:sp>
-      <p:sp>
-        <p:nvSpPr>
-          <p:cNvPr id="12" name="Text 10"/>
-          <p:cNvSpPr/>
-          <p:nvPr/>
-        </p:nvSpPr>
-        <p:spPr>
-          <a:xfrm>
-            <a:off x="914400" y="4636008"/>
-            <a:ext cx="4846320" cy="502920"/>
-          </a:xfrm>
-          <a:prstGeom prst="rect">
-            <a:avLst/>
-          </a:prstGeom>
-          <a:noFill/>
-          <a:ln/>
-        </p:spPr>
-        <p:txBody>
-          <a:bodyPr wrap="square" lIns="0" tIns="0" rIns="0" bIns="0" rtlCol="0" anchor="t"/>
-          <a:lstStyle/>
-          <a:p>
-            <a:pPr indent="0" marL="0">
-              <a:buNone/>
-            </a:pPr>
-            <a:r>
-              <a:rPr lang="en-US" sz="1100" dirty="0">
-                <a:solidFill>
-                  <a:srgbClr val="8B949E"/>
-                </a:solidFill>
-                <a:latin typeface="Calibri" pitchFamily="34" charset="0"/>
-                <a:ea typeface="Calibri" pitchFamily="34" charset="-122"/>
-                <a:cs typeface="Calibri" pitchFamily="34" charset="-120"/>
-              </a:rPr>
-              <a:t>Es mi idea, mi proyecto, mi sueño. El riesgo de la apuesta es mío.</a:t>
-            </a:r>
-            <a:endParaRPr lang="en-US" sz="1100" dirty="0"/>
-          </a:p>
-        </p:txBody>
-      </p:sp>
-      <p:sp>
-        <p:nvSpPr>
-          <p:cNvPr id="13" name="Shape 11"/>
-          <p:cNvSpPr/>
-          <p:nvPr/>
-        </p:nvSpPr>
-        <p:spPr>
-          <a:xfrm>
-            <a:off x="6263640" y="1828800"/>
-            <a:ext cx="5303520" cy="3383280"/>
+              <a:t>Velocidad y ángulo del propio bus del equipo — los sensores ya están adentro. Posición por “cuánto me moví”.</a:t>
+            </a:r>
+            <a:endParaRPr lang="en-US" sz="1200" dirty="0"/>
+          </a:p>
+        </p:txBody>
+      </p:sp>
+      <p:sp>
+        <p:nvSpPr>
+          <p:cNvPr id="9" name="Shape 7"/>
+          <p:cNvSpPr/>
+          <p:nvPr/>
+        </p:nvSpPr>
+        <p:spPr>
+          <a:xfrm>
+            <a:off x="594360" y="3200400"/>
+            <a:ext cx="10972800" cy="1188720"/>
           </a:xfrm>
           <a:prstGeom prst="roundRect">
             <a:avLst>
-              <a:gd name="adj" fmla="val 2432"/>
+              <a:gd name="adj" fmla="val 6923"/>
             </a:avLst>
           </a:prstGeom>
           <a:solidFill>
@@ -9107,128 +9784,128 @@
       </p:sp>
       <p:sp>
         <p:nvSpPr>
-          <p:cNvPr id="14" name="Shape 12"/>
-          <p:cNvSpPr/>
-          <p:nvPr/>
-        </p:nvSpPr>
-        <p:spPr>
-          <a:xfrm>
-            <a:off x="6263640" y="1828800"/>
-            <a:ext cx="5303520" cy="109728"/>
-          </a:xfrm>
-          <a:prstGeom prst="rect">
+          <p:cNvPr id="10" name="Shape 8"/>
+          <p:cNvSpPr/>
+          <p:nvPr/>
+        </p:nvSpPr>
+        <p:spPr>
+          <a:xfrm>
+            <a:off x="914400" y="3602736"/>
+            <a:ext cx="384048" cy="384048"/>
+          </a:xfrm>
+          <a:prstGeom prst="ellipse">
             <a:avLst/>
           </a:prstGeom>
           <a:solidFill>
-            <a:srgbClr val="37C3FF"/>
+            <a:srgbClr val="F5C518"/>
           </a:solidFill>
           <a:ln/>
         </p:spPr>
       </p:sp>
       <p:sp>
         <p:nvSpPr>
-          <p:cNvPr id="15" name="Text 13"/>
-          <p:cNvSpPr/>
-          <p:nvPr/>
-        </p:nvSpPr>
-        <p:spPr>
-          <a:xfrm>
-            <a:off x="6583680" y="2103120"/>
-            <a:ext cx="4663440" cy="457200"/>
-          </a:xfrm>
-          <a:prstGeom prst="rect">
-            <a:avLst/>
-          </a:prstGeom>
-          <a:noFill/>
-          <a:ln/>
-        </p:spPr>
-        <p:txBody>
-          <a:bodyPr wrap="square" lIns="0" tIns="0" rIns="0" bIns="0" rtlCol="0" anchor="ctr"/>
-          <a:lstStyle/>
-          <a:p>
-            <a:pPr indent="0" marL="0">
-              <a:buNone/>
-            </a:pPr>
-            <a:r>
-              <a:rPr lang="en-US" sz="1900" b="1" dirty="0">
-                <a:solidFill>
-                  <a:srgbClr val="37C3FF"/>
+          <p:cNvPr id="11" name="Text 9"/>
+          <p:cNvSpPr/>
+          <p:nvPr/>
+        </p:nvSpPr>
+        <p:spPr>
+          <a:xfrm>
+            <a:off x="914400" y="3602736"/>
+            <a:ext cx="384048" cy="384048"/>
+          </a:xfrm>
+          <a:prstGeom prst="rect">
+            <a:avLst/>
+          </a:prstGeom>
+          <a:noFill/>
+          <a:ln/>
+        </p:spPr>
+        <p:txBody>
+          <a:bodyPr wrap="square" lIns="0" tIns="0" rIns="0" bIns="0" rtlCol="0" anchor="ctr"/>
+          <a:lstStyle/>
+          <a:p>
+            <a:pPr algn="ctr" indent="0" marL="0">
+              <a:buNone/>
+            </a:pPr>
+            <a:r>
+              <a:rPr lang="en-US" sz="1500" b="1" dirty="0">
+                <a:solidFill>
+                  <a:srgbClr val="14171C"/>
+                </a:solidFill>
+                <a:latin typeface="Calibri" pitchFamily="34" charset="0"/>
+                <a:ea typeface="Calibri" pitchFamily="34" charset="-122"/>
+                <a:cs typeface="Calibri" pitchFamily="34" charset="-120"/>
+              </a:rPr>
+              <a:t>2</a:t>
+            </a:r>
+            <a:endParaRPr lang="en-US" sz="1500" dirty="0"/>
+          </a:p>
+        </p:txBody>
+      </p:sp>
+      <p:sp>
+        <p:nvSpPr>
+          <p:cNvPr id="12" name="Text 10"/>
+          <p:cNvSpPr/>
+          <p:nvPr/>
+        </p:nvSpPr>
+        <p:spPr>
+          <a:xfrm>
+            <a:off x="1508760" y="3456432"/>
+            <a:ext cx="3200400" cy="457200"/>
+          </a:xfrm>
+          <a:prstGeom prst="rect">
+            <a:avLst/>
+          </a:prstGeom>
+          <a:noFill/>
+          <a:ln/>
+        </p:spPr>
+        <p:txBody>
+          <a:bodyPr wrap="square" lIns="0" tIns="0" rIns="0" bIns="0" rtlCol="0" anchor="ctr"/>
+          <a:lstStyle/>
+          <a:p>
+            <a:pPr indent="0" marL="0">
+              <a:buNone/>
+            </a:pPr>
+            <a:r>
+              <a:rPr lang="en-US" sz="1600" b="1" dirty="0">
+                <a:solidFill>
+                  <a:srgbClr val="ECEBE6"/>
                 </a:solidFill>
                 <a:latin typeface="Cambria" pitchFamily="34" charset="0"/>
                 <a:ea typeface="Cambria" pitchFamily="34" charset="-122"/>
                 <a:cs typeface="Cambria" pitchFamily="34" charset="-120"/>
               </a:rPr>
-              <a:t>Lo pone Montasa</a:t>
-            </a:r>
-            <a:endParaRPr lang="en-US" sz="1900" dirty="0"/>
-          </a:p>
-        </p:txBody>
-      </p:sp>
-      <p:sp>
-        <p:nvSpPr>
-          <p:cNvPr id="16" name="Text 14"/>
-          <p:cNvSpPr/>
-          <p:nvPr/>
-        </p:nvSpPr>
-        <p:spPr>
-          <a:xfrm>
-            <a:off x="6583680" y="2697480"/>
-            <a:ext cx="4663440" cy="320040"/>
-          </a:xfrm>
-          <a:prstGeom prst="rect">
-            <a:avLst/>
-          </a:prstGeom>
-          <a:noFill/>
-          <a:ln/>
-        </p:spPr>
-        <p:txBody>
-          <a:bodyPr wrap="square" lIns="0" tIns="0" rIns="0" bIns="0" rtlCol="0" anchor="ctr"/>
-          <a:lstStyle/>
-          <a:p>
-            <a:pPr indent="0" marL="0">
-              <a:buNone/>
-            </a:pPr>
-            <a:r>
-              <a:rPr lang="en-US" sz="1350" b="1" dirty="0">
-                <a:solidFill>
-                  <a:srgbClr val="ECEBE6"/>
-                </a:solidFill>
-                <a:latin typeface="Calibri" pitchFamily="34" charset="0"/>
-                <a:ea typeface="Calibri" pitchFamily="34" charset="-122"/>
-                <a:cs typeface="Calibri" pitchFamily="34" charset="-120"/>
-              </a:rPr>
-              <a:t>Reparar el MT 122</a:t>
-            </a:r>
-            <a:endParaRPr lang="en-US" sz="1350" dirty="0"/>
-          </a:p>
-        </p:txBody>
-      </p:sp>
-      <p:sp>
-        <p:nvSpPr>
-          <p:cNvPr id="17" name="Text 15"/>
-          <p:cNvSpPr/>
-          <p:nvPr/>
-        </p:nvSpPr>
-        <p:spPr>
-          <a:xfrm>
-            <a:off x="6583680" y="2990088"/>
-            <a:ext cx="4663440" cy="685800"/>
-          </a:xfrm>
-          <a:prstGeom prst="rect">
-            <a:avLst/>
-          </a:prstGeom>
-          <a:noFill/>
-          <a:ln/>
-        </p:spPr>
-        <p:txBody>
-          <a:bodyPr wrap="square" lIns="0" tIns="0" rIns="0" bIns="0" rtlCol="0" anchor="t"/>
-          <a:lstStyle/>
-          <a:p>
-            <a:pPr indent="0" marL="0">
-              <a:buNone/>
-            </a:pPr>
-            <a:r>
-              <a:rPr lang="en-US" sz="1100" dirty="0">
+              <a:t>Fusión Kalman + ArUco</a:t>
+            </a:r>
+            <a:endParaRPr lang="en-US" sz="1600" dirty="0"/>
+          </a:p>
+        </p:txBody>
+      </p:sp>
+      <p:sp>
+        <p:nvSpPr>
+          <p:cNvPr id="13" name="Text 11"/>
+          <p:cNvSpPr/>
+          <p:nvPr/>
+        </p:nvSpPr>
+        <p:spPr>
+          <a:xfrm>
+            <a:off x="4754880" y="3383280"/>
+            <a:ext cx="6583680" cy="914400"/>
+          </a:xfrm>
+          <a:prstGeom prst="rect">
+            <a:avLst/>
+          </a:prstGeom>
+          <a:noFill/>
+          <a:ln/>
+        </p:spPr>
+        <p:txBody>
+          <a:bodyPr wrap="square" lIns="0" tIns="0" rIns="0" bIns="0" rtlCol="0" anchor="ctr"/>
+          <a:lstStyle/>
+          <a:p>
+            <a:pPr indent="0" marL="0">
+              <a:buNone/>
+            </a:pPr>
+            <a:r>
+              <a:rPr lang="en-US" sz="1200" dirty="0">
                 <a:solidFill>
                   <a:srgbClr val="8B949E"/>
                 </a:solidFill>
@@ -9236,104 +9913,26 @@
                 <a:ea typeface="Calibri" pitchFamily="34" charset="-122"/>
                 <a:cs typeface="Calibri" pitchFamily="34" charset="-120"/>
               </a:rPr>
-              <a:t>Su propio activo, que vuelve a rentar. No es gasto del proyecto.</a:t>
-            </a:r>
-            <a:endParaRPr lang="en-US" sz="1100" dirty="0"/>
-          </a:p>
-        </p:txBody>
-      </p:sp>
-      <p:sp>
-        <p:nvSpPr>
-          <p:cNvPr id="18" name="Text 16"/>
-          <p:cNvSpPr/>
-          <p:nvPr/>
-        </p:nvSpPr>
-        <p:spPr>
-          <a:xfrm>
-            <a:off x="6583680" y="3886200"/>
-            <a:ext cx="4663440" cy="320040"/>
-          </a:xfrm>
-          <a:prstGeom prst="rect">
-            <a:avLst/>
-          </a:prstGeom>
-          <a:noFill/>
-          <a:ln/>
-        </p:spPr>
-        <p:txBody>
-          <a:bodyPr wrap="square" lIns="0" tIns="0" rIns="0" bIns="0" rtlCol="0" anchor="ctr"/>
-          <a:lstStyle/>
-          <a:p>
-            <a:pPr indent="0" marL="0">
-              <a:buNone/>
-            </a:pPr>
-            <a:r>
-              <a:rPr lang="en-US" sz="1350" b="1" dirty="0">
-                <a:solidFill>
-                  <a:srgbClr val="ECEBE6"/>
-                </a:solidFill>
-                <a:latin typeface="Calibri" pitchFamily="34" charset="0"/>
-                <a:ea typeface="Calibri" pitchFamily="34" charset="-122"/>
-                <a:cs typeface="Calibri" pitchFamily="34" charset="-120"/>
-              </a:rPr>
-              <a:t>Salario y confianza</a:t>
-            </a:r>
-            <a:endParaRPr lang="en-US" sz="1350" dirty="0"/>
-          </a:p>
-        </p:txBody>
-      </p:sp>
-      <p:sp>
-        <p:nvSpPr>
-          <p:cNvPr id="19" name="Text 17"/>
-          <p:cNvSpPr/>
-          <p:nvPr/>
-        </p:nvSpPr>
-        <p:spPr>
-          <a:xfrm>
-            <a:off x="6583680" y="4178808"/>
-            <a:ext cx="4663440" cy="685800"/>
-          </a:xfrm>
-          <a:prstGeom prst="rect">
-            <a:avLst/>
-          </a:prstGeom>
-          <a:noFill/>
-          <a:ln/>
-        </p:spPr>
-        <p:txBody>
-          <a:bodyPr wrap="square" lIns="0" tIns="0" rIns="0" bIns="0" rtlCol="0" anchor="t"/>
-          <a:lstStyle/>
-          <a:p>
-            <a:pPr indent="0" marL="0">
-              <a:buNone/>
-            </a:pPr>
-            <a:r>
-              <a:rPr lang="en-US" sz="1100" dirty="0">
-                <a:solidFill>
-                  <a:srgbClr val="8B949E"/>
-                </a:solidFill>
-                <a:latin typeface="Calibri" pitchFamily="34" charset="0"/>
-                <a:ea typeface="Calibri" pitchFamily="34" charset="-122"/>
-                <a:cs typeface="Calibri" pitchFamily="34" charset="-120"/>
-              </a:rPr>
-              <a:t>Lo que Montasa ya me ha dado. Lo tomo como su inversión en esto.</a:t>
-            </a:r>
-            <a:endParaRPr lang="en-US" sz="1100" dirty="0"/>
-          </a:p>
-        </p:txBody>
-      </p:sp>
-      <p:sp>
-        <p:nvSpPr>
-          <p:cNvPr id="20" name="Shape 18"/>
-          <p:cNvSpPr/>
-          <p:nvPr/>
-        </p:nvSpPr>
-        <p:spPr>
-          <a:xfrm>
-            <a:off x="594360" y="5486400"/>
-            <a:ext cx="10972800" cy="777240"/>
+              <a:t>Un filtro combina la odometría con las marcas ArUco de los racks: corrige la deriva y da la posición absoluta. Este es el siguiente paso, con sólo cámaras.</a:t>
+            </a:r>
+            <a:endParaRPr lang="en-US" sz="1200" dirty="0"/>
+          </a:p>
+        </p:txBody>
+      </p:sp>
+      <p:sp>
+        <p:nvSpPr>
+          <p:cNvPr id="14" name="Shape 12"/>
+          <p:cNvSpPr/>
+          <p:nvPr/>
+        </p:nvSpPr>
+        <p:spPr>
+          <a:xfrm>
+            <a:off x="594360" y="4572000"/>
+            <a:ext cx="10972800" cy="1188720"/>
           </a:xfrm>
           <a:prstGeom prst="roundRect">
             <a:avLst>
-              <a:gd name="adj" fmla="val 10588"/>
+              <a:gd name="adj" fmla="val 6923"/>
             </a:avLst>
           </a:prstGeom>
           <a:solidFill>
@@ -9351,40 +9950,138 @@
       </p:sp>
       <p:sp>
         <p:nvSpPr>
-          <p:cNvPr id="21" name="Text 19"/>
-          <p:cNvSpPr/>
-          <p:nvPr/>
-        </p:nvSpPr>
-        <p:spPr>
-          <a:xfrm>
-            <a:off x="960120" y="5486400"/>
-            <a:ext cx="10241280" cy="777240"/>
-          </a:xfrm>
-          <a:prstGeom prst="rect">
-            <a:avLst/>
-          </a:prstGeom>
-          <a:noFill/>
-          <a:ln/>
-        </p:spPr>
-        <p:txBody>
-          <a:bodyPr wrap="square" lIns="0" tIns="0" rIns="0" bIns="0" rtlCol="0" anchor="ctr"/>
-          <a:lstStyle/>
-          <a:p>
-            <a:pPr indent="0" marL="0">
-              <a:buNone/>
-            </a:pPr>
-            <a:r>
-              <a:rPr lang="en-US" sz="1400" b="1" dirty="0">
-                <a:solidFill>
-                  <a:srgbClr val="F5C518"/>
-                </a:solidFill>
-                <a:latin typeface="Calibri" pitchFamily="34" charset="0"/>
-                <a:ea typeface="Calibri" pitchFamily="34" charset="-122"/>
-                <a:cs typeface="Calibri" pitchFamily="34" charset="-120"/>
-              </a:rPr>
-              <a:t>No le pido a Montasa que financie mi sueño. Le pido que recupere una máquina suya — y yo pongo todo lo demás.</a:t>
-            </a:r>
-            <a:endParaRPr lang="en-US" sz="1400" dirty="0"/>
+          <p:cNvPr id="15" name="Shape 13"/>
+          <p:cNvSpPr/>
+          <p:nvPr/>
+        </p:nvSpPr>
+        <p:spPr>
+          <a:xfrm>
+            <a:off x="914400" y="4974336"/>
+            <a:ext cx="384048" cy="384048"/>
+          </a:xfrm>
+          <a:prstGeom prst="ellipse">
+            <a:avLst/>
+          </a:prstGeom>
+          <a:solidFill>
+            <a:srgbClr val="39D98A"/>
+          </a:solidFill>
+          <a:ln/>
+        </p:spPr>
+      </p:sp>
+      <p:sp>
+        <p:nvSpPr>
+          <p:cNvPr id="16" name="Text 14"/>
+          <p:cNvSpPr/>
+          <p:nvPr/>
+        </p:nvSpPr>
+        <p:spPr>
+          <a:xfrm>
+            <a:off x="914400" y="4974336"/>
+            <a:ext cx="384048" cy="384048"/>
+          </a:xfrm>
+          <a:prstGeom prst="rect">
+            <a:avLst/>
+          </a:prstGeom>
+          <a:noFill/>
+          <a:ln/>
+        </p:spPr>
+        <p:txBody>
+          <a:bodyPr wrap="square" lIns="0" tIns="0" rIns="0" bIns="0" rtlCol="0" anchor="ctr"/>
+          <a:lstStyle/>
+          <a:p>
+            <a:pPr algn="ctr" indent="0" marL="0">
+              <a:buNone/>
+            </a:pPr>
+            <a:r>
+              <a:rPr lang="en-US" sz="1500" b="1" dirty="0">
+                <a:solidFill>
+                  <a:srgbClr val="14171C"/>
+                </a:solidFill>
+                <a:latin typeface="Calibri" pitchFamily="34" charset="0"/>
+                <a:ea typeface="Calibri" pitchFamily="34" charset="-122"/>
+                <a:cs typeface="Calibri" pitchFamily="34" charset="-120"/>
+              </a:rPr>
+              <a:t>3</a:t>
+            </a:r>
+            <a:endParaRPr lang="en-US" sz="1500" dirty="0"/>
+          </a:p>
+        </p:txBody>
+      </p:sp>
+      <p:sp>
+        <p:nvSpPr>
+          <p:cNvPr id="17" name="Text 15"/>
+          <p:cNvSpPr/>
+          <p:nvPr/>
+        </p:nvSpPr>
+        <p:spPr>
+          <a:xfrm>
+            <a:off x="1508760" y="4828032"/>
+            <a:ext cx="3200400" cy="457200"/>
+          </a:xfrm>
+          <a:prstGeom prst="rect">
+            <a:avLst/>
+          </a:prstGeom>
+          <a:noFill/>
+          <a:ln/>
+        </p:spPr>
+        <p:txBody>
+          <a:bodyPr wrap="square" lIns="0" tIns="0" rIns="0" bIns="0" rtlCol="0" anchor="ctr"/>
+          <a:lstStyle/>
+          <a:p>
+            <a:pPr indent="0" marL="0">
+              <a:buNone/>
+            </a:pPr>
+            <a:r>
+              <a:rPr lang="en-US" sz="1600" b="1" dirty="0">
+                <a:solidFill>
+                  <a:srgbClr val="ECEBE6"/>
+                </a:solidFill>
+                <a:latin typeface="Cambria" pitchFamily="34" charset="0"/>
+                <a:ea typeface="Cambria" pitchFamily="34" charset="-122"/>
+                <a:cs typeface="Cambria" pitchFamily="34" charset="-120"/>
+              </a:rPr>
+              <a:t>LiDAR / SLAM</a:t>
+            </a:r>
+            <a:endParaRPr lang="en-US" sz="1600" dirty="0"/>
+          </a:p>
+        </p:txBody>
+      </p:sp>
+      <p:sp>
+        <p:nvSpPr>
+          <p:cNvPr id="18" name="Text 16"/>
+          <p:cNvSpPr/>
+          <p:nvPr/>
+        </p:nvSpPr>
+        <p:spPr>
+          <a:xfrm>
+            <a:off x="4754880" y="4754880"/>
+            <a:ext cx="6583680" cy="914400"/>
+          </a:xfrm>
+          <a:prstGeom prst="rect">
+            <a:avLst/>
+          </a:prstGeom>
+          <a:noFill/>
+          <a:ln/>
+        </p:spPr>
+        <p:txBody>
+          <a:bodyPr wrap="square" lIns="0" tIns="0" rIns="0" bIns="0" rtlCol="0" anchor="ctr"/>
+          <a:lstStyle/>
+          <a:p>
+            <a:pPr indent="0" marL="0">
+              <a:buNone/>
+            </a:pPr>
+            <a:r>
+              <a:rPr lang="en-US" sz="1200" dirty="0">
+                <a:solidFill>
+                  <a:srgbClr val="8B949E"/>
+                </a:solidFill>
+                <a:latin typeface="Calibri" pitchFamily="34" charset="0"/>
+                <a:ea typeface="Calibri" pitchFamily="34" charset="-122"/>
+                <a:cs typeface="Calibri" pitchFamily="34" charset="-120"/>
+              </a:rPr>
+              <a:t>Mapeo en vivo y detección de obstáculos. Sigue en el plan — se suma después de formalizar el proyecto. No se descarta.</a:t>
+            </a:r>
+            <a:endParaRPr lang="en-US" sz="1200" dirty="0"/>
           </a:p>
         </p:txBody>
       </p:sp>

--- a/presentaciones/TaTa_Estado_y_Pedido_Omar.pptx
+++ b/presentaciones/TaTa_Estado_y_Pedido_Omar.pptx
@@ -958,7 +958,7 @@
           <a:p>
             <a:r>
               <a:rPr lang="en-US" dirty="0"/>
-              <a:t>El Aula no es un vergueo: reorganizar estantes para un pasillo 3x6. Pruebas con pantografo sin uñas + sensor de altura calibrado (lo de Botoni).</a:t>
+              <a:t>Mi orden del dibujo: actual = todo el taller, sombreado = en uso no se toca, rack 4 en area de mecanicos. Propuesta = solo el lado derecho, rack 4 movido flanquea el pasillo y libera a los mecanicos.</a:t>
             </a:r>
             <a:endParaRPr lang="en-US" dirty="0"/>
           </a:p>
@@ -5246,7 +5246,7 @@
                 <a:ea typeface="Calibri" pitchFamily="34" charset="-122"/>
                 <a:cs typeface="Calibri" pitchFamily="34" charset="-120"/>
               </a:rPr>
-              <a:t>No deshace el taller: solo reorganizar estantes para liberar un pasillo de 3.0 × 6.0 m</a:t>
+              <a:t>Mover el rack 4 libera espacio a los mecánicos y deja un pasillo de 3.0 × 6.0 m. Lo sombreado ya se usa y no se toca</a:t>
             </a:r>
             <a:endParaRPr lang="en-US" sz="1350" dirty="0"/>
           </a:p>
@@ -5260,8 +5260,8 @@
         </p:nvSpPr>
         <p:spPr>
           <a:xfrm>
-            <a:off x="822960" y="1645920"/>
-            <a:ext cx="4206240" cy="274320"/>
+            <a:off x="594360" y="1554480"/>
+            <a:ext cx="6583680" cy="274320"/>
           </a:xfrm>
           <a:prstGeom prst="rect">
             <a:avLst/>
@@ -5277,7 +5277,7 @@
               <a:buNone/>
             </a:pPr>
             <a:r>
-              <a:rPr lang="en-US" sz="1200" b="1" dirty="0">
+              <a:rPr lang="en-US" sz="1250" b="1" dirty="0">
                 <a:solidFill>
                   <a:srgbClr val="5B6470"/>
                 </a:solidFill>
@@ -5285,9 +5285,9 @@
                 <a:ea typeface="Calibri" pitchFamily="34" charset="-122"/>
                 <a:cs typeface="Calibri" pitchFamily="34" charset="-120"/>
               </a:rPr>
-              <a:t>Hoy</a:t>
-            </a:r>
-            <a:endParaRPr lang="en-US" sz="1200" dirty="0"/>
+              <a:t>Taller hoy</a:t>
+            </a:r>
+            <a:endParaRPr lang="en-US" sz="1250" dirty="0"/>
           </a:p>
         </p:txBody>
       </p:sp>
@@ -5299,8 +5299,8 @@
         </p:nvSpPr>
         <p:spPr>
           <a:xfrm>
-            <a:off x="822960" y="1938528"/>
-            <a:ext cx="4206240" cy="2743200"/>
+            <a:off x="594360" y="1828800"/>
+            <a:ext cx="6583680" cy="3246120"/>
           </a:xfrm>
           <a:prstGeom prst="rect">
             <a:avLst/>
@@ -5308,7 +5308,258 @@
           <a:solidFill>
             <a:srgbClr val="FFFFFF"/>
           </a:solidFill>
-          <a:ln w="17780">
+          <a:ln w="30480">
+            <a:solidFill>
+              <a:srgbClr val="3A3F49"/>
+            </a:solidFill>
+            <a:prstDash val="solid"/>
+          </a:ln>
+        </p:spPr>
+      </p:sp>
+      <p:sp>
+        <p:nvSpPr>
+          <p:cNvPr id="6" name="Shape 4"/>
+          <p:cNvSpPr/>
+          <p:nvPr/>
+        </p:nvSpPr>
+        <p:spPr>
+          <a:xfrm>
+            <a:off x="704088" y="2240280"/>
+            <a:ext cx="2103120" cy="1051560"/>
+          </a:xfrm>
+          <a:prstGeom prst="rect">
+            <a:avLst/>
+          </a:prstGeom>
+          <a:solidFill>
+            <a:srgbClr val="DCE0D6"/>
+          </a:solidFill>
+          <a:ln w="12700">
+            <a:solidFill>
+              <a:srgbClr val="AEB4A6"/>
+            </a:solidFill>
+            <a:prstDash val="solid"/>
+          </a:ln>
+        </p:spPr>
+      </p:sp>
+      <p:sp>
+        <p:nvSpPr>
+          <p:cNvPr id="7" name="Text 5"/>
+          <p:cNvSpPr/>
+          <p:nvPr/>
+        </p:nvSpPr>
+        <p:spPr>
+          <a:xfrm>
+            <a:off x="704088" y="2240280"/>
+            <a:ext cx="2103120" cy="1051560"/>
+          </a:xfrm>
+          <a:prstGeom prst="rect">
+            <a:avLst/>
+          </a:prstGeom>
+          <a:noFill/>
+          <a:ln/>
+        </p:spPr>
+        <p:txBody>
+          <a:bodyPr wrap="square" lIns="0" tIns="0" rIns="0" bIns="0" rtlCol="0" anchor="ctr"/>
+          <a:lstStyle/>
+          <a:p>
+            <a:pPr algn="ctr" indent="0" marL="0">
+              <a:buNone/>
+            </a:pPr>
+            <a:r>
+              <a:rPr lang="en-US" sz="950" i="1" dirty="0">
+                <a:solidFill>
+                  <a:srgbClr val="6B7266"/>
+                </a:solidFill>
+                <a:latin typeface="Calibri" pitchFamily="34" charset="0"/>
+                <a:ea typeface="Calibri" pitchFamily="34" charset="-122"/>
+                <a:cs typeface="Calibri" pitchFamily="34" charset="-120"/>
+              </a:rPr>
+              <a:t>en uso</a:t>
+            </a:r>
+            <a:endParaRPr lang="en-US" sz="950" dirty="0"/>
+          </a:p>
+          <a:p>
+            <a:pPr algn="ctr" indent="0" marL="0">
+              <a:buNone/>
+            </a:pPr>
+            <a:r>
+              <a:rPr lang="en-US" sz="950" i="1" dirty="0">
+                <a:solidFill>
+                  <a:srgbClr val="6B7266"/>
+                </a:solidFill>
+                <a:latin typeface="Calibri" pitchFamily="34" charset="0"/>
+                <a:ea typeface="Calibri" pitchFamily="34" charset="-122"/>
+                <a:cs typeface="Calibri" pitchFamily="34" charset="-120"/>
+              </a:rPr>
+              <a:t>no se toca</a:t>
+            </a:r>
+            <a:endParaRPr lang="en-US" sz="950" dirty="0"/>
+          </a:p>
+        </p:txBody>
+      </p:sp>
+      <p:sp>
+        <p:nvSpPr>
+          <p:cNvPr id="8" name="Shape 6"/>
+          <p:cNvSpPr/>
+          <p:nvPr/>
+        </p:nvSpPr>
+        <p:spPr>
+          <a:xfrm>
+            <a:off x="704088" y="3520440"/>
+            <a:ext cx="1920240" cy="1325880"/>
+          </a:xfrm>
+          <a:prstGeom prst="rect">
+            <a:avLst/>
+          </a:prstGeom>
+          <a:solidFill>
+            <a:srgbClr val="DCE0D6"/>
+          </a:solidFill>
+          <a:ln w="12700">
+            <a:solidFill>
+              <a:srgbClr val="AEB4A6"/>
+            </a:solidFill>
+            <a:prstDash val="solid"/>
+          </a:ln>
+        </p:spPr>
+      </p:sp>
+      <p:sp>
+        <p:nvSpPr>
+          <p:cNvPr id="9" name="Text 7"/>
+          <p:cNvSpPr/>
+          <p:nvPr/>
+        </p:nvSpPr>
+        <p:spPr>
+          <a:xfrm>
+            <a:off x="704088" y="3520440"/>
+            <a:ext cx="1920240" cy="1325880"/>
+          </a:xfrm>
+          <a:prstGeom prst="rect">
+            <a:avLst/>
+          </a:prstGeom>
+          <a:noFill/>
+          <a:ln/>
+        </p:spPr>
+        <p:txBody>
+          <a:bodyPr wrap="square" lIns="0" tIns="0" rIns="0" bIns="0" rtlCol="0" anchor="ctr"/>
+          <a:lstStyle/>
+          <a:p>
+            <a:pPr algn="ctr" indent="0" marL="0">
+              <a:buNone/>
+            </a:pPr>
+            <a:r>
+              <a:rPr lang="en-US" sz="950" i="1" dirty="0">
+                <a:solidFill>
+                  <a:srgbClr val="6B7266"/>
+                </a:solidFill>
+                <a:latin typeface="Calibri" pitchFamily="34" charset="0"/>
+                <a:ea typeface="Calibri" pitchFamily="34" charset="-122"/>
+                <a:cs typeface="Calibri" pitchFamily="34" charset="-120"/>
+              </a:rPr>
+              <a:t>en uso</a:t>
+            </a:r>
+            <a:endParaRPr lang="en-US" sz="950" dirty="0"/>
+          </a:p>
+          <a:p>
+            <a:pPr algn="ctr" indent="0" marL="0">
+              <a:buNone/>
+            </a:pPr>
+            <a:r>
+              <a:rPr lang="en-US" sz="950" i="1" dirty="0">
+                <a:solidFill>
+                  <a:srgbClr val="6B7266"/>
+                </a:solidFill>
+                <a:latin typeface="Calibri" pitchFamily="34" charset="0"/>
+                <a:ea typeface="Calibri" pitchFamily="34" charset="-122"/>
+                <a:cs typeface="Calibri" pitchFamily="34" charset="-120"/>
+              </a:rPr>
+              <a:t>no se toca</a:t>
+            </a:r>
+            <a:endParaRPr lang="en-US" sz="950" dirty="0"/>
+          </a:p>
+        </p:txBody>
+      </p:sp>
+      <p:sp>
+        <p:nvSpPr>
+          <p:cNvPr id="10" name="Shape 8"/>
+          <p:cNvSpPr/>
+          <p:nvPr/>
+        </p:nvSpPr>
+        <p:spPr>
+          <a:xfrm>
+            <a:off x="2880360" y="4370832"/>
+            <a:ext cx="1188720" cy="603504"/>
+          </a:xfrm>
+          <a:prstGeom prst="rect">
+            <a:avLst/>
+          </a:prstGeom>
+          <a:solidFill>
+            <a:srgbClr val="E7DCC8"/>
+          </a:solidFill>
+          <a:ln w="12700">
+            <a:solidFill>
+              <a:srgbClr val="C9B88E"/>
+            </a:solidFill>
+            <a:prstDash val="solid"/>
+          </a:ln>
+        </p:spPr>
+      </p:sp>
+      <p:sp>
+        <p:nvSpPr>
+          <p:cNvPr id="11" name="Text 9"/>
+          <p:cNvSpPr/>
+          <p:nvPr/>
+        </p:nvSpPr>
+        <p:spPr>
+          <a:xfrm>
+            <a:off x="2880360" y="4370832"/>
+            <a:ext cx="1188720" cy="603504"/>
+          </a:xfrm>
+          <a:prstGeom prst="rect">
+            <a:avLst/>
+          </a:prstGeom>
+          <a:noFill/>
+          <a:ln/>
+        </p:spPr>
+        <p:txBody>
+          <a:bodyPr wrap="square" lIns="0" tIns="0" rIns="0" bIns="0" rtlCol="0" anchor="ctr"/>
+          <a:lstStyle/>
+          <a:p>
+            <a:pPr algn="ctr" indent="0" marL="0">
+              <a:buNone/>
+            </a:pPr>
+            <a:r>
+              <a:rPr lang="en-US" sz="850" b="1" dirty="0">
+                <a:solidFill>
+                  <a:srgbClr val="8A6D16"/>
+                </a:solidFill>
+                <a:latin typeface="Calibri" pitchFamily="34" charset="0"/>
+                <a:ea typeface="Calibri" pitchFamily="34" charset="-122"/>
+                <a:cs typeface="Calibri" pitchFamily="34" charset="-120"/>
+              </a:rPr>
+              <a:t>rampa / portón</a:t>
+            </a:r>
+            <a:endParaRPr lang="en-US" sz="850" dirty="0"/>
+          </a:p>
+        </p:txBody>
+      </p:sp>
+      <p:sp>
+        <p:nvSpPr>
+          <p:cNvPr id="12" name="Shape 10"/>
+          <p:cNvSpPr/>
+          <p:nvPr/>
+        </p:nvSpPr>
+        <p:spPr>
+          <a:xfrm>
+            <a:off x="5349240" y="2066544"/>
+            <a:ext cx="274320" cy="274320"/>
+          </a:xfrm>
+          <a:prstGeom prst="rect">
+            <a:avLst/>
+          </a:prstGeom>
+          <a:solidFill>
+            <a:srgbClr val="E7E9EC"/>
+          </a:solidFill>
+          <a:ln w="12700">
             <a:solidFill>
               <a:srgbClr val="C8CCD2"/>
             </a:solidFill>
@@ -5318,20 +5569,534 @@
       </p:sp>
       <p:sp>
         <p:nvSpPr>
-          <p:cNvPr id="6" name="Shape 4"/>
-          <p:cNvSpPr/>
-          <p:nvPr/>
-        </p:nvSpPr>
-        <p:spPr>
-          <a:xfrm>
-            <a:off x="960120" y="2084832"/>
-            <a:ext cx="1188720" cy="731520"/>
-          </a:xfrm>
-          <a:prstGeom prst="rect">
-            <a:avLst/>
-          </a:prstGeom>
-          <a:solidFill>
-            <a:srgbClr val="DCE0E6"/>
+          <p:cNvPr id="13" name="Shape 11"/>
+          <p:cNvSpPr/>
+          <p:nvPr/>
+        </p:nvSpPr>
+        <p:spPr>
+          <a:xfrm>
+            <a:off x="5678424" y="2066544"/>
+            <a:ext cx="274320" cy="274320"/>
+          </a:xfrm>
+          <a:prstGeom prst="rect">
+            <a:avLst/>
+          </a:prstGeom>
+          <a:solidFill>
+            <a:srgbClr val="E7E9EC"/>
+          </a:solidFill>
+          <a:ln w="12700">
+            <a:solidFill>
+              <a:srgbClr val="C8CCD2"/>
+            </a:solidFill>
+            <a:prstDash val="solid"/>
+          </a:ln>
+        </p:spPr>
+      </p:sp>
+      <p:sp>
+        <p:nvSpPr>
+          <p:cNvPr id="14" name="Shape 12"/>
+          <p:cNvSpPr/>
+          <p:nvPr/>
+        </p:nvSpPr>
+        <p:spPr>
+          <a:xfrm>
+            <a:off x="6007608" y="2066544"/>
+            <a:ext cx="274320" cy="274320"/>
+          </a:xfrm>
+          <a:prstGeom prst="rect">
+            <a:avLst/>
+          </a:prstGeom>
+          <a:solidFill>
+            <a:srgbClr val="E7E9EC"/>
+          </a:solidFill>
+          <a:ln w="12700">
+            <a:solidFill>
+              <a:srgbClr val="C8CCD2"/>
+            </a:solidFill>
+            <a:prstDash val="solid"/>
+          </a:ln>
+        </p:spPr>
+      </p:sp>
+      <p:sp>
+        <p:nvSpPr>
+          <p:cNvPr id="15" name="Shape 13"/>
+          <p:cNvSpPr/>
+          <p:nvPr/>
+        </p:nvSpPr>
+        <p:spPr>
+          <a:xfrm>
+            <a:off x="4389120" y="2487168"/>
+            <a:ext cx="777240" cy="438912"/>
+          </a:xfrm>
+          <a:prstGeom prst="roundRect">
+            <a:avLst>
+              <a:gd name="adj" fmla="val 10417"/>
+            </a:avLst>
+          </a:prstGeom>
+          <a:solidFill>
+            <a:srgbClr val="E4E7DF"/>
+          </a:solidFill>
+          <a:ln w="13970">
+            <a:solidFill>
+              <a:srgbClr val="566270"/>
+            </a:solidFill>
+            <a:prstDash val="solid"/>
+          </a:ln>
+        </p:spPr>
+      </p:sp>
+      <p:sp>
+        <p:nvSpPr>
+          <p:cNvPr id="16" name="Shape 14"/>
+          <p:cNvSpPr/>
+          <p:nvPr/>
+        </p:nvSpPr>
+        <p:spPr>
+          <a:xfrm>
+            <a:off x="4617171" y="2176272"/>
+            <a:ext cx="64008" cy="310896"/>
+          </a:xfrm>
+          <a:prstGeom prst="rect">
+            <a:avLst/>
+          </a:prstGeom>
+          <a:solidFill>
+            <a:srgbClr val="566270"/>
+          </a:solidFill>
+          <a:ln/>
+        </p:spPr>
+      </p:sp>
+      <p:sp>
+        <p:nvSpPr>
+          <p:cNvPr id="17" name="Shape 15"/>
+          <p:cNvSpPr/>
+          <p:nvPr/>
+        </p:nvSpPr>
+        <p:spPr>
+          <a:xfrm>
+            <a:off x="4874301" y="2176272"/>
+            <a:ext cx="64008" cy="310896"/>
+          </a:xfrm>
+          <a:prstGeom prst="rect">
+            <a:avLst/>
+          </a:prstGeom>
+          <a:solidFill>
+            <a:srgbClr val="566270"/>
+          </a:solidFill>
+          <a:ln/>
+        </p:spPr>
+      </p:sp>
+      <p:sp>
+        <p:nvSpPr>
+          <p:cNvPr id="18" name="Shape 16"/>
+          <p:cNvSpPr/>
+          <p:nvPr/>
+        </p:nvSpPr>
+        <p:spPr>
+          <a:xfrm>
+            <a:off x="4617171" y="2441448"/>
+            <a:ext cx="321137" cy="45720"/>
+          </a:xfrm>
+          <a:prstGeom prst="rect">
+            <a:avLst/>
+          </a:prstGeom>
+          <a:solidFill>
+            <a:srgbClr val="566270"/>
+          </a:solidFill>
+          <a:ln/>
+        </p:spPr>
+      </p:sp>
+      <p:sp>
+        <p:nvSpPr>
+          <p:cNvPr id="19" name="Text 17"/>
+          <p:cNvSpPr/>
+          <p:nvPr/>
+        </p:nvSpPr>
+        <p:spPr>
+          <a:xfrm>
+            <a:off x="4389120" y="2487168"/>
+            <a:ext cx="777240" cy="438912"/>
+          </a:xfrm>
+          <a:prstGeom prst="rect">
+            <a:avLst/>
+          </a:prstGeom>
+          <a:noFill/>
+          <a:ln/>
+        </p:spPr>
+        <p:txBody>
+          <a:bodyPr wrap="square" lIns="0" tIns="0" rIns="0" bIns="0" rtlCol="0" anchor="ctr"/>
+          <a:lstStyle/>
+          <a:p>
+            <a:pPr algn="ctr" indent="0" marL="0">
+              <a:buNone/>
+            </a:pPr>
+            <a:r>
+              <a:rPr lang="en-US" sz="900" b="1" dirty="0">
+                <a:solidFill>
+                  <a:srgbClr val="2A2F39"/>
+                </a:solidFill>
+                <a:latin typeface="Calibri" pitchFamily="34" charset="0"/>
+                <a:ea typeface="Calibri" pitchFamily="34" charset="-122"/>
+                <a:cs typeface="Calibri" pitchFamily="34" charset="-120"/>
+              </a:rPr>
+              <a:t>5</a:t>
+            </a:r>
+            <a:endParaRPr lang="en-US" sz="900" dirty="0"/>
+          </a:p>
+        </p:txBody>
+      </p:sp>
+      <p:sp>
+        <p:nvSpPr>
+          <p:cNvPr id="20" name="Shape 18"/>
+          <p:cNvSpPr/>
+          <p:nvPr/>
+        </p:nvSpPr>
+        <p:spPr>
+          <a:xfrm>
+            <a:off x="5394960" y="2505456"/>
+            <a:ext cx="694944" cy="438912"/>
+          </a:xfrm>
+          <a:prstGeom prst="roundRect">
+            <a:avLst>
+              <a:gd name="adj" fmla="val 10417"/>
+            </a:avLst>
+          </a:prstGeom>
+          <a:solidFill>
+            <a:srgbClr val="E4E7DF"/>
+          </a:solidFill>
+          <a:ln w="13970">
+            <a:solidFill>
+              <a:srgbClr val="566270"/>
+            </a:solidFill>
+            <a:prstDash val="solid"/>
+          </a:ln>
+        </p:spPr>
+      </p:sp>
+      <p:sp>
+        <p:nvSpPr>
+          <p:cNvPr id="21" name="Shape 19"/>
+          <p:cNvSpPr/>
+          <p:nvPr/>
+        </p:nvSpPr>
+        <p:spPr>
+          <a:xfrm>
+            <a:off x="5581863" y="2194560"/>
+            <a:ext cx="64008" cy="310896"/>
+          </a:xfrm>
+          <a:prstGeom prst="rect">
+            <a:avLst/>
+          </a:prstGeom>
+          <a:solidFill>
+            <a:srgbClr val="566270"/>
+          </a:solidFill>
+          <a:ln/>
+        </p:spPr>
+      </p:sp>
+      <p:sp>
+        <p:nvSpPr>
+          <p:cNvPr id="22" name="Shape 20"/>
+          <p:cNvSpPr/>
+          <p:nvPr/>
+        </p:nvSpPr>
+        <p:spPr>
+          <a:xfrm>
+            <a:off x="5838993" y="2194560"/>
+            <a:ext cx="64008" cy="310896"/>
+          </a:xfrm>
+          <a:prstGeom prst="rect">
+            <a:avLst/>
+          </a:prstGeom>
+          <a:solidFill>
+            <a:srgbClr val="566270"/>
+          </a:solidFill>
+          <a:ln/>
+        </p:spPr>
+      </p:sp>
+      <p:sp>
+        <p:nvSpPr>
+          <p:cNvPr id="23" name="Shape 21"/>
+          <p:cNvSpPr/>
+          <p:nvPr/>
+        </p:nvSpPr>
+        <p:spPr>
+          <a:xfrm>
+            <a:off x="5581863" y="2459736"/>
+            <a:ext cx="321137" cy="45720"/>
+          </a:xfrm>
+          <a:prstGeom prst="rect">
+            <a:avLst/>
+          </a:prstGeom>
+          <a:solidFill>
+            <a:srgbClr val="566270"/>
+          </a:solidFill>
+          <a:ln/>
+        </p:spPr>
+      </p:sp>
+      <p:sp>
+        <p:nvSpPr>
+          <p:cNvPr id="24" name="Text 22"/>
+          <p:cNvSpPr/>
+          <p:nvPr/>
+        </p:nvSpPr>
+        <p:spPr>
+          <a:xfrm>
+            <a:off x="5394960" y="2505456"/>
+            <a:ext cx="694944" cy="438912"/>
+          </a:xfrm>
+          <a:prstGeom prst="rect">
+            <a:avLst/>
+          </a:prstGeom>
+          <a:noFill/>
+          <a:ln/>
+        </p:spPr>
+        <p:txBody>
+          <a:bodyPr wrap="square" lIns="0" tIns="0" rIns="0" bIns="0" rtlCol="0" anchor="ctr"/>
+          <a:lstStyle/>
+          <a:p>
+            <a:pPr algn="ctr" indent="0" marL="0">
+              <a:buNone/>
+            </a:pPr>
+            <a:r>
+              <a:rPr lang="en-US" sz="900" b="1" dirty="0">
+                <a:solidFill>
+                  <a:srgbClr val="2A2F39"/>
+                </a:solidFill>
+                <a:latin typeface="Calibri" pitchFamily="34" charset="0"/>
+                <a:ea typeface="Calibri" pitchFamily="34" charset="-122"/>
+                <a:cs typeface="Calibri" pitchFamily="34" charset="-120"/>
+              </a:rPr>
+              <a:t>6</a:t>
+            </a:r>
+            <a:endParaRPr lang="en-US" sz="900" dirty="0"/>
+          </a:p>
+        </p:txBody>
+      </p:sp>
+      <p:sp>
+        <p:nvSpPr>
+          <p:cNvPr id="25" name="Shape 23"/>
+          <p:cNvSpPr/>
+          <p:nvPr/>
+        </p:nvSpPr>
+        <p:spPr>
+          <a:xfrm>
+            <a:off x="6336792" y="2212848"/>
+            <a:ext cx="621792" cy="365760"/>
+          </a:xfrm>
+          <a:prstGeom prst="roundRect">
+            <a:avLst>
+              <a:gd name="adj" fmla="val 12500"/>
+            </a:avLst>
+          </a:prstGeom>
+          <a:solidFill>
+            <a:srgbClr val="E4E7DF"/>
+          </a:solidFill>
+          <a:ln w="13970">
+            <a:solidFill>
+              <a:srgbClr val="566270"/>
+            </a:solidFill>
+            <a:prstDash val="solid"/>
+          </a:ln>
+        </p:spPr>
+      </p:sp>
+      <p:sp>
+        <p:nvSpPr>
+          <p:cNvPr id="26" name="Shape 24"/>
+          <p:cNvSpPr/>
+          <p:nvPr/>
+        </p:nvSpPr>
+        <p:spPr>
+          <a:xfrm>
+            <a:off x="6025896" y="2251253"/>
+            <a:ext cx="310896" cy="64008"/>
+          </a:xfrm>
+          <a:prstGeom prst="rect">
+            <a:avLst/>
+          </a:prstGeom>
+          <a:solidFill>
+            <a:srgbClr val="566270"/>
+          </a:solidFill>
+          <a:ln/>
+        </p:spPr>
+      </p:sp>
+      <p:sp>
+        <p:nvSpPr>
+          <p:cNvPr id="27" name="Shape 25"/>
+          <p:cNvSpPr/>
+          <p:nvPr/>
+        </p:nvSpPr>
+        <p:spPr>
+          <a:xfrm>
+            <a:off x="6025896" y="2476195"/>
+            <a:ext cx="310896" cy="64008"/>
+          </a:xfrm>
+          <a:prstGeom prst="rect">
+            <a:avLst/>
+          </a:prstGeom>
+          <a:solidFill>
+            <a:srgbClr val="566270"/>
+          </a:solidFill>
+          <a:ln/>
+        </p:spPr>
+      </p:sp>
+      <p:sp>
+        <p:nvSpPr>
+          <p:cNvPr id="28" name="Text 26"/>
+          <p:cNvSpPr/>
+          <p:nvPr/>
+        </p:nvSpPr>
+        <p:spPr>
+          <a:xfrm>
+            <a:off x="6336792" y="2212848"/>
+            <a:ext cx="621792" cy="365760"/>
+          </a:xfrm>
+          <a:prstGeom prst="rect">
+            <a:avLst/>
+          </a:prstGeom>
+          <a:noFill/>
+          <a:ln/>
+        </p:spPr>
+        <p:txBody>
+          <a:bodyPr wrap="square" lIns="0" tIns="0" rIns="0" bIns="0" rtlCol="0" anchor="ctr"/>
+          <a:lstStyle/>
+          <a:p>
+            <a:pPr algn="ctr" indent="0" marL="0">
+              <a:buNone/>
+            </a:pPr>
+            <a:r>
+              <a:rPr lang="en-US" sz="900" b="1" dirty="0">
+                <a:solidFill>
+                  <a:srgbClr val="2A2F39"/>
+                </a:solidFill>
+                <a:latin typeface="Calibri" pitchFamily="34" charset="0"/>
+                <a:ea typeface="Calibri" pitchFamily="34" charset="-122"/>
+                <a:cs typeface="Calibri" pitchFamily="34" charset="-120"/>
+              </a:rPr>
+              <a:t>2</a:t>
+            </a:r>
+            <a:endParaRPr lang="en-US" sz="900" dirty="0"/>
+          </a:p>
+        </p:txBody>
+      </p:sp>
+      <p:sp>
+        <p:nvSpPr>
+          <p:cNvPr id="29" name="Shape 27"/>
+          <p:cNvSpPr/>
+          <p:nvPr/>
+        </p:nvSpPr>
+        <p:spPr>
+          <a:xfrm>
+            <a:off x="6336792" y="3108960"/>
+            <a:ext cx="658368" cy="365760"/>
+          </a:xfrm>
+          <a:prstGeom prst="roundRect">
+            <a:avLst>
+              <a:gd name="adj" fmla="val 12500"/>
+            </a:avLst>
+          </a:prstGeom>
+          <a:solidFill>
+            <a:srgbClr val="CDE9F7"/>
+          </a:solidFill>
+          <a:ln w="13970">
+            <a:solidFill>
+              <a:srgbClr val="566270"/>
+            </a:solidFill>
+            <a:prstDash val="solid"/>
+          </a:ln>
+        </p:spPr>
+      </p:sp>
+      <p:sp>
+        <p:nvSpPr>
+          <p:cNvPr id="30" name="Shape 28"/>
+          <p:cNvSpPr/>
+          <p:nvPr/>
+        </p:nvSpPr>
+        <p:spPr>
+          <a:xfrm>
+            <a:off x="6025896" y="3147365"/>
+            <a:ext cx="310896" cy="64008"/>
+          </a:xfrm>
+          <a:prstGeom prst="rect">
+            <a:avLst/>
+          </a:prstGeom>
+          <a:solidFill>
+            <a:srgbClr val="566270"/>
+          </a:solidFill>
+          <a:ln/>
+        </p:spPr>
+      </p:sp>
+      <p:sp>
+        <p:nvSpPr>
+          <p:cNvPr id="31" name="Shape 29"/>
+          <p:cNvSpPr/>
+          <p:nvPr/>
+        </p:nvSpPr>
+        <p:spPr>
+          <a:xfrm>
+            <a:off x="6025896" y="3372307"/>
+            <a:ext cx="310896" cy="64008"/>
+          </a:xfrm>
+          <a:prstGeom prst="rect">
+            <a:avLst/>
+          </a:prstGeom>
+          <a:solidFill>
+            <a:srgbClr val="566270"/>
+          </a:solidFill>
+          <a:ln/>
+        </p:spPr>
+      </p:sp>
+      <p:sp>
+        <p:nvSpPr>
+          <p:cNvPr id="32" name="Text 30"/>
+          <p:cNvSpPr/>
+          <p:nvPr/>
+        </p:nvSpPr>
+        <p:spPr>
+          <a:xfrm>
+            <a:off x="6336792" y="3108960"/>
+            <a:ext cx="658368" cy="365760"/>
+          </a:xfrm>
+          <a:prstGeom prst="rect">
+            <a:avLst/>
+          </a:prstGeom>
+          <a:noFill/>
+          <a:ln/>
+        </p:spPr>
+        <p:txBody>
+          <a:bodyPr wrap="square" lIns="0" tIns="0" rIns="0" bIns="0" rtlCol="0" anchor="ctr"/>
+          <a:lstStyle/>
+          <a:p>
+            <a:pPr algn="ctr" indent="0" marL="0">
+              <a:buNone/>
+            </a:pPr>
+            <a:r>
+              <a:rPr lang="en-US" sz="900" b="1" dirty="0">
+                <a:solidFill>
+                  <a:srgbClr val="2A2F39"/>
+                </a:solidFill>
+                <a:latin typeface="Calibri" pitchFamily="34" charset="0"/>
+                <a:ea typeface="Calibri" pitchFamily="34" charset="-122"/>
+                <a:cs typeface="Calibri" pitchFamily="34" charset="-120"/>
+              </a:rPr>
+              <a:t>1</a:t>
+            </a:r>
+            <a:endParaRPr lang="en-US" sz="900" dirty="0"/>
+          </a:p>
+        </p:txBody>
+      </p:sp>
+      <p:sp>
+        <p:nvSpPr>
+          <p:cNvPr id="33" name="Shape 31"/>
+          <p:cNvSpPr/>
+          <p:nvPr/>
+        </p:nvSpPr>
+        <p:spPr>
+          <a:xfrm>
+            <a:off x="4480560" y="3246120"/>
+            <a:ext cx="640080" cy="365760"/>
+          </a:xfrm>
+          <a:prstGeom prst="rect">
+            <a:avLst/>
+          </a:prstGeom>
+          <a:solidFill>
+            <a:srgbClr val="EDE6D7"/>
           </a:solidFill>
           <a:ln w="12700">
             <a:solidFill>
@@ -5343,14 +6108,14 @@
       </p:sp>
       <p:sp>
         <p:nvSpPr>
-          <p:cNvPr id="7" name="Text 5"/>
-          <p:cNvSpPr/>
-          <p:nvPr/>
-        </p:nvSpPr>
-        <p:spPr>
-          <a:xfrm>
-            <a:off x="960120" y="2084832"/>
-            <a:ext cx="1188720" cy="731520"/>
+          <p:cNvPr id="34" name="Text 32"/>
+          <p:cNvSpPr/>
+          <p:nvPr/>
+        </p:nvSpPr>
+        <p:spPr>
+          <a:xfrm>
+            <a:off x="4480560" y="3246120"/>
+            <a:ext cx="640080" cy="365760"/>
           </a:xfrm>
           <a:prstGeom prst="rect">
             <a:avLst/>
@@ -5374,7 +6139,7 @@
                 <a:ea typeface="Calibri" pitchFamily="34" charset="-122"/>
                 <a:cs typeface="Calibri" pitchFamily="34" charset="-120"/>
               </a:rPr>
-              <a:t>3</a:t>
+              <a:t>7</a:t>
             </a:r>
             <a:endParaRPr lang="en-US" sz="900" dirty="0"/>
           </a:p>
@@ -5382,20 +6147,20 @@
       </p:sp>
       <p:sp>
         <p:nvSpPr>
-          <p:cNvPr id="8" name="Shape 6"/>
-          <p:cNvSpPr/>
-          <p:nvPr/>
-        </p:nvSpPr>
-        <p:spPr>
-          <a:xfrm>
-            <a:off x="2286000" y="2084832"/>
-            <a:ext cx="1188720" cy="731520"/>
-          </a:xfrm>
-          <a:prstGeom prst="rect">
-            <a:avLst/>
-          </a:prstGeom>
-          <a:solidFill>
-            <a:srgbClr val="DCE0E6"/>
+          <p:cNvPr id="35" name="Shape 33"/>
+          <p:cNvSpPr/>
+          <p:nvPr/>
+        </p:nvSpPr>
+        <p:spPr>
+          <a:xfrm>
+            <a:off x="5349240" y="3246120"/>
+            <a:ext cx="640080" cy="365760"/>
+          </a:xfrm>
+          <a:prstGeom prst="rect">
+            <a:avLst/>
+          </a:prstGeom>
+          <a:solidFill>
+            <a:srgbClr val="EDE6D7"/>
           </a:solidFill>
           <a:ln w="12700">
             <a:solidFill>
@@ -5407,14 +6172,14 @@
       </p:sp>
       <p:sp>
         <p:nvSpPr>
-          <p:cNvPr id="9" name="Text 7"/>
-          <p:cNvSpPr/>
-          <p:nvPr/>
-        </p:nvSpPr>
-        <p:spPr>
-          <a:xfrm>
-            <a:off x="2286000" y="2084832"/>
-            <a:ext cx="1188720" cy="731520"/>
+          <p:cNvPr id="36" name="Text 34"/>
+          <p:cNvSpPr/>
+          <p:nvPr/>
+        </p:nvSpPr>
+        <p:spPr>
+          <a:xfrm>
+            <a:off x="5349240" y="3246120"/>
+            <a:ext cx="640080" cy="365760"/>
           </a:xfrm>
           <a:prstGeom prst="rect">
             <a:avLst/>
@@ -5438,28 +6203,2551 @@
                 <a:ea typeface="Calibri" pitchFamily="34" charset="-122"/>
                 <a:cs typeface="Calibri" pitchFamily="34" charset="-120"/>
               </a:rPr>
+              <a:t>8</a:t>
+            </a:r>
+            <a:endParaRPr lang="en-US" sz="900" dirty="0"/>
+          </a:p>
+        </p:txBody>
+      </p:sp>
+      <p:sp>
+        <p:nvSpPr>
+          <p:cNvPr id="37" name="Shape 35"/>
+          <p:cNvSpPr/>
+          <p:nvPr/>
+        </p:nvSpPr>
+        <p:spPr>
+          <a:xfrm>
+            <a:off x="6611112" y="3749040"/>
+            <a:ext cx="438912" cy="1143000"/>
+          </a:xfrm>
+          <a:prstGeom prst="rect">
+            <a:avLst/>
+          </a:prstGeom>
+          <a:solidFill>
+            <a:srgbClr val="DCE0E6"/>
+          </a:solidFill>
+          <a:ln w="16510">
+            <a:solidFill>
+              <a:srgbClr val="8A93A0"/>
+            </a:solidFill>
+            <a:prstDash val="solid"/>
+          </a:ln>
+        </p:spPr>
+      </p:sp>
+      <p:sp>
+        <p:nvSpPr>
+          <p:cNvPr id="38" name="Shape 36"/>
+          <p:cNvSpPr/>
+          <p:nvPr/>
+        </p:nvSpPr>
+        <p:spPr>
+          <a:xfrm>
+            <a:off x="6611112" y="3939540"/>
+            <a:ext cx="438912" cy="0"/>
+          </a:xfrm>
+          <a:prstGeom prst="line">
+            <a:avLst/>
+          </a:prstGeom>
+          <a:noFill/>
+          <a:ln w="10160">
+            <a:solidFill>
+              <a:srgbClr val="9AA3B0"/>
+            </a:solidFill>
+            <a:prstDash val="solid"/>
+          </a:ln>
+        </p:spPr>
+      </p:sp>
+      <p:sp>
+        <p:nvSpPr>
+          <p:cNvPr id="39" name="Shape 37"/>
+          <p:cNvSpPr/>
+          <p:nvPr/>
+        </p:nvSpPr>
+        <p:spPr>
+          <a:xfrm>
+            <a:off x="6611112" y="4130040"/>
+            <a:ext cx="438912" cy="0"/>
+          </a:xfrm>
+          <a:prstGeom prst="line">
+            <a:avLst/>
+          </a:prstGeom>
+          <a:noFill/>
+          <a:ln w="10160">
+            <a:solidFill>
+              <a:srgbClr val="9AA3B0"/>
+            </a:solidFill>
+            <a:prstDash val="solid"/>
+          </a:ln>
+        </p:spPr>
+      </p:sp>
+      <p:sp>
+        <p:nvSpPr>
+          <p:cNvPr id="40" name="Shape 38"/>
+          <p:cNvSpPr/>
+          <p:nvPr/>
+        </p:nvSpPr>
+        <p:spPr>
+          <a:xfrm>
+            <a:off x="6611112" y="4320540"/>
+            <a:ext cx="438912" cy="0"/>
+          </a:xfrm>
+          <a:prstGeom prst="line">
+            <a:avLst/>
+          </a:prstGeom>
+          <a:noFill/>
+          <a:ln w="10160">
+            <a:solidFill>
+              <a:srgbClr val="9AA3B0"/>
+            </a:solidFill>
+            <a:prstDash val="solid"/>
+          </a:ln>
+        </p:spPr>
+      </p:sp>
+      <p:sp>
+        <p:nvSpPr>
+          <p:cNvPr id="41" name="Shape 39"/>
+          <p:cNvSpPr/>
+          <p:nvPr/>
+        </p:nvSpPr>
+        <p:spPr>
+          <a:xfrm>
+            <a:off x="6611112" y="4511040"/>
+            <a:ext cx="438912" cy="0"/>
+          </a:xfrm>
+          <a:prstGeom prst="line">
+            <a:avLst/>
+          </a:prstGeom>
+          <a:noFill/>
+          <a:ln w="10160">
+            <a:solidFill>
+              <a:srgbClr val="9AA3B0"/>
+            </a:solidFill>
+            <a:prstDash val="solid"/>
+          </a:ln>
+        </p:spPr>
+      </p:sp>
+      <p:sp>
+        <p:nvSpPr>
+          <p:cNvPr id="42" name="Shape 40"/>
+          <p:cNvSpPr/>
+          <p:nvPr/>
+        </p:nvSpPr>
+        <p:spPr>
+          <a:xfrm>
+            <a:off x="6611112" y="4701540"/>
+            <a:ext cx="438912" cy="0"/>
+          </a:xfrm>
+          <a:prstGeom prst="line">
+            <a:avLst/>
+          </a:prstGeom>
+          <a:noFill/>
+          <a:ln w="10160">
+            <a:solidFill>
+              <a:srgbClr val="9AA3B0"/>
+            </a:solidFill>
+            <a:prstDash val="solid"/>
+          </a:ln>
+        </p:spPr>
+      </p:sp>
+      <p:sp>
+        <p:nvSpPr>
+          <p:cNvPr id="43" name="Shape 41"/>
+          <p:cNvSpPr/>
+          <p:nvPr/>
+        </p:nvSpPr>
+        <p:spPr>
+          <a:xfrm>
+            <a:off x="6675120" y="3803904"/>
+            <a:ext cx="310896" cy="80772"/>
+          </a:xfrm>
+          <a:prstGeom prst="rect">
+            <a:avLst/>
+          </a:prstGeom>
+          <a:solidFill>
+            <a:srgbClr val="CFC2A0"/>
+          </a:solidFill>
+          <a:ln w="5080">
+            <a:solidFill>
+              <a:srgbClr val="AC9E78"/>
+            </a:solidFill>
+            <a:prstDash val="solid"/>
+          </a:ln>
+        </p:spPr>
+      </p:sp>
+      <p:sp>
+        <p:nvSpPr>
+          <p:cNvPr id="44" name="Shape 42"/>
+          <p:cNvSpPr/>
+          <p:nvPr/>
+        </p:nvSpPr>
+        <p:spPr>
+          <a:xfrm>
+            <a:off x="6675120" y="4184904"/>
+            <a:ext cx="310896" cy="80772"/>
+          </a:xfrm>
+          <a:prstGeom prst="rect">
+            <a:avLst/>
+          </a:prstGeom>
+          <a:solidFill>
+            <a:srgbClr val="CFC2A0"/>
+          </a:solidFill>
+          <a:ln w="5080">
+            <a:solidFill>
+              <a:srgbClr val="AC9E78"/>
+            </a:solidFill>
+            <a:prstDash val="solid"/>
+          </a:ln>
+        </p:spPr>
+      </p:sp>
+      <p:sp>
+        <p:nvSpPr>
+          <p:cNvPr id="45" name="Shape 43"/>
+          <p:cNvSpPr/>
+          <p:nvPr/>
+        </p:nvSpPr>
+        <p:spPr>
+          <a:xfrm>
+            <a:off x="6675120" y="4565904"/>
+            <a:ext cx="310896" cy="80772"/>
+          </a:xfrm>
+          <a:prstGeom prst="rect">
+            <a:avLst/>
+          </a:prstGeom>
+          <a:solidFill>
+            <a:srgbClr val="CFC2A0"/>
+          </a:solidFill>
+          <a:ln w="5080">
+            <a:solidFill>
+              <a:srgbClr val="AC9E78"/>
+            </a:solidFill>
+            <a:prstDash val="solid"/>
+          </a:ln>
+        </p:spPr>
+      </p:sp>
+      <p:sp>
+        <p:nvSpPr>
+          <p:cNvPr id="46" name="Shape 44"/>
+          <p:cNvSpPr/>
+          <p:nvPr/>
+        </p:nvSpPr>
+        <p:spPr>
+          <a:xfrm>
+            <a:off x="6446520" y="3511296"/>
+            <a:ext cx="768096" cy="237744"/>
+          </a:xfrm>
+          <a:prstGeom prst="roundRect">
+            <a:avLst>
+              <a:gd name="adj" fmla="val 15385"/>
+            </a:avLst>
+          </a:prstGeom>
+          <a:solidFill>
+            <a:srgbClr val="566270"/>
+          </a:solidFill>
+          <a:ln/>
+        </p:spPr>
+      </p:sp>
+      <p:sp>
+        <p:nvSpPr>
+          <p:cNvPr id="47" name="Text 45"/>
+          <p:cNvSpPr/>
+          <p:nvPr/>
+        </p:nvSpPr>
+        <p:spPr>
+          <a:xfrm>
+            <a:off x="6446520" y="3511296"/>
+            <a:ext cx="768096" cy="237744"/>
+          </a:xfrm>
+          <a:prstGeom prst="rect">
+            <a:avLst/>
+          </a:prstGeom>
+          <a:noFill/>
+          <a:ln/>
+        </p:spPr>
+        <p:txBody>
+          <a:bodyPr wrap="square" lIns="0" tIns="0" rIns="0" bIns="0" rtlCol="0" anchor="ctr"/>
+          <a:lstStyle/>
+          <a:p>
+            <a:pPr algn="ctr" indent="0" marL="0">
+              <a:buNone/>
+            </a:pPr>
+            <a:r>
+              <a:rPr lang="en-US" sz="950" b="1" dirty="0">
+                <a:solidFill>
+                  <a:srgbClr val="FFFFFF"/>
+                </a:solidFill>
+                <a:latin typeface="Calibri" pitchFamily="34" charset="0"/>
+                <a:ea typeface="Calibri" pitchFamily="34" charset="-122"/>
+                <a:cs typeface="Calibri" pitchFamily="34" charset="-120"/>
+              </a:rPr>
+              <a:t>3</a:t>
+            </a:r>
+            <a:endParaRPr lang="en-US" sz="950" dirty="0"/>
+          </a:p>
+        </p:txBody>
+      </p:sp>
+      <p:sp>
+        <p:nvSpPr>
+          <p:cNvPr id="48" name="Shape 46"/>
+          <p:cNvSpPr/>
+          <p:nvPr/>
+        </p:nvSpPr>
+        <p:spPr>
+          <a:xfrm>
+            <a:off x="4617720" y="4206240"/>
+            <a:ext cx="475488" cy="777240"/>
+          </a:xfrm>
+          <a:prstGeom prst="rect">
+            <a:avLst/>
+          </a:prstGeom>
+          <a:solidFill>
+            <a:srgbClr val="DCE0E6"/>
+          </a:solidFill>
+          <a:ln w="16510">
+            <a:solidFill>
+              <a:srgbClr val="8A93A0"/>
+            </a:solidFill>
+            <a:prstDash val="solid"/>
+          </a:ln>
+        </p:spPr>
+      </p:sp>
+      <p:sp>
+        <p:nvSpPr>
+          <p:cNvPr id="49" name="Shape 47"/>
+          <p:cNvSpPr/>
+          <p:nvPr/>
+        </p:nvSpPr>
+        <p:spPr>
+          <a:xfrm>
+            <a:off x="4617720" y="4335780"/>
+            <a:ext cx="475488" cy="0"/>
+          </a:xfrm>
+          <a:prstGeom prst="line">
+            <a:avLst/>
+          </a:prstGeom>
+          <a:noFill/>
+          <a:ln w="10160">
+            <a:solidFill>
+              <a:srgbClr val="9AA3B0"/>
+            </a:solidFill>
+            <a:prstDash val="solid"/>
+          </a:ln>
+        </p:spPr>
+      </p:sp>
+      <p:sp>
+        <p:nvSpPr>
+          <p:cNvPr id="50" name="Shape 48"/>
+          <p:cNvSpPr/>
+          <p:nvPr/>
+        </p:nvSpPr>
+        <p:spPr>
+          <a:xfrm>
+            <a:off x="4617720" y="4465320"/>
+            <a:ext cx="475488" cy="0"/>
+          </a:xfrm>
+          <a:prstGeom prst="line">
+            <a:avLst/>
+          </a:prstGeom>
+          <a:noFill/>
+          <a:ln w="10160">
+            <a:solidFill>
+              <a:srgbClr val="9AA3B0"/>
+            </a:solidFill>
+            <a:prstDash val="solid"/>
+          </a:ln>
+        </p:spPr>
+      </p:sp>
+      <p:sp>
+        <p:nvSpPr>
+          <p:cNvPr id="51" name="Shape 49"/>
+          <p:cNvSpPr/>
+          <p:nvPr/>
+        </p:nvSpPr>
+        <p:spPr>
+          <a:xfrm>
+            <a:off x="4617720" y="4594860"/>
+            <a:ext cx="475488" cy="0"/>
+          </a:xfrm>
+          <a:prstGeom prst="line">
+            <a:avLst/>
+          </a:prstGeom>
+          <a:noFill/>
+          <a:ln w="10160">
+            <a:solidFill>
+              <a:srgbClr val="9AA3B0"/>
+            </a:solidFill>
+            <a:prstDash val="solid"/>
+          </a:ln>
+        </p:spPr>
+      </p:sp>
+      <p:sp>
+        <p:nvSpPr>
+          <p:cNvPr id="52" name="Shape 50"/>
+          <p:cNvSpPr/>
+          <p:nvPr/>
+        </p:nvSpPr>
+        <p:spPr>
+          <a:xfrm>
+            <a:off x="4617720" y="4724400"/>
+            <a:ext cx="475488" cy="0"/>
+          </a:xfrm>
+          <a:prstGeom prst="line">
+            <a:avLst/>
+          </a:prstGeom>
+          <a:noFill/>
+          <a:ln w="10160">
+            <a:solidFill>
+              <a:srgbClr val="9AA3B0"/>
+            </a:solidFill>
+            <a:prstDash val="solid"/>
+          </a:ln>
+        </p:spPr>
+      </p:sp>
+      <p:sp>
+        <p:nvSpPr>
+          <p:cNvPr id="53" name="Shape 51"/>
+          <p:cNvSpPr/>
+          <p:nvPr/>
+        </p:nvSpPr>
+        <p:spPr>
+          <a:xfrm>
+            <a:off x="4617720" y="4853940"/>
+            <a:ext cx="475488" cy="0"/>
+          </a:xfrm>
+          <a:prstGeom prst="line">
+            <a:avLst/>
+          </a:prstGeom>
+          <a:noFill/>
+          <a:ln w="10160">
+            <a:solidFill>
+              <a:srgbClr val="9AA3B0"/>
+            </a:solidFill>
+            <a:prstDash val="solid"/>
+          </a:ln>
+        </p:spPr>
+      </p:sp>
+      <p:sp>
+        <p:nvSpPr>
+          <p:cNvPr id="54" name="Shape 52"/>
+          <p:cNvSpPr/>
+          <p:nvPr/>
+        </p:nvSpPr>
+        <p:spPr>
+          <a:xfrm>
+            <a:off x="4681728" y="4261104"/>
+            <a:ext cx="347472" cy="19812"/>
+          </a:xfrm>
+          <a:prstGeom prst="rect">
+            <a:avLst/>
+          </a:prstGeom>
+          <a:solidFill>
+            <a:srgbClr val="CFC2A0"/>
+          </a:solidFill>
+          <a:ln w="5080">
+            <a:solidFill>
+              <a:srgbClr val="AC9E78"/>
+            </a:solidFill>
+            <a:prstDash val="solid"/>
+          </a:ln>
+        </p:spPr>
+      </p:sp>
+      <p:sp>
+        <p:nvSpPr>
+          <p:cNvPr id="55" name="Shape 53"/>
+          <p:cNvSpPr/>
+          <p:nvPr/>
+        </p:nvSpPr>
+        <p:spPr>
+          <a:xfrm>
+            <a:off x="4681728" y="4520184"/>
+            <a:ext cx="347472" cy="19812"/>
+          </a:xfrm>
+          <a:prstGeom prst="rect">
+            <a:avLst/>
+          </a:prstGeom>
+          <a:solidFill>
+            <a:srgbClr val="CFC2A0"/>
+          </a:solidFill>
+          <a:ln w="5080">
+            <a:solidFill>
+              <a:srgbClr val="AC9E78"/>
+            </a:solidFill>
+            <a:prstDash val="solid"/>
+          </a:ln>
+        </p:spPr>
+      </p:sp>
+      <p:sp>
+        <p:nvSpPr>
+          <p:cNvPr id="56" name="Shape 54"/>
+          <p:cNvSpPr/>
+          <p:nvPr/>
+        </p:nvSpPr>
+        <p:spPr>
+          <a:xfrm>
+            <a:off x="4681728" y="4779264"/>
+            <a:ext cx="347472" cy="19812"/>
+          </a:xfrm>
+          <a:prstGeom prst="rect">
+            <a:avLst/>
+          </a:prstGeom>
+          <a:solidFill>
+            <a:srgbClr val="CFC2A0"/>
+          </a:solidFill>
+          <a:ln w="5080">
+            <a:solidFill>
+              <a:srgbClr val="AC9E78"/>
+            </a:solidFill>
+            <a:prstDash val="solid"/>
+          </a:ln>
+        </p:spPr>
+      </p:sp>
+      <p:sp>
+        <p:nvSpPr>
+          <p:cNvPr id="57" name="Shape 55"/>
+          <p:cNvSpPr/>
+          <p:nvPr/>
+        </p:nvSpPr>
+        <p:spPr>
+          <a:xfrm>
+            <a:off x="4471416" y="3968496"/>
+            <a:ext cx="768096" cy="237744"/>
+          </a:xfrm>
+          <a:prstGeom prst="roundRect">
+            <a:avLst>
+              <a:gd name="adj" fmla="val 15385"/>
+            </a:avLst>
+          </a:prstGeom>
+          <a:solidFill>
+            <a:srgbClr val="566270"/>
+          </a:solidFill>
+          <a:ln/>
+        </p:spPr>
+      </p:sp>
+      <p:sp>
+        <p:nvSpPr>
+          <p:cNvPr id="58" name="Text 56"/>
+          <p:cNvSpPr/>
+          <p:nvPr/>
+        </p:nvSpPr>
+        <p:spPr>
+          <a:xfrm>
+            <a:off x="4471416" y="3968496"/>
+            <a:ext cx="768096" cy="237744"/>
+          </a:xfrm>
+          <a:prstGeom prst="rect">
+            <a:avLst/>
+          </a:prstGeom>
+          <a:noFill/>
+          <a:ln/>
+        </p:spPr>
+        <p:txBody>
+          <a:bodyPr wrap="square" lIns="0" tIns="0" rIns="0" bIns="0" rtlCol="0" anchor="ctr"/>
+          <a:lstStyle/>
+          <a:p>
+            <a:pPr algn="ctr" indent="0" marL="0">
+              <a:buNone/>
+            </a:pPr>
+            <a:r>
+              <a:rPr lang="en-US" sz="950" b="1" dirty="0">
+                <a:solidFill>
+                  <a:srgbClr val="FFFFFF"/>
+                </a:solidFill>
+                <a:latin typeface="Calibri" pitchFamily="34" charset="0"/>
+                <a:ea typeface="Calibri" pitchFamily="34" charset="-122"/>
+                <a:cs typeface="Calibri" pitchFamily="34" charset="-120"/>
+              </a:rPr>
               <a:t>4</a:t>
             </a:r>
+            <a:endParaRPr lang="en-US" sz="950" dirty="0"/>
+          </a:p>
+        </p:txBody>
+      </p:sp>
+      <p:sp>
+        <p:nvSpPr>
+          <p:cNvPr id="59" name="Shape 57"/>
+          <p:cNvSpPr/>
+          <p:nvPr/>
+        </p:nvSpPr>
+        <p:spPr>
+          <a:xfrm>
+            <a:off x="4361688" y="3977640"/>
+            <a:ext cx="1234440" cy="1024128"/>
+          </a:xfrm>
+          <a:prstGeom prst="roundRect">
+            <a:avLst>
+              <a:gd name="adj" fmla="val 5357"/>
+            </a:avLst>
+          </a:prstGeom>
+          <a:solidFill>
+            <a:srgbClr val="FFFFFF">
+              <a:alpha val="0"/>
+            </a:srgbClr>
+          </a:solidFill>
+          <a:ln w="20320">
+            <a:solidFill>
+              <a:srgbClr val="FF5A52"/>
+            </a:solidFill>
+            <a:prstDash val="dash"/>
+          </a:ln>
+        </p:spPr>
+      </p:sp>
+      <p:sp>
+        <p:nvSpPr>
+          <p:cNvPr id="60" name="Text 58"/>
+          <p:cNvSpPr/>
+          <p:nvPr/>
+        </p:nvSpPr>
+        <p:spPr>
+          <a:xfrm>
+            <a:off x="4206240" y="3639312"/>
+            <a:ext cx="1554480" cy="365760"/>
+          </a:xfrm>
+          <a:prstGeom prst="rect">
+            <a:avLst/>
+          </a:prstGeom>
+          <a:noFill/>
+          <a:ln/>
+        </p:spPr>
+        <p:txBody>
+          <a:bodyPr wrap="square" lIns="0" tIns="0" rIns="0" bIns="0" rtlCol="0" anchor="ctr"/>
+          <a:lstStyle/>
+          <a:p>
+            <a:pPr algn="ctr" indent="0" marL="0">
+              <a:buNone/>
+            </a:pPr>
+            <a:r>
+              <a:rPr lang="en-US" sz="800" b="1" dirty="0">
+                <a:solidFill>
+                  <a:srgbClr val="FF5A52"/>
+                </a:solidFill>
+                <a:latin typeface="Calibri" pitchFamily="34" charset="0"/>
+                <a:ea typeface="Calibri" pitchFamily="34" charset="-122"/>
+                <a:cs typeface="Calibri" pitchFamily="34" charset="-120"/>
+              </a:rPr>
+              <a:t>rack 4 — ocupa área que</a:t>
+            </a:r>
+            <a:endParaRPr lang="en-US" sz="800" dirty="0"/>
+          </a:p>
+          <a:p>
+            <a:pPr algn="ctr" indent="0" marL="0">
+              <a:buNone/>
+            </a:pPr>
+            <a:r>
+              <a:rPr lang="en-US" sz="800" b="1" dirty="0">
+                <a:solidFill>
+                  <a:srgbClr val="FF5A52"/>
+                </a:solidFill>
+                <a:latin typeface="Calibri" pitchFamily="34" charset="0"/>
+                <a:ea typeface="Calibri" pitchFamily="34" charset="-122"/>
+                <a:cs typeface="Calibri" pitchFamily="34" charset="-120"/>
+              </a:rPr>
+              <a:t>usan los mecánicos</a:t>
+            </a:r>
+            <a:endParaRPr lang="en-US" sz="800" dirty="0"/>
+          </a:p>
+        </p:txBody>
+      </p:sp>
+      <p:sp>
+        <p:nvSpPr>
+          <p:cNvPr id="61" name="Text 59"/>
+          <p:cNvSpPr/>
+          <p:nvPr/>
+        </p:nvSpPr>
+        <p:spPr>
+          <a:xfrm>
+            <a:off x="7452360" y="1554480"/>
+            <a:ext cx="4114800" cy="274320"/>
+          </a:xfrm>
+          <a:prstGeom prst="rect">
+            <a:avLst/>
+          </a:prstGeom>
+          <a:noFill/>
+          <a:ln/>
+        </p:spPr>
+        <p:txBody>
+          <a:bodyPr wrap="square" lIns="0" tIns="0" rIns="0" bIns="0" rtlCol="0" anchor="ctr"/>
+          <a:lstStyle/>
+          <a:p>
+            <a:pPr indent="0" marL="0">
+              <a:buNone/>
+            </a:pPr>
+            <a:r>
+              <a:rPr lang="en-US" sz="1250" b="1" dirty="0">
+                <a:solidFill>
+                  <a:srgbClr val="1A1D23"/>
+                </a:solidFill>
+                <a:latin typeface="Calibri" pitchFamily="34" charset="0"/>
+                <a:ea typeface="Calibri" pitchFamily="34" charset="-122"/>
+                <a:cs typeface="Calibri" pitchFamily="34" charset="-120"/>
+              </a:rPr>
+              <a:t>Propuesta — lado derecho</a:t>
+            </a:r>
+            <a:endParaRPr lang="en-US" sz="1250" dirty="0"/>
+          </a:p>
+        </p:txBody>
+      </p:sp>
+      <p:sp>
+        <p:nvSpPr>
+          <p:cNvPr id="62" name="Shape 60"/>
+          <p:cNvSpPr/>
+          <p:nvPr/>
+        </p:nvSpPr>
+        <p:spPr>
+          <a:xfrm>
+            <a:off x="7452360" y="1828800"/>
+            <a:ext cx="4114800" cy="3246120"/>
+          </a:xfrm>
+          <a:prstGeom prst="rect">
+            <a:avLst/>
+          </a:prstGeom>
+          <a:solidFill>
+            <a:srgbClr val="FFFFFF"/>
+          </a:solidFill>
+          <a:ln w="30480">
+            <a:solidFill>
+              <a:srgbClr val="3A3F49"/>
+            </a:solidFill>
+            <a:prstDash val="solid"/>
+          </a:ln>
+        </p:spPr>
+      </p:sp>
+      <p:sp>
+        <p:nvSpPr>
+          <p:cNvPr id="63" name="Shape 61"/>
+          <p:cNvSpPr/>
+          <p:nvPr/>
+        </p:nvSpPr>
+        <p:spPr>
+          <a:xfrm>
+            <a:off x="8842248" y="2560320"/>
+            <a:ext cx="1280160" cy="1828800"/>
+          </a:xfrm>
+          <a:prstGeom prst="rect">
+            <a:avLst/>
+          </a:prstGeom>
+          <a:solidFill>
+            <a:srgbClr val="FBEFC9"/>
+          </a:solidFill>
+          <a:ln w="12700">
+            <a:solidFill>
+              <a:srgbClr val="E0C96A"/>
+            </a:solidFill>
+            <a:prstDash val="solid"/>
+          </a:ln>
+        </p:spPr>
+      </p:sp>
+      <p:sp>
+        <p:nvSpPr>
+          <p:cNvPr id="64" name="Text 62"/>
+          <p:cNvSpPr/>
+          <p:nvPr/>
+        </p:nvSpPr>
+        <p:spPr>
+          <a:xfrm>
+            <a:off x="8842248" y="3337560"/>
+            <a:ext cx="1280160" cy="274320"/>
+          </a:xfrm>
+          <a:prstGeom prst="rect">
+            <a:avLst/>
+          </a:prstGeom>
+          <a:noFill/>
+          <a:ln/>
+        </p:spPr>
+        <p:txBody>
+          <a:bodyPr wrap="square" lIns="0" tIns="0" rIns="0" bIns="0" rtlCol="0" anchor="ctr"/>
+          <a:lstStyle/>
+          <a:p>
+            <a:pPr algn="ctr" indent="0" marL="0">
+              <a:buNone/>
+            </a:pPr>
+            <a:r>
+              <a:rPr lang="en-US" sz="1000" b="1" dirty="0">
+                <a:solidFill>
+                  <a:srgbClr val="8A6D16"/>
+                </a:solidFill>
+                <a:latin typeface="Calibri" pitchFamily="34" charset="0"/>
+                <a:ea typeface="Calibri" pitchFamily="34" charset="-122"/>
+                <a:cs typeface="Calibri" pitchFamily="34" charset="-120"/>
+              </a:rPr>
+              <a:t>Pasillo 0</a:t>
+            </a:r>
+            <a:endParaRPr lang="en-US" sz="1000" dirty="0"/>
+          </a:p>
+        </p:txBody>
+      </p:sp>
+      <p:sp>
+        <p:nvSpPr>
+          <p:cNvPr id="65" name="Shape 63"/>
+          <p:cNvSpPr/>
+          <p:nvPr/>
+        </p:nvSpPr>
+        <p:spPr>
+          <a:xfrm>
+            <a:off x="8257032" y="2560320"/>
+            <a:ext cx="530352" cy="1828800"/>
+          </a:xfrm>
+          <a:prstGeom prst="rect">
+            <a:avLst/>
+          </a:prstGeom>
+          <a:solidFill>
+            <a:srgbClr val="DCE0E6"/>
+          </a:solidFill>
+          <a:ln w="16510">
+            <a:solidFill>
+              <a:srgbClr val="8A93A0"/>
+            </a:solidFill>
+            <a:prstDash val="solid"/>
+          </a:ln>
+        </p:spPr>
+      </p:sp>
+      <p:sp>
+        <p:nvSpPr>
+          <p:cNvPr id="66" name="Shape 64"/>
+          <p:cNvSpPr/>
+          <p:nvPr/>
+        </p:nvSpPr>
+        <p:spPr>
+          <a:xfrm>
+            <a:off x="8257032" y="2865120"/>
+            <a:ext cx="530352" cy="0"/>
+          </a:xfrm>
+          <a:prstGeom prst="line">
+            <a:avLst/>
+          </a:prstGeom>
+          <a:noFill/>
+          <a:ln w="10160">
+            <a:solidFill>
+              <a:srgbClr val="9AA3B0"/>
+            </a:solidFill>
+            <a:prstDash val="solid"/>
+          </a:ln>
+        </p:spPr>
+      </p:sp>
+      <p:sp>
+        <p:nvSpPr>
+          <p:cNvPr id="67" name="Shape 65"/>
+          <p:cNvSpPr/>
+          <p:nvPr/>
+        </p:nvSpPr>
+        <p:spPr>
+          <a:xfrm>
+            <a:off x="8257032" y="3169920"/>
+            <a:ext cx="530352" cy="0"/>
+          </a:xfrm>
+          <a:prstGeom prst="line">
+            <a:avLst/>
+          </a:prstGeom>
+          <a:noFill/>
+          <a:ln w="10160">
+            <a:solidFill>
+              <a:srgbClr val="9AA3B0"/>
+            </a:solidFill>
+            <a:prstDash val="solid"/>
+          </a:ln>
+        </p:spPr>
+      </p:sp>
+      <p:sp>
+        <p:nvSpPr>
+          <p:cNvPr id="68" name="Shape 66"/>
+          <p:cNvSpPr/>
+          <p:nvPr/>
+        </p:nvSpPr>
+        <p:spPr>
+          <a:xfrm>
+            <a:off x="8257032" y="3474720"/>
+            <a:ext cx="530352" cy="0"/>
+          </a:xfrm>
+          <a:prstGeom prst="line">
+            <a:avLst/>
+          </a:prstGeom>
+          <a:noFill/>
+          <a:ln w="10160">
+            <a:solidFill>
+              <a:srgbClr val="9AA3B0"/>
+            </a:solidFill>
+            <a:prstDash val="solid"/>
+          </a:ln>
+        </p:spPr>
+      </p:sp>
+      <p:sp>
+        <p:nvSpPr>
+          <p:cNvPr id="69" name="Shape 67"/>
+          <p:cNvSpPr/>
+          <p:nvPr/>
+        </p:nvSpPr>
+        <p:spPr>
+          <a:xfrm>
+            <a:off x="8257032" y="3779520"/>
+            <a:ext cx="530352" cy="0"/>
+          </a:xfrm>
+          <a:prstGeom prst="line">
+            <a:avLst/>
+          </a:prstGeom>
+          <a:noFill/>
+          <a:ln w="10160">
+            <a:solidFill>
+              <a:srgbClr val="9AA3B0"/>
+            </a:solidFill>
+            <a:prstDash val="solid"/>
+          </a:ln>
+        </p:spPr>
+      </p:sp>
+      <p:sp>
+        <p:nvSpPr>
+          <p:cNvPr id="70" name="Shape 68"/>
+          <p:cNvSpPr/>
+          <p:nvPr/>
+        </p:nvSpPr>
+        <p:spPr>
+          <a:xfrm>
+            <a:off x="8257032" y="4084320"/>
+            <a:ext cx="530352" cy="0"/>
+          </a:xfrm>
+          <a:prstGeom prst="line">
+            <a:avLst/>
+          </a:prstGeom>
+          <a:noFill/>
+          <a:ln w="10160">
+            <a:solidFill>
+              <a:srgbClr val="9AA3B0"/>
+            </a:solidFill>
+            <a:prstDash val="solid"/>
+          </a:ln>
+        </p:spPr>
+      </p:sp>
+      <p:sp>
+        <p:nvSpPr>
+          <p:cNvPr id="71" name="Shape 69"/>
+          <p:cNvSpPr/>
+          <p:nvPr/>
+        </p:nvSpPr>
+        <p:spPr>
+          <a:xfrm>
+            <a:off x="8321040" y="2615184"/>
+            <a:ext cx="402336" cy="195072"/>
+          </a:xfrm>
+          <a:prstGeom prst="rect">
+            <a:avLst/>
+          </a:prstGeom>
+          <a:solidFill>
+            <a:srgbClr val="CFC2A0"/>
+          </a:solidFill>
+          <a:ln w="5080">
+            <a:solidFill>
+              <a:srgbClr val="AC9E78"/>
+            </a:solidFill>
+            <a:prstDash val="solid"/>
+          </a:ln>
+        </p:spPr>
+      </p:sp>
+      <p:sp>
+        <p:nvSpPr>
+          <p:cNvPr id="72" name="Shape 70"/>
+          <p:cNvSpPr/>
+          <p:nvPr/>
+        </p:nvSpPr>
+        <p:spPr>
+          <a:xfrm>
+            <a:off x="8321040" y="3224784"/>
+            <a:ext cx="402336" cy="195072"/>
+          </a:xfrm>
+          <a:prstGeom prst="rect">
+            <a:avLst/>
+          </a:prstGeom>
+          <a:solidFill>
+            <a:srgbClr val="CFC2A0"/>
+          </a:solidFill>
+          <a:ln w="5080">
+            <a:solidFill>
+              <a:srgbClr val="AC9E78"/>
+            </a:solidFill>
+            <a:prstDash val="solid"/>
+          </a:ln>
+        </p:spPr>
+      </p:sp>
+      <p:sp>
+        <p:nvSpPr>
+          <p:cNvPr id="73" name="Shape 71"/>
+          <p:cNvSpPr/>
+          <p:nvPr/>
+        </p:nvSpPr>
+        <p:spPr>
+          <a:xfrm>
+            <a:off x="8321040" y="3834384"/>
+            <a:ext cx="402336" cy="195072"/>
+          </a:xfrm>
+          <a:prstGeom prst="rect">
+            <a:avLst/>
+          </a:prstGeom>
+          <a:solidFill>
+            <a:srgbClr val="CFC2A0"/>
+          </a:solidFill>
+          <a:ln w="5080">
+            <a:solidFill>
+              <a:srgbClr val="AC9E78"/>
+            </a:solidFill>
+            <a:prstDash val="solid"/>
+          </a:ln>
+        </p:spPr>
+      </p:sp>
+      <p:sp>
+        <p:nvSpPr>
+          <p:cNvPr id="74" name="Shape 72"/>
+          <p:cNvSpPr/>
+          <p:nvPr/>
+        </p:nvSpPr>
+        <p:spPr>
+          <a:xfrm>
+            <a:off x="8138160" y="2322576"/>
+            <a:ext cx="768096" cy="237744"/>
+          </a:xfrm>
+          <a:prstGeom prst="roundRect">
+            <a:avLst>
+              <a:gd name="adj" fmla="val 15385"/>
+            </a:avLst>
+          </a:prstGeom>
+          <a:solidFill>
+            <a:srgbClr val="566270"/>
+          </a:solidFill>
+          <a:ln/>
+        </p:spPr>
+      </p:sp>
+      <p:sp>
+        <p:nvSpPr>
+          <p:cNvPr id="75" name="Text 73"/>
+          <p:cNvSpPr/>
+          <p:nvPr/>
+        </p:nvSpPr>
+        <p:spPr>
+          <a:xfrm>
+            <a:off x="8138160" y="2322576"/>
+            <a:ext cx="768096" cy="237744"/>
+          </a:xfrm>
+          <a:prstGeom prst="rect">
+            <a:avLst/>
+          </a:prstGeom>
+          <a:noFill/>
+          <a:ln/>
+        </p:spPr>
+        <p:txBody>
+          <a:bodyPr wrap="square" lIns="0" tIns="0" rIns="0" bIns="0" rtlCol="0" anchor="ctr"/>
+          <a:lstStyle/>
+          <a:p>
+            <a:pPr algn="ctr" indent="0" marL="0">
+              <a:buNone/>
+            </a:pPr>
+            <a:r>
+              <a:rPr lang="en-US" sz="950" b="1" dirty="0">
+                <a:solidFill>
+                  <a:srgbClr val="FFFFFF"/>
+                </a:solidFill>
+                <a:latin typeface="Calibri" pitchFamily="34" charset="0"/>
+                <a:ea typeface="Calibri" pitchFamily="34" charset="-122"/>
+                <a:cs typeface="Calibri" pitchFamily="34" charset="-120"/>
+              </a:rPr>
+              <a:t>4</a:t>
+            </a:r>
+            <a:endParaRPr lang="en-US" sz="950" dirty="0"/>
+          </a:p>
+        </p:txBody>
+      </p:sp>
+      <p:sp>
+        <p:nvSpPr>
+          <p:cNvPr id="76" name="Shape 74"/>
+          <p:cNvSpPr/>
+          <p:nvPr/>
+        </p:nvSpPr>
+        <p:spPr>
+          <a:xfrm>
+            <a:off x="10195560" y="2560320"/>
+            <a:ext cx="530352" cy="1828800"/>
+          </a:xfrm>
+          <a:prstGeom prst="rect">
+            <a:avLst/>
+          </a:prstGeom>
+          <a:solidFill>
+            <a:srgbClr val="DCE0E6"/>
+          </a:solidFill>
+          <a:ln w="16510">
+            <a:solidFill>
+              <a:srgbClr val="8A93A0"/>
+            </a:solidFill>
+            <a:prstDash val="solid"/>
+          </a:ln>
+        </p:spPr>
+      </p:sp>
+      <p:sp>
+        <p:nvSpPr>
+          <p:cNvPr id="77" name="Shape 75"/>
+          <p:cNvSpPr/>
+          <p:nvPr/>
+        </p:nvSpPr>
+        <p:spPr>
+          <a:xfrm>
+            <a:off x="10195560" y="2865120"/>
+            <a:ext cx="530352" cy="0"/>
+          </a:xfrm>
+          <a:prstGeom prst="line">
+            <a:avLst/>
+          </a:prstGeom>
+          <a:noFill/>
+          <a:ln w="10160">
+            <a:solidFill>
+              <a:srgbClr val="9AA3B0"/>
+            </a:solidFill>
+            <a:prstDash val="solid"/>
+          </a:ln>
+        </p:spPr>
+      </p:sp>
+      <p:sp>
+        <p:nvSpPr>
+          <p:cNvPr id="78" name="Shape 76"/>
+          <p:cNvSpPr/>
+          <p:nvPr/>
+        </p:nvSpPr>
+        <p:spPr>
+          <a:xfrm>
+            <a:off x="10195560" y="3169920"/>
+            <a:ext cx="530352" cy="0"/>
+          </a:xfrm>
+          <a:prstGeom prst="line">
+            <a:avLst/>
+          </a:prstGeom>
+          <a:noFill/>
+          <a:ln w="10160">
+            <a:solidFill>
+              <a:srgbClr val="9AA3B0"/>
+            </a:solidFill>
+            <a:prstDash val="solid"/>
+          </a:ln>
+        </p:spPr>
+      </p:sp>
+      <p:sp>
+        <p:nvSpPr>
+          <p:cNvPr id="79" name="Shape 77"/>
+          <p:cNvSpPr/>
+          <p:nvPr/>
+        </p:nvSpPr>
+        <p:spPr>
+          <a:xfrm>
+            <a:off x="10195560" y="3474720"/>
+            <a:ext cx="530352" cy="0"/>
+          </a:xfrm>
+          <a:prstGeom prst="line">
+            <a:avLst/>
+          </a:prstGeom>
+          <a:noFill/>
+          <a:ln w="10160">
+            <a:solidFill>
+              <a:srgbClr val="9AA3B0"/>
+            </a:solidFill>
+            <a:prstDash val="solid"/>
+          </a:ln>
+        </p:spPr>
+      </p:sp>
+      <p:sp>
+        <p:nvSpPr>
+          <p:cNvPr id="80" name="Shape 78"/>
+          <p:cNvSpPr/>
+          <p:nvPr/>
+        </p:nvSpPr>
+        <p:spPr>
+          <a:xfrm>
+            <a:off x="10195560" y="3779520"/>
+            <a:ext cx="530352" cy="0"/>
+          </a:xfrm>
+          <a:prstGeom prst="line">
+            <a:avLst/>
+          </a:prstGeom>
+          <a:noFill/>
+          <a:ln w="10160">
+            <a:solidFill>
+              <a:srgbClr val="9AA3B0"/>
+            </a:solidFill>
+            <a:prstDash val="solid"/>
+          </a:ln>
+        </p:spPr>
+      </p:sp>
+      <p:sp>
+        <p:nvSpPr>
+          <p:cNvPr id="81" name="Shape 79"/>
+          <p:cNvSpPr/>
+          <p:nvPr/>
+        </p:nvSpPr>
+        <p:spPr>
+          <a:xfrm>
+            <a:off x="10195560" y="4084320"/>
+            <a:ext cx="530352" cy="0"/>
+          </a:xfrm>
+          <a:prstGeom prst="line">
+            <a:avLst/>
+          </a:prstGeom>
+          <a:noFill/>
+          <a:ln w="10160">
+            <a:solidFill>
+              <a:srgbClr val="9AA3B0"/>
+            </a:solidFill>
+            <a:prstDash val="solid"/>
+          </a:ln>
+        </p:spPr>
+      </p:sp>
+      <p:sp>
+        <p:nvSpPr>
+          <p:cNvPr id="82" name="Shape 80"/>
+          <p:cNvSpPr/>
+          <p:nvPr/>
+        </p:nvSpPr>
+        <p:spPr>
+          <a:xfrm>
+            <a:off x="10259568" y="2615184"/>
+            <a:ext cx="402336" cy="195072"/>
+          </a:xfrm>
+          <a:prstGeom prst="rect">
+            <a:avLst/>
+          </a:prstGeom>
+          <a:solidFill>
+            <a:srgbClr val="CFC2A0"/>
+          </a:solidFill>
+          <a:ln w="5080">
+            <a:solidFill>
+              <a:srgbClr val="AC9E78"/>
+            </a:solidFill>
+            <a:prstDash val="solid"/>
+          </a:ln>
+        </p:spPr>
+      </p:sp>
+      <p:sp>
+        <p:nvSpPr>
+          <p:cNvPr id="83" name="Shape 81"/>
+          <p:cNvSpPr/>
+          <p:nvPr/>
+        </p:nvSpPr>
+        <p:spPr>
+          <a:xfrm>
+            <a:off x="10259568" y="3224784"/>
+            <a:ext cx="402336" cy="195072"/>
+          </a:xfrm>
+          <a:prstGeom prst="rect">
+            <a:avLst/>
+          </a:prstGeom>
+          <a:solidFill>
+            <a:srgbClr val="CFC2A0"/>
+          </a:solidFill>
+          <a:ln w="5080">
+            <a:solidFill>
+              <a:srgbClr val="AC9E78"/>
+            </a:solidFill>
+            <a:prstDash val="solid"/>
+          </a:ln>
+        </p:spPr>
+      </p:sp>
+      <p:sp>
+        <p:nvSpPr>
+          <p:cNvPr id="84" name="Shape 82"/>
+          <p:cNvSpPr/>
+          <p:nvPr/>
+        </p:nvSpPr>
+        <p:spPr>
+          <a:xfrm>
+            <a:off x="10259568" y="3834384"/>
+            <a:ext cx="402336" cy="195072"/>
+          </a:xfrm>
+          <a:prstGeom prst="rect">
+            <a:avLst/>
+          </a:prstGeom>
+          <a:solidFill>
+            <a:srgbClr val="CFC2A0"/>
+          </a:solidFill>
+          <a:ln w="5080">
+            <a:solidFill>
+              <a:srgbClr val="AC9E78"/>
+            </a:solidFill>
+            <a:prstDash val="solid"/>
+          </a:ln>
+        </p:spPr>
+      </p:sp>
+      <p:sp>
+        <p:nvSpPr>
+          <p:cNvPr id="85" name="Shape 83"/>
+          <p:cNvSpPr/>
+          <p:nvPr/>
+        </p:nvSpPr>
+        <p:spPr>
+          <a:xfrm>
+            <a:off x="10076688" y="2322576"/>
+            <a:ext cx="768096" cy="237744"/>
+          </a:xfrm>
+          <a:prstGeom prst="roundRect">
+            <a:avLst>
+              <a:gd name="adj" fmla="val 15385"/>
+            </a:avLst>
+          </a:prstGeom>
+          <a:solidFill>
+            <a:srgbClr val="566270"/>
+          </a:solidFill>
+          <a:ln/>
+        </p:spPr>
+      </p:sp>
+      <p:sp>
+        <p:nvSpPr>
+          <p:cNvPr id="86" name="Text 84"/>
+          <p:cNvSpPr/>
+          <p:nvPr/>
+        </p:nvSpPr>
+        <p:spPr>
+          <a:xfrm>
+            <a:off x="10076688" y="2322576"/>
+            <a:ext cx="768096" cy="237744"/>
+          </a:xfrm>
+          <a:prstGeom prst="rect">
+            <a:avLst/>
+          </a:prstGeom>
+          <a:noFill/>
+          <a:ln/>
+        </p:spPr>
+        <p:txBody>
+          <a:bodyPr wrap="square" lIns="0" tIns="0" rIns="0" bIns="0" rtlCol="0" anchor="ctr"/>
+          <a:lstStyle/>
+          <a:p>
+            <a:pPr algn="ctr" indent="0" marL="0">
+              <a:buNone/>
+            </a:pPr>
+            <a:r>
+              <a:rPr lang="en-US" sz="950" b="1" dirty="0">
+                <a:solidFill>
+                  <a:srgbClr val="FFFFFF"/>
+                </a:solidFill>
+                <a:latin typeface="Calibri" pitchFamily="34" charset="0"/>
+                <a:ea typeface="Calibri" pitchFamily="34" charset="-122"/>
+                <a:cs typeface="Calibri" pitchFamily="34" charset="-120"/>
+              </a:rPr>
+              <a:t>3</a:t>
+            </a:r>
+            <a:endParaRPr lang="en-US" sz="950" dirty="0"/>
+          </a:p>
+        </p:txBody>
+      </p:sp>
+      <p:sp>
+        <p:nvSpPr>
+          <p:cNvPr id="87" name="Shape 85"/>
+          <p:cNvSpPr/>
+          <p:nvPr/>
+        </p:nvSpPr>
+        <p:spPr>
+          <a:xfrm>
+            <a:off x="8869680" y="2743200"/>
+            <a:ext cx="137160" cy="137160"/>
+          </a:xfrm>
+          <a:prstGeom prst="rect">
+            <a:avLst/>
+          </a:prstGeom>
+          <a:solidFill>
+            <a:srgbClr val="111111"/>
+          </a:solidFill>
+          <a:ln/>
+        </p:spPr>
+      </p:sp>
+      <p:sp>
+        <p:nvSpPr>
+          <p:cNvPr id="88" name="Shape 86"/>
+          <p:cNvSpPr/>
+          <p:nvPr/>
+        </p:nvSpPr>
+        <p:spPr>
+          <a:xfrm>
+            <a:off x="8897112" y="2770632"/>
+            <a:ext cx="24689" cy="24689"/>
+          </a:xfrm>
+          <a:prstGeom prst="rect">
+            <a:avLst/>
+          </a:prstGeom>
+          <a:solidFill>
+            <a:srgbClr val="FFFFFF"/>
+          </a:solidFill>
+          <a:ln/>
+        </p:spPr>
+      </p:sp>
+      <p:sp>
+        <p:nvSpPr>
+          <p:cNvPr id="89" name="Shape 87"/>
+          <p:cNvSpPr/>
+          <p:nvPr/>
+        </p:nvSpPr>
+        <p:spPr>
+          <a:xfrm>
+            <a:off x="8951976" y="2770632"/>
+            <a:ext cx="24689" cy="24689"/>
+          </a:xfrm>
+          <a:prstGeom prst="rect">
+            <a:avLst/>
+          </a:prstGeom>
+          <a:solidFill>
+            <a:srgbClr val="FFFFFF"/>
+          </a:solidFill>
+          <a:ln/>
+        </p:spPr>
+      </p:sp>
+      <p:sp>
+        <p:nvSpPr>
+          <p:cNvPr id="90" name="Shape 88"/>
+          <p:cNvSpPr/>
+          <p:nvPr/>
+        </p:nvSpPr>
+        <p:spPr>
+          <a:xfrm>
+            <a:off x="8924544" y="2798064"/>
+            <a:ext cx="24689" cy="24689"/>
+          </a:xfrm>
+          <a:prstGeom prst="rect">
+            <a:avLst/>
+          </a:prstGeom>
+          <a:solidFill>
+            <a:srgbClr val="FFFFFF"/>
+          </a:solidFill>
+          <a:ln/>
+        </p:spPr>
+      </p:sp>
+      <p:sp>
+        <p:nvSpPr>
+          <p:cNvPr id="91" name="Shape 89"/>
+          <p:cNvSpPr/>
+          <p:nvPr/>
+        </p:nvSpPr>
+        <p:spPr>
+          <a:xfrm>
+            <a:off x="8897112" y="2825496"/>
+            <a:ext cx="24689" cy="24689"/>
+          </a:xfrm>
+          <a:prstGeom prst="rect">
+            <a:avLst/>
+          </a:prstGeom>
+          <a:solidFill>
+            <a:srgbClr val="FFFFFF"/>
+          </a:solidFill>
+          <a:ln/>
+        </p:spPr>
+      </p:sp>
+      <p:sp>
+        <p:nvSpPr>
+          <p:cNvPr id="92" name="Shape 90"/>
+          <p:cNvSpPr/>
+          <p:nvPr/>
+        </p:nvSpPr>
+        <p:spPr>
+          <a:xfrm>
+            <a:off x="8951976" y="2825496"/>
+            <a:ext cx="24689" cy="24689"/>
+          </a:xfrm>
+          <a:prstGeom prst="rect">
+            <a:avLst/>
+          </a:prstGeom>
+          <a:solidFill>
+            <a:srgbClr val="FFFFFF"/>
+          </a:solidFill>
+          <a:ln/>
+        </p:spPr>
+      </p:sp>
+      <p:sp>
+        <p:nvSpPr>
+          <p:cNvPr id="93" name="Shape 91"/>
+          <p:cNvSpPr/>
+          <p:nvPr/>
+        </p:nvSpPr>
+        <p:spPr>
+          <a:xfrm>
+            <a:off x="9957816" y="2743200"/>
+            <a:ext cx="137160" cy="137160"/>
+          </a:xfrm>
+          <a:prstGeom prst="rect">
+            <a:avLst/>
+          </a:prstGeom>
+          <a:solidFill>
+            <a:srgbClr val="111111"/>
+          </a:solidFill>
+          <a:ln/>
+        </p:spPr>
+      </p:sp>
+      <p:sp>
+        <p:nvSpPr>
+          <p:cNvPr id="94" name="Shape 92"/>
+          <p:cNvSpPr/>
+          <p:nvPr/>
+        </p:nvSpPr>
+        <p:spPr>
+          <a:xfrm>
+            <a:off x="9985248" y="2770632"/>
+            <a:ext cx="24689" cy="24689"/>
+          </a:xfrm>
+          <a:prstGeom prst="rect">
+            <a:avLst/>
+          </a:prstGeom>
+          <a:solidFill>
+            <a:srgbClr val="FFFFFF"/>
+          </a:solidFill>
+          <a:ln/>
+        </p:spPr>
+      </p:sp>
+      <p:sp>
+        <p:nvSpPr>
+          <p:cNvPr id="95" name="Shape 93"/>
+          <p:cNvSpPr/>
+          <p:nvPr/>
+        </p:nvSpPr>
+        <p:spPr>
+          <a:xfrm>
+            <a:off x="10040112" y="2770632"/>
+            <a:ext cx="24689" cy="24689"/>
+          </a:xfrm>
+          <a:prstGeom prst="rect">
+            <a:avLst/>
+          </a:prstGeom>
+          <a:solidFill>
+            <a:srgbClr val="FFFFFF"/>
+          </a:solidFill>
+          <a:ln/>
+        </p:spPr>
+      </p:sp>
+      <p:sp>
+        <p:nvSpPr>
+          <p:cNvPr id="96" name="Shape 94"/>
+          <p:cNvSpPr/>
+          <p:nvPr/>
+        </p:nvSpPr>
+        <p:spPr>
+          <a:xfrm>
+            <a:off x="10012680" y="2798064"/>
+            <a:ext cx="24689" cy="24689"/>
+          </a:xfrm>
+          <a:prstGeom prst="rect">
+            <a:avLst/>
+          </a:prstGeom>
+          <a:solidFill>
+            <a:srgbClr val="FFFFFF"/>
+          </a:solidFill>
+          <a:ln/>
+        </p:spPr>
+      </p:sp>
+      <p:sp>
+        <p:nvSpPr>
+          <p:cNvPr id="97" name="Shape 95"/>
+          <p:cNvSpPr/>
+          <p:nvPr/>
+        </p:nvSpPr>
+        <p:spPr>
+          <a:xfrm>
+            <a:off x="9985248" y="2825496"/>
+            <a:ext cx="24689" cy="24689"/>
+          </a:xfrm>
+          <a:prstGeom prst="rect">
+            <a:avLst/>
+          </a:prstGeom>
+          <a:solidFill>
+            <a:srgbClr val="FFFFFF"/>
+          </a:solidFill>
+          <a:ln/>
+        </p:spPr>
+      </p:sp>
+      <p:sp>
+        <p:nvSpPr>
+          <p:cNvPr id="98" name="Shape 96"/>
+          <p:cNvSpPr/>
+          <p:nvPr/>
+        </p:nvSpPr>
+        <p:spPr>
+          <a:xfrm>
+            <a:off x="10040112" y="2825496"/>
+            <a:ext cx="24689" cy="24689"/>
+          </a:xfrm>
+          <a:prstGeom prst="rect">
+            <a:avLst/>
+          </a:prstGeom>
+          <a:solidFill>
+            <a:srgbClr val="FFFFFF"/>
+          </a:solidFill>
+          <a:ln/>
+        </p:spPr>
+      </p:sp>
+      <p:sp>
+        <p:nvSpPr>
+          <p:cNvPr id="99" name="Shape 97"/>
+          <p:cNvSpPr/>
+          <p:nvPr/>
+        </p:nvSpPr>
+        <p:spPr>
+          <a:xfrm>
+            <a:off x="8869680" y="3246120"/>
+            <a:ext cx="137160" cy="137160"/>
+          </a:xfrm>
+          <a:prstGeom prst="rect">
+            <a:avLst/>
+          </a:prstGeom>
+          <a:solidFill>
+            <a:srgbClr val="111111"/>
+          </a:solidFill>
+          <a:ln/>
+        </p:spPr>
+      </p:sp>
+      <p:sp>
+        <p:nvSpPr>
+          <p:cNvPr id="100" name="Shape 98"/>
+          <p:cNvSpPr/>
+          <p:nvPr/>
+        </p:nvSpPr>
+        <p:spPr>
+          <a:xfrm>
+            <a:off x="8897112" y="3273552"/>
+            <a:ext cx="24689" cy="24689"/>
+          </a:xfrm>
+          <a:prstGeom prst="rect">
+            <a:avLst/>
+          </a:prstGeom>
+          <a:solidFill>
+            <a:srgbClr val="FFFFFF"/>
+          </a:solidFill>
+          <a:ln/>
+        </p:spPr>
+      </p:sp>
+      <p:sp>
+        <p:nvSpPr>
+          <p:cNvPr id="101" name="Shape 99"/>
+          <p:cNvSpPr/>
+          <p:nvPr/>
+        </p:nvSpPr>
+        <p:spPr>
+          <a:xfrm>
+            <a:off x="8951976" y="3273552"/>
+            <a:ext cx="24689" cy="24689"/>
+          </a:xfrm>
+          <a:prstGeom prst="rect">
+            <a:avLst/>
+          </a:prstGeom>
+          <a:solidFill>
+            <a:srgbClr val="FFFFFF"/>
+          </a:solidFill>
+          <a:ln/>
+        </p:spPr>
+      </p:sp>
+      <p:sp>
+        <p:nvSpPr>
+          <p:cNvPr id="102" name="Shape 100"/>
+          <p:cNvSpPr/>
+          <p:nvPr/>
+        </p:nvSpPr>
+        <p:spPr>
+          <a:xfrm>
+            <a:off x="8924544" y="3300984"/>
+            <a:ext cx="24689" cy="24689"/>
+          </a:xfrm>
+          <a:prstGeom prst="rect">
+            <a:avLst/>
+          </a:prstGeom>
+          <a:solidFill>
+            <a:srgbClr val="FFFFFF"/>
+          </a:solidFill>
+          <a:ln/>
+        </p:spPr>
+      </p:sp>
+      <p:sp>
+        <p:nvSpPr>
+          <p:cNvPr id="103" name="Shape 101"/>
+          <p:cNvSpPr/>
+          <p:nvPr/>
+        </p:nvSpPr>
+        <p:spPr>
+          <a:xfrm>
+            <a:off x="8897112" y="3328416"/>
+            <a:ext cx="24689" cy="24689"/>
+          </a:xfrm>
+          <a:prstGeom prst="rect">
+            <a:avLst/>
+          </a:prstGeom>
+          <a:solidFill>
+            <a:srgbClr val="FFFFFF"/>
+          </a:solidFill>
+          <a:ln/>
+        </p:spPr>
+      </p:sp>
+      <p:sp>
+        <p:nvSpPr>
+          <p:cNvPr id="104" name="Shape 102"/>
+          <p:cNvSpPr/>
+          <p:nvPr/>
+        </p:nvSpPr>
+        <p:spPr>
+          <a:xfrm>
+            <a:off x="8951976" y="3328416"/>
+            <a:ext cx="24689" cy="24689"/>
+          </a:xfrm>
+          <a:prstGeom prst="rect">
+            <a:avLst/>
+          </a:prstGeom>
+          <a:solidFill>
+            <a:srgbClr val="FFFFFF"/>
+          </a:solidFill>
+          <a:ln/>
+        </p:spPr>
+      </p:sp>
+      <p:sp>
+        <p:nvSpPr>
+          <p:cNvPr id="105" name="Shape 103"/>
+          <p:cNvSpPr/>
+          <p:nvPr/>
+        </p:nvSpPr>
+        <p:spPr>
+          <a:xfrm>
+            <a:off x="9957816" y="3246120"/>
+            <a:ext cx="137160" cy="137160"/>
+          </a:xfrm>
+          <a:prstGeom prst="rect">
+            <a:avLst/>
+          </a:prstGeom>
+          <a:solidFill>
+            <a:srgbClr val="111111"/>
+          </a:solidFill>
+          <a:ln/>
+        </p:spPr>
+      </p:sp>
+      <p:sp>
+        <p:nvSpPr>
+          <p:cNvPr id="106" name="Shape 104"/>
+          <p:cNvSpPr/>
+          <p:nvPr/>
+        </p:nvSpPr>
+        <p:spPr>
+          <a:xfrm>
+            <a:off x="9985248" y="3273552"/>
+            <a:ext cx="24689" cy="24689"/>
+          </a:xfrm>
+          <a:prstGeom prst="rect">
+            <a:avLst/>
+          </a:prstGeom>
+          <a:solidFill>
+            <a:srgbClr val="FFFFFF"/>
+          </a:solidFill>
+          <a:ln/>
+        </p:spPr>
+      </p:sp>
+      <p:sp>
+        <p:nvSpPr>
+          <p:cNvPr id="107" name="Shape 105"/>
+          <p:cNvSpPr/>
+          <p:nvPr/>
+        </p:nvSpPr>
+        <p:spPr>
+          <a:xfrm>
+            <a:off x="10040112" y="3273552"/>
+            <a:ext cx="24689" cy="24689"/>
+          </a:xfrm>
+          <a:prstGeom prst="rect">
+            <a:avLst/>
+          </a:prstGeom>
+          <a:solidFill>
+            <a:srgbClr val="FFFFFF"/>
+          </a:solidFill>
+          <a:ln/>
+        </p:spPr>
+      </p:sp>
+      <p:sp>
+        <p:nvSpPr>
+          <p:cNvPr id="108" name="Shape 106"/>
+          <p:cNvSpPr/>
+          <p:nvPr/>
+        </p:nvSpPr>
+        <p:spPr>
+          <a:xfrm>
+            <a:off x="10012680" y="3300984"/>
+            <a:ext cx="24689" cy="24689"/>
+          </a:xfrm>
+          <a:prstGeom prst="rect">
+            <a:avLst/>
+          </a:prstGeom>
+          <a:solidFill>
+            <a:srgbClr val="FFFFFF"/>
+          </a:solidFill>
+          <a:ln/>
+        </p:spPr>
+      </p:sp>
+      <p:sp>
+        <p:nvSpPr>
+          <p:cNvPr id="109" name="Shape 107"/>
+          <p:cNvSpPr/>
+          <p:nvPr/>
+        </p:nvSpPr>
+        <p:spPr>
+          <a:xfrm>
+            <a:off x="9985248" y="3328416"/>
+            <a:ext cx="24689" cy="24689"/>
+          </a:xfrm>
+          <a:prstGeom prst="rect">
+            <a:avLst/>
+          </a:prstGeom>
+          <a:solidFill>
+            <a:srgbClr val="FFFFFF"/>
+          </a:solidFill>
+          <a:ln/>
+        </p:spPr>
+      </p:sp>
+      <p:sp>
+        <p:nvSpPr>
+          <p:cNvPr id="110" name="Shape 108"/>
+          <p:cNvSpPr/>
+          <p:nvPr/>
+        </p:nvSpPr>
+        <p:spPr>
+          <a:xfrm>
+            <a:off x="10040112" y="3328416"/>
+            <a:ext cx="24689" cy="24689"/>
+          </a:xfrm>
+          <a:prstGeom prst="rect">
+            <a:avLst/>
+          </a:prstGeom>
+          <a:solidFill>
+            <a:srgbClr val="FFFFFF"/>
+          </a:solidFill>
+          <a:ln/>
+        </p:spPr>
+      </p:sp>
+      <p:sp>
+        <p:nvSpPr>
+          <p:cNvPr id="111" name="Shape 109"/>
+          <p:cNvSpPr/>
+          <p:nvPr/>
+        </p:nvSpPr>
+        <p:spPr>
+          <a:xfrm>
+            <a:off x="8869680" y="3749040"/>
+            <a:ext cx="137160" cy="137160"/>
+          </a:xfrm>
+          <a:prstGeom prst="rect">
+            <a:avLst/>
+          </a:prstGeom>
+          <a:solidFill>
+            <a:srgbClr val="111111"/>
+          </a:solidFill>
+          <a:ln/>
+        </p:spPr>
+      </p:sp>
+      <p:sp>
+        <p:nvSpPr>
+          <p:cNvPr id="112" name="Shape 110"/>
+          <p:cNvSpPr/>
+          <p:nvPr/>
+        </p:nvSpPr>
+        <p:spPr>
+          <a:xfrm>
+            <a:off x="8897112" y="3776472"/>
+            <a:ext cx="24689" cy="24689"/>
+          </a:xfrm>
+          <a:prstGeom prst="rect">
+            <a:avLst/>
+          </a:prstGeom>
+          <a:solidFill>
+            <a:srgbClr val="FFFFFF"/>
+          </a:solidFill>
+          <a:ln/>
+        </p:spPr>
+      </p:sp>
+      <p:sp>
+        <p:nvSpPr>
+          <p:cNvPr id="113" name="Shape 111"/>
+          <p:cNvSpPr/>
+          <p:nvPr/>
+        </p:nvSpPr>
+        <p:spPr>
+          <a:xfrm>
+            <a:off x="8951976" y="3776472"/>
+            <a:ext cx="24689" cy="24689"/>
+          </a:xfrm>
+          <a:prstGeom prst="rect">
+            <a:avLst/>
+          </a:prstGeom>
+          <a:solidFill>
+            <a:srgbClr val="FFFFFF"/>
+          </a:solidFill>
+          <a:ln/>
+        </p:spPr>
+      </p:sp>
+      <p:sp>
+        <p:nvSpPr>
+          <p:cNvPr id="114" name="Shape 112"/>
+          <p:cNvSpPr/>
+          <p:nvPr/>
+        </p:nvSpPr>
+        <p:spPr>
+          <a:xfrm>
+            <a:off x="8924544" y="3803904"/>
+            <a:ext cx="24689" cy="24689"/>
+          </a:xfrm>
+          <a:prstGeom prst="rect">
+            <a:avLst/>
+          </a:prstGeom>
+          <a:solidFill>
+            <a:srgbClr val="FFFFFF"/>
+          </a:solidFill>
+          <a:ln/>
+        </p:spPr>
+      </p:sp>
+      <p:sp>
+        <p:nvSpPr>
+          <p:cNvPr id="115" name="Shape 113"/>
+          <p:cNvSpPr/>
+          <p:nvPr/>
+        </p:nvSpPr>
+        <p:spPr>
+          <a:xfrm>
+            <a:off x="8897112" y="3831336"/>
+            <a:ext cx="24689" cy="24689"/>
+          </a:xfrm>
+          <a:prstGeom prst="rect">
+            <a:avLst/>
+          </a:prstGeom>
+          <a:solidFill>
+            <a:srgbClr val="FFFFFF"/>
+          </a:solidFill>
+          <a:ln/>
+        </p:spPr>
+      </p:sp>
+      <p:sp>
+        <p:nvSpPr>
+          <p:cNvPr id="116" name="Shape 114"/>
+          <p:cNvSpPr/>
+          <p:nvPr/>
+        </p:nvSpPr>
+        <p:spPr>
+          <a:xfrm>
+            <a:off x="8951976" y="3831336"/>
+            <a:ext cx="24689" cy="24689"/>
+          </a:xfrm>
+          <a:prstGeom prst="rect">
+            <a:avLst/>
+          </a:prstGeom>
+          <a:solidFill>
+            <a:srgbClr val="FFFFFF"/>
+          </a:solidFill>
+          <a:ln/>
+        </p:spPr>
+      </p:sp>
+      <p:sp>
+        <p:nvSpPr>
+          <p:cNvPr id="117" name="Shape 115"/>
+          <p:cNvSpPr/>
+          <p:nvPr/>
+        </p:nvSpPr>
+        <p:spPr>
+          <a:xfrm>
+            <a:off x="9957816" y="3749040"/>
+            <a:ext cx="137160" cy="137160"/>
+          </a:xfrm>
+          <a:prstGeom prst="rect">
+            <a:avLst/>
+          </a:prstGeom>
+          <a:solidFill>
+            <a:srgbClr val="111111"/>
+          </a:solidFill>
+          <a:ln/>
+        </p:spPr>
+      </p:sp>
+      <p:sp>
+        <p:nvSpPr>
+          <p:cNvPr id="118" name="Shape 116"/>
+          <p:cNvSpPr/>
+          <p:nvPr/>
+        </p:nvSpPr>
+        <p:spPr>
+          <a:xfrm>
+            <a:off x="9985248" y="3776472"/>
+            <a:ext cx="24689" cy="24689"/>
+          </a:xfrm>
+          <a:prstGeom prst="rect">
+            <a:avLst/>
+          </a:prstGeom>
+          <a:solidFill>
+            <a:srgbClr val="FFFFFF"/>
+          </a:solidFill>
+          <a:ln/>
+        </p:spPr>
+      </p:sp>
+      <p:sp>
+        <p:nvSpPr>
+          <p:cNvPr id="119" name="Shape 117"/>
+          <p:cNvSpPr/>
+          <p:nvPr/>
+        </p:nvSpPr>
+        <p:spPr>
+          <a:xfrm>
+            <a:off x="10040112" y="3776472"/>
+            <a:ext cx="24689" cy="24689"/>
+          </a:xfrm>
+          <a:prstGeom prst="rect">
+            <a:avLst/>
+          </a:prstGeom>
+          <a:solidFill>
+            <a:srgbClr val="FFFFFF"/>
+          </a:solidFill>
+          <a:ln/>
+        </p:spPr>
+      </p:sp>
+      <p:sp>
+        <p:nvSpPr>
+          <p:cNvPr id="120" name="Shape 118"/>
+          <p:cNvSpPr/>
+          <p:nvPr/>
+        </p:nvSpPr>
+        <p:spPr>
+          <a:xfrm>
+            <a:off x="10012680" y="3803904"/>
+            <a:ext cx="24689" cy="24689"/>
+          </a:xfrm>
+          <a:prstGeom prst="rect">
+            <a:avLst/>
+          </a:prstGeom>
+          <a:solidFill>
+            <a:srgbClr val="FFFFFF"/>
+          </a:solidFill>
+          <a:ln/>
+        </p:spPr>
+      </p:sp>
+      <p:sp>
+        <p:nvSpPr>
+          <p:cNvPr id="121" name="Shape 119"/>
+          <p:cNvSpPr/>
+          <p:nvPr/>
+        </p:nvSpPr>
+        <p:spPr>
+          <a:xfrm>
+            <a:off x="9985248" y="3831336"/>
+            <a:ext cx="24689" cy="24689"/>
+          </a:xfrm>
+          <a:prstGeom prst="rect">
+            <a:avLst/>
+          </a:prstGeom>
+          <a:solidFill>
+            <a:srgbClr val="FFFFFF"/>
+          </a:solidFill>
+          <a:ln/>
+        </p:spPr>
+      </p:sp>
+      <p:sp>
+        <p:nvSpPr>
+          <p:cNvPr id="122" name="Shape 120"/>
+          <p:cNvSpPr/>
+          <p:nvPr/>
+        </p:nvSpPr>
+        <p:spPr>
+          <a:xfrm>
+            <a:off x="10040112" y="3831336"/>
+            <a:ext cx="24689" cy="24689"/>
+          </a:xfrm>
+          <a:prstGeom prst="rect">
+            <a:avLst/>
+          </a:prstGeom>
+          <a:solidFill>
+            <a:srgbClr val="FFFFFF"/>
+          </a:solidFill>
+          <a:ln/>
+        </p:spPr>
+      </p:sp>
+      <p:sp>
+        <p:nvSpPr>
+          <p:cNvPr id="123" name="Shape 121"/>
+          <p:cNvSpPr/>
+          <p:nvPr/>
+        </p:nvSpPr>
+        <p:spPr>
+          <a:xfrm>
+            <a:off x="9134856" y="2267712"/>
+            <a:ext cx="694944" cy="347472"/>
+          </a:xfrm>
+          <a:prstGeom prst="roundRect">
+            <a:avLst>
+              <a:gd name="adj" fmla="val 13158"/>
+            </a:avLst>
+          </a:prstGeom>
+          <a:solidFill>
+            <a:srgbClr val="CDE9F7"/>
+          </a:solidFill>
+          <a:ln w="13970">
+            <a:solidFill>
+              <a:srgbClr val="566270"/>
+            </a:solidFill>
+            <a:prstDash val="solid"/>
+          </a:ln>
+        </p:spPr>
+      </p:sp>
+      <p:sp>
+        <p:nvSpPr>
+          <p:cNvPr id="124" name="Shape 122"/>
+          <p:cNvSpPr/>
+          <p:nvPr/>
+        </p:nvSpPr>
+        <p:spPr>
+          <a:xfrm>
+            <a:off x="9341876" y="2615184"/>
+            <a:ext cx="64008" cy="310896"/>
+          </a:xfrm>
+          <a:prstGeom prst="rect">
+            <a:avLst/>
+          </a:prstGeom>
+          <a:solidFill>
+            <a:srgbClr val="566270"/>
+          </a:solidFill>
+          <a:ln/>
+        </p:spPr>
+      </p:sp>
+      <p:sp>
+        <p:nvSpPr>
+          <p:cNvPr id="125" name="Shape 123"/>
+          <p:cNvSpPr/>
+          <p:nvPr/>
+        </p:nvSpPr>
+        <p:spPr>
+          <a:xfrm>
+            <a:off x="9558772" y="2615184"/>
+            <a:ext cx="64008" cy="310896"/>
+          </a:xfrm>
+          <a:prstGeom prst="rect">
+            <a:avLst/>
+          </a:prstGeom>
+          <a:solidFill>
+            <a:srgbClr val="566270"/>
+          </a:solidFill>
+          <a:ln/>
+        </p:spPr>
+      </p:sp>
+      <p:sp>
+        <p:nvSpPr>
+          <p:cNvPr id="126" name="Text 124"/>
+          <p:cNvSpPr/>
+          <p:nvPr/>
+        </p:nvSpPr>
+        <p:spPr>
+          <a:xfrm>
+            <a:off x="9134856" y="2267712"/>
+            <a:ext cx="694944" cy="347472"/>
+          </a:xfrm>
+          <a:prstGeom prst="rect">
+            <a:avLst/>
+          </a:prstGeom>
+          <a:noFill/>
+          <a:ln/>
+        </p:spPr>
+        <p:txBody>
+          <a:bodyPr wrap="square" lIns="0" tIns="0" rIns="0" bIns="0" rtlCol="0" anchor="ctr"/>
+          <a:lstStyle/>
+          <a:p>
+            <a:pPr algn="ctr" indent="0" marL="0">
+              <a:buNone/>
+            </a:pPr>
+            <a:r>
+              <a:rPr lang="en-US" sz="900" b="1" dirty="0">
+                <a:solidFill>
+                  <a:srgbClr val="2A2F39"/>
+                </a:solidFill>
+                <a:latin typeface="Calibri" pitchFamily="34" charset="0"/>
+                <a:ea typeface="Calibri" pitchFamily="34" charset="-122"/>
+                <a:cs typeface="Calibri" pitchFamily="34" charset="-120"/>
+              </a:rPr>
+              <a:t>1</a:t>
+            </a:r>
             <a:endParaRPr lang="en-US" sz="900" dirty="0"/>
           </a:p>
         </p:txBody>
       </p:sp>
       <p:sp>
         <p:nvSpPr>
-          <p:cNvPr id="10" name="Shape 8"/>
-          <p:cNvSpPr/>
-          <p:nvPr/>
-        </p:nvSpPr>
-        <p:spPr>
-          <a:xfrm>
-            <a:off x="3657600" y="2084832"/>
-            <a:ext cx="1188720" cy="502920"/>
-          </a:xfrm>
-          <a:prstGeom prst="rect">
-            <a:avLst/>
+          <p:cNvPr id="127" name="Shape 125"/>
+          <p:cNvSpPr/>
+          <p:nvPr/>
+        </p:nvSpPr>
+        <p:spPr>
+          <a:xfrm>
+            <a:off x="8842248" y="2139696"/>
+            <a:ext cx="1280160" cy="0"/>
+          </a:xfrm>
+          <a:prstGeom prst="line">
+            <a:avLst/>
+          </a:prstGeom>
+          <a:noFill/>
+          <a:ln w="16510">
+            <a:solidFill>
+              <a:srgbClr val="8A6D16"/>
+            </a:solidFill>
+            <a:prstDash val="solid"/>
+            <a:headEnd type="triangle"/>
+            <a:tailEnd type="triangle"/>
+          </a:ln>
+        </p:spPr>
+      </p:sp>
+      <p:sp>
+        <p:nvSpPr>
+          <p:cNvPr id="128" name="Text 126"/>
+          <p:cNvSpPr/>
+          <p:nvPr/>
+        </p:nvSpPr>
+        <p:spPr>
+          <a:xfrm>
+            <a:off x="8842248" y="1883664"/>
+            <a:ext cx="1280160" cy="219456"/>
+          </a:xfrm>
+          <a:prstGeom prst="rect">
+            <a:avLst/>
+          </a:prstGeom>
+          <a:noFill/>
+          <a:ln/>
+        </p:spPr>
+        <p:txBody>
+          <a:bodyPr wrap="square" lIns="0" tIns="0" rIns="0" bIns="0" rtlCol="0" anchor="ctr"/>
+          <a:lstStyle/>
+          <a:p>
+            <a:pPr algn="ctr" indent="0" marL="0">
+              <a:buNone/>
+            </a:pPr>
+            <a:r>
+              <a:rPr lang="en-US" sz="1100" b="1" dirty="0">
+                <a:solidFill>
+                  <a:srgbClr val="8A6D16"/>
+                </a:solidFill>
+                <a:latin typeface="Calibri" pitchFamily="34" charset="0"/>
+                <a:ea typeface="Calibri" pitchFamily="34" charset="-122"/>
+                <a:cs typeface="Calibri" pitchFamily="34" charset="-120"/>
+              </a:rPr>
+              <a:t>3.0 m</a:t>
+            </a:r>
+            <a:endParaRPr lang="en-US" sz="1100" dirty="0"/>
+          </a:p>
+        </p:txBody>
+      </p:sp>
+      <p:sp>
+        <p:nvSpPr>
+          <p:cNvPr id="129" name="Shape 127"/>
+          <p:cNvSpPr/>
+          <p:nvPr/>
+        </p:nvSpPr>
+        <p:spPr>
+          <a:xfrm>
+            <a:off x="8129016" y="2560320"/>
+            <a:ext cx="0" cy="1828800"/>
+          </a:xfrm>
+          <a:prstGeom prst="line">
+            <a:avLst/>
+          </a:prstGeom>
+          <a:noFill/>
+          <a:ln w="16510">
+            <a:solidFill>
+              <a:srgbClr val="8A6D16"/>
+            </a:solidFill>
+            <a:prstDash val="solid"/>
+            <a:headEnd type="triangle"/>
+            <a:tailEnd type="triangle"/>
+          </a:ln>
+        </p:spPr>
+      </p:sp>
+      <p:sp>
+        <p:nvSpPr>
+          <p:cNvPr id="130" name="Text 128"/>
+          <p:cNvSpPr/>
+          <p:nvPr/>
+        </p:nvSpPr>
+        <p:spPr>
+          <a:xfrm>
+            <a:off x="7488936" y="3355848"/>
+            <a:ext cx="603504" cy="237744"/>
+          </a:xfrm>
+          <a:prstGeom prst="rect">
+            <a:avLst/>
+          </a:prstGeom>
+          <a:noFill/>
+          <a:ln/>
+        </p:spPr>
+        <p:txBody>
+          <a:bodyPr wrap="square" lIns="0" tIns="0" rIns="0" bIns="0" rtlCol="0" anchor="ctr"/>
+          <a:lstStyle/>
+          <a:p>
+            <a:pPr algn="ctr" indent="0" marL="0">
+              <a:buNone/>
+            </a:pPr>
+            <a:r>
+              <a:rPr lang="en-US" sz="900" b="1" dirty="0">
+                <a:solidFill>
+                  <a:srgbClr val="8A6D16"/>
+                </a:solidFill>
+                <a:latin typeface="Calibri" pitchFamily="34" charset="0"/>
+                <a:ea typeface="Calibri" pitchFamily="34" charset="-122"/>
+                <a:cs typeface="Calibri" pitchFamily="34" charset="-120"/>
+              </a:rPr>
+              <a:t>6.0 m</a:t>
+            </a:r>
+            <a:endParaRPr lang="en-US" sz="900" dirty="0"/>
+          </a:p>
+        </p:txBody>
+      </p:sp>
+      <p:sp>
+        <p:nvSpPr>
+          <p:cNvPr id="131" name="Shape 129"/>
+          <p:cNvSpPr/>
+          <p:nvPr/>
+        </p:nvSpPr>
+        <p:spPr>
+          <a:xfrm>
+            <a:off x="8366760" y="4645152"/>
+            <a:ext cx="566928" cy="329184"/>
+          </a:xfrm>
+          <a:prstGeom prst="roundRect">
+            <a:avLst>
+              <a:gd name="adj" fmla="val 13889"/>
+            </a:avLst>
           </a:prstGeom>
           <a:solidFill>
             <a:srgbClr val="E4E7DF"/>
+          </a:solidFill>
+          <a:ln w="13970">
+            <a:solidFill>
+              <a:srgbClr val="566270"/>
+            </a:solidFill>
+            <a:prstDash val="solid"/>
+          </a:ln>
+        </p:spPr>
+      </p:sp>
+      <p:sp>
+        <p:nvSpPr>
+          <p:cNvPr id="132" name="Shape 130"/>
+          <p:cNvSpPr/>
+          <p:nvPr/>
+        </p:nvSpPr>
+        <p:spPr>
+          <a:xfrm>
+            <a:off x="8513796" y="4334256"/>
+            <a:ext cx="64008" cy="310896"/>
+          </a:xfrm>
+          <a:prstGeom prst="rect">
+            <a:avLst/>
+          </a:prstGeom>
+          <a:solidFill>
+            <a:srgbClr val="566270"/>
+          </a:solidFill>
+          <a:ln/>
+        </p:spPr>
+      </p:sp>
+      <p:sp>
+        <p:nvSpPr>
+          <p:cNvPr id="133" name="Shape 131"/>
+          <p:cNvSpPr/>
+          <p:nvPr/>
+        </p:nvSpPr>
+        <p:spPr>
+          <a:xfrm>
+            <a:off x="8722644" y="4334256"/>
+            <a:ext cx="64008" cy="310896"/>
+          </a:xfrm>
+          <a:prstGeom prst="rect">
+            <a:avLst/>
+          </a:prstGeom>
+          <a:solidFill>
+            <a:srgbClr val="566270"/>
+          </a:solidFill>
+          <a:ln/>
+        </p:spPr>
+      </p:sp>
+      <p:sp>
+        <p:nvSpPr>
+          <p:cNvPr id="134" name="Shape 132"/>
+          <p:cNvSpPr/>
+          <p:nvPr/>
+        </p:nvSpPr>
+        <p:spPr>
+          <a:xfrm>
+            <a:off x="8513796" y="4599432"/>
+            <a:ext cx="272857" cy="45720"/>
+          </a:xfrm>
+          <a:prstGeom prst="rect">
+            <a:avLst/>
+          </a:prstGeom>
+          <a:solidFill>
+            <a:srgbClr val="566270"/>
+          </a:solidFill>
+          <a:ln/>
+        </p:spPr>
+      </p:sp>
+      <p:sp>
+        <p:nvSpPr>
+          <p:cNvPr id="135" name="Text 133"/>
+          <p:cNvSpPr/>
+          <p:nvPr/>
+        </p:nvSpPr>
+        <p:spPr>
+          <a:xfrm>
+            <a:off x="8366760" y="4645152"/>
+            <a:ext cx="566928" cy="329184"/>
+          </a:xfrm>
+          <a:prstGeom prst="rect">
+            <a:avLst/>
+          </a:prstGeom>
+          <a:noFill/>
+          <a:ln/>
+        </p:spPr>
+        <p:txBody>
+          <a:bodyPr wrap="square" lIns="0" tIns="0" rIns="0" bIns="0" rtlCol="0" anchor="ctr"/>
+          <a:lstStyle/>
+          <a:p>
+            <a:pPr algn="ctr" indent="0" marL="0">
+              <a:buNone/>
+            </a:pPr>
+            <a:r>
+              <a:rPr lang="en-US" sz="900" b="1" dirty="0">
+                <a:solidFill>
+                  <a:srgbClr val="2A2F39"/>
+                </a:solidFill>
+                <a:latin typeface="Calibri" pitchFamily="34" charset="0"/>
+                <a:ea typeface="Calibri" pitchFamily="34" charset="-122"/>
+                <a:cs typeface="Calibri" pitchFamily="34" charset="-120"/>
+              </a:rPr>
+              <a:t>2</a:t>
+            </a:r>
+            <a:endParaRPr lang="en-US" sz="900" dirty="0"/>
+          </a:p>
+        </p:txBody>
+      </p:sp>
+      <p:sp>
+        <p:nvSpPr>
+          <p:cNvPr id="136" name="Shape 134"/>
+          <p:cNvSpPr/>
+          <p:nvPr/>
+        </p:nvSpPr>
+        <p:spPr>
+          <a:xfrm>
+            <a:off x="10195560" y="4645152"/>
+            <a:ext cx="566928" cy="329184"/>
+          </a:xfrm>
+          <a:prstGeom prst="roundRect">
+            <a:avLst>
+              <a:gd name="adj" fmla="val 13889"/>
+            </a:avLst>
+          </a:prstGeom>
+          <a:solidFill>
+            <a:srgbClr val="E4E7DF"/>
+          </a:solidFill>
+          <a:ln w="13970">
+            <a:solidFill>
+              <a:srgbClr val="566270"/>
+            </a:solidFill>
+            <a:prstDash val="solid"/>
+          </a:ln>
+        </p:spPr>
+      </p:sp>
+      <p:sp>
+        <p:nvSpPr>
+          <p:cNvPr id="137" name="Shape 135"/>
+          <p:cNvSpPr/>
+          <p:nvPr/>
+        </p:nvSpPr>
+        <p:spPr>
+          <a:xfrm>
+            <a:off x="10342596" y="4334256"/>
+            <a:ext cx="64008" cy="310896"/>
+          </a:xfrm>
+          <a:prstGeom prst="rect">
+            <a:avLst/>
+          </a:prstGeom>
+          <a:solidFill>
+            <a:srgbClr val="566270"/>
+          </a:solidFill>
+          <a:ln/>
+        </p:spPr>
+      </p:sp>
+      <p:sp>
+        <p:nvSpPr>
+          <p:cNvPr id="138" name="Shape 136"/>
+          <p:cNvSpPr/>
+          <p:nvPr/>
+        </p:nvSpPr>
+        <p:spPr>
+          <a:xfrm>
+            <a:off x="10551444" y="4334256"/>
+            <a:ext cx="64008" cy="310896"/>
+          </a:xfrm>
+          <a:prstGeom prst="rect">
+            <a:avLst/>
+          </a:prstGeom>
+          <a:solidFill>
+            <a:srgbClr val="566270"/>
+          </a:solidFill>
+          <a:ln/>
+        </p:spPr>
+      </p:sp>
+      <p:sp>
+        <p:nvSpPr>
+          <p:cNvPr id="139" name="Shape 137"/>
+          <p:cNvSpPr/>
+          <p:nvPr/>
+        </p:nvSpPr>
+        <p:spPr>
+          <a:xfrm>
+            <a:off x="10342596" y="4599432"/>
+            <a:ext cx="272857" cy="45720"/>
+          </a:xfrm>
+          <a:prstGeom prst="rect">
+            <a:avLst/>
+          </a:prstGeom>
+          <a:solidFill>
+            <a:srgbClr val="566270"/>
+          </a:solidFill>
+          <a:ln/>
+        </p:spPr>
+      </p:sp>
+      <p:sp>
+        <p:nvSpPr>
+          <p:cNvPr id="140" name="Text 138"/>
+          <p:cNvSpPr/>
+          <p:nvPr/>
+        </p:nvSpPr>
+        <p:spPr>
+          <a:xfrm>
+            <a:off x="10195560" y="4645152"/>
+            <a:ext cx="566928" cy="329184"/>
+          </a:xfrm>
+          <a:prstGeom prst="rect">
+            <a:avLst/>
+          </a:prstGeom>
+          <a:noFill/>
+          <a:ln/>
+        </p:spPr>
+        <p:txBody>
+          <a:bodyPr wrap="square" lIns="0" tIns="0" rIns="0" bIns="0" rtlCol="0" anchor="ctr"/>
+          <a:lstStyle/>
+          <a:p>
+            <a:pPr algn="ctr" indent="0" marL="0">
+              <a:buNone/>
+            </a:pPr>
+            <a:r>
+              <a:rPr lang="en-US" sz="900" b="1" dirty="0">
+                <a:solidFill>
+                  <a:srgbClr val="2A2F39"/>
+                </a:solidFill>
+                <a:latin typeface="Calibri" pitchFamily="34" charset="0"/>
+                <a:ea typeface="Calibri" pitchFamily="34" charset="-122"/>
+                <a:cs typeface="Calibri" pitchFamily="34" charset="-120"/>
+              </a:rPr>
+              <a:t>6</a:t>
+            </a:r>
+            <a:endParaRPr lang="en-US" sz="900" dirty="0"/>
+          </a:p>
+        </p:txBody>
+      </p:sp>
+      <p:sp>
+        <p:nvSpPr>
+          <p:cNvPr id="141" name="Shape 139"/>
+          <p:cNvSpPr/>
+          <p:nvPr/>
+        </p:nvSpPr>
+        <p:spPr>
+          <a:xfrm>
+            <a:off x="9235440" y="4681728"/>
+            <a:ext cx="274320" cy="274320"/>
+          </a:xfrm>
+          <a:prstGeom prst="rect">
+            <a:avLst/>
+          </a:prstGeom>
+          <a:solidFill>
+            <a:srgbClr val="E7E9EC"/>
           </a:solidFill>
           <a:ln w="12700">
             <a:solidFill>
@@ -5471,59 +8759,20 @@
       </p:sp>
       <p:sp>
         <p:nvSpPr>
-          <p:cNvPr id="11" name="Text 9"/>
-          <p:cNvSpPr/>
-          <p:nvPr/>
-        </p:nvSpPr>
-        <p:spPr>
-          <a:xfrm>
-            <a:off x="3657600" y="2084832"/>
-            <a:ext cx="1188720" cy="502920"/>
-          </a:xfrm>
-          <a:prstGeom prst="rect">
-            <a:avLst/>
-          </a:prstGeom>
-          <a:noFill/>
-          <a:ln/>
-        </p:spPr>
-        <p:txBody>
-          <a:bodyPr wrap="square" lIns="0" tIns="0" rIns="0" bIns="0" rtlCol="0" anchor="ctr"/>
-          <a:lstStyle/>
-          <a:p>
-            <a:pPr algn="ctr" indent="0" marL="0">
-              <a:buNone/>
-            </a:pPr>
-            <a:r>
-              <a:rPr lang="en-US" sz="900" b="1" dirty="0">
-                <a:solidFill>
-                  <a:srgbClr val="3A3F49"/>
-                </a:solidFill>
-                <a:latin typeface="Calibri" pitchFamily="34" charset="0"/>
-                <a:ea typeface="Calibri" pitchFamily="34" charset="-122"/>
-                <a:cs typeface="Calibri" pitchFamily="34" charset="-120"/>
-              </a:rPr>
-              <a:t>5</a:t>
-            </a:r>
-            <a:endParaRPr lang="en-US" sz="900" dirty="0"/>
-          </a:p>
-        </p:txBody>
-      </p:sp>
-      <p:sp>
-        <p:nvSpPr>
-          <p:cNvPr id="12" name="Shape 10"/>
-          <p:cNvSpPr/>
-          <p:nvPr/>
-        </p:nvSpPr>
-        <p:spPr>
-          <a:xfrm>
-            <a:off x="960120" y="3017520"/>
-            <a:ext cx="731520" cy="640080"/>
-          </a:xfrm>
-          <a:prstGeom prst="rect">
-            <a:avLst/>
-          </a:prstGeom>
-          <a:solidFill>
-            <a:srgbClr val="E4E7DF"/>
+          <p:cNvPr id="142" name="Shape 140"/>
+          <p:cNvSpPr/>
+          <p:nvPr/>
+        </p:nvSpPr>
+        <p:spPr>
+          <a:xfrm>
+            <a:off x="9573768" y="4681728"/>
+            <a:ext cx="274320" cy="274320"/>
+          </a:xfrm>
+          <a:prstGeom prst="rect">
+            <a:avLst/>
+          </a:prstGeom>
+          <a:solidFill>
+            <a:srgbClr val="E7E9EC"/>
           </a:solidFill>
           <a:ln w="12700">
             <a:solidFill>
@@ -5535,1355 +8784,18 @@
       </p:sp>
       <p:sp>
         <p:nvSpPr>
-          <p:cNvPr id="13" name="Text 11"/>
-          <p:cNvSpPr/>
-          <p:nvPr/>
-        </p:nvSpPr>
-        <p:spPr>
-          <a:xfrm>
-            <a:off x="960120" y="3017520"/>
-            <a:ext cx="731520" cy="640080"/>
-          </a:xfrm>
-          <a:prstGeom prst="rect">
-            <a:avLst/>
-          </a:prstGeom>
-          <a:noFill/>
-          <a:ln/>
-        </p:spPr>
-        <p:txBody>
-          <a:bodyPr wrap="square" lIns="0" tIns="0" rIns="0" bIns="0" rtlCol="0" anchor="ctr"/>
-          <a:lstStyle/>
-          <a:p>
-            <a:pPr algn="ctr" indent="0" marL="0">
-              <a:buNone/>
-            </a:pPr>
-            <a:r>
-              <a:rPr lang="en-US" sz="900" b="1" dirty="0">
-                <a:solidFill>
-                  <a:srgbClr val="3A3F49"/>
-                </a:solidFill>
-                <a:latin typeface="Calibri" pitchFamily="34" charset="0"/>
-                <a:ea typeface="Calibri" pitchFamily="34" charset="-122"/>
-                <a:cs typeface="Calibri" pitchFamily="34" charset="-120"/>
-              </a:rPr>
-              <a:t>2</a:t>
-            </a:r>
-            <a:endParaRPr lang="en-US" sz="900" dirty="0"/>
-          </a:p>
-        </p:txBody>
-      </p:sp>
-      <p:sp>
-        <p:nvSpPr>
-          <p:cNvPr id="14" name="Shape 12"/>
-          <p:cNvSpPr/>
-          <p:nvPr/>
-        </p:nvSpPr>
-        <p:spPr>
-          <a:xfrm>
-            <a:off x="1874520" y="3063240"/>
-            <a:ext cx="640080" cy="548640"/>
-          </a:xfrm>
-          <a:prstGeom prst="rect">
-            <a:avLst/>
-          </a:prstGeom>
-          <a:solidFill>
-            <a:srgbClr val="E4E7DF"/>
-          </a:solidFill>
-          <a:ln w="12700">
-            <a:solidFill>
-              <a:srgbClr val="B9BEC6"/>
-            </a:solidFill>
-            <a:prstDash val="solid"/>
-          </a:ln>
-        </p:spPr>
-      </p:sp>
-      <p:sp>
-        <p:nvSpPr>
-          <p:cNvPr id="15" name="Text 13"/>
-          <p:cNvSpPr/>
-          <p:nvPr/>
-        </p:nvSpPr>
-        <p:spPr>
-          <a:xfrm>
-            <a:off x="1874520" y="3063240"/>
-            <a:ext cx="640080" cy="548640"/>
-          </a:xfrm>
-          <a:prstGeom prst="rect">
-            <a:avLst/>
-          </a:prstGeom>
-          <a:noFill/>
-          <a:ln/>
-        </p:spPr>
-        <p:txBody>
-          <a:bodyPr wrap="square" lIns="0" tIns="0" rIns="0" bIns="0" rtlCol="0" anchor="ctr"/>
-          <a:lstStyle/>
-          <a:p>
-            <a:pPr algn="ctr" indent="0" marL="0">
-              <a:buNone/>
-            </a:pPr>
-            <a:r>
-              <a:rPr lang="en-US" sz="900" b="1" dirty="0">
-                <a:solidFill>
-                  <a:srgbClr val="3A3F49"/>
-                </a:solidFill>
-                <a:latin typeface="Calibri" pitchFamily="34" charset="0"/>
-                <a:ea typeface="Calibri" pitchFamily="34" charset="-122"/>
-                <a:cs typeface="Calibri" pitchFamily="34" charset="-120"/>
-              </a:rPr>
-              <a:t>6</a:t>
-            </a:r>
-            <a:endParaRPr lang="en-US" sz="900" dirty="0"/>
-          </a:p>
-        </p:txBody>
-      </p:sp>
-      <p:sp>
-        <p:nvSpPr>
-          <p:cNvPr id="16" name="Shape 14"/>
-          <p:cNvSpPr/>
-          <p:nvPr/>
-        </p:nvSpPr>
-        <p:spPr>
-          <a:xfrm>
-            <a:off x="2743200" y="3017520"/>
-            <a:ext cx="640080" cy="548640"/>
-          </a:xfrm>
-          <a:prstGeom prst="rect">
-            <a:avLst/>
-          </a:prstGeom>
-          <a:solidFill>
-            <a:srgbClr val="CDE9F7"/>
-          </a:solidFill>
-          <a:ln w="12700">
-            <a:solidFill>
-              <a:srgbClr val="B9BEC6"/>
-            </a:solidFill>
-            <a:prstDash val="solid"/>
-          </a:ln>
-        </p:spPr>
-      </p:sp>
-      <p:sp>
-        <p:nvSpPr>
-          <p:cNvPr id="17" name="Text 15"/>
-          <p:cNvSpPr/>
-          <p:nvPr/>
-        </p:nvSpPr>
-        <p:spPr>
-          <a:xfrm>
-            <a:off x="2743200" y="3017520"/>
-            <a:ext cx="640080" cy="548640"/>
-          </a:xfrm>
-          <a:prstGeom prst="rect">
-            <a:avLst/>
-          </a:prstGeom>
-          <a:noFill/>
-          <a:ln/>
-        </p:spPr>
-        <p:txBody>
-          <a:bodyPr wrap="square" lIns="0" tIns="0" rIns="0" bIns="0" rtlCol="0" anchor="ctr"/>
-          <a:lstStyle/>
-          <a:p>
-            <a:pPr algn="ctr" indent="0" marL="0">
-              <a:buNone/>
-            </a:pPr>
-            <a:r>
-              <a:rPr lang="en-US" sz="900" b="1" dirty="0">
-                <a:solidFill>
-                  <a:srgbClr val="3A3F49"/>
-                </a:solidFill>
-                <a:latin typeface="Calibri" pitchFamily="34" charset="0"/>
-                <a:ea typeface="Calibri" pitchFamily="34" charset="-122"/>
-                <a:cs typeface="Calibri" pitchFamily="34" charset="-120"/>
-              </a:rPr>
-              <a:t>1</a:t>
-            </a:r>
-            <a:endParaRPr lang="en-US" sz="900" dirty="0"/>
-          </a:p>
-        </p:txBody>
-      </p:sp>
-      <p:sp>
-        <p:nvSpPr>
-          <p:cNvPr id="18" name="Shape 16"/>
-          <p:cNvSpPr/>
-          <p:nvPr/>
-        </p:nvSpPr>
-        <p:spPr>
-          <a:xfrm>
-            <a:off x="3566160" y="2788920"/>
-            <a:ext cx="548640" cy="457200"/>
-          </a:xfrm>
-          <a:prstGeom prst="rect">
-            <a:avLst/>
-          </a:prstGeom>
-          <a:solidFill>
-            <a:srgbClr val="EDE6D7"/>
-          </a:solidFill>
-          <a:ln w="12700">
-            <a:solidFill>
-              <a:srgbClr val="B9BEC6"/>
-            </a:solidFill>
-            <a:prstDash val="solid"/>
-          </a:ln>
-        </p:spPr>
-      </p:sp>
-      <p:sp>
-        <p:nvSpPr>
-          <p:cNvPr id="19" name="Text 17"/>
-          <p:cNvSpPr/>
-          <p:nvPr/>
-        </p:nvSpPr>
-        <p:spPr>
-          <a:xfrm>
-            <a:off x="3566160" y="2788920"/>
-            <a:ext cx="548640" cy="457200"/>
-          </a:xfrm>
-          <a:prstGeom prst="rect">
-            <a:avLst/>
-          </a:prstGeom>
-          <a:noFill/>
-          <a:ln/>
-        </p:spPr>
-        <p:txBody>
-          <a:bodyPr wrap="square" lIns="0" tIns="0" rIns="0" bIns="0" rtlCol="0" anchor="ctr"/>
-          <a:lstStyle/>
-          <a:p>
-            <a:pPr algn="ctr" indent="0" marL="0">
-              <a:buNone/>
-            </a:pPr>
-            <a:r>
-              <a:rPr lang="en-US" sz="900" b="1" dirty="0">
-                <a:solidFill>
-                  <a:srgbClr val="3A3F49"/>
-                </a:solidFill>
-                <a:latin typeface="Calibri" pitchFamily="34" charset="0"/>
-                <a:ea typeface="Calibri" pitchFamily="34" charset="-122"/>
-                <a:cs typeface="Calibri" pitchFamily="34" charset="-120"/>
-              </a:rPr>
-              <a:t>7</a:t>
-            </a:r>
-            <a:endParaRPr lang="en-US" sz="900" dirty="0"/>
-          </a:p>
-        </p:txBody>
-      </p:sp>
-      <p:sp>
-        <p:nvSpPr>
-          <p:cNvPr id="20" name="Shape 18"/>
-          <p:cNvSpPr/>
-          <p:nvPr/>
-        </p:nvSpPr>
-        <p:spPr>
-          <a:xfrm>
-            <a:off x="1005840" y="3840480"/>
-            <a:ext cx="502920" cy="457200"/>
-          </a:xfrm>
-          <a:prstGeom prst="rect">
-            <a:avLst/>
-          </a:prstGeom>
-          <a:solidFill>
-            <a:srgbClr val="EDE6D7"/>
-          </a:solidFill>
-          <a:ln w="12700">
-            <a:solidFill>
-              <a:srgbClr val="B9BEC6"/>
-            </a:solidFill>
-            <a:prstDash val="solid"/>
-          </a:ln>
-        </p:spPr>
-      </p:sp>
-      <p:sp>
-        <p:nvSpPr>
-          <p:cNvPr id="21" name="Text 19"/>
-          <p:cNvSpPr/>
-          <p:nvPr/>
-        </p:nvSpPr>
-        <p:spPr>
-          <a:xfrm>
-            <a:off x="1005840" y="3840480"/>
-            <a:ext cx="502920" cy="457200"/>
-          </a:xfrm>
-          <a:prstGeom prst="rect">
-            <a:avLst/>
-          </a:prstGeom>
-          <a:noFill/>
-          <a:ln/>
-        </p:spPr>
-        <p:txBody>
-          <a:bodyPr wrap="square" lIns="0" tIns="0" rIns="0" bIns="0" rtlCol="0" anchor="ctr"/>
-          <a:lstStyle/>
-          <a:p>
-            <a:pPr algn="ctr" indent="0" marL="0">
-              <a:buNone/>
-            </a:pPr>
-            <a:r>
-              <a:rPr lang="en-US" sz="900" b="1" dirty="0">
-                <a:solidFill>
-                  <a:srgbClr val="3A3F49"/>
-                </a:solidFill>
-                <a:latin typeface="Calibri" pitchFamily="34" charset="0"/>
-                <a:ea typeface="Calibri" pitchFamily="34" charset="-122"/>
-                <a:cs typeface="Calibri" pitchFamily="34" charset="-120"/>
-              </a:rPr>
-              <a:t>8</a:t>
-            </a:r>
-            <a:endParaRPr lang="en-US" sz="900" dirty="0"/>
-          </a:p>
-        </p:txBody>
-      </p:sp>
-      <p:sp>
-        <p:nvSpPr>
-          <p:cNvPr id="22" name="Shape 20"/>
-          <p:cNvSpPr/>
-          <p:nvPr/>
-        </p:nvSpPr>
-        <p:spPr>
-          <a:xfrm>
-            <a:off x="1828800" y="3886200"/>
-            <a:ext cx="365760" cy="365760"/>
-          </a:xfrm>
-          <a:prstGeom prst="rect">
-            <a:avLst/>
-          </a:prstGeom>
-          <a:solidFill>
-            <a:srgbClr val="E7E9EC"/>
-          </a:solidFill>
-          <a:ln w="12700">
-            <a:solidFill>
-              <a:srgbClr val="B9BEC6"/>
-            </a:solidFill>
-            <a:prstDash val="solid"/>
-          </a:ln>
-        </p:spPr>
-      </p:sp>
-      <p:sp>
-        <p:nvSpPr>
-          <p:cNvPr id="23" name="Shape 21"/>
-          <p:cNvSpPr/>
-          <p:nvPr/>
-        </p:nvSpPr>
-        <p:spPr>
-          <a:xfrm>
-            <a:off x="2377440" y="3886200"/>
-            <a:ext cx="365760" cy="365760"/>
-          </a:xfrm>
-          <a:prstGeom prst="rect">
-            <a:avLst/>
-          </a:prstGeom>
-          <a:solidFill>
-            <a:srgbClr val="E7E9EC"/>
-          </a:solidFill>
-          <a:ln w="12700">
-            <a:solidFill>
-              <a:srgbClr val="B9BEC6"/>
-            </a:solidFill>
-            <a:prstDash val="solid"/>
-          </a:ln>
-        </p:spPr>
-      </p:sp>
-      <p:sp>
-        <p:nvSpPr>
-          <p:cNvPr id="24" name="Shape 22"/>
-          <p:cNvSpPr/>
-          <p:nvPr/>
-        </p:nvSpPr>
-        <p:spPr>
-          <a:xfrm>
-            <a:off x="3017520" y="3840480"/>
-            <a:ext cx="457200" cy="457200"/>
-          </a:xfrm>
-          <a:prstGeom prst="rect">
-            <a:avLst/>
-          </a:prstGeom>
-          <a:solidFill>
-            <a:srgbClr val="E4E7DF"/>
-          </a:solidFill>
-          <a:ln w="12700">
-            <a:solidFill>
-              <a:srgbClr val="B9BEC6"/>
-            </a:solidFill>
-            <a:prstDash val="solid"/>
-          </a:ln>
-        </p:spPr>
-      </p:sp>
-      <p:sp>
-        <p:nvSpPr>
-          <p:cNvPr id="25" name="Text 23"/>
-          <p:cNvSpPr/>
-          <p:nvPr/>
-        </p:nvSpPr>
-        <p:spPr>
-          <a:xfrm>
-            <a:off x="822960" y="4407408"/>
-            <a:ext cx="4206240" cy="274320"/>
-          </a:xfrm>
-          <a:prstGeom prst="rect">
-            <a:avLst/>
-          </a:prstGeom>
-          <a:noFill/>
-          <a:ln/>
-        </p:spPr>
-        <p:txBody>
-          <a:bodyPr wrap="square" lIns="0" tIns="0" rIns="0" bIns="0" rtlCol="0" anchor="ctr"/>
-          <a:lstStyle/>
-          <a:p>
-            <a:pPr algn="ctr" indent="0" marL="0">
-              <a:buNone/>
-            </a:pPr>
-            <a:r>
-              <a:rPr lang="en-US" sz="1000" i="1" dirty="0">
-                <a:solidFill>
-                  <a:srgbClr val="5B6470"/>
-                </a:solidFill>
-                <a:latin typeface="Calibri" pitchFamily="34" charset="0"/>
-                <a:ea typeface="Calibri" pitchFamily="34" charset="-122"/>
-                <a:cs typeface="Calibri" pitchFamily="34" charset="-120"/>
-              </a:rPr>
-              <a:t>lleno, sin pasillo libre</a:t>
-            </a:r>
-            <a:endParaRPr lang="en-US" sz="1000" dirty="0"/>
-          </a:p>
-        </p:txBody>
-      </p:sp>
-      <p:sp>
-        <p:nvSpPr>
-          <p:cNvPr id="26" name="Text 24"/>
-          <p:cNvSpPr/>
-          <p:nvPr/>
-        </p:nvSpPr>
-        <p:spPr>
-          <a:xfrm>
-            <a:off x="5760720" y="1645920"/>
-            <a:ext cx="5486400" cy="274320"/>
-          </a:xfrm>
-          <a:prstGeom prst="rect">
-            <a:avLst/>
-          </a:prstGeom>
-          <a:noFill/>
-          <a:ln/>
-        </p:spPr>
-        <p:txBody>
-          <a:bodyPr wrap="square" lIns="0" tIns="0" rIns="0" bIns="0" rtlCol="0" anchor="ctr"/>
-          <a:lstStyle/>
-          <a:p>
-            <a:pPr indent="0" marL="0">
-              <a:buNone/>
-            </a:pPr>
-            <a:r>
-              <a:rPr lang="en-US" sz="1200" b="1" dirty="0">
-                <a:solidFill>
-                  <a:srgbClr val="1A1D23"/>
-                </a:solidFill>
-                <a:latin typeface="Calibri" pitchFamily="34" charset="0"/>
-                <a:ea typeface="Calibri" pitchFamily="34" charset="-122"/>
-                <a:cs typeface="Calibri" pitchFamily="34" charset="-120"/>
-              </a:rPr>
-              <a:t>Propuesta</a:t>
-            </a:r>
-            <a:endParaRPr lang="en-US" sz="1200" dirty="0"/>
-          </a:p>
-        </p:txBody>
-      </p:sp>
-      <p:sp>
-        <p:nvSpPr>
-          <p:cNvPr id="27" name="Shape 25"/>
-          <p:cNvSpPr/>
-          <p:nvPr/>
-        </p:nvSpPr>
-        <p:spPr>
-          <a:xfrm>
-            <a:off x="5760720" y="1938528"/>
-            <a:ext cx="5760720" cy="2743200"/>
-          </a:xfrm>
-          <a:prstGeom prst="rect">
-            <a:avLst/>
-          </a:prstGeom>
-          <a:solidFill>
-            <a:srgbClr val="FFFFFF"/>
-          </a:solidFill>
-          <a:ln w="17780">
-            <a:solidFill>
-              <a:srgbClr val="C8CCD2"/>
-            </a:solidFill>
-            <a:prstDash val="solid"/>
-          </a:ln>
-        </p:spPr>
-      </p:sp>
-      <p:sp>
-        <p:nvSpPr>
-          <p:cNvPr id="28" name="Shape 26"/>
-          <p:cNvSpPr/>
-          <p:nvPr/>
-        </p:nvSpPr>
-        <p:spPr>
-          <a:xfrm>
-            <a:off x="7315200" y="2148840"/>
-            <a:ext cx="502920" cy="2194560"/>
-          </a:xfrm>
-          <a:prstGeom prst="rect">
-            <a:avLst/>
-          </a:prstGeom>
-          <a:solidFill>
-            <a:srgbClr val="DCE0E6"/>
-          </a:solidFill>
-          <a:ln w="12700">
-            <a:solidFill>
-              <a:srgbClr val="B9BEC6"/>
-            </a:solidFill>
-            <a:prstDash val="solid"/>
-          </a:ln>
-        </p:spPr>
-      </p:sp>
-      <p:sp>
-        <p:nvSpPr>
-          <p:cNvPr id="29" name="Text 27"/>
-          <p:cNvSpPr/>
-          <p:nvPr/>
-        </p:nvSpPr>
-        <p:spPr>
-          <a:xfrm>
-            <a:off x="7315200" y="2148840"/>
-            <a:ext cx="502920" cy="2194560"/>
-          </a:xfrm>
-          <a:prstGeom prst="rect">
-            <a:avLst/>
-          </a:prstGeom>
-          <a:noFill/>
-          <a:ln/>
-        </p:spPr>
-        <p:txBody>
-          <a:bodyPr wrap="square" lIns="0" tIns="0" rIns="0" bIns="0" rtlCol="0" anchor="ctr"/>
-          <a:lstStyle/>
-          <a:p>
-            <a:pPr algn="ctr" indent="0" marL="0">
-              <a:buNone/>
-            </a:pPr>
-            <a:r>
-              <a:rPr lang="en-US" sz="900" b="1" dirty="0">
-                <a:solidFill>
-                  <a:srgbClr val="3A3F49"/>
-                </a:solidFill>
-                <a:latin typeface="Calibri" pitchFamily="34" charset="0"/>
-                <a:ea typeface="Calibri" pitchFamily="34" charset="-122"/>
-                <a:cs typeface="Calibri" pitchFamily="34" charset="-120"/>
-              </a:rPr>
-              <a:t>3</a:t>
-            </a:r>
-            <a:endParaRPr lang="en-US" sz="900" dirty="0"/>
-          </a:p>
-        </p:txBody>
-      </p:sp>
-      <p:sp>
-        <p:nvSpPr>
-          <p:cNvPr id="30" name="Shape 28"/>
-          <p:cNvSpPr/>
-          <p:nvPr/>
-        </p:nvSpPr>
-        <p:spPr>
-          <a:xfrm>
-            <a:off x="9326880" y="2148840"/>
-            <a:ext cx="502920" cy="2194560"/>
-          </a:xfrm>
-          <a:prstGeom prst="rect">
-            <a:avLst/>
-          </a:prstGeom>
-          <a:solidFill>
-            <a:srgbClr val="DCE0E6"/>
-          </a:solidFill>
-          <a:ln w="12700">
-            <a:solidFill>
-              <a:srgbClr val="B9BEC6"/>
-            </a:solidFill>
-            <a:prstDash val="solid"/>
-          </a:ln>
-        </p:spPr>
-      </p:sp>
-      <p:sp>
-        <p:nvSpPr>
-          <p:cNvPr id="31" name="Text 29"/>
-          <p:cNvSpPr/>
-          <p:nvPr/>
-        </p:nvSpPr>
-        <p:spPr>
-          <a:xfrm>
-            <a:off x="9326880" y="2148840"/>
-            <a:ext cx="502920" cy="2194560"/>
-          </a:xfrm>
-          <a:prstGeom prst="rect">
-            <a:avLst/>
-          </a:prstGeom>
-          <a:noFill/>
-          <a:ln/>
-        </p:spPr>
-        <p:txBody>
-          <a:bodyPr wrap="square" lIns="0" tIns="0" rIns="0" bIns="0" rtlCol="0" anchor="ctr"/>
-          <a:lstStyle/>
-          <a:p>
-            <a:pPr algn="ctr" indent="0" marL="0">
-              <a:buNone/>
-            </a:pPr>
-            <a:r>
-              <a:rPr lang="en-US" sz="900" b="1" dirty="0">
-                <a:solidFill>
-                  <a:srgbClr val="3A3F49"/>
-                </a:solidFill>
-                <a:latin typeface="Calibri" pitchFamily="34" charset="0"/>
-                <a:ea typeface="Calibri" pitchFamily="34" charset="-122"/>
-                <a:cs typeface="Calibri" pitchFamily="34" charset="-120"/>
-              </a:rPr>
-              <a:t>4</a:t>
-            </a:r>
-            <a:endParaRPr lang="en-US" sz="900" dirty="0"/>
-          </a:p>
-        </p:txBody>
-      </p:sp>
-      <p:sp>
-        <p:nvSpPr>
-          <p:cNvPr id="32" name="Shape 30"/>
-          <p:cNvSpPr/>
-          <p:nvPr/>
-        </p:nvSpPr>
-        <p:spPr>
-          <a:xfrm>
-            <a:off x="7818120" y="2148840"/>
-            <a:ext cx="1508760" cy="2194560"/>
-          </a:xfrm>
-          <a:prstGeom prst="rect">
-            <a:avLst/>
-          </a:prstGeom>
-          <a:solidFill>
-            <a:srgbClr val="FBEFC9"/>
-          </a:solidFill>
-          <a:ln w="12700">
-            <a:solidFill>
-              <a:srgbClr val="E0C96A"/>
-            </a:solidFill>
-            <a:prstDash val="solid"/>
-          </a:ln>
-        </p:spPr>
-      </p:sp>
-      <p:sp>
-        <p:nvSpPr>
-          <p:cNvPr id="33" name="Text 31"/>
-          <p:cNvSpPr/>
-          <p:nvPr/>
-        </p:nvSpPr>
-        <p:spPr>
-          <a:xfrm>
-            <a:off x="7818120" y="2697480"/>
-            <a:ext cx="1508760" cy="274320"/>
-          </a:xfrm>
-          <a:prstGeom prst="rect">
-            <a:avLst/>
-          </a:prstGeom>
-          <a:noFill/>
-          <a:ln/>
-        </p:spPr>
-        <p:txBody>
-          <a:bodyPr wrap="square" lIns="0" tIns="0" rIns="0" bIns="0" rtlCol="0" anchor="ctr"/>
-          <a:lstStyle/>
-          <a:p>
-            <a:pPr algn="ctr" indent="0" marL="0">
-              <a:buNone/>
-            </a:pPr>
-            <a:r>
-              <a:rPr lang="en-US" sz="1100" b="1" dirty="0">
-                <a:solidFill>
-                  <a:srgbClr val="8A6D16"/>
-                </a:solidFill>
-                <a:latin typeface="Calibri" pitchFamily="34" charset="0"/>
-                <a:ea typeface="Calibri" pitchFamily="34" charset="-122"/>
-                <a:cs typeface="Calibri" pitchFamily="34" charset="-120"/>
-              </a:rPr>
-              <a:t>Pasillo 0</a:t>
-            </a:r>
-            <a:endParaRPr lang="en-US" sz="1100" dirty="0"/>
-          </a:p>
-        </p:txBody>
-      </p:sp>
-      <p:sp>
-        <p:nvSpPr>
-          <p:cNvPr id="34" name="Text 32"/>
-          <p:cNvSpPr/>
-          <p:nvPr/>
-        </p:nvSpPr>
-        <p:spPr>
-          <a:xfrm>
-            <a:off x="7818120" y="2971800"/>
-            <a:ext cx="1508760" cy="274320"/>
-          </a:xfrm>
-          <a:prstGeom prst="rect">
-            <a:avLst/>
-          </a:prstGeom>
-          <a:noFill/>
-          <a:ln/>
-        </p:spPr>
-        <p:txBody>
-          <a:bodyPr wrap="square" lIns="0" tIns="0" rIns="0" bIns="0" rtlCol="0" anchor="ctr"/>
-          <a:lstStyle/>
-          <a:p>
-            <a:pPr algn="ctr" indent="0" marL="0">
-              <a:buNone/>
-            </a:pPr>
-            <a:r>
-              <a:rPr lang="en-US" sz="950" dirty="0">
-                <a:solidFill>
-                  <a:srgbClr val="8A6D16"/>
-                </a:solidFill>
-                <a:latin typeface="Calibri" pitchFamily="34" charset="0"/>
-                <a:ea typeface="Calibri" pitchFamily="34" charset="-122"/>
-                <a:cs typeface="Calibri" pitchFamily="34" charset="-120"/>
-              </a:rPr>
-              <a:t>3.0 × 6.0 m</a:t>
-            </a:r>
-            <a:endParaRPr lang="en-US" sz="950" dirty="0"/>
-          </a:p>
-        </p:txBody>
-      </p:sp>
-      <p:sp>
-        <p:nvSpPr>
-          <p:cNvPr id="35" name="Shape 33"/>
-          <p:cNvSpPr/>
-          <p:nvPr/>
-        </p:nvSpPr>
-        <p:spPr>
-          <a:xfrm>
-            <a:off x="7827264" y="2331720"/>
-            <a:ext cx="109728" cy="109728"/>
-          </a:xfrm>
-          <a:prstGeom prst="rect">
-            <a:avLst/>
-          </a:prstGeom>
-          <a:solidFill>
-            <a:srgbClr val="1A1D23"/>
-          </a:solidFill>
-          <a:ln/>
-        </p:spPr>
-      </p:sp>
-      <p:sp>
-        <p:nvSpPr>
-          <p:cNvPr id="36" name="Shape 34"/>
-          <p:cNvSpPr/>
-          <p:nvPr/>
-        </p:nvSpPr>
-        <p:spPr>
-          <a:xfrm>
-            <a:off x="9217152" y="2331720"/>
-            <a:ext cx="109728" cy="109728"/>
-          </a:xfrm>
-          <a:prstGeom prst="rect">
-            <a:avLst/>
-          </a:prstGeom>
-          <a:solidFill>
-            <a:srgbClr val="1A1D23"/>
-          </a:solidFill>
-          <a:ln/>
-        </p:spPr>
-      </p:sp>
-      <p:sp>
-        <p:nvSpPr>
-          <p:cNvPr id="37" name="Shape 35"/>
-          <p:cNvSpPr/>
-          <p:nvPr/>
-        </p:nvSpPr>
-        <p:spPr>
-          <a:xfrm>
-            <a:off x="7827264" y="2971800"/>
-            <a:ext cx="109728" cy="109728"/>
-          </a:xfrm>
-          <a:prstGeom prst="rect">
-            <a:avLst/>
-          </a:prstGeom>
-          <a:solidFill>
-            <a:srgbClr val="1A1D23"/>
-          </a:solidFill>
-          <a:ln/>
-        </p:spPr>
-      </p:sp>
-      <p:sp>
-        <p:nvSpPr>
-          <p:cNvPr id="38" name="Shape 36"/>
-          <p:cNvSpPr/>
-          <p:nvPr/>
-        </p:nvSpPr>
-        <p:spPr>
-          <a:xfrm>
-            <a:off x="9217152" y="2971800"/>
-            <a:ext cx="109728" cy="109728"/>
-          </a:xfrm>
-          <a:prstGeom prst="rect">
-            <a:avLst/>
-          </a:prstGeom>
-          <a:solidFill>
-            <a:srgbClr val="1A1D23"/>
-          </a:solidFill>
-          <a:ln/>
-        </p:spPr>
-      </p:sp>
-      <p:sp>
-        <p:nvSpPr>
-          <p:cNvPr id="39" name="Shape 37"/>
-          <p:cNvSpPr/>
-          <p:nvPr/>
-        </p:nvSpPr>
-        <p:spPr>
-          <a:xfrm>
-            <a:off x="7827264" y="3611880"/>
-            <a:ext cx="109728" cy="109728"/>
-          </a:xfrm>
-          <a:prstGeom prst="rect">
-            <a:avLst/>
-          </a:prstGeom>
-          <a:solidFill>
-            <a:srgbClr val="1A1D23"/>
-          </a:solidFill>
-          <a:ln/>
-        </p:spPr>
-      </p:sp>
-      <p:sp>
-        <p:nvSpPr>
-          <p:cNvPr id="40" name="Shape 38"/>
-          <p:cNvSpPr/>
-          <p:nvPr/>
-        </p:nvSpPr>
-        <p:spPr>
-          <a:xfrm>
-            <a:off x="9217152" y="3611880"/>
-            <a:ext cx="109728" cy="109728"/>
-          </a:xfrm>
-          <a:prstGeom prst="rect">
-            <a:avLst/>
-          </a:prstGeom>
-          <a:solidFill>
-            <a:srgbClr val="1A1D23"/>
-          </a:solidFill>
-          <a:ln/>
-        </p:spPr>
-      </p:sp>
-      <p:sp>
-        <p:nvSpPr>
-          <p:cNvPr id="41" name="Shape 39"/>
-          <p:cNvSpPr/>
-          <p:nvPr/>
-        </p:nvSpPr>
-        <p:spPr>
-          <a:xfrm>
-            <a:off x="7827264" y="4114800"/>
-            <a:ext cx="109728" cy="109728"/>
-          </a:xfrm>
-          <a:prstGeom prst="rect">
-            <a:avLst/>
-          </a:prstGeom>
-          <a:solidFill>
-            <a:srgbClr val="1A1D23"/>
-          </a:solidFill>
-          <a:ln/>
-        </p:spPr>
-      </p:sp>
-      <p:sp>
-        <p:nvSpPr>
-          <p:cNvPr id="42" name="Shape 40"/>
-          <p:cNvSpPr/>
-          <p:nvPr/>
-        </p:nvSpPr>
-        <p:spPr>
-          <a:xfrm>
-            <a:off x="9217152" y="4114800"/>
-            <a:ext cx="109728" cy="109728"/>
-          </a:xfrm>
-          <a:prstGeom prst="rect">
-            <a:avLst/>
-          </a:prstGeom>
-          <a:solidFill>
-            <a:srgbClr val="1A1D23"/>
-          </a:solidFill>
-          <a:ln/>
-        </p:spPr>
-      </p:sp>
-      <p:sp>
-        <p:nvSpPr>
-          <p:cNvPr id="43" name="Shape 41"/>
-          <p:cNvSpPr/>
-          <p:nvPr/>
-        </p:nvSpPr>
-        <p:spPr>
-          <a:xfrm>
-            <a:off x="8065008" y="3986784"/>
-            <a:ext cx="1005840" cy="292608"/>
-          </a:xfrm>
-          <a:prstGeom prst="rect">
-            <a:avLst/>
-          </a:prstGeom>
-          <a:solidFill>
-            <a:srgbClr val="CDE9F7"/>
-          </a:solidFill>
-          <a:ln w="12700">
-            <a:solidFill>
-              <a:srgbClr val="A7C8DA"/>
-            </a:solidFill>
-            <a:prstDash val="solid"/>
-          </a:ln>
-        </p:spPr>
-      </p:sp>
-      <p:sp>
-        <p:nvSpPr>
-          <p:cNvPr id="44" name="Text 42"/>
-          <p:cNvSpPr/>
-          <p:nvPr/>
-        </p:nvSpPr>
-        <p:spPr>
-          <a:xfrm>
-            <a:off x="8065008" y="3986784"/>
-            <a:ext cx="1005840" cy="292608"/>
-          </a:xfrm>
-          <a:prstGeom prst="rect">
-            <a:avLst/>
-          </a:prstGeom>
-          <a:noFill/>
-          <a:ln/>
-        </p:spPr>
-        <p:txBody>
-          <a:bodyPr wrap="square" lIns="0" tIns="0" rIns="0" bIns="0" rtlCol="0" anchor="ctr"/>
-          <a:lstStyle/>
-          <a:p>
-            <a:pPr algn="ctr" indent="0" marL="0">
-              <a:buNone/>
-            </a:pPr>
-            <a:r>
-              <a:rPr lang="en-US" sz="900" b="1" dirty="0">
-                <a:solidFill>
-                  <a:srgbClr val="3A3F49"/>
-                </a:solidFill>
-                <a:latin typeface="Calibri" pitchFamily="34" charset="0"/>
-                <a:ea typeface="Calibri" pitchFamily="34" charset="-122"/>
-                <a:cs typeface="Calibri" pitchFamily="34" charset="-120"/>
-              </a:rPr>
-              <a:t>1 · EDR</a:t>
-            </a:r>
-            <a:endParaRPr lang="en-US" sz="900" dirty="0"/>
-          </a:p>
-        </p:txBody>
-      </p:sp>
-      <p:sp>
-        <p:nvSpPr>
-          <p:cNvPr id="45" name="Shape 43"/>
-          <p:cNvSpPr/>
-          <p:nvPr/>
-        </p:nvSpPr>
-        <p:spPr>
-          <a:xfrm>
-            <a:off x="5943600" y="2148840"/>
-            <a:ext cx="1188720" cy="502920"/>
-          </a:xfrm>
-          <a:prstGeom prst="rect">
-            <a:avLst/>
-          </a:prstGeom>
-          <a:solidFill>
-            <a:srgbClr val="E4E7DF"/>
-          </a:solidFill>
-          <a:ln w="12700">
-            <a:solidFill>
-              <a:srgbClr val="B9BEC6"/>
-            </a:solidFill>
-            <a:prstDash val="solid"/>
-          </a:ln>
-        </p:spPr>
-      </p:sp>
-      <p:sp>
-        <p:nvSpPr>
-          <p:cNvPr id="46" name="Text 44"/>
-          <p:cNvSpPr/>
-          <p:nvPr/>
-        </p:nvSpPr>
-        <p:spPr>
-          <a:xfrm>
-            <a:off x="5943600" y="2148840"/>
-            <a:ext cx="1188720" cy="502920"/>
-          </a:xfrm>
-          <a:prstGeom prst="rect">
-            <a:avLst/>
-          </a:prstGeom>
-          <a:noFill/>
-          <a:ln/>
-        </p:spPr>
-        <p:txBody>
-          <a:bodyPr wrap="square" lIns="0" tIns="0" rIns="0" bIns="0" rtlCol="0" anchor="ctr"/>
-          <a:lstStyle/>
-          <a:p>
-            <a:pPr algn="ctr" indent="0" marL="0">
-              <a:buNone/>
-            </a:pPr>
-            <a:r>
-              <a:rPr lang="en-US" sz="900" b="1" dirty="0">
-                <a:solidFill>
-                  <a:srgbClr val="3A3F49"/>
-                </a:solidFill>
-                <a:latin typeface="Calibri" pitchFamily="34" charset="0"/>
-                <a:ea typeface="Calibri" pitchFamily="34" charset="-122"/>
-                <a:cs typeface="Calibri" pitchFamily="34" charset="-120"/>
-              </a:rPr>
-              <a:t>5</a:t>
-            </a:r>
-            <a:endParaRPr lang="en-US" sz="900" dirty="0"/>
-          </a:p>
-        </p:txBody>
-      </p:sp>
-      <p:sp>
-        <p:nvSpPr>
-          <p:cNvPr id="47" name="Shape 45"/>
-          <p:cNvSpPr/>
-          <p:nvPr/>
-        </p:nvSpPr>
-        <p:spPr>
-          <a:xfrm>
-            <a:off x="5943600" y="2788920"/>
-            <a:ext cx="548640" cy="502920"/>
-          </a:xfrm>
-          <a:prstGeom prst="rect">
-            <a:avLst/>
-          </a:prstGeom>
-          <a:solidFill>
-            <a:srgbClr val="E4E7DF"/>
-          </a:solidFill>
-          <a:ln w="12700">
-            <a:solidFill>
-              <a:srgbClr val="B9BEC6"/>
-            </a:solidFill>
-            <a:prstDash val="solid"/>
-          </a:ln>
-        </p:spPr>
-      </p:sp>
-      <p:sp>
-        <p:nvSpPr>
-          <p:cNvPr id="48" name="Text 46"/>
-          <p:cNvSpPr/>
-          <p:nvPr/>
-        </p:nvSpPr>
-        <p:spPr>
-          <a:xfrm>
-            <a:off x="5943600" y="2788920"/>
-            <a:ext cx="548640" cy="502920"/>
-          </a:xfrm>
-          <a:prstGeom prst="rect">
-            <a:avLst/>
-          </a:prstGeom>
-          <a:noFill/>
-          <a:ln/>
-        </p:spPr>
-        <p:txBody>
-          <a:bodyPr wrap="square" lIns="0" tIns="0" rIns="0" bIns="0" rtlCol="0" anchor="ctr"/>
-          <a:lstStyle/>
-          <a:p>
-            <a:pPr algn="ctr" indent="0" marL="0">
-              <a:buNone/>
-            </a:pPr>
-            <a:r>
-              <a:rPr lang="en-US" sz="900" b="1" dirty="0">
-                <a:solidFill>
-                  <a:srgbClr val="3A3F49"/>
-                </a:solidFill>
-                <a:latin typeface="Calibri" pitchFamily="34" charset="0"/>
-                <a:ea typeface="Calibri" pitchFamily="34" charset="-122"/>
-                <a:cs typeface="Calibri" pitchFamily="34" charset="-120"/>
-              </a:rPr>
-              <a:t>2</a:t>
-            </a:r>
-            <a:endParaRPr lang="en-US" sz="900" dirty="0"/>
-          </a:p>
-        </p:txBody>
-      </p:sp>
-      <p:sp>
-        <p:nvSpPr>
-          <p:cNvPr id="49" name="Shape 47"/>
-          <p:cNvSpPr/>
-          <p:nvPr/>
-        </p:nvSpPr>
-        <p:spPr>
-          <a:xfrm>
-            <a:off x="6537960" y="2788920"/>
-            <a:ext cx="548640" cy="502920"/>
-          </a:xfrm>
-          <a:prstGeom prst="rect">
-            <a:avLst/>
-          </a:prstGeom>
-          <a:solidFill>
-            <a:srgbClr val="E4E7DF"/>
-          </a:solidFill>
-          <a:ln w="12700">
-            <a:solidFill>
-              <a:srgbClr val="B9BEC6"/>
-            </a:solidFill>
-            <a:prstDash val="solid"/>
-          </a:ln>
-        </p:spPr>
-      </p:sp>
-      <p:sp>
-        <p:nvSpPr>
-          <p:cNvPr id="50" name="Text 48"/>
-          <p:cNvSpPr/>
-          <p:nvPr/>
-        </p:nvSpPr>
-        <p:spPr>
-          <a:xfrm>
-            <a:off x="6537960" y="2788920"/>
-            <a:ext cx="548640" cy="502920"/>
-          </a:xfrm>
-          <a:prstGeom prst="rect">
-            <a:avLst/>
-          </a:prstGeom>
-          <a:noFill/>
-          <a:ln/>
-        </p:spPr>
-        <p:txBody>
-          <a:bodyPr wrap="square" lIns="0" tIns="0" rIns="0" bIns="0" rtlCol="0" anchor="ctr"/>
-          <a:lstStyle/>
-          <a:p>
-            <a:pPr algn="ctr" indent="0" marL="0">
-              <a:buNone/>
-            </a:pPr>
-            <a:r>
-              <a:rPr lang="en-US" sz="900" b="1" dirty="0">
-                <a:solidFill>
-                  <a:srgbClr val="3A3F49"/>
-                </a:solidFill>
-                <a:latin typeface="Calibri" pitchFamily="34" charset="0"/>
-                <a:ea typeface="Calibri" pitchFamily="34" charset="-122"/>
-                <a:cs typeface="Calibri" pitchFamily="34" charset="-120"/>
-              </a:rPr>
-              <a:t>6</a:t>
-            </a:r>
-            <a:endParaRPr lang="en-US" sz="900" dirty="0"/>
-          </a:p>
-        </p:txBody>
-      </p:sp>
-      <p:sp>
-        <p:nvSpPr>
-          <p:cNvPr id="51" name="Shape 49"/>
-          <p:cNvSpPr/>
-          <p:nvPr/>
-        </p:nvSpPr>
-        <p:spPr>
-          <a:xfrm>
-            <a:off x="10058400" y="2148840"/>
-            <a:ext cx="1188720" cy="457200"/>
-          </a:xfrm>
-          <a:prstGeom prst="rect">
-            <a:avLst/>
-          </a:prstGeom>
-          <a:solidFill>
-            <a:srgbClr val="EDE6D7"/>
-          </a:solidFill>
-          <a:ln w="12700">
-            <a:solidFill>
-              <a:srgbClr val="B9BEC6"/>
-            </a:solidFill>
-            <a:prstDash val="solid"/>
-          </a:ln>
-        </p:spPr>
-      </p:sp>
-      <p:sp>
-        <p:nvSpPr>
-          <p:cNvPr id="52" name="Text 50"/>
-          <p:cNvSpPr/>
-          <p:nvPr/>
-        </p:nvSpPr>
-        <p:spPr>
-          <a:xfrm>
-            <a:off x="10058400" y="2148840"/>
-            <a:ext cx="1188720" cy="457200"/>
-          </a:xfrm>
-          <a:prstGeom prst="rect">
-            <a:avLst/>
-          </a:prstGeom>
-          <a:noFill/>
-          <a:ln/>
-        </p:spPr>
-        <p:txBody>
-          <a:bodyPr wrap="square" lIns="0" tIns="0" rIns="0" bIns="0" rtlCol="0" anchor="ctr"/>
-          <a:lstStyle/>
-          <a:p>
-            <a:pPr algn="ctr" indent="0" marL="0">
-              <a:buNone/>
-            </a:pPr>
-            <a:r>
-              <a:rPr lang="en-US" sz="900" b="1" dirty="0">
-                <a:solidFill>
-                  <a:srgbClr val="3A3F49"/>
-                </a:solidFill>
-                <a:latin typeface="Calibri" pitchFamily="34" charset="0"/>
-                <a:ea typeface="Calibri" pitchFamily="34" charset="-122"/>
-                <a:cs typeface="Calibri" pitchFamily="34" charset="-120"/>
-              </a:rPr>
-              <a:t>7</a:t>
-            </a:r>
-            <a:endParaRPr lang="en-US" sz="900" dirty="0"/>
-          </a:p>
-        </p:txBody>
-      </p:sp>
-      <p:sp>
-        <p:nvSpPr>
-          <p:cNvPr id="53" name="Shape 51"/>
-          <p:cNvSpPr/>
-          <p:nvPr/>
-        </p:nvSpPr>
-        <p:spPr>
-          <a:xfrm>
-            <a:off x="10058400" y="2697480"/>
-            <a:ext cx="1188720" cy="457200"/>
-          </a:xfrm>
-          <a:prstGeom prst="rect">
-            <a:avLst/>
-          </a:prstGeom>
-          <a:solidFill>
-            <a:srgbClr val="EDE6D7"/>
-          </a:solidFill>
-          <a:ln w="12700">
-            <a:solidFill>
-              <a:srgbClr val="B9BEC6"/>
-            </a:solidFill>
-            <a:prstDash val="solid"/>
-          </a:ln>
-        </p:spPr>
-      </p:sp>
-      <p:sp>
-        <p:nvSpPr>
-          <p:cNvPr id="54" name="Text 52"/>
-          <p:cNvSpPr/>
-          <p:nvPr/>
-        </p:nvSpPr>
-        <p:spPr>
-          <a:xfrm>
-            <a:off x="10058400" y="2697480"/>
-            <a:ext cx="1188720" cy="457200"/>
-          </a:xfrm>
-          <a:prstGeom prst="rect">
-            <a:avLst/>
-          </a:prstGeom>
-          <a:noFill/>
-          <a:ln/>
-        </p:spPr>
-        <p:txBody>
-          <a:bodyPr wrap="square" lIns="0" tIns="0" rIns="0" bIns="0" rtlCol="0" anchor="ctr"/>
-          <a:lstStyle/>
-          <a:p>
-            <a:pPr algn="ctr" indent="0" marL="0">
-              <a:buNone/>
-            </a:pPr>
-            <a:r>
-              <a:rPr lang="en-US" sz="900" b="1" dirty="0">
-                <a:solidFill>
-                  <a:srgbClr val="3A3F49"/>
-                </a:solidFill>
-                <a:latin typeface="Calibri" pitchFamily="34" charset="0"/>
-                <a:ea typeface="Calibri" pitchFamily="34" charset="-122"/>
-                <a:cs typeface="Calibri" pitchFamily="34" charset="-120"/>
-              </a:rPr>
-              <a:t>8</a:t>
-            </a:r>
-            <a:endParaRPr lang="en-US" sz="900" dirty="0"/>
-          </a:p>
-        </p:txBody>
-      </p:sp>
-      <p:sp>
-        <p:nvSpPr>
-          <p:cNvPr id="55" name="Shape 53"/>
-          <p:cNvSpPr/>
-          <p:nvPr/>
-        </p:nvSpPr>
-        <p:spPr>
-          <a:xfrm>
-            <a:off x="5943600" y="3566160"/>
-            <a:ext cx="411480" cy="365760"/>
-          </a:xfrm>
-          <a:prstGeom prst="rect">
-            <a:avLst/>
-          </a:prstGeom>
-          <a:solidFill>
-            <a:srgbClr val="E7E9EC"/>
-          </a:solidFill>
-          <a:ln w="12700">
-            <a:solidFill>
-              <a:srgbClr val="B9BEC6"/>
-            </a:solidFill>
-            <a:prstDash val="solid"/>
-          </a:ln>
-        </p:spPr>
-      </p:sp>
-      <p:sp>
-        <p:nvSpPr>
-          <p:cNvPr id="56" name="Shape 54"/>
-          <p:cNvSpPr/>
-          <p:nvPr/>
-        </p:nvSpPr>
-        <p:spPr>
-          <a:xfrm>
-            <a:off x="6446520" y="3566160"/>
-            <a:ext cx="411480" cy="365760"/>
-          </a:xfrm>
-          <a:prstGeom prst="rect">
-            <a:avLst/>
-          </a:prstGeom>
-          <a:solidFill>
-            <a:srgbClr val="E7E9EC"/>
-          </a:solidFill>
-          <a:ln w="12700">
-            <a:solidFill>
-              <a:srgbClr val="B9BEC6"/>
-            </a:solidFill>
-            <a:prstDash val="solid"/>
-          </a:ln>
-        </p:spPr>
-      </p:sp>
-      <p:sp>
-        <p:nvSpPr>
-          <p:cNvPr id="57" name="Text 55"/>
-          <p:cNvSpPr/>
-          <p:nvPr/>
-        </p:nvSpPr>
-        <p:spPr>
-          <a:xfrm>
-            <a:off x="5760720" y="4407408"/>
-            <a:ext cx="5760720" cy="274320"/>
-          </a:xfrm>
-          <a:prstGeom prst="rect">
-            <a:avLst/>
-          </a:prstGeom>
-          <a:noFill/>
-          <a:ln/>
-        </p:spPr>
-        <p:txBody>
-          <a:bodyPr wrap="square" lIns="0" tIns="0" rIns="0" bIns="0" rtlCol="0" anchor="ctr"/>
-          <a:lstStyle/>
-          <a:p>
-            <a:pPr algn="ctr" indent="0" marL="0">
-              <a:buNone/>
-            </a:pPr>
-            <a:r>
-              <a:rPr lang="en-US" sz="1000" i="1" dirty="0">
-                <a:solidFill>
-                  <a:srgbClr val="5B6470"/>
-                </a:solidFill>
-                <a:latin typeface="Calibri" pitchFamily="34" charset="0"/>
-                <a:ea typeface="Calibri" pitchFamily="34" charset="-122"/>
-                <a:cs typeface="Calibri" pitchFamily="34" charset="-120"/>
-              </a:rPr>
-              <a:t>estantes 3 y 4 reorganizados, no vaciados · equipos y mesas se quedan</a:t>
-            </a:r>
-            <a:endParaRPr lang="en-US" sz="1000" dirty="0"/>
-          </a:p>
-        </p:txBody>
-      </p:sp>
-      <p:sp>
-        <p:nvSpPr>
-          <p:cNvPr id="58" name="Shape 56"/>
-          <p:cNvSpPr/>
-          <p:nvPr/>
-        </p:nvSpPr>
-        <p:spPr>
-          <a:xfrm>
-            <a:off x="594360" y="4983480"/>
-            <a:ext cx="10972800" cy="1280160"/>
+          <p:cNvPr id="143" name="Shape 141"/>
+          <p:cNvSpPr/>
+          <p:nvPr/>
+        </p:nvSpPr>
+        <p:spPr>
+          <a:xfrm>
+            <a:off x="594360" y="5230368"/>
+            <a:ext cx="10972800" cy="1097280"/>
           </a:xfrm>
           <a:prstGeom prst="roundRect">
             <a:avLst>
-              <a:gd name="adj" fmla="val 6429"/>
+              <a:gd name="adj" fmla="val 7500"/>
             </a:avLst>
           </a:prstGeom>
           <a:solidFill>
@@ -6901,14 +8813,14 @@
       </p:sp>
       <p:sp>
         <p:nvSpPr>
-          <p:cNvPr id="59" name="Text 57"/>
-          <p:cNvSpPr/>
-          <p:nvPr/>
-        </p:nvSpPr>
-        <p:spPr>
-          <a:xfrm>
-            <a:off x="914400" y="5074920"/>
-            <a:ext cx="10332720" cy="320040"/>
+          <p:cNvPr id="144" name="Text 142"/>
+          <p:cNvSpPr/>
+          <p:nvPr/>
+        </p:nvSpPr>
+        <p:spPr>
+          <a:xfrm>
+            <a:off x="914400" y="5303520"/>
+            <a:ext cx="10332720" cy="274320"/>
           </a:xfrm>
           <a:prstGeom prst="rect">
             <a:avLst/>
@@ -6924,30 +8836,30 @@
               <a:buNone/>
             </a:pPr>
             <a:r>
-              <a:rPr lang="en-US" sz="1300" b="1" dirty="0">
-                <a:solidFill>
-                  <a:srgbClr val="1A1D23"/>
-                </a:solidFill>
-                <a:latin typeface="Calibri" pitchFamily="34" charset="0"/>
-                <a:ea typeface="Calibri" pitchFamily="34" charset="-122"/>
-                <a:cs typeface="Calibri" pitchFamily="34" charset="-120"/>
-              </a:rPr>
-              <a:t>Qué pide El Aula, en concreto:</a:t>
-            </a:r>
-            <a:endParaRPr lang="en-US" sz="1300" dirty="0"/>
-          </a:p>
-        </p:txBody>
-      </p:sp>
-      <p:sp>
-        <p:nvSpPr>
-          <p:cNvPr id="60" name="Text 58"/>
-          <p:cNvSpPr/>
-          <p:nvPr/>
-        </p:nvSpPr>
-        <p:spPr>
-          <a:xfrm>
-            <a:off x="914400" y="5440680"/>
-            <a:ext cx="10332720" cy="777240"/>
+              <a:rPr lang="en-US" sz="1200" b="1" dirty="0">
+                <a:solidFill>
+                  <a:srgbClr val="2FA866"/>
+                </a:solidFill>
+                <a:latin typeface="Calibri" pitchFamily="34" charset="0"/>
+                <a:ea typeface="Calibri" pitchFamily="34" charset="-122"/>
+                <a:cs typeface="Calibri" pitchFamily="34" charset="-120"/>
+              </a:rPr>
+              <a:t>✓  Mover el rack 4 además libera un área que usan los mecánicos.</a:t>
+            </a:r>
+            <a:endParaRPr lang="en-US" sz="1200" dirty="0"/>
+          </a:p>
+        </p:txBody>
+      </p:sp>
+      <p:sp>
+        <p:nvSpPr>
+          <p:cNvPr id="145" name="Text 143"/>
+          <p:cNvSpPr/>
+          <p:nvPr/>
+        </p:nvSpPr>
+        <p:spPr>
+          <a:xfrm>
+            <a:off x="914400" y="5614416"/>
+            <a:ext cx="10332720" cy="685800"/>
           </a:xfrm>
           <a:prstGeom prst="rect">
             <a:avLst/>
@@ -6961,12 +8873,12 @@
           <a:p>
             <a:pPr indent="0" marL="0">
               <a:lnSpc>
-                <a:spcPts val="1500"/>
+                <a:spcPts val="1400"/>
               </a:lnSpc>
               <a:buNone/>
             </a:pPr>
             <a:r>
-              <a:rPr lang="en-US" sz="1150" dirty="0">
+              <a:rPr lang="en-US" sz="1100" dirty="0">
                 <a:solidFill>
                   <a:srgbClr val="5B6470"/>
                 </a:solidFill>
@@ -6974,19 +8886,19 @@
                 <a:ea typeface="Calibri" pitchFamily="34" charset="-122"/>
                 <a:cs typeface="Calibri" pitchFamily="34" charset="-120"/>
               </a:rPr>
-              <a:t>•  Solo reorganizar estantes para un pasillo de 3.0 m × 6.0 m — los racks 3 y 4 siguen accesibles, no se vacían. Equipos parados y mesas se quedan donde están.</a:t>
-            </a:r>
-            <a:endParaRPr lang="en-US" sz="1150" dirty="0"/>
+              <a:t>•  Solo reorganizar estantes para el pasillo de 3.0 × 6.0 m — los racks 3 y 4 siguen accesibles, no se vacían, y todo lo sombreado (espacio en uso) y las mesas se quedan.</a:t>
+            </a:r>
+            <a:endParaRPr lang="en-US" sz="1100" dirty="0"/>
           </a:p>
           <a:p>
             <a:pPr indent="0" marL="0">
               <a:lnSpc>
-                <a:spcPts val="1500"/>
+                <a:spcPts val="1400"/>
               </a:lnSpc>
               <a:buNone/>
             </a:pPr>
             <a:r>
-              <a:rPr lang="en-US" sz="1150" dirty="0">
+              <a:rPr lang="en-US" sz="1100" dirty="0">
                 <a:solidFill>
                   <a:srgbClr val="5B6470"/>
                 </a:solidFill>
@@ -6996,7 +8908,7 @@
               </a:rPr>
               <a:t>•  Pruebas con el pantógrafo (sin uñas) + un sensor de altura simple y calibrado en las uñas — no viene en el equipo, lo necesitamos, y ya lo resolví al milímetro en Botoni.</a:t>
             </a:r>
-            <a:endParaRPr lang="en-US" sz="1150" dirty="0"/>
+            <a:endParaRPr lang="en-US" sz="1100" dirty="0"/>
           </a:p>
         </p:txBody>
       </p:sp>

--- a/presentaciones/TaTa_Estado_y_Pedido_Omar.pptx
+++ b/presentaciones/TaTa_Estado_y_Pedido_Omar.pptx
@@ -958,7 +958,7 @@
           <a:p>
             <a:r>
               <a:rPr lang="en-US" dirty="0"/>
-              <a:t>Mi orden del dibujo: actual = todo el taller, sombreado = en uso no se toca, rack 4 en area de mecanicos. Propuesta = solo el lado derecho, rack 4 movido flanquea el pasillo y libera a los mecanicos.</a:t>
+              <a:t>Se quito el plano a pedido. El Aula = reconfigurar espacio muerto (equipo no usado + racks) para un espacio 3x6, ambiente cerrado como RETHINK, y la luz inestable ayuda a la robustez.</a:t>
             </a:r>
             <a:endParaRPr lang="en-US" dirty="0"/>
           </a:p>
@@ -5207,7 +5207,7 @@
                 <a:ea typeface="Cambria" pitchFamily="34" charset="-122"/>
                 <a:cs typeface="Cambria" pitchFamily="34" charset="-120"/>
               </a:rPr>
-              <a:t>El Aula — el banco de pruebas, dentro del taller</a:t>
+              <a:t>El Aula — el banco de pruebas</a:t>
             </a:r>
             <a:endParaRPr lang="en-US" sz="3200" dirty="0"/>
           </a:p>
@@ -5246,7 +5246,7 @@
                 <a:ea typeface="Calibri" pitchFamily="34" charset="-122"/>
                 <a:cs typeface="Calibri" pitchFamily="34" charset="-120"/>
               </a:rPr>
-              <a:t>Mover el rack 4 libera espacio a los mecánicos y deja un pasillo de 3.0 × 6.0 m. Lo sombreado ya se usa y no se toca</a:t>
+              <a:t>En una etapa más adelante, dentro del taller</a:t>
             </a:r>
             <a:endParaRPr lang="en-US" sz="1350" dirty="0"/>
           </a:p>
@@ -5254,3548 +5254,18 @@
       </p:sp>
       <p:sp>
         <p:nvSpPr>
-          <p:cNvPr id="4" name="Text 2"/>
-          <p:cNvSpPr/>
-          <p:nvPr/>
-        </p:nvSpPr>
-        <p:spPr>
-          <a:xfrm>
-            <a:off x="594360" y="1554480"/>
-            <a:ext cx="6583680" cy="274320"/>
-          </a:xfrm>
-          <a:prstGeom prst="rect">
-            <a:avLst/>
-          </a:prstGeom>
-          <a:noFill/>
-          <a:ln/>
-        </p:spPr>
-        <p:txBody>
-          <a:bodyPr wrap="square" lIns="0" tIns="0" rIns="0" bIns="0" rtlCol="0" anchor="ctr"/>
-          <a:lstStyle/>
-          <a:p>
-            <a:pPr indent="0" marL="0">
-              <a:buNone/>
-            </a:pPr>
-            <a:r>
-              <a:rPr lang="en-US" sz="1250" b="1" dirty="0">
-                <a:solidFill>
-                  <a:srgbClr val="5B6470"/>
-                </a:solidFill>
-                <a:latin typeface="Calibri" pitchFamily="34" charset="0"/>
-                <a:ea typeface="Calibri" pitchFamily="34" charset="-122"/>
-                <a:cs typeface="Calibri" pitchFamily="34" charset="-120"/>
-              </a:rPr>
-              <a:t>Taller hoy</a:t>
-            </a:r>
-            <a:endParaRPr lang="en-US" sz="1250" dirty="0"/>
-          </a:p>
-        </p:txBody>
-      </p:sp>
-      <p:sp>
-        <p:nvSpPr>
-          <p:cNvPr id="5" name="Shape 3"/>
-          <p:cNvSpPr/>
-          <p:nvPr/>
-        </p:nvSpPr>
-        <p:spPr>
-          <a:xfrm>
-            <a:off x="594360" y="1828800"/>
-            <a:ext cx="6583680" cy="3246120"/>
-          </a:xfrm>
-          <a:prstGeom prst="rect">
-            <a:avLst/>
-          </a:prstGeom>
-          <a:solidFill>
-            <a:srgbClr val="FFFFFF"/>
-          </a:solidFill>
-          <a:ln w="30480">
-            <a:solidFill>
-              <a:srgbClr val="3A3F49"/>
-            </a:solidFill>
-            <a:prstDash val="solid"/>
-          </a:ln>
-        </p:spPr>
-      </p:sp>
-      <p:sp>
-        <p:nvSpPr>
-          <p:cNvPr id="6" name="Shape 4"/>
-          <p:cNvSpPr/>
-          <p:nvPr/>
-        </p:nvSpPr>
-        <p:spPr>
-          <a:xfrm>
-            <a:off x="704088" y="2240280"/>
-            <a:ext cx="2103120" cy="1051560"/>
-          </a:xfrm>
-          <a:prstGeom prst="rect">
-            <a:avLst/>
-          </a:prstGeom>
-          <a:solidFill>
-            <a:srgbClr val="DCE0D6"/>
-          </a:solidFill>
-          <a:ln w="12700">
-            <a:solidFill>
-              <a:srgbClr val="AEB4A6"/>
-            </a:solidFill>
-            <a:prstDash val="solid"/>
-          </a:ln>
-        </p:spPr>
-      </p:sp>
-      <p:sp>
-        <p:nvSpPr>
-          <p:cNvPr id="7" name="Text 5"/>
-          <p:cNvSpPr/>
-          <p:nvPr/>
-        </p:nvSpPr>
-        <p:spPr>
-          <a:xfrm>
-            <a:off x="704088" y="2240280"/>
-            <a:ext cx="2103120" cy="1051560"/>
-          </a:xfrm>
-          <a:prstGeom prst="rect">
-            <a:avLst/>
-          </a:prstGeom>
-          <a:noFill/>
-          <a:ln/>
-        </p:spPr>
-        <p:txBody>
-          <a:bodyPr wrap="square" lIns="0" tIns="0" rIns="0" bIns="0" rtlCol="0" anchor="ctr"/>
-          <a:lstStyle/>
-          <a:p>
-            <a:pPr algn="ctr" indent="0" marL="0">
-              <a:buNone/>
-            </a:pPr>
-            <a:r>
-              <a:rPr lang="en-US" sz="950" i="1" dirty="0">
-                <a:solidFill>
-                  <a:srgbClr val="6B7266"/>
-                </a:solidFill>
-                <a:latin typeface="Calibri" pitchFamily="34" charset="0"/>
-                <a:ea typeface="Calibri" pitchFamily="34" charset="-122"/>
-                <a:cs typeface="Calibri" pitchFamily="34" charset="-120"/>
-              </a:rPr>
-              <a:t>en uso</a:t>
-            </a:r>
-            <a:endParaRPr lang="en-US" sz="950" dirty="0"/>
-          </a:p>
-          <a:p>
-            <a:pPr algn="ctr" indent="0" marL="0">
-              <a:buNone/>
-            </a:pPr>
-            <a:r>
-              <a:rPr lang="en-US" sz="950" i="1" dirty="0">
-                <a:solidFill>
-                  <a:srgbClr val="6B7266"/>
-                </a:solidFill>
-                <a:latin typeface="Calibri" pitchFamily="34" charset="0"/>
-                <a:ea typeface="Calibri" pitchFamily="34" charset="-122"/>
-                <a:cs typeface="Calibri" pitchFamily="34" charset="-120"/>
-              </a:rPr>
-              <a:t>no se toca</a:t>
-            </a:r>
-            <a:endParaRPr lang="en-US" sz="950" dirty="0"/>
-          </a:p>
-        </p:txBody>
-      </p:sp>
-      <p:sp>
-        <p:nvSpPr>
-          <p:cNvPr id="8" name="Shape 6"/>
-          <p:cNvSpPr/>
-          <p:nvPr/>
-        </p:nvSpPr>
-        <p:spPr>
-          <a:xfrm>
-            <a:off x="704088" y="3520440"/>
-            <a:ext cx="1920240" cy="1325880"/>
-          </a:xfrm>
-          <a:prstGeom prst="rect">
-            <a:avLst/>
-          </a:prstGeom>
-          <a:solidFill>
-            <a:srgbClr val="DCE0D6"/>
-          </a:solidFill>
-          <a:ln w="12700">
-            <a:solidFill>
-              <a:srgbClr val="AEB4A6"/>
-            </a:solidFill>
-            <a:prstDash val="solid"/>
-          </a:ln>
-        </p:spPr>
-      </p:sp>
-      <p:sp>
-        <p:nvSpPr>
-          <p:cNvPr id="9" name="Text 7"/>
-          <p:cNvSpPr/>
-          <p:nvPr/>
-        </p:nvSpPr>
-        <p:spPr>
-          <a:xfrm>
-            <a:off x="704088" y="3520440"/>
-            <a:ext cx="1920240" cy="1325880"/>
-          </a:xfrm>
-          <a:prstGeom prst="rect">
-            <a:avLst/>
-          </a:prstGeom>
-          <a:noFill/>
-          <a:ln/>
-        </p:spPr>
-        <p:txBody>
-          <a:bodyPr wrap="square" lIns="0" tIns="0" rIns="0" bIns="0" rtlCol="0" anchor="ctr"/>
-          <a:lstStyle/>
-          <a:p>
-            <a:pPr algn="ctr" indent="0" marL="0">
-              <a:buNone/>
-            </a:pPr>
-            <a:r>
-              <a:rPr lang="en-US" sz="950" i="1" dirty="0">
-                <a:solidFill>
-                  <a:srgbClr val="6B7266"/>
-                </a:solidFill>
-                <a:latin typeface="Calibri" pitchFamily="34" charset="0"/>
-                <a:ea typeface="Calibri" pitchFamily="34" charset="-122"/>
-                <a:cs typeface="Calibri" pitchFamily="34" charset="-120"/>
-              </a:rPr>
-              <a:t>en uso</a:t>
-            </a:r>
-            <a:endParaRPr lang="en-US" sz="950" dirty="0"/>
-          </a:p>
-          <a:p>
-            <a:pPr algn="ctr" indent="0" marL="0">
-              <a:buNone/>
-            </a:pPr>
-            <a:r>
-              <a:rPr lang="en-US" sz="950" i="1" dirty="0">
-                <a:solidFill>
-                  <a:srgbClr val="6B7266"/>
-                </a:solidFill>
-                <a:latin typeface="Calibri" pitchFamily="34" charset="0"/>
-                <a:ea typeface="Calibri" pitchFamily="34" charset="-122"/>
-                <a:cs typeface="Calibri" pitchFamily="34" charset="-120"/>
-              </a:rPr>
-              <a:t>no se toca</a:t>
-            </a:r>
-            <a:endParaRPr lang="en-US" sz="950" dirty="0"/>
-          </a:p>
-        </p:txBody>
-      </p:sp>
-      <p:sp>
-        <p:nvSpPr>
-          <p:cNvPr id="10" name="Shape 8"/>
-          <p:cNvSpPr/>
-          <p:nvPr/>
-        </p:nvSpPr>
-        <p:spPr>
-          <a:xfrm>
-            <a:off x="2880360" y="4370832"/>
-            <a:ext cx="1188720" cy="603504"/>
-          </a:xfrm>
-          <a:prstGeom prst="rect">
-            <a:avLst/>
-          </a:prstGeom>
-          <a:solidFill>
-            <a:srgbClr val="E7DCC8"/>
-          </a:solidFill>
-          <a:ln w="12700">
-            <a:solidFill>
-              <a:srgbClr val="C9B88E"/>
-            </a:solidFill>
-            <a:prstDash val="solid"/>
-          </a:ln>
-        </p:spPr>
-      </p:sp>
-      <p:sp>
-        <p:nvSpPr>
-          <p:cNvPr id="11" name="Text 9"/>
-          <p:cNvSpPr/>
-          <p:nvPr/>
-        </p:nvSpPr>
-        <p:spPr>
-          <a:xfrm>
-            <a:off x="2880360" y="4370832"/>
-            <a:ext cx="1188720" cy="603504"/>
-          </a:xfrm>
-          <a:prstGeom prst="rect">
-            <a:avLst/>
-          </a:prstGeom>
-          <a:noFill/>
-          <a:ln/>
-        </p:spPr>
-        <p:txBody>
-          <a:bodyPr wrap="square" lIns="0" tIns="0" rIns="0" bIns="0" rtlCol="0" anchor="ctr"/>
-          <a:lstStyle/>
-          <a:p>
-            <a:pPr algn="ctr" indent="0" marL="0">
-              <a:buNone/>
-            </a:pPr>
-            <a:r>
-              <a:rPr lang="en-US" sz="850" b="1" dirty="0">
-                <a:solidFill>
-                  <a:srgbClr val="8A6D16"/>
-                </a:solidFill>
-                <a:latin typeface="Calibri" pitchFamily="34" charset="0"/>
-                <a:ea typeface="Calibri" pitchFamily="34" charset="-122"/>
-                <a:cs typeface="Calibri" pitchFamily="34" charset="-120"/>
-              </a:rPr>
-              <a:t>rampa / portón</a:t>
-            </a:r>
-            <a:endParaRPr lang="en-US" sz="850" dirty="0"/>
-          </a:p>
-        </p:txBody>
-      </p:sp>
-      <p:sp>
-        <p:nvSpPr>
-          <p:cNvPr id="12" name="Shape 10"/>
-          <p:cNvSpPr/>
-          <p:nvPr/>
-        </p:nvSpPr>
-        <p:spPr>
-          <a:xfrm>
-            <a:off x="5349240" y="2066544"/>
-            <a:ext cx="274320" cy="274320"/>
-          </a:xfrm>
-          <a:prstGeom prst="rect">
-            <a:avLst/>
-          </a:prstGeom>
-          <a:solidFill>
-            <a:srgbClr val="E7E9EC"/>
-          </a:solidFill>
-          <a:ln w="12700">
-            <a:solidFill>
-              <a:srgbClr val="C8CCD2"/>
-            </a:solidFill>
-            <a:prstDash val="solid"/>
-          </a:ln>
-        </p:spPr>
-      </p:sp>
-      <p:sp>
-        <p:nvSpPr>
-          <p:cNvPr id="13" name="Shape 11"/>
-          <p:cNvSpPr/>
-          <p:nvPr/>
-        </p:nvSpPr>
-        <p:spPr>
-          <a:xfrm>
-            <a:off x="5678424" y="2066544"/>
-            <a:ext cx="274320" cy="274320"/>
-          </a:xfrm>
-          <a:prstGeom prst="rect">
-            <a:avLst/>
-          </a:prstGeom>
-          <a:solidFill>
-            <a:srgbClr val="E7E9EC"/>
-          </a:solidFill>
-          <a:ln w="12700">
-            <a:solidFill>
-              <a:srgbClr val="C8CCD2"/>
-            </a:solidFill>
-            <a:prstDash val="solid"/>
-          </a:ln>
-        </p:spPr>
-      </p:sp>
-      <p:sp>
-        <p:nvSpPr>
-          <p:cNvPr id="14" name="Shape 12"/>
-          <p:cNvSpPr/>
-          <p:nvPr/>
-        </p:nvSpPr>
-        <p:spPr>
-          <a:xfrm>
-            <a:off x="6007608" y="2066544"/>
-            <a:ext cx="274320" cy="274320"/>
-          </a:xfrm>
-          <a:prstGeom prst="rect">
-            <a:avLst/>
-          </a:prstGeom>
-          <a:solidFill>
-            <a:srgbClr val="E7E9EC"/>
-          </a:solidFill>
-          <a:ln w="12700">
-            <a:solidFill>
-              <a:srgbClr val="C8CCD2"/>
-            </a:solidFill>
-            <a:prstDash val="solid"/>
-          </a:ln>
-        </p:spPr>
-      </p:sp>
-      <p:sp>
-        <p:nvSpPr>
-          <p:cNvPr id="15" name="Shape 13"/>
-          <p:cNvSpPr/>
-          <p:nvPr/>
-        </p:nvSpPr>
-        <p:spPr>
-          <a:xfrm>
-            <a:off x="4389120" y="2487168"/>
-            <a:ext cx="777240" cy="438912"/>
+          <p:cNvPr id="4" name="Shape 2"/>
+          <p:cNvSpPr/>
+          <p:nvPr/>
+        </p:nvSpPr>
+        <p:spPr>
+          <a:xfrm>
+            <a:off x="594360" y="1783080"/>
+            <a:ext cx="10972800" cy="1188720"/>
           </a:xfrm>
           <a:prstGeom prst="roundRect">
             <a:avLst>
-              <a:gd name="adj" fmla="val 10417"/>
-            </a:avLst>
-          </a:prstGeom>
-          <a:solidFill>
-            <a:srgbClr val="E4E7DF"/>
-          </a:solidFill>
-          <a:ln w="13970">
-            <a:solidFill>
-              <a:srgbClr val="566270"/>
-            </a:solidFill>
-            <a:prstDash val="solid"/>
-          </a:ln>
-        </p:spPr>
-      </p:sp>
-      <p:sp>
-        <p:nvSpPr>
-          <p:cNvPr id="16" name="Shape 14"/>
-          <p:cNvSpPr/>
-          <p:nvPr/>
-        </p:nvSpPr>
-        <p:spPr>
-          <a:xfrm>
-            <a:off x="4617171" y="2176272"/>
-            <a:ext cx="64008" cy="310896"/>
-          </a:xfrm>
-          <a:prstGeom prst="rect">
-            <a:avLst/>
-          </a:prstGeom>
-          <a:solidFill>
-            <a:srgbClr val="566270"/>
-          </a:solidFill>
-          <a:ln/>
-        </p:spPr>
-      </p:sp>
-      <p:sp>
-        <p:nvSpPr>
-          <p:cNvPr id="17" name="Shape 15"/>
-          <p:cNvSpPr/>
-          <p:nvPr/>
-        </p:nvSpPr>
-        <p:spPr>
-          <a:xfrm>
-            <a:off x="4874301" y="2176272"/>
-            <a:ext cx="64008" cy="310896"/>
-          </a:xfrm>
-          <a:prstGeom prst="rect">
-            <a:avLst/>
-          </a:prstGeom>
-          <a:solidFill>
-            <a:srgbClr val="566270"/>
-          </a:solidFill>
-          <a:ln/>
-        </p:spPr>
-      </p:sp>
-      <p:sp>
-        <p:nvSpPr>
-          <p:cNvPr id="18" name="Shape 16"/>
-          <p:cNvSpPr/>
-          <p:nvPr/>
-        </p:nvSpPr>
-        <p:spPr>
-          <a:xfrm>
-            <a:off x="4617171" y="2441448"/>
-            <a:ext cx="321137" cy="45720"/>
-          </a:xfrm>
-          <a:prstGeom prst="rect">
-            <a:avLst/>
-          </a:prstGeom>
-          <a:solidFill>
-            <a:srgbClr val="566270"/>
-          </a:solidFill>
-          <a:ln/>
-        </p:spPr>
-      </p:sp>
-      <p:sp>
-        <p:nvSpPr>
-          <p:cNvPr id="19" name="Text 17"/>
-          <p:cNvSpPr/>
-          <p:nvPr/>
-        </p:nvSpPr>
-        <p:spPr>
-          <a:xfrm>
-            <a:off x="4389120" y="2487168"/>
-            <a:ext cx="777240" cy="438912"/>
-          </a:xfrm>
-          <a:prstGeom prst="rect">
-            <a:avLst/>
-          </a:prstGeom>
-          <a:noFill/>
-          <a:ln/>
-        </p:spPr>
-        <p:txBody>
-          <a:bodyPr wrap="square" lIns="0" tIns="0" rIns="0" bIns="0" rtlCol="0" anchor="ctr"/>
-          <a:lstStyle/>
-          <a:p>
-            <a:pPr algn="ctr" indent="0" marL="0">
-              <a:buNone/>
-            </a:pPr>
-            <a:r>
-              <a:rPr lang="en-US" sz="900" b="1" dirty="0">
-                <a:solidFill>
-                  <a:srgbClr val="2A2F39"/>
-                </a:solidFill>
-                <a:latin typeface="Calibri" pitchFamily="34" charset="0"/>
-                <a:ea typeface="Calibri" pitchFamily="34" charset="-122"/>
-                <a:cs typeface="Calibri" pitchFamily="34" charset="-120"/>
-              </a:rPr>
-              <a:t>5</a:t>
-            </a:r>
-            <a:endParaRPr lang="en-US" sz="900" dirty="0"/>
-          </a:p>
-        </p:txBody>
-      </p:sp>
-      <p:sp>
-        <p:nvSpPr>
-          <p:cNvPr id="20" name="Shape 18"/>
-          <p:cNvSpPr/>
-          <p:nvPr/>
-        </p:nvSpPr>
-        <p:spPr>
-          <a:xfrm>
-            <a:off x="5394960" y="2505456"/>
-            <a:ext cx="694944" cy="438912"/>
-          </a:xfrm>
-          <a:prstGeom prst="roundRect">
-            <a:avLst>
-              <a:gd name="adj" fmla="val 10417"/>
-            </a:avLst>
-          </a:prstGeom>
-          <a:solidFill>
-            <a:srgbClr val="E4E7DF"/>
-          </a:solidFill>
-          <a:ln w="13970">
-            <a:solidFill>
-              <a:srgbClr val="566270"/>
-            </a:solidFill>
-            <a:prstDash val="solid"/>
-          </a:ln>
-        </p:spPr>
-      </p:sp>
-      <p:sp>
-        <p:nvSpPr>
-          <p:cNvPr id="21" name="Shape 19"/>
-          <p:cNvSpPr/>
-          <p:nvPr/>
-        </p:nvSpPr>
-        <p:spPr>
-          <a:xfrm>
-            <a:off x="5581863" y="2194560"/>
-            <a:ext cx="64008" cy="310896"/>
-          </a:xfrm>
-          <a:prstGeom prst="rect">
-            <a:avLst/>
-          </a:prstGeom>
-          <a:solidFill>
-            <a:srgbClr val="566270"/>
-          </a:solidFill>
-          <a:ln/>
-        </p:spPr>
-      </p:sp>
-      <p:sp>
-        <p:nvSpPr>
-          <p:cNvPr id="22" name="Shape 20"/>
-          <p:cNvSpPr/>
-          <p:nvPr/>
-        </p:nvSpPr>
-        <p:spPr>
-          <a:xfrm>
-            <a:off x="5838993" y="2194560"/>
-            <a:ext cx="64008" cy="310896"/>
-          </a:xfrm>
-          <a:prstGeom prst="rect">
-            <a:avLst/>
-          </a:prstGeom>
-          <a:solidFill>
-            <a:srgbClr val="566270"/>
-          </a:solidFill>
-          <a:ln/>
-        </p:spPr>
-      </p:sp>
-      <p:sp>
-        <p:nvSpPr>
-          <p:cNvPr id="23" name="Shape 21"/>
-          <p:cNvSpPr/>
-          <p:nvPr/>
-        </p:nvSpPr>
-        <p:spPr>
-          <a:xfrm>
-            <a:off x="5581863" y="2459736"/>
-            <a:ext cx="321137" cy="45720"/>
-          </a:xfrm>
-          <a:prstGeom prst="rect">
-            <a:avLst/>
-          </a:prstGeom>
-          <a:solidFill>
-            <a:srgbClr val="566270"/>
-          </a:solidFill>
-          <a:ln/>
-        </p:spPr>
-      </p:sp>
-      <p:sp>
-        <p:nvSpPr>
-          <p:cNvPr id="24" name="Text 22"/>
-          <p:cNvSpPr/>
-          <p:nvPr/>
-        </p:nvSpPr>
-        <p:spPr>
-          <a:xfrm>
-            <a:off x="5394960" y="2505456"/>
-            <a:ext cx="694944" cy="438912"/>
-          </a:xfrm>
-          <a:prstGeom prst="rect">
-            <a:avLst/>
-          </a:prstGeom>
-          <a:noFill/>
-          <a:ln/>
-        </p:spPr>
-        <p:txBody>
-          <a:bodyPr wrap="square" lIns="0" tIns="0" rIns="0" bIns="0" rtlCol="0" anchor="ctr"/>
-          <a:lstStyle/>
-          <a:p>
-            <a:pPr algn="ctr" indent="0" marL="0">
-              <a:buNone/>
-            </a:pPr>
-            <a:r>
-              <a:rPr lang="en-US" sz="900" b="1" dirty="0">
-                <a:solidFill>
-                  <a:srgbClr val="2A2F39"/>
-                </a:solidFill>
-                <a:latin typeface="Calibri" pitchFamily="34" charset="0"/>
-                <a:ea typeface="Calibri" pitchFamily="34" charset="-122"/>
-                <a:cs typeface="Calibri" pitchFamily="34" charset="-120"/>
-              </a:rPr>
-              <a:t>6</a:t>
-            </a:r>
-            <a:endParaRPr lang="en-US" sz="900" dirty="0"/>
-          </a:p>
-        </p:txBody>
-      </p:sp>
-      <p:sp>
-        <p:nvSpPr>
-          <p:cNvPr id="25" name="Shape 23"/>
-          <p:cNvSpPr/>
-          <p:nvPr/>
-        </p:nvSpPr>
-        <p:spPr>
-          <a:xfrm>
-            <a:off x="6336792" y="2212848"/>
-            <a:ext cx="621792" cy="365760"/>
-          </a:xfrm>
-          <a:prstGeom prst="roundRect">
-            <a:avLst>
-              <a:gd name="adj" fmla="val 12500"/>
-            </a:avLst>
-          </a:prstGeom>
-          <a:solidFill>
-            <a:srgbClr val="E4E7DF"/>
-          </a:solidFill>
-          <a:ln w="13970">
-            <a:solidFill>
-              <a:srgbClr val="566270"/>
-            </a:solidFill>
-            <a:prstDash val="solid"/>
-          </a:ln>
-        </p:spPr>
-      </p:sp>
-      <p:sp>
-        <p:nvSpPr>
-          <p:cNvPr id="26" name="Shape 24"/>
-          <p:cNvSpPr/>
-          <p:nvPr/>
-        </p:nvSpPr>
-        <p:spPr>
-          <a:xfrm>
-            <a:off x="6025896" y="2251253"/>
-            <a:ext cx="310896" cy="64008"/>
-          </a:xfrm>
-          <a:prstGeom prst="rect">
-            <a:avLst/>
-          </a:prstGeom>
-          <a:solidFill>
-            <a:srgbClr val="566270"/>
-          </a:solidFill>
-          <a:ln/>
-        </p:spPr>
-      </p:sp>
-      <p:sp>
-        <p:nvSpPr>
-          <p:cNvPr id="27" name="Shape 25"/>
-          <p:cNvSpPr/>
-          <p:nvPr/>
-        </p:nvSpPr>
-        <p:spPr>
-          <a:xfrm>
-            <a:off x="6025896" y="2476195"/>
-            <a:ext cx="310896" cy="64008"/>
-          </a:xfrm>
-          <a:prstGeom prst="rect">
-            <a:avLst/>
-          </a:prstGeom>
-          <a:solidFill>
-            <a:srgbClr val="566270"/>
-          </a:solidFill>
-          <a:ln/>
-        </p:spPr>
-      </p:sp>
-      <p:sp>
-        <p:nvSpPr>
-          <p:cNvPr id="28" name="Text 26"/>
-          <p:cNvSpPr/>
-          <p:nvPr/>
-        </p:nvSpPr>
-        <p:spPr>
-          <a:xfrm>
-            <a:off x="6336792" y="2212848"/>
-            <a:ext cx="621792" cy="365760"/>
-          </a:xfrm>
-          <a:prstGeom prst="rect">
-            <a:avLst/>
-          </a:prstGeom>
-          <a:noFill/>
-          <a:ln/>
-        </p:spPr>
-        <p:txBody>
-          <a:bodyPr wrap="square" lIns="0" tIns="0" rIns="0" bIns="0" rtlCol="0" anchor="ctr"/>
-          <a:lstStyle/>
-          <a:p>
-            <a:pPr algn="ctr" indent="0" marL="0">
-              <a:buNone/>
-            </a:pPr>
-            <a:r>
-              <a:rPr lang="en-US" sz="900" b="1" dirty="0">
-                <a:solidFill>
-                  <a:srgbClr val="2A2F39"/>
-                </a:solidFill>
-                <a:latin typeface="Calibri" pitchFamily="34" charset="0"/>
-                <a:ea typeface="Calibri" pitchFamily="34" charset="-122"/>
-                <a:cs typeface="Calibri" pitchFamily="34" charset="-120"/>
-              </a:rPr>
-              <a:t>2</a:t>
-            </a:r>
-            <a:endParaRPr lang="en-US" sz="900" dirty="0"/>
-          </a:p>
-        </p:txBody>
-      </p:sp>
-      <p:sp>
-        <p:nvSpPr>
-          <p:cNvPr id="29" name="Shape 27"/>
-          <p:cNvSpPr/>
-          <p:nvPr/>
-        </p:nvSpPr>
-        <p:spPr>
-          <a:xfrm>
-            <a:off x="6336792" y="3108960"/>
-            <a:ext cx="658368" cy="365760"/>
-          </a:xfrm>
-          <a:prstGeom prst="roundRect">
-            <a:avLst>
-              <a:gd name="adj" fmla="val 12500"/>
-            </a:avLst>
-          </a:prstGeom>
-          <a:solidFill>
-            <a:srgbClr val="CDE9F7"/>
-          </a:solidFill>
-          <a:ln w="13970">
-            <a:solidFill>
-              <a:srgbClr val="566270"/>
-            </a:solidFill>
-            <a:prstDash val="solid"/>
-          </a:ln>
-        </p:spPr>
-      </p:sp>
-      <p:sp>
-        <p:nvSpPr>
-          <p:cNvPr id="30" name="Shape 28"/>
-          <p:cNvSpPr/>
-          <p:nvPr/>
-        </p:nvSpPr>
-        <p:spPr>
-          <a:xfrm>
-            <a:off x="6025896" y="3147365"/>
-            <a:ext cx="310896" cy="64008"/>
-          </a:xfrm>
-          <a:prstGeom prst="rect">
-            <a:avLst/>
-          </a:prstGeom>
-          <a:solidFill>
-            <a:srgbClr val="566270"/>
-          </a:solidFill>
-          <a:ln/>
-        </p:spPr>
-      </p:sp>
-      <p:sp>
-        <p:nvSpPr>
-          <p:cNvPr id="31" name="Shape 29"/>
-          <p:cNvSpPr/>
-          <p:nvPr/>
-        </p:nvSpPr>
-        <p:spPr>
-          <a:xfrm>
-            <a:off x="6025896" y="3372307"/>
-            <a:ext cx="310896" cy="64008"/>
-          </a:xfrm>
-          <a:prstGeom prst="rect">
-            <a:avLst/>
-          </a:prstGeom>
-          <a:solidFill>
-            <a:srgbClr val="566270"/>
-          </a:solidFill>
-          <a:ln/>
-        </p:spPr>
-      </p:sp>
-      <p:sp>
-        <p:nvSpPr>
-          <p:cNvPr id="32" name="Text 30"/>
-          <p:cNvSpPr/>
-          <p:nvPr/>
-        </p:nvSpPr>
-        <p:spPr>
-          <a:xfrm>
-            <a:off x="6336792" y="3108960"/>
-            <a:ext cx="658368" cy="365760"/>
-          </a:xfrm>
-          <a:prstGeom prst="rect">
-            <a:avLst/>
-          </a:prstGeom>
-          <a:noFill/>
-          <a:ln/>
-        </p:spPr>
-        <p:txBody>
-          <a:bodyPr wrap="square" lIns="0" tIns="0" rIns="0" bIns="0" rtlCol="0" anchor="ctr"/>
-          <a:lstStyle/>
-          <a:p>
-            <a:pPr algn="ctr" indent="0" marL="0">
-              <a:buNone/>
-            </a:pPr>
-            <a:r>
-              <a:rPr lang="en-US" sz="900" b="1" dirty="0">
-                <a:solidFill>
-                  <a:srgbClr val="2A2F39"/>
-                </a:solidFill>
-                <a:latin typeface="Calibri" pitchFamily="34" charset="0"/>
-                <a:ea typeface="Calibri" pitchFamily="34" charset="-122"/>
-                <a:cs typeface="Calibri" pitchFamily="34" charset="-120"/>
-              </a:rPr>
-              <a:t>1</a:t>
-            </a:r>
-            <a:endParaRPr lang="en-US" sz="900" dirty="0"/>
-          </a:p>
-        </p:txBody>
-      </p:sp>
-      <p:sp>
-        <p:nvSpPr>
-          <p:cNvPr id="33" name="Shape 31"/>
-          <p:cNvSpPr/>
-          <p:nvPr/>
-        </p:nvSpPr>
-        <p:spPr>
-          <a:xfrm>
-            <a:off x="4480560" y="3246120"/>
-            <a:ext cx="640080" cy="365760"/>
-          </a:xfrm>
-          <a:prstGeom prst="rect">
-            <a:avLst/>
-          </a:prstGeom>
-          <a:solidFill>
-            <a:srgbClr val="EDE6D7"/>
-          </a:solidFill>
-          <a:ln w="12700">
-            <a:solidFill>
-              <a:srgbClr val="B9BEC6"/>
-            </a:solidFill>
-            <a:prstDash val="solid"/>
-          </a:ln>
-        </p:spPr>
-      </p:sp>
-      <p:sp>
-        <p:nvSpPr>
-          <p:cNvPr id="34" name="Text 32"/>
-          <p:cNvSpPr/>
-          <p:nvPr/>
-        </p:nvSpPr>
-        <p:spPr>
-          <a:xfrm>
-            <a:off x="4480560" y="3246120"/>
-            <a:ext cx="640080" cy="365760"/>
-          </a:xfrm>
-          <a:prstGeom prst="rect">
-            <a:avLst/>
-          </a:prstGeom>
-          <a:noFill/>
-          <a:ln/>
-        </p:spPr>
-        <p:txBody>
-          <a:bodyPr wrap="square" lIns="0" tIns="0" rIns="0" bIns="0" rtlCol="0" anchor="ctr"/>
-          <a:lstStyle/>
-          <a:p>
-            <a:pPr algn="ctr" indent="0" marL="0">
-              <a:buNone/>
-            </a:pPr>
-            <a:r>
-              <a:rPr lang="en-US" sz="900" b="1" dirty="0">
-                <a:solidFill>
-                  <a:srgbClr val="3A3F49"/>
-                </a:solidFill>
-                <a:latin typeface="Calibri" pitchFamily="34" charset="0"/>
-                <a:ea typeface="Calibri" pitchFamily="34" charset="-122"/>
-                <a:cs typeface="Calibri" pitchFamily="34" charset="-120"/>
-              </a:rPr>
-              <a:t>7</a:t>
-            </a:r>
-            <a:endParaRPr lang="en-US" sz="900" dirty="0"/>
-          </a:p>
-        </p:txBody>
-      </p:sp>
-      <p:sp>
-        <p:nvSpPr>
-          <p:cNvPr id="35" name="Shape 33"/>
-          <p:cNvSpPr/>
-          <p:nvPr/>
-        </p:nvSpPr>
-        <p:spPr>
-          <a:xfrm>
-            <a:off x="5349240" y="3246120"/>
-            <a:ext cx="640080" cy="365760"/>
-          </a:xfrm>
-          <a:prstGeom prst="rect">
-            <a:avLst/>
-          </a:prstGeom>
-          <a:solidFill>
-            <a:srgbClr val="EDE6D7"/>
-          </a:solidFill>
-          <a:ln w="12700">
-            <a:solidFill>
-              <a:srgbClr val="B9BEC6"/>
-            </a:solidFill>
-            <a:prstDash val="solid"/>
-          </a:ln>
-        </p:spPr>
-      </p:sp>
-      <p:sp>
-        <p:nvSpPr>
-          <p:cNvPr id="36" name="Text 34"/>
-          <p:cNvSpPr/>
-          <p:nvPr/>
-        </p:nvSpPr>
-        <p:spPr>
-          <a:xfrm>
-            <a:off x="5349240" y="3246120"/>
-            <a:ext cx="640080" cy="365760"/>
-          </a:xfrm>
-          <a:prstGeom prst="rect">
-            <a:avLst/>
-          </a:prstGeom>
-          <a:noFill/>
-          <a:ln/>
-        </p:spPr>
-        <p:txBody>
-          <a:bodyPr wrap="square" lIns="0" tIns="0" rIns="0" bIns="0" rtlCol="0" anchor="ctr"/>
-          <a:lstStyle/>
-          <a:p>
-            <a:pPr algn="ctr" indent="0" marL="0">
-              <a:buNone/>
-            </a:pPr>
-            <a:r>
-              <a:rPr lang="en-US" sz="900" b="1" dirty="0">
-                <a:solidFill>
-                  <a:srgbClr val="3A3F49"/>
-                </a:solidFill>
-                <a:latin typeface="Calibri" pitchFamily="34" charset="0"/>
-                <a:ea typeface="Calibri" pitchFamily="34" charset="-122"/>
-                <a:cs typeface="Calibri" pitchFamily="34" charset="-120"/>
-              </a:rPr>
-              <a:t>8</a:t>
-            </a:r>
-            <a:endParaRPr lang="en-US" sz="900" dirty="0"/>
-          </a:p>
-        </p:txBody>
-      </p:sp>
-      <p:sp>
-        <p:nvSpPr>
-          <p:cNvPr id="37" name="Shape 35"/>
-          <p:cNvSpPr/>
-          <p:nvPr/>
-        </p:nvSpPr>
-        <p:spPr>
-          <a:xfrm>
-            <a:off x="6611112" y="3749040"/>
-            <a:ext cx="438912" cy="1143000"/>
-          </a:xfrm>
-          <a:prstGeom prst="rect">
-            <a:avLst/>
-          </a:prstGeom>
-          <a:solidFill>
-            <a:srgbClr val="DCE0E6"/>
-          </a:solidFill>
-          <a:ln w="16510">
-            <a:solidFill>
-              <a:srgbClr val="8A93A0"/>
-            </a:solidFill>
-            <a:prstDash val="solid"/>
-          </a:ln>
-        </p:spPr>
-      </p:sp>
-      <p:sp>
-        <p:nvSpPr>
-          <p:cNvPr id="38" name="Shape 36"/>
-          <p:cNvSpPr/>
-          <p:nvPr/>
-        </p:nvSpPr>
-        <p:spPr>
-          <a:xfrm>
-            <a:off x="6611112" y="3939540"/>
-            <a:ext cx="438912" cy="0"/>
-          </a:xfrm>
-          <a:prstGeom prst="line">
-            <a:avLst/>
-          </a:prstGeom>
-          <a:noFill/>
-          <a:ln w="10160">
-            <a:solidFill>
-              <a:srgbClr val="9AA3B0"/>
-            </a:solidFill>
-            <a:prstDash val="solid"/>
-          </a:ln>
-        </p:spPr>
-      </p:sp>
-      <p:sp>
-        <p:nvSpPr>
-          <p:cNvPr id="39" name="Shape 37"/>
-          <p:cNvSpPr/>
-          <p:nvPr/>
-        </p:nvSpPr>
-        <p:spPr>
-          <a:xfrm>
-            <a:off x="6611112" y="4130040"/>
-            <a:ext cx="438912" cy="0"/>
-          </a:xfrm>
-          <a:prstGeom prst="line">
-            <a:avLst/>
-          </a:prstGeom>
-          <a:noFill/>
-          <a:ln w="10160">
-            <a:solidFill>
-              <a:srgbClr val="9AA3B0"/>
-            </a:solidFill>
-            <a:prstDash val="solid"/>
-          </a:ln>
-        </p:spPr>
-      </p:sp>
-      <p:sp>
-        <p:nvSpPr>
-          <p:cNvPr id="40" name="Shape 38"/>
-          <p:cNvSpPr/>
-          <p:nvPr/>
-        </p:nvSpPr>
-        <p:spPr>
-          <a:xfrm>
-            <a:off x="6611112" y="4320540"/>
-            <a:ext cx="438912" cy="0"/>
-          </a:xfrm>
-          <a:prstGeom prst="line">
-            <a:avLst/>
-          </a:prstGeom>
-          <a:noFill/>
-          <a:ln w="10160">
-            <a:solidFill>
-              <a:srgbClr val="9AA3B0"/>
-            </a:solidFill>
-            <a:prstDash val="solid"/>
-          </a:ln>
-        </p:spPr>
-      </p:sp>
-      <p:sp>
-        <p:nvSpPr>
-          <p:cNvPr id="41" name="Shape 39"/>
-          <p:cNvSpPr/>
-          <p:nvPr/>
-        </p:nvSpPr>
-        <p:spPr>
-          <a:xfrm>
-            <a:off x="6611112" y="4511040"/>
-            <a:ext cx="438912" cy="0"/>
-          </a:xfrm>
-          <a:prstGeom prst="line">
-            <a:avLst/>
-          </a:prstGeom>
-          <a:noFill/>
-          <a:ln w="10160">
-            <a:solidFill>
-              <a:srgbClr val="9AA3B0"/>
-            </a:solidFill>
-            <a:prstDash val="solid"/>
-          </a:ln>
-        </p:spPr>
-      </p:sp>
-      <p:sp>
-        <p:nvSpPr>
-          <p:cNvPr id="42" name="Shape 40"/>
-          <p:cNvSpPr/>
-          <p:nvPr/>
-        </p:nvSpPr>
-        <p:spPr>
-          <a:xfrm>
-            <a:off x="6611112" y="4701540"/>
-            <a:ext cx="438912" cy="0"/>
-          </a:xfrm>
-          <a:prstGeom prst="line">
-            <a:avLst/>
-          </a:prstGeom>
-          <a:noFill/>
-          <a:ln w="10160">
-            <a:solidFill>
-              <a:srgbClr val="9AA3B0"/>
-            </a:solidFill>
-            <a:prstDash val="solid"/>
-          </a:ln>
-        </p:spPr>
-      </p:sp>
-      <p:sp>
-        <p:nvSpPr>
-          <p:cNvPr id="43" name="Shape 41"/>
-          <p:cNvSpPr/>
-          <p:nvPr/>
-        </p:nvSpPr>
-        <p:spPr>
-          <a:xfrm>
-            <a:off x="6675120" y="3803904"/>
-            <a:ext cx="310896" cy="80772"/>
-          </a:xfrm>
-          <a:prstGeom prst="rect">
-            <a:avLst/>
-          </a:prstGeom>
-          <a:solidFill>
-            <a:srgbClr val="CFC2A0"/>
-          </a:solidFill>
-          <a:ln w="5080">
-            <a:solidFill>
-              <a:srgbClr val="AC9E78"/>
-            </a:solidFill>
-            <a:prstDash val="solid"/>
-          </a:ln>
-        </p:spPr>
-      </p:sp>
-      <p:sp>
-        <p:nvSpPr>
-          <p:cNvPr id="44" name="Shape 42"/>
-          <p:cNvSpPr/>
-          <p:nvPr/>
-        </p:nvSpPr>
-        <p:spPr>
-          <a:xfrm>
-            <a:off x="6675120" y="4184904"/>
-            <a:ext cx="310896" cy="80772"/>
-          </a:xfrm>
-          <a:prstGeom prst="rect">
-            <a:avLst/>
-          </a:prstGeom>
-          <a:solidFill>
-            <a:srgbClr val="CFC2A0"/>
-          </a:solidFill>
-          <a:ln w="5080">
-            <a:solidFill>
-              <a:srgbClr val="AC9E78"/>
-            </a:solidFill>
-            <a:prstDash val="solid"/>
-          </a:ln>
-        </p:spPr>
-      </p:sp>
-      <p:sp>
-        <p:nvSpPr>
-          <p:cNvPr id="45" name="Shape 43"/>
-          <p:cNvSpPr/>
-          <p:nvPr/>
-        </p:nvSpPr>
-        <p:spPr>
-          <a:xfrm>
-            <a:off x="6675120" y="4565904"/>
-            <a:ext cx="310896" cy="80772"/>
-          </a:xfrm>
-          <a:prstGeom prst="rect">
-            <a:avLst/>
-          </a:prstGeom>
-          <a:solidFill>
-            <a:srgbClr val="CFC2A0"/>
-          </a:solidFill>
-          <a:ln w="5080">
-            <a:solidFill>
-              <a:srgbClr val="AC9E78"/>
-            </a:solidFill>
-            <a:prstDash val="solid"/>
-          </a:ln>
-        </p:spPr>
-      </p:sp>
-      <p:sp>
-        <p:nvSpPr>
-          <p:cNvPr id="46" name="Shape 44"/>
-          <p:cNvSpPr/>
-          <p:nvPr/>
-        </p:nvSpPr>
-        <p:spPr>
-          <a:xfrm>
-            <a:off x="6446520" y="3511296"/>
-            <a:ext cx="768096" cy="237744"/>
-          </a:xfrm>
-          <a:prstGeom prst="roundRect">
-            <a:avLst>
-              <a:gd name="adj" fmla="val 15385"/>
-            </a:avLst>
-          </a:prstGeom>
-          <a:solidFill>
-            <a:srgbClr val="566270"/>
-          </a:solidFill>
-          <a:ln/>
-        </p:spPr>
-      </p:sp>
-      <p:sp>
-        <p:nvSpPr>
-          <p:cNvPr id="47" name="Text 45"/>
-          <p:cNvSpPr/>
-          <p:nvPr/>
-        </p:nvSpPr>
-        <p:spPr>
-          <a:xfrm>
-            <a:off x="6446520" y="3511296"/>
-            <a:ext cx="768096" cy="237744"/>
-          </a:xfrm>
-          <a:prstGeom prst="rect">
-            <a:avLst/>
-          </a:prstGeom>
-          <a:noFill/>
-          <a:ln/>
-        </p:spPr>
-        <p:txBody>
-          <a:bodyPr wrap="square" lIns="0" tIns="0" rIns="0" bIns="0" rtlCol="0" anchor="ctr"/>
-          <a:lstStyle/>
-          <a:p>
-            <a:pPr algn="ctr" indent="0" marL="0">
-              <a:buNone/>
-            </a:pPr>
-            <a:r>
-              <a:rPr lang="en-US" sz="950" b="1" dirty="0">
-                <a:solidFill>
-                  <a:srgbClr val="FFFFFF"/>
-                </a:solidFill>
-                <a:latin typeface="Calibri" pitchFamily="34" charset="0"/>
-                <a:ea typeface="Calibri" pitchFamily="34" charset="-122"/>
-                <a:cs typeface="Calibri" pitchFamily="34" charset="-120"/>
-              </a:rPr>
-              <a:t>3</a:t>
-            </a:r>
-            <a:endParaRPr lang="en-US" sz="950" dirty="0"/>
-          </a:p>
-        </p:txBody>
-      </p:sp>
-      <p:sp>
-        <p:nvSpPr>
-          <p:cNvPr id="48" name="Shape 46"/>
-          <p:cNvSpPr/>
-          <p:nvPr/>
-        </p:nvSpPr>
-        <p:spPr>
-          <a:xfrm>
-            <a:off x="4617720" y="4206240"/>
-            <a:ext cx="475488" cy="777240"/>
-          </a:xfrm>
-          <a:prstGeom prst="rect">
-            <a:avLst/>
-          </a:prstGeom>
-          <a:solidFill>
-            <a:srgbClr val="DCE0E6"/>
-          </a:solidFill>
-          <a:ln w="16510">
-            <a:solidFill>
-              <a:srgbClr val="8A93A0"/>
-            </a:solidFill>
-            <a:prstDash val="solid"/>
-          </a:ln>
-        </p:spPr>
-      </p:sp>
-      <p:sp>
-        <p:nvSpPr>
-          <p:cNvPr id="49" name="Shape 47"/>
-          <p:cNvSpPr/>
-          <p:nvPr/>
-        </p:nvSpPr>
-        <p:spPr>
-          <a:xfrm>
-            <a:off x="4617720" y="4335780"/>
-            <a:ext cx="475488" cy="0"/>
-          </a:xfrm>
-          <a:prstGeom prst="line">
-            <a:avLst/>
-          </a:prstGeom>
-          <a:noFill/>
-          <a:ln w="10160">
-            <a:solidFill>
-              <a:srgbClr val="9AA3B0"/>
-            </a:solidFill>
-            <a:prstDash val="solid"/>
-          </a:ln>
-        </p:spPr>
-      </p:sp>
-      <p:sp>
-        <p:nvSpPr>
-          <p:cNvPr id="50" name="Shape 48"/>
-          <p:cNvSpPr/>
-          <p:nvPr/>
-        </p:nvSpPr>
-        <p:spPr>
-          <a:xfrm>
-            <a:off x="4617720" y="4465320"/>
-            <a:ext cx="475488" cy="0"/>
-          </a:xfrm>
-          <a:prstGeom prst="line">
-            <a:avLst/>
-          </a:prstGeom>
-          <a:noFill/>
-          <a:ln w="10160">
-            <a:solidFill>
-              <a:srgbClr val="9AA3B0"/>
-            </a:solidFill>
-            <a:prstDash val="solid"/>
-          </a:ln>
-        </p:spPr>
-      </p:sp>
-      <p:sp>
-        <p:nvSpPr>
-          <p:cNvPr id="51" name="Shape 49"/>
-          <p:cNvSpPr/>
-          <p:nvPr/>
-        </p:nvSpPr>
-        <p:spPr>
-          <a:xfrm>
-            <a:off x="4617720" y="4594860"/>
-            <a:ext cx="475488" cy="0"/>
-          </a:xfrm>
-          <a:prstGeom prst="line">
-            <a:avLst/>
-          </a:prstGeom>
-          <a:noFill/>
-          <a:ln w="10160">
-            <a:solidFill>
-              <a:srgbClr val="9AA3B0"/>
-            </a:solidFill>
-            <a:prstDash val="solid"/>
-          </a:ln>
-        </p:spPr>
-      </p:sp>
-      <p:sp>
-        <p:nvSpPr>
-          <p:cNvPr id="52" name="Shape 50"/>
-          <p:cNvSpPr/>
-          <p:nvPr/>
-        </p:nvSpPr>
-        <p:spPr>
-          <a:xfrm>
-            <a:off x="4617720" y="4724400"/>
-            <a:ext cx="475488" cy="0"/>
-          </a:xfrm>
-          <a:prstGeom prst="line">
-            <a:avLst/>
-          </a:prstGeom>
-          <a:noFill/>
-          <a:ln w="10160">
-            <a:solidFill>
-              <a:srgbClr val="9AA3B0"/>
-            </a:solidFill>
-            <a:prstDash val="solid"/>
-          </a:ln>
-        </p:spPr>
-      </p:sp>
-      <p:sp>
-        <p:nvSpPr>
-          <p:cNvPr id="53" name="Shape 51"/>
-          <p:cNvSpPr/>
-          <p:nvPr/>
-        </p:nvSpPr>
-        <p:spPr>
-          <a:xfrm>
-            <a:off x="4617720" y="4853940"/>
-            <a:ext cx="475488" cy="0"/>
-          </a:xfrm>
-          <a:prstGeom prst="line">
-            <a:avLst/>
-          </a:prstGeom>
-          <a:noFill/>
-          <a:ln w="10160">
-            <a:solidFill>
-              <a:srgbClr val="9AA3B0"/>
-            </a:solidFill>
-            <a:prstDash val="solid"/>
-          </a:ln>
-        </p:spPr>
-      </p:sp>
-      <p:sp>
-        <p:nvSpPr>
-          <p:cNvPr id="54" name="Shape 52"/>
-          <p:cNvSpPr/>
-          <p:nvPr/>
-        </p:nvSpPr>
-        <p:spPr>
-          <a:xfrm>
-            <a:off x="4681728" y="4261104"/>
-            <a:ext cx="347472" cy="19812"/>
-          </a:xfrm>
-          <a:prstGeom prst="rect">
-            <a:avLst/>
-          </a:prstGeom>
-          <a:solidFill>
-            <a:srgbClr val="CFC2A0"/>
-          </a:solidFill>
-          <a:ln w="5080">
-            <a:solidFill>
-              <a:srgbClr val="AC9E78"/>
-            </a:solidFill>
-            <a:prstDash val="solid"/>
-          </a:ln>
-        </p:spPr>
-      </p:sp>
-      <p:sp>
-        <p:nvSpPr>
-          <p:cNvPr id="55" name="Shape 53"/>
-          <p:cNvSpPr/>
-          <p:nvPr/>
-        </p:nvSpPr>
-        <p:spPr>
-          <a:xfrm>
-            <a:off x="4681728" y="4520184"/>
-            <a:ext cx="347472" cy="19812"/>
-          </a:xfrm>
-          <a:prstGeom prst="rect">
-            <a:avLst/>
-          </a:prstGeom>
-          <a:solidFill>
-            <a:srgbClr val="CFC2A0"/>
-          </a:solidFill>
-          <a:ln w="5080">
-            <a:solidFill>
-              <a:srgbClr val="AC9E78"/>
-            </a:solidFill>
-            <a:prstDash val="solid"/>
-          </a:ln>
-        </p:spPr>
-      </p:sp>
-      <p:sp>
-        <p:nvSpPr>
-          <p:cNvPr id="56" name="Shape 54"/>
-          <p:cNvSpPr/>
-          <p:nvPr/>
-        </p:nvSpPr>
-        <p:spPr>
-          <a:xfrm>
-            <a:off x="4681728" y="4779264"/>
-            <a:ext cx="347472" cy="19812"/>
-          </a:xfrm>
-          <a:prstGeom prst="rect">
-            <a:avLst/>
-          </a:prstGeom>
-          <a:solidFill>
-            <a:srgbClr val="CFC2A0"/>
-          </a:solidFill>
-          <a:ln w="5080">
-            <a:solidFill>
-              <a:srgbClr val="AC9E78"/>
-            </a:solidFill>
-            <a:prstDash val="solid"/>
-          </a:ln>
-        </p:spPr>
-      </p:sp>
-      <p:sp>
-        <p:nvSpPr>
-          <p:cNvPr id="57" name="Shape 55"/>
-          <p:cNvSpPr/>
-          <p:nvPr/>
-        </p:nvSpPr>
-        <p:spPr>
-          <a:xfrm>
-            <a:off x="4471416" y="3968496"/>
-            <a:ext cx="768096" cy="237744"/>
-          </a:xfrm>
-          <a:prstGeom prst="roundRect">
-            <a:avLst>
-              <a:gd name="adj" fmla="val 15385"/>
-            </a:avLst>
-          </a:prstGeom>
-          <a:solidFill>
-            <a:srgbClr val="566270"/>
-          </a:solidFill>
-          <a:ln/>
-        </p:spPr>
-      </p:sp>
-      <p:sp>
-        <p:nvSpPr>
-          <p:cNvPr id="58" name="Text 56"/>
-          <p:cNvSpPr/>
-          <p:nvPr/>
-        </p:nvSpPr>
-        <p:spPr>
-          <a:xfrm>
-            <a:off x="4471416" y="3968496"/>
-            <a:ext cx="768096" cy="237744"/>
-          </a:xfrm>
-          <a:prstGeom prst="rect">
-            <a:avLst/>
-          </a:prstGeom>
-          <a:noFill/>
-          <a:ln/>
-        </p:spPr>
-        <p:txBody>
-          <a:bodyPr wrap="square" lIns="0" tIns="0" rIns="0" bIns="0" rtlCol="0" anchor="ctr"/>
-          <a:lstStyle/>
-          <a:p>
-            <a:pPr algn="ctr" indent="0" marL="0">
-              <a:buNone/>
-            </a:pPr>
-            <a:r>
-              <a:rPr lang="en-US" sz="950" b="1" dirty="0">
-                <a:solidFill>
-                  <a:srgbClr val="FFFFFF"/>
-                </a:solidFill>
-                <a:latin typeface="Calibri" pitchFamily="34" charset="0"/>
-                <a:ea typeface="Calibri" pitchFamily="34" charset="-122"/>
-                <a:cs typeface="Calibri" pitchFamily="34" charset="-120"/>
-              </a:rPr>
-              <a:t>4</a:t>
-            </a:r>
-            <a:endParaRPr lang="en-US" sz="950" dirty="0"/>
-          </a:p>
-        </p:txBody>
-      </p:sp>
-      <p:sp>
-        <p:nvSpPr>
-          <p:cNvPr id="59" name="Shape 57"/>
-          <p:cNvSpPr/>
-          <p:nvPr/>
-        </p:nvSpPr>
-        <p:spPr>
-          <a:xfrm>
-            <a:off x="4361688" y="3977640"/>
-            <a:ext cx="1234440" cy="1024128"/>
-          </a:xfrm>
-          <a:prstGeom prst="roundRect">
-            <a:avLst>
-              <a:gd name="adj" fmla="val 5357"/>
-            </a:avLst>
-          </a:prstGeom>
-          <a:solidFill>
-            <a:srgbClr val="FFFFFF">
-              <a:alpha val="0"/>
-            </a:srgbClr>
-          </a:solidFill>
-          <a:ln w="20320">
-            <a:solidFill>
-              <a:srgbClr val="FF5A52"/>
-            </a:solidFill>
-            <a:prstDash val="dash"/>
-          </a:ln>
-        </p:spPr>
-      </p:sp>
-      <p:sp>
-        <p:nvSpPr>
-          <p:cNvPr id="60" name="Text 58"/>
-          <p:cNvSpPr/>
-          <p:nvPr/>
-        </p:nvSpPr>
-        <p:spPr>
-          <a:xfrm>
-            <a:off x="4206240" y="3639312"/>
-            <a:ext cx="1554480" cy="365760"/>
-          </a:xfrm>
-          <a:prstGeom prst="rect">
-            <a:avLst/>
-          </a:prstGeom>
-          <a:noFill/>
-          <a:ln/>
-        </p:spPr>
-        <p:txBody>
-          <a:bodyPr wrap="square" lIns="0" tIns="0" rIns="0" bIns="0" rtlCol="0" anchor="ctr"/>
-          <a:lstStyle/>
-          <a:p>
-            <a:pPr algn="ctr" indent="0" marL="0">
-              <a:buNone/>
-            </a:pPr>
-            <a:r>
-              <a:rPr lang="en-US" sz="800" b="1" dirty="0">
-                <a:solidFill>
-                  <a:srgbClr val="FF5A52"/>
-                </a:solidFill>
-                <a:latin typeface="Calibri" pitchFamily="34" charset="0"/>
-                <a:ea typeface="Calibri" pitchFamily="34" charset="-122"/>
-                <a:cs typeface="Calibri" pitchFamily="34" charset="-120"/>
-              </a:rPr>
-              <a:t>rack 4 — ocupa área que</a:t>
-            </a:r>
-            <a:endParaRPr lang="en-US" sz="800" dirty="0"/>
-          </a:p>
-          <a:p>
-            <a:pPr algn="ctr" indent="0" marL="0">
-              <a:buNone/>
-            </a:pPr>
-            <a:r>
-              <a:rPr lang="en-US" sz="800" b="1" dirty="0">
-                <a:solidFill>
-                  <a:srgbClr val="FF5A52"/>
-                </a:solidFill>
-                <a:latin typeface="Calibri" pitchFamily="34" charset="0"/>
-                <a:ea typeface="Calibri" pitchFamily="34" charset="-122"/>
-                <a:cs typeface="Calibri" pitchFamily="34" charset="-120"/>
-              </a:rPr>
-              <a:t>usan los mecánicos</a:t>
-            </a:r>
-            <a:endParaRPr lang="en-US" sz="800" dirty="0"/>
-          </a:p>
-        </p:txBody>
-      </p:sp>
-      <p:sp>
-        <p:nvSpPr>
-          <p:cNvPr id="61" name="Text 59"/>
-          <p:cNvSpPr/>
-          <p:nvPr/>
-        </p:nvSpPr>
-        <p:spPr>
-          <a:xfrm>
-            <a:off x="7452360" y="1554480"/>
-            <a:ext cx="4114800" cy="274320"/>
-          </a:xfrm>
-          <a:prstGeom prst="rect">
-            <a:avLst/>
-          </a:prstGeom>
-          <a:noFill/>
-          <a:ln/>
-        </p:spPr>
-        <p:txBody>
-          <a:bodyPr wrap="square" lIns="0" tIns="0" rIns="0" bIns="0" rtlCol="0" anchor="ctr"/>
-          <a:lstStyle/>
-          <a:p>
-            <a:pPr indent="0" marL="0">
-              <a:buNone/>
-            </a:pPr>
-            <a:r>
-              <a:rPr lang="en-US" sz="1250" b="1" dirty="0">
-                <a:solidFill>
-                  <a:srgbClr val="1A1D23"/>
-                </a:solidFill>
-                <a:latin typeface="Calibri" pitchFamily="34" charset="0"/>
-                <a:ea typeface="Calibri" pitchFamily="34" charset="-122"/>
-                <a:cs typeface="Calibri" pitchFamily="34" charset="-120"/>
-              </a:rPr>
-              <a:t>Propuesta — lado derecho</a:t>
-            </a:r>
-            <a:endParaRPr lang="en-US" sz="1250" dirty="0"/>
-          </a:p>
-        </p:txBody>
-      </p:sp>
-      <p:sp>
-        <p:nvSpPr>
-          <p:cNvPr id="62" name="Shape 60"/>
-          <p:cNvSpPr/>
-          <p:nvPr/>
-        </p:nvSpPr>
-        <p:spPr>
-          <a:xfrm>
-            <a:off x="7452360" y="1828800"/>
-            <a:ext cx="4114800" cy="3246120"/>
-          </a:xfrm>
-          <a:prstGeom prst="rect">
-            <a:avLst/>
-          </a:prstGeom>
-          <a:solidFill>
-            <a:srgbClr val="FFFFFF"/>
-          </a:solidFill>
-          <a:ln w="30480">
-            <a:solidFill>
-              <a:srgbClr val="3A3F49"/>
-            </a:solidFill>
-            <a:prstDash val="solid"/>
-          </a:ln>
-        </p:spPr>
-      </p:sp>
-      <p:sp>
-        <p:nvSpPr>
-          <p:cNvPr id="63" name="Shape 61"/>
-          <p:cNvSpPr/>
-          <p:nvPr/>
-        </p:nvSpPr>
-        <p:spPr>
-          <a:xfrm>
-            <a:off x="8842248" y="2560320"/>
-            <a:ext cx="1280160" cy="1828800"/>
-          </a:xfrm>
-          <a:prstGeom prst="rect">
-            <a:avLst/>
-          </a:prstGeom>
-          <a:solidFill>
-            <a:srgbClr val="FBEFC9"/>
-          </a:solidFill>
-          <a:ln w="12700">
-            <a:solidFill>
-              <a:srgbClr val="E0C96A"/>
-            </a:solidFill>
-            <a:prstDash val="solid"/>
-          </a:ln>
-        </p:spPr>
-      </p:sp>
-      <p:sp>
-        <p:nvSpPr>
-          <p:cNvPr id="64" name="Text 62"/>
-          <p:cNvSpPr/>
-          <p:nvPr/>
-        </p:nvSpPr>
-        <p:spPr>
-          <a:xfrm>
-            <a:off x="8842248" y="3337560"/>
-            <a:ext cx="1280160" cy="274320"/>
-          </a:xfrm>
-          <a:prstGeom prst="rect">
-            <a:avLst/>
-          </a:prstGeom>
-          <a:noFill/>
-          <a:ln/>
-        </p:spPr>
-        <p:txBody>
-          <a:bodyPr wrap="square" lIns="0" tIns="0" rIns="0" bIns="0" rtlCol="0" anchor="ctr"/>
-          <a:lstStyle/>
-          <a:p>
-            <a:pPr algn="ctr" indent="0" marL="0">
-              <a:buNone/>
-            </a:pPr>
-            <a:r>
-              <a:rPr lang="en-US" sz="1000" b="1" dirty="0">
-                <a:solidFill>
-                  <a:srgbClr val="8A6D16"/>
-                </a:solidFill>
-                <a:latin typeface="Calibri" pitchFamily="34" charset="0"/>
-                <a:ea typeface="Calibri" pitchFamily="34" charset="-122"/>
-                <a:cs typeface="Calibri" pitchFamily="34" charset="-120"/>
-              </a:rPr>
-              <a:t>Pasillo 0</a:t>
-            </a:r>
-            <a:endParaRPr lang="en-US" sz="1000" dirty="0"/>
-          </a:p>
-        </p:txBody>
-      </p:sp>
-      <p:sp>
-        <p:nvSpPr>
-          <p:cNvPr id="65" name="Shape 63"/>
-          <p:cNvSpPr/>
-          <p:nvPr/>
-        </p:nvSpPr>
-        <p:spPr>
-          <a:xfrm>
-            <a:off x="8257032" y="2560320"/>
-            <a:ext cx="530352" cy="1828800"/>
-          </a:xfrm>
-          <a:prstGeom prst="rect">
-            <a:avLst/>
-          </a:prstGeom>
-          <a:solidFill>
-            <a:srgbClr val="DCE0E6"/>
-          </a:solidFill>
-          <a:ln w="16510">
-            <a:solidFill>
-              <a:srgbClr val="8A93A0"/>
-            </a:solidFill>
-            <a:prstDash val="solid"/>
-          </a:ln>
-        </p:spPr>
-      </p:sp>
-      <p:sp>
-        <p:nvSpPr>
-          <p:cNvPr id="66" name="Shape 64"/>
-          <p:cNvSpPr/>
-          <p:nvPr/>
-        </p:nvSpPr>
-        <p:spPr>
-          <a:xfrm>
-            <a:off x="8257032" y="2865120"/>
-            <a:ext cx="530352" cy="0"/>
-          </a:xfrm>
-          <a:prstGeom prst="line">
-            <a:avLst/>
-          </a:prstGeom>
-          <a:noFill/>
-          <a:ln w="10160">
-            <a:solidFill>
-              <a:srgbClr val="9AA3B0"/>
-            </a:solidFill>
-            <a:prstDash val="solid"/>
-          </a:ln>
-        </p:spPr>
-      </p:sp>
-      <p:sp>
-        <p:nvSpPr>
-          <p:cNvPr id="67" name="Shape 65"/>
-          <p:cNvSpPr/>
-          <p:nvPr/>
-        </p:nvSpPr>
-        <p:spPr>
-          <a:xfrm>
-            <a:off x="8257032" y="3169920"/>
-            <a:ext cx="530352" cy="0"/>
-          </a:xfrm>
-          <a:prstGeom prst="line">
-            <a:avLst/>
-          </a:prstGeom>
-          <a:noFill/>
-          <a:ln w="10160">
-            <a:solidFill>
-              <a:srgbClr val="9AA3B0"/>
-            </a:solidFill>
-            <a:prstDash val="solid"/>
-          </a:ln>
-        </p:spPr>
-      </p:sp>
-      <p:sp>
-        <p:nvSpPr>
-          <p:cNvPr id="68" name="Shape 66"/>
-          <p:cNvSpPr/>
-          <p:nvPr/>
-        </p:nvSpPr>
-        <p:spPr>
-          <a:xfrm>
-            <a:off x="8257032" y="3474720"/>
-            <a:ext cx="530352" cy="0"/>
-          </a:xfrm>
-          <a:prstGeom prst="line">
-            <a:avLst/>
-          </a:prstGeom>
-          <a:noFill/>
-          <a:ln w="10160">
-            <a:solidFill>
-              <a:srgbClr val="9AA3B0"/>
-            </a:solidFill>
-            <a:prstDash val="solid"/>
-          </a:ln>
-        </p:spPr>
-      </p:sp>
-      <p:sp>
-        <p:nvSpPr>
-          <p:cNvPr id="69" name="Shape 67"/>
-          <p:cNvSpPr/>
-          <p:nvPr/>
-        </p:nvSpPr>
-        <p:spPr>
-          <a:xfrm>
-            <a:off x="8257032" y="3779520"/>
-            <a:ext cx="530352" cy="0"/>
-          </a:xfrm>
-          <a:prstGeom prst="line">
-            <a:avLst/>
-          </a:prstGeom>
-          <a:noFill/>
-          <a:ln w="10160">
-            <a:solidFill>
-              <a:srgbClr val="9AA3B0"/>
-            </a:solidFill>
-            <a:prstDash val="solid"/>
-          </a:ln>
-        </p:spPr>
-      </p:sp>
-      <p:sp>
-        <p:nvSpPr>
-          <p:cNvPr id="70" name="Shape 68"/>
-          <p:cNvSpPr/>
-          <p:nvPr/>
-        </p:nvSpPr>
-        <p:spPr>
-          <a:xfrm>
-            <a:off x="8257032" y="4084320"/>
-            <a:ext cx="530352" cy="0"/>
-          </a:xfrm>
-          <a:prstGeom prst="line">
-            <a:avLst/>
-          </a:prstGeom>
-          <a:noFill/>
-          <a:ln w="10160">
-            <a:solidFill>
-              <a:srgbClr val="9AA3B0"/>
-            </a:solidFill>
-            <a:prstDash val="solid"/>
-          </a:ln>
-        </p:spPr>
-      </p:sp>
-      <p:sp>
-        <p:nvSpPr>
-          <p:cNvPr id="71" name="Shape 69"/>
-          <p:cNvSpPr/>
-          <p:nvPr/>
-        </p:nvSpPr>
-        <p:spPr>
-          <a:xfrm>
-            <a:off x="8321040" y="2615184"/>
-            <a:ext cx="402336" cy="195072"/>
-          </a:xfrm>
-          <a:prstGeom prst="rect">
-            <a:avLst/>
-          </a:prstGeom>
-          <a:solidFill>
-            <a:srgbClr val="CFC2A0"/>
-          </a:solidFill>
-          <a:ln w="5080">
-            <a:solidFill>
-              <a:srgbClr val="AC9E78"/>
-            </a:solidFill>
-            <a:prstDash val="solid"/>
-          </a:ln>
-        </p:spPr>
-      </p:sp>
-      <p:sp>
-        <p:nvSpPr>
-          <p:cNvPr id="72" name="Shape 70"/>
-          <p:cNvSpPr/>
-          <p:nvPr/>
-        </p:nvSpPr>
-        <p:spPr>
-          <a:xfrm>
-            <a:off x="8321040" y="3224784"/>
-            <a:ext cx="402336" cy="195072"/>
-          </a:xfrm>
-          <a:prstGeom prst="rect">
-            <a:avLst/>
-          </a:prstGeom>
-          <a:solidFill>
-            <a:srgbClr val="CFC2A0"/>
-          </a:solidFill>
-          <a:ln w="5080">
-            <a:solidFill>
-              <a:srgbClr val="AC9E78"/>
-            </a:solidFill>
-            <a:prstDash val="solid"/>
-          </a:ln>
-        </p:spPr>
-      </p:sp>
-      <p:sp>
-        <p:nvSpPr>
-          <p:cNvPr id="73" name="Shape 71"/>
-          <p:cNvSpPr/>
-          <p:nvPr/>
-        </p:nvSpPr>
-        <p:spPr>
-          <a:xfrm>
-            <a:off x="8321040" y="3834384"/>
-            <a:ext cx="402336" cy="195072"/>
-          </a:xfrm>
-          <a:prstGeom prst="rect">
-            <a:avLst/>
-          </a:prstGeom>
-          <a:solidFill>
-            <a:srgbClr val="CFC2A0"/>
-          </a:solidFill>
-          <a:ln w="5080">
-            <a:solidFill>
-              <a:srgbClr val="AC9E78"/>
-            </a:solidFill>
-            <a:prstDash val="solid"/>
-          </a:ln>
-        </p:spPr>
-      </p:sp>
-      <p:sp>
-        <p:nvSpPr>
-          <p:cNvPr id="74" name="Shape 72"/>
-          <p:cNvSpPr/>
-          <p:nvPr/>
-        </p:nvSpPr>
-        <p:spPr>
-          <a:xfrm>
-            <a:off x="8138160" y="2322576"/>
-            <a:ext cx="768096" cy="237744"/>
-          </a:xfrm>
-          <a:prstGeom prst="roundRect">
-            <a:avLst>
-              <a:gd name="adj" fmla="val 15385"/>
-            </a:avLst>
-          </a:prstGeom>
-          <a:solidFill>
-            <a:srgbClr val="566270"/>
-          </a:solidFill>
-          <a:ln/>
-        </p:spPr>
-      </p:sp>
-      <p:sp>
-        <p:nvSpPr>
-          <p:cNvPr id="75" name="Text 73"/>
-          <p:cNvSpPr/>
-          <p:nvPr/>
-        </p:nvSpPr>
-        <p:spPr>
-          <a:xfrm>
-            <a:off x="8138160" y="2322576"/>
-            <a:ext cx="768096" cy="237744"/>
-          </a:xfrm>
-          <a:prstGeom prst="rect">
-            <a:avLst/>
-          </a:prstGeom>
-          <a:noFill/>
-          <a:ln/>
-        </p:spPr>
-        <p:txBody>
-          <a:bodyPr wrap="square" lIns="0" tIns="0" rIns="0" bIns="0" rtlCol="0" anchor="ctr"/>
-          <a:lstStyle/>
-          <a:p>
-            <a:pPr algn="ctr" indent="0" marL="0">
-              <a:buNone/>
-            </a:pPr>
-            <a:r>
-              <a:rPr lang="en-US" sz="950" b="1" dirty="0">
-                <a:solidFill>
-                  <a:srgbClr val="FFFFFF"/>
-                </a:solidFill>
-                <a:latin typeface="Calibri" pitchFamily="34" charset="0"/>
-                <a:ea typeface="Calibri" pitchFamily="34" charset="-122"/>
-                <a:cs typeface="Calibri" pitchFamily="34" charset="-120"/>
-              </a:rPr>
-              <a:t>4</a:t>
-            </a:r>
-            <a:endParaRPr lang="en-US" sz="950" dirty="0"/>
-          </a:p>
-        </p:txBody>
-      </p:sp>
-      <p:sp>
-        <p:nvSpPr>
-          <p:cNvPr id="76" name="Shape 74"/>
-          <p:cNvSpPr/>
-          <p:nvPr/>
-        </p:nvSpPr>
-        <p:spPr>
-          <a:xfrm>
-            <a:off x="10195560" y="2560320"/>
-            <a:ext cx="530352" cy="1828800"/>
-          </a:xfrm>
-          <a:prstGeom prst="rect">
-            <a:avLst/>
-          </a:prstGeom>
-          <a:solidFill>
-            <a:srgbClr val="DCE0E6"/>
-          </a:solidFill>
-          <a:ln w="16510">
-            <a:solidFill>
-              <a:srgbClr val="8A93A0"/>
-            </a:solidFill>
-            <a:prstDash val="solid"/>
-          </a:ln>
-        </p:spPr>
-      </p:sp>
-      <p:sp>
-        <p:nvSpPr>
-          <p:cNvPr id="77" name="Shape 75"/>
-          <p:cNvSpPr/>
-          <p:nvPr/>
-        </p:nvSpPr>
-        <p:spPr>
-          <a:xfrm>
-            <a:off x="10195560" y="2865120"/>
-            <a:ext cx="530352" cy="0"/>
-          </a:xfrm>
-          <a:prstGeom prst="line">
-            <a:avLst/>
-          </a:prstGeom>
-          <a:noFill/>
-          <a:ln w="10160">
-            <a:solidFill>
-              <a:srgbClr val="9AA3B0"/>
-            </a:solidFill>
-            <a:prstDash val="solid"/>
-          </a:ln>
-        </p:spPr>
-      </p:sp>
-      <p:sp>
-        <p:nvSpPr>
-          <p:cNvPr id="78" name="Shape 76"/>
-          <p:cNvSpPr/>
-          <p:nvPr/>
-        </p:nvSpPr>
-        <p:spPr>
-          <a:xfrm>
-            <a:off x="10195560" y="3169920"/>
-            <a:ext cx="530352" cy="0"/>
-          </a:xfrm>
-          <a:prstGeom prst="line">
-            <a:avLst/>
-          </a:prstGeom>
-          <a:noFill/>
-          <a:ln w="10160">
-            <a:solidFill>
-              <a:srgbClr val="9AA3B0"/>
-            </a:solidFill>
-            <a:prstDash val="solid"/>
-          </a:ln>
-        </p:spPr>
-      </p:sp>
-      <p:sp>
-        <p:nvSpPr>
-          <p:cNvPr id="79" name="Shape 77"/>
-          <p:cNvSpPr/>
-          <p:nvPr/>
-        </p:nvSpPr>
-        <p:spPr>
-          <a:xfrm>
-            <a:off x="10195560" y="3474720"/>
-            <a:ext cx="530352" cy="0"/>
-          </a:xfrm>
-          <a:prstGeom prst="line">
-            <a:avLst/>
-          </a:prstGeom>
-          <a:noFill/>
-          <a:ln w="10160">
-            <a:solidFill>
-              <a:srgbClr val="9AA3B0"/>
-            </a:solidFill>
-            <a:prstDash val="solid"/>
-          </a:ln>
-        </p:spPr>
-      </p:sp>
-      <p:sp>
-        <p:nvSpPr>
-          <p:cNvPr id="80" name="Shape 78"/>
-          <p:cNvSpPr/>
-          <p:nvPr/>
-        </p:nvSpPr>
-        <p:spPr>
-          <a:xfrm>
-            <a:off x="10195560" y="3779520"/>
-            <a:ext cx="530352" cy="0"/>
-          </a:xfrm>
-          <a:prstGeom prst="line">
-            <a:avLst/>
-          </a:prstGeom>
-          <a:noFill/>
-          <a:ln w="10160">
-            <a:solidFill>
-              <a:srgbClr val="9AA3B0"/>
-            </a:solidFill>
-            <a:prstDash val="solid"/>
-          </a:ln>
-        </p:spPr>
-      </p:sp>
-      <p:sp>
-        <p:nvSpPr>
-          <p:cNvPr id="81" name="Shape 79"/>
-          <p:cNvSpPr/>
-          <p:nvPr/>
-        </p:nvSpPr>
-        <p:spPr>
-          <a:xfrm>
-            <a:off x="10195560" y="4084320"/>
-            <a:ext cx="530352" cy="0"/>
-          </a:xfrm>
-          <a:prstGeom prst="line">
-            <a:avLst/>
-          </a:prstGeom>
-          <a:noFill/>
-          <a:ln w="10160">
-            <a:solidFill>
-              <a:srgbClr val="9AA3B0"/>
-            </a:solidFill>
-            <a:prstDash val="solid"/>
-          </a:ln>
-        </p:spPr>
-      </p:sp>
-      <p:sp>
-        <p:nvSpPr>
-          <p:cNvPr id="82" name="Shape 80"/>
-          <p:cNvSpPr/>
-          <p:nvPr/>
-        </p:nvSpPr>
-        <p:spPr>
-          <a:xfrm>
-            <a:off x="10259568" y="2615184"/>
-            <a:ext cx="402336" cy="195072"/>
-          </a:xfrm>
-          <a:prstGeom prst="rect">
-            <a:avLst/>
-          </a:prstGeom>
-          <a:solidFill>
-            <a:srgbClr val="CFC2A0"/>
-          </a:solidFill>
-          <a:ln w="5080">
-            <a:solidFill>
-              <a:srgbClr val="AC9E78"/>
-            </a:solidFill>
-            <a:prstDash val="solid"/>
-          </a:ln>
-        </p:spPr>
-      </p:sp>
-      <p:sp>
-        <p:nvSpPr>
-          <p:cNvPr id="83" name="Shape 81"/>
-          <p:cNvSpPr/>
-          <p:nvPr/>
-        </p:nvSpPr>
-        <p:spPr>
-          <a:xfrm>
-            <a:off x="10259568" y="3224784"/>
-            <a:ext cx="402336" cy="195072"/>
-          </a:xfrm>
-          <a:prstGeom prst="rect">
-            <a:avLst/>
-          </a:prstGeom>
-          <a:solidFill>
-            <a:srgbClr val="CFC2A0"/>
-          </a:solidFill>
-          <a:ln w="5080">
-            <a:solidFill>
-              <a:srgbClr val="AC9E78"/>
-            </a:solidFill>
-            <a:prstDash val="solid"/>
-          </a:ln>
-        </p:spPr>
-      </p:sp>
-      <p:sp>
-        <p:nvSpPr>
-          <p:cNvPr id="84" name="Shape 82"/>
-          <p:cNvSpPr/>
-          <p:nvPr/>
-        </p:nvSpPr>
-        <p:spPr>
-          <a:xfrm>
-            <a:off x="10259568" y="3834384"/>
-            <a:ext cx="402336" cy="195072"/>
-          </a:xfrm>
-          <a:prstGeom prst="rect">
-            <a:avLst/>
-          </a:prstGeom>
-          <a:solidFill>
-            <a:srgbClr val="CFC2A0"/>
-          </a:solidFill>
-          <a:ln w="5080">
-            <a:solidFill>
-              <a:srgbClr val="AC9E78"/>
-            </a:solidFill>
-            <a:prstDash val="solid"/>
-          </a:ln>
-        </p:spPr>
-      </p:sp>
-      <p:sp>
-        <p:nvSpPr>
-          <p:cNvPr id="85" name="Shape 83"/>
-          <p:cNvSpPr/>
-          <p:nvPr/>
-        </p:nvSpPr>
-        <p:spPr>
-          <a:xfrm>
-            <a:off x="10076688" y="2322576"/>
-            <a:ext cx="768096" cy="237744"/>
-          </a:xfrm>
-          <a:prstGeom prst="roundRect">
-            <a:avLst>
-              <a:gd name="adj" fmla="val 15385"/>
-            </a:avLst>
-          </a:prstGeom>
-          <a:solidFill>
-            <a:srgbClr val="566270"/>
-          </a:solidFill>
-          <a:ln/>
-        </p:spPr>
-      </p:sp>
-      <p:sp>
-        <p:nvSpPr>
-          <p:cNvPr id="86" name="Text 84"/>
-          <p:cNvSpPr/>
-          <p:nvPr/>
-        </p:nvSpPr>
-        <p:spPr>
-          <a:xfrm>
-            <a:off x="10076688" y="2322576"/>
-            <a:ext cx="768096" cy="237744"/>
-          </a:xfrm>
-          <a:prstGeom prst="rect">
-            <a:avLst/>
-          </a:prstGeom>
-          <a:noFill/>
-          <a:ln/>
-        </p:spPr>
-        <p:txBody>
-          <a:bodyPr wrap="square" lIns="0" tIns="0" rIns="0" bIns="0" rtlCol="0" anchor="ctr"/>
-          <a:lstStyle/>
-          <a:p>
-            <a:pPr algn="ctr" indent="0" marL="0">
-              <a:buNone/>
-            </a:pPr>
-            <a:r>
-              <a:rPr lang="en-US" sz="950" b="1" dirty="0">
-                <a:solidFill>
-                  <a:srgbClr val="FFFFFF"/>
-                </a:solidFill>
-                <a:latin typeface="Calibri" pitchFamily="34" charset="0"/>
-                <a:ea typeface="Calibri" pitchFamily="34" charset="-122"/>
-                <a:cs typeface="Calibri" pitchFamily="34" charset="-120"/>
-              </a:rPr>
-              <a:t>3</a:t>
-            </a:r>
-            <a:endParaRPr lang="en-US" sz="950" dirty="0"/>
-          </a:p>
-        </p:txBody>
-      </p:sp>
-      <p:sp>
-        <p:nvSpPr>
-          <p:cNvPr id="87" name="Shape 85"/>
-          <p:cNvSpPr/>
-          <p:nvPr/>
-        </p:nvSpPr>
-        <p:spPr>
-          <a:xfrm>
-            <a:off x="8869680" y="2743200"/>
-            <a:ext cx="137160" cy="137160"/>
-          </a:xfrm>
-          <a:prstGeom prst="rect">
-            <a:avLst/>
-          </a:prstGeom>
-          <a:solidFill>
-            <a:srgbClr val="111111"/>
-          </a:solidFill>
-          <a:ln/>
-        </p:spPr>
-      </p:sp>
-      <p:sp>
-        <p:nvSpPr>
-          <p:cNvPr id="88" name="Shape 86"/>
-          <p:cNvSpPr/>
-          <p:nvPr/>
-        </p:nvSpPr>
-        <p:spPr>
-          <a:xfrm>
-            <a:off x="8897112" y="2770632"/>
-            <a:ext cx="24689" cy="24689"/>
-          </a:xfrm>
-          <a:prstGeom prst="rect">
-            <a:avLst/>
-          </a:prstGeom>
-          <a:solidFill>
-            <a:srgbClr val="FFFFFF"/>
-          </a:solidFill>
-          <a:ln/>
-        </p:spPr>
-      </p:sp>
-      <p:sp>
-        <p:nvSpPr>
-          <p:cNvPr id="89" name="Shape 87"/>
-          <p:cNvSpPr/>
-          <p:nvPr/>
-        </p:nvSpPr>
-        <p:spPr>
-          <a:xfrm>
-            <a:off x="8951976" y="2770632"/>
-            <a:ext cx="24689" cy="24689"/>
-          </a:xfrm>
-          <a:prstGeom prst="rect">
-            <a:avLst/>
-          </a:prstGeom>
-          <a:solidFill>
-            <a:srgbClr val="FFFFFF"/>
-          </a:solidFill>
-          <a:ln/>
-        </p:spPr>
-      </p:sp>
-      <p:sp>
-        <p:nvSpPr>
-          <p:cNvPr id="90" name="Shape 88"/>
-          <p:cNvSpPr/>
-          <p:nvPr/>
-        </p:nvSpPr>
-        <p:spPr>
-          <a:xfrm>
-            <a:off x="8924544" y="2798064"/>
-            <a:ext cx="24689" cy="24689"/>
-          </a:xfrm>
-          <a:prstGeom prst="rect">
-            <a:avLst/>
-          </a:prstGeom>
-          <a:solidFill>
-            <a:srgbClr val="FFFFFF"/>
-          </a:solidFill>
-          <a:ln/>
-        </p:spPr>
-      </p:sp>
-      <p:sp>
-        <p:nvSpPr>
-          <p:cNvPr id="91" name="Shape 89"/>
-          <p:cNvSpPr/>
-          <p:nvPr/>
-        </p:nvSpPr>
-        <p:spPr>
-          <a:xfrm>
-            <a:off x="8897112" y="2825496"/>
-            <a:ext cx="24689" cy="24689"/>
-          </a:xfrm>
-          <a:prstGeom prst="rect">
-            <a:avLst/>
-          </a:prstGeom>
-          <a:solidFill>
-            <a:srgbClr val="FFFFFF"/>
-          </a:solidFill>
-          <a:ln/>
-        </p:spPr>
-      </p:sp>
-      <p:sp>
-        <p:nvSpPr>
-          <p:cNvPr id="92" name="Shape 90"/>
-          <p:cNvSpPr/>
-          <p:nvPr/>
-        </p:nvSpPr>
-        <p:spPr>
-          <a:xfrm>
-            <a:off x="8951976" y="2825496"/>
-            <a:ext cx="24689" cy="24689"/>
-          </a:xfrm>
-          <a:prstGeom prst="rect">
-            <a:avLst/>
-          </a:prstGeom>
-          <a:solidFill>
-            <a:srgbClr val="FFFFFF"/>
-          </a:solidFill>
-          <a:ln/>
-        </p:spPr>
-      </p:sp>
-      <p:sp>
-        <p:nvSpPr>
-          <p:cNvPr id="93" name="Shape 91"/>
-          <p:cNvSpPr/>
-          <p:nvPr/>
-        </p:nvSpPr>
-        <p:spPr>
-          <a:xfrm>
-            <a:off x="9957816" y="2743200"/>
-            <a:ext cx="137160" cy="137160"/>
-          </a:xfrm>
-          <a:prstGeom prst="rect">
-            <a:avLst/>
-          </a:prstGeom>
-          <a:solidFill>
-            <a:srgbClr val="111111"/>
-          </a:solidFill>
-          <a:ln/>
-        </p:spPr>
-      </p:sp>
-      <p:sp>
-        <p:nvSpPr>
-          <p:cNvPr id="94" name="Shape 92"/>
-          <p:cNvSpPr/>
-          <p:nvPr/>
-        </p:nvSpPr>
-        <p:spPr>
-          <a:xfrm>
-            <a:off x="9985248" y="2770632"/>
-            <a:ext cx="24689" cy="24689"/>
-          </a:xfrm>
-          <a:prstGeom prst="rect">
-            <a:avLst/>
-          </a:prstGeom>
-          <a:solidFill>
-            <a:srgbClr val="FFFFFF"/>
-          </a:solidFill>
-          <a:ln/>
-        </p:spPr>
-      </p:sp>
-      <p:sp>
-        <p:nvSpPr>
-          <p:cNvPr id="95" name="Shape 93"/>
-          <p:cNvSpPr/>
-          <p:nvPr/>
-        </p:nvSpPr>
-        <p:spPr>
-          <a:xfrm>
-            <a:off x="10040112" y="2770632"/>
-            <a:ext cx="24689" cy="24689"/>
-          </a:xfrm>
-          <a:prstGeom prst="rect">
-            <a:avLst/>
-          </a:prstGeom>
-          <a:solidFill>
-            <a:srgbClr val="FFFFFF"/>
-          </a:solidFill>
-          <a:ln/>
-        </p:spPr>
-      </p:sp>
-      <p:sp>
-        <p:nvSpPr>
-          <p:cNvPr id="96" name="Shape 94"/>
-          <p:cNvSpPr/>
-          <p:nvPr/>
-        </p:nvSpPr>
-        <p:spPr>
-          <a:xfrm>
-            <a:off x="10012680" y="2798064"/>
-            <a:ext cx="24689" cy="24689"/>
-          </a:xfrm>
-          <a:prstGeom prst="rect">
-            <a:avLst/>
-          </a:prstGeom>
-          <a:solidFill>
-            <a:srgbClr val="FFFFFF"/>
-          </a:solidFill>
-          <a:ln/>
-        </p:spPr>
-      </p:sp>
-      <p:sp>
-        <p:nvSpPr>
-          <p:cNvPr id="97" name="Shape 95"/>
-          <p:cNvSpPr/>
-          <p:nvPr/>
-        </p:nvSpPr>
-        <p:spPr>
-          <a:xfrm>
-            <a:off x="9985248" y="2825496"/>
-            <a:ext cx="24689" cy="24689"/>
-          </a:xfrm>
-          <a:prstGeom prst="rect">
-            <a:avLst/>
-          </a:prstGeom>
-          <a:solidFill>
-            <a:srgbClr val="FFFFFF"/>
-          </a:solidFill>
-          <a:ln/>
-        </p:spPr>
-      </p:sp>
-      <p:sp>
-        <p:nvSpPr>
-          <p:cNvPr id="98" name="Shape 96"/>
-          <p:cNvSpPr/>
-          <p:nvPr/>
-        </p:nvSpPr>
-        <p:spPr>
-          <a:xfrm>
-            <a:off x="10040112" y="2825496"/>
-            <a:ext cx="24689" cy="24689"/>
-          </a:xfrm>
-          <a:prstGeom prst="rect">
-            <a:avLst/>
-          </a:prstGeom>
-          <a:solidFill>
-            <a:srgbClr val="FFFFFF"/>
-          </a:solidFill>
-          <a:ln/>
-        </p:spPr>
-      </p:sp>
-      <p:sp>
-        <p:nvSpPr>
-          <p:cNvPr id="99" name="Shape 97"/>
-          <p:cNvSpPr/>
-          <p:nvPr/>
-        </p:nvSpPr>
-        <p:spPr>
-          <a:xfrm>
-            <a:off x="8869680" y="3246120"/>
-            <a:ext cx="137160" cy="137160"/>
-          </a:xfrm>
-          <a:prstGeom prst="rect">
-            <a:avLst/>
-          </a:prstGeom>
-          <a:solidFill>
-            <a:srgbClr val="111111"/>
-          </a:solidFill>
-          <a:ln/>
-        </p:spPr>
-      </p:sp>
-      <p:sp>
-        <p:nvSpPr>
-          <p:cNvPr id="100" name="Shape 98"/>
-          <p:cNvSpPr/>
-          <p:nvPr/>
-        </p:nvSpPr>
-        <p:spPr>
-          <a:xfrm>
-            <a:off x="8897112" y="3273552"/>
-            <a:ext cx="24689" cy="24689"/>
-          </a:xfrm>
-          <a:prstGeom prst="rect">
-            <a:avLst/>
-          </a:prstGeom>
-          <a:solidFill>
-            <a:srgbClr val="FFFFFF"/>
-          </a:solidFill>
-          <a:ln/>
-        </p:spPr>
-      </p:sp>
-      <p:sp>
-        <p:nvSpPr>
-          <p:cNvPr id="101" name="Shape 99"/>
-          <p:cNvSpPr/>
-          <p:nvPr/>
-        </p:nvSpPr>
-        <p:spPr>
-          <a:xfrm>
-            <a:off x="8951976" y="3273552"/>
-            <a:ext cx="24689" cy="24689"/>
-          </a:xfrm>
-          <a:prstGeom prst="rect">
-            <a:avLst/>
-          </a:prstGeom>
-          <a:solidFill>
-            <a:srgbClr val="FFFFFF"/>
-          </a:solidFill>
-          <a:ln/>
-        </p:spPr>
-      </p:sp>
-      <p:sp>
-        <p:nvSpPr>
-          <p:cNvPr id="102" name="Shape 100"/>
-          <p:cNvSpPr/>
-          <p:nvPr/>
-        </p:nvSpPr>
-        <p:spPr>
-          <a:xfrm>
-            <a:off x="8924544" y="3300984"/>
-            <a:ext cx="24689" cy="24689"/>
-          </a:xfrm>
-          <a:prstGeom prst="rect">
-            <a:avLst/>
-          </a:prstGeom>
-          <a:solidFill>
-            <a:srgbClr val="FFFFFF"/>
-          </a:solidFill>
-          <a:ln/>
-        </p:spPr>
-      </p:sp>
-      <p:sp>
-        <p:nvSpPr>
-          <p:cNvPr id="103" name="Shape 101"/>
-          <p:cNvSpPr/>
-          <p:nvPr/>
-        </p:nvSpPr>
-        <p:spPr>
-          <a:xfrm>
-            <a:off x="8897112" y="3328416"/>
-            <a:ext cx="24689" cy="24689"/>
-          </a:xfrm>
-          <a:prstGeom prst="rect">
-            <a:avLst/>
-          </a:prstGeom>
-          <a:solidFill>
-            <a:srgbClr val="FFFFFF"/>
-          </a:solidFill>
-          <a:ln/>
-        </p:spPr>
-      </p:sp>
-      <p:sp>
-        <p:nvSpPr>
-          <p:cNvPr id="104" name="Shape 102"/>
-          <p:cNvSpPr/>
-          <p:nvPr/>
-        </p:nvSpPr>
-        <p:spPr>
-          <a:xfrm>
-            <a:off x="8951976" y="3328416"/>
-            <a:ext cx="24689" cy="24689"/>
-          </a:xfrm>
-          <a:prstGeom prst="rect">
-            <a:avLst/>
-          </a:prstGeom>
-          <a:solidFill>
-            <a:srgbClr val="FFFFFF"/>
-          </a:solidFill>
-          <a:ln/>
-        </p:spPr>
-      </p:sp>
-      <p:sp>
-        <p:nvSpPr>
-          <p:cNvPr id="105" name="Shape 103"/>
-          <p:cNvSpPr/>
-          <p:nvPr/>
-        </p:nvSpPr>
-        <p:spPr>
-          <a:xfrm>
-            <a:off x="9957816" y="3246120"/>
-            <a:ext cx="137160" cy="137160"/>
-          </a:xfrm>
-          <a:prstGeom prst="rect">
-            <a:avLst/>
-          </a:prstGeom>
-          <a:solidFill>
-            <a:srgbClr val="111111"/>
-          </a:solidFill>
-          <a:ln/>
-        </p:spPr>
-      </p:sp>
-      <p:sp>
-        <p:nvSpPr>
-          <p:cNvPr id="106" name="Shape 104"/>
-          <p:cNvSpPr/>
-          <p:nvPr/>
-        </p:nvSpPr>
-        <p:spPr>
-          <a:xfrm>
-            <a:off x="9985248" y="3273552"/>
-            <a:ext cx="24689" cy="24689"/>
-          </a:xfrm>
-          <a:prstGeom prst="rect">
-            <a:avLst/>
-          </a:prstGeom>
-          <a:solidFill>
-            <a:srgbClr val="FFFFFF"/>
-          </a:solidFill>
-          <a:ln/>
-        </p:spPr>
-      </p:sp>
-      <p:sp>
-        <p:nvSpPr>
-          <p:cNvPr id="107" name="Shape 105"/>
-          <p:cNvSpPr/>
-          <p:nvPr/>
-        </p:nvSpPr>
-        <p:spPr>
-          <a:xfrm>
-            <a:off x="10040112" y="3273552"/>
-            <a:ext cx="24689" cy="24689"/>
-          </a:xfrm>
-          <a:prstGeom prst="rect">
-            <a:avLst/>
-          </a:prstGeom>
-          <a:solidFill>
-            <a:srgbClr val="FFFFFF"/>
-          </a:solidFill>
-          <a:ln/>
-        </p:spPr>
-      </p:sp>
-      <p:sp>
-        <p:nvSpPr>
-          <p:cNvPr id="108" name="Shape 106"/>
-          <p:cNvSpPr/>
-          <p:nvPr/>
-        </p:nvSpPr>
-        <p:spPr>
-          <a:xfrm>
-            <a:off x="10012680" y="3300984"/>
-            <a:ext cx="24689" cy="24689"/>
-          </a:xfrm>
-          <a:prstGeom prst="rect">
-            <a:avLst/>
-          </a:prstGeom>
-          <a:solidFill>
-            <a:srgbClr val="FFFFFF"/>
-          </a:solidFill>
-          <a:ln/>
-        </p:spPr>
-      </p:sp>
-      <p:sp>
-        <p:nvSpPr>
-          <p:cNvPr id="109" name="Shape 107"/>
-          <p:cNvSpPr/>
-          <p:nvPr/>
-        </p:nvSpPr>
-        <p:spPr>
-          <a:xfrm>
-            <a:off x="9985248" y="3328416"/>
-            <a:ext cx="24689" cy="24689"/>
-          </a:xfrm>
-          <a:prstGeom prst="rect">
-            <a:avLst/>
-          </a:prstGeom>
-          <a:solidFill>
-            <a:srgbClr val="FFFFFF"/>
-          </a:solidFill>
-          <a:ln/>
-        </p:spPr>
-      </p:sp>
-      <p:sp>
-        <p:nvSpPr>
-          <p:cNvPr id="110" name="Shape 108"/>
-          <p:cNvSpPr/>
-          <p:nvPr/>
-        </p:nvSpPr>
-        <p:spPr>
-          <a:xfrm>
-            <a:off x="10040112" y="3328416"/>
-            <a:ext cx="24689" cy="24689"/>
-          </a:xfrm>
-          <a:prstGeom prst="rect">
-            <a:avLst/>
-          </a:prstGeom>
-          <a:solidFill>
-            <a:srgbClr val="FFFFFF"/>
-          </a:solidFill>
-          <a:ln/>
-        </p:spPr>
-      </p:sp>
-      <p:sp>
-        <p:nvSpPr>
-          <p:cNvPr id="111" name="Shape 109"/>
-          <p:cNvSpPr/>
-          <p:nvPr/>
-        </p:nvSpPr>
-        <p:spPr>
-          <a:xfrm>
-            <a:off x="8869680" y="3749040"/>
-            <a:ext cx="137160" cy="137160"/>
-          </a:xfrm>
-          <a:prstGeom prst="rect">
-            <a:avLst/>
-          </a:prstGeom>
-          <a:solidFill>
-            <a:srgbClr val="111111"/>
-          </a:solidFill>
-          <a:ln/>
-        </p:spPr>
-      </p:sp>
-      <p:sp>
-        <p:nvSpPr>
-          <p:cNvPr id="112" name="Shape 110"/>
-          <p:cNvSpPr/>
-          <p:nvPr/>
-        </p:nvSpPr>
-        <p:spPr>
-          <a:xfrm>
-            <a:off x="8897112" y="3776472"/>
-            <a:ext cx="24689" cy="24689"/>
-          </a:xfrm>
-          <a:prstGeom prst="rect">
-            <a:avLst/>
-          </a:prstGeom>
-          <a:solidFill>
-            <a:srgbClr val="FFFFFF"/>
-          </a:solidFill>
-          <a:ln/>
-        </p:spPr>
-      </p:sp>
-      <p:sp>
-        <p:nvSpPr>
-          <p:cNvPr id="113" name="Shape 111"/>
-          <p:cNvSpPr/>
-          <p:nvPr/>
-        </p:nvSpPr>
-        <p:spPr>
-          <a:xfrm>
-            <a:off x="8951976" y="3776472"/>
-            <a:ext cx="24689" cy="24689"/>
-          </a:xfrm>
-          <a:prstGeom prst="rect">
-            <a:avLst/>
-          </a:prstGeom>
-          <a:solidFill>
-            <a:srgbClr val="FFFFFF"/>
-          </a:solidFill>
-          <a:ln/>
-        </p:spPr>
-      </p:sp>
-      <p:sp>
-        <p:nvSpPr>
-          <p:cNvPr id="114" name="Shape 112"/>
-          <p:cNvSpPr/>
-          <p:nvPr/>
-        </p:nvSpPr>
-        <p:spPr>
-          <a:xfrm>
-            <a:off x="8924544" y="3803904"/>
-            <a:ext cx="24689" cy="24689"/>
-          </a:xfrm>
-          <a:prstGeom prst="rect">
-            <a:avLst/>
-          </a:prstGeom>
-          <a:solidFill>
-            <a:srgbClr val="FFFFFF"/>
-          </a:solidFill>
-          <a:ln/>
-        </p:spPr>
-      </p:sp>
-      <p:sp>
-        <p:nvSpPr>
-          <p:cNvPr id="115" name="Shape 113"/>
-          <p:cNvSpPr/>
-          <p:nvPr/>
-        </p:nvSpPr>
-        <p:spPr>
-          <a:xfrm>
-            <a:off x="8897112" y="3831336"/>
-            <a:ext cx="24689" cy="24689"/>
-          </a:xfrm>
-          <a:prstGeom prst="rect">
-            <a:avLst/>
-          </a:prstGeom>
-          <a:solidFill>
-            <a:srgbClr val="FFFFFF"/>
-          </a:solidFill>
-          <a:ln/>
-        </p:spPr>
-      </p:sp>
-      <p:sp>
-        <p:nvSpPr>
-          <p:cNvPr id="116" name="Shape 114"/>
-          <p:cNvSpPr/>
-          <p:nvPr/>
-        </p:nvSpPr>
-        <p:spPr>
-          <a:xfrm>
-            <a:off x="8951976" y="3831336"/>
-            <a:ext cx="24689" cy="24689"/>
-          </a:xfrm>
-          <a:prstGeom prst="rect">
-            <a:avLst/>
-          </a:prstGeom>
-          <a:solidFill>
-            <a:srgbClr val="FFFFFF"/>
-          </a:solidFill>
-          <a:ln/>
-        </p:spPr>
-      </p:sp>
-      <p:sp>
-        <p:nvSpPr>
-          <p:cNvPr id="117" name="Shape 115"/>
-          <p:cNvSpPr/>
-          <p:nvPr/>
-        </p:nvSpPr>
-        <p:spPr>
-          <a:xfrm>
-            <a:off x="9957816" y="3749040"/>
-            <a:ext cx="137160" cy="137160"/>
-          </a:xfrm>
-          <a:prstGeom prst="rect">
-            <a:avLst/>
-          </a:prstGeom>
-          <a:solidFill>
-            <a:srgbClr val="111111"/>
-          </a:solidFill>
-          <a:ln/>
-        </p:spPr>
-      </p:sp>
-      <p:sp>
-        <p:nvSpPr>
-          <p:cNvPr id="118" name="Shape 116"/>
-          <p:cNvSpPr/>
-          <p:nvPr/>
-        </p:nvSpPr>
-        <p:spPr>
-          <a:xfrm>
-            <a:off x="9985248" y="3776472"/>
-            <a:ext cx="24689" cy="24689"/>
-          </a:xfrm>
-          <a:prstGeom prst="rect">
-            <a:avLst/>
-          </a:prstGeom>
-          <a:solidFill>
-            <a:srgbClr val="FFFFFF"/>
-          </a:solidFill>
-          <a:ln/>
-        </p:spPr>
-      </p:sp>
-      <p:sp>
-        <p:nvSpPr>
-          <p:cNvPr id="119" name="Shape 117"/>
-          <p:cNvSpPr/>
-          <p:nvPr/>
-        </p:nvSpPr>
-        <p:spPr>
-          <a:xfrm>
-            <a:off x="10040112" y="3776472"/>
-            <a:ext cx="24689" cy="24689"/>
-          </a:xfrm>
-          <a:prstGeom prst="rect">
-            <a:avLst/>
-          </a:prstGeom>
-          <a:solidFill>
-            <a:srgbClr val="FFFFFF"/>
-          </a:solidFill>
-          <a:ln/>
-        </p:spPr>
-      </p:sp>
-      <p:sp>
-        <p:nvSpPr>
-          <p:cNvPr id="120" name="Shape 118"/>
-          <p:cNvSpPr/>
-          <p:nvPr/>
-        </p:nvSpPr>
-        <p:spPr>
-          <a:xfrm>
-            <a:off x="10012680" y="3803904"/>
-            <a:ext cx="24689" cy="24689"/>
-          </a:xfrm>
-          <a:prstGeom prst="rect">
-            <a:avLst/>
-          </a:prstGeom>
-          <a:solidFill>
-            <a:srgbClr val="FFFFFF"/>
-          </a:solidFill>
-          <a:ln/>
-        </p:spPr>
-      </p:sp>
-      <p:sp>
-        <p:nvSpPr>
-          <p:cNvPr id="121" name="Shape 119"/>
-          <p:cNvSpPr/>
-          <p:nvPr/>
-        </p:nvSpPr>
-        <p:spPr>
-          <a:xfrm>
-            <a:off x="9985248" y="3831336"/>
-            <a:ext cx="24689" cy="24689"/>
-          </a:xfrm>
-          <a:prstGeom prst="rect">
-            <a:avLst/>
-          </a:prstGeom>
-          <a:solidFill>
-            <a:srgbClr val="FFFFFF"/>
-          </a:solidFill>
-          <a:ln/>
-        </p:spPr>
-      </p:sp>
-      <p:sp>
-        <p:nvSpPr>
-          <p:cNvPr id="122" name="Shape 120"/>
-          <p:cNvSpPr/>
-          <p:nvPr/>
-        </p:nvSpPr>
-        <p:spPr>
-          <a:xfrm>
-            <a:off x="10040112" y="3831336"/>
-            <a:ext cx="24689" cy="24689"/>
-          </a:xfrm>
-          <a:prstGeom prst="rect">
-            <a:avLst/>
-          </a:prstGeom>
-          <a:solidFill>
-            <a:srgbClr val="FFFFFF"/>
-          </a:solidFill>
-          <a:ln/>
-        </p:spPr>
-      </p:sp>
-      <p:sp>
-        <p:nvSpPr>
-          <p:cNvPr id="123" name="Shape 121"/>
-          <p:cNvSpPr/>
-          <p:nvPr/>
-        </p:nvSpPr>
-        <p:spPr>
-          <a:xfrm>
-            <a:off x="9134856" y="2267712"/>
-            <a:ext cx="694944" cy="347472"/>
-          </a:xfrm>
-          <a:prstGeom prst="roundRect">
-            <a:avLst>
-              <a:gd name="adj" fmla="val 13158"/>
-            </a:avLst>
-          </a:prstGeom>
-          <a:solidFill>
-            <a:srgbClr val="CDE9F7"/>
-          </a:solidFill>
-          <a:ln w="13970">
-            <a:solidFill>
-              <a:srgbClr val="566270"/>
-            </a:solidFill>
-            <a:prstDash val="solid"/>
-          </a:ln>
-        </p:spPr>
-      </p:sp>
-      <p:sp>
-        <p:nvSpPr>
-          <p:cNvPr id="124" name="Shape 122"/>
-          <p:cNvSpPr/>
-          <p:nvPr/>
-        </p:nvSpPr>
-        <p:spPr>
-          <a:xfrm>
-            <a:off x="9341876" y="2615184"/>
-            <a:ext cx="64008" cy="310896"/>
-          </a:xfrm>
-          <a:prstGeom prst="rect">
-            <a:avLst/>
-          </a:prstGeom>
-          <a:solidFill>
-            <a:srgbClr val="566270"/>
-          </a:solidFill>
-          <a:ln/>
-        </p:spPr>
-      </p:sp>
-      <p:sp>
-        <p:nvSpPr>
-          <p:cNvPr id="125" name="Shape 123"/>
-          <p:cNvSpPr/>
-          <p:nvPr/>
-        </p:nvSpPr>
-        <p:spPr>
-          <a:xfrm>
-            <a:off x="9558772" y="2615184"/>
-            <a:ext cx="64008" cy="310896"/>
-          </a:xfrm>
-          <a:prstGeom prst="rect">
-            <a:avLst/>
-          </a:prstGeom>
-          <a:solidFill>
-            <a:srgbClr val="566270"/>
-          </a:solidFill>
-          <a:ln/>
-        </p:spPr>
-      </p:sp>
-      <p:sp>
-        <p:nvSpPr>
-          <p:cNvPr id="126" name="Text 124"/>
-          <p:cNvSpPr/>
-          <p:nvPr/>
-        </p:nvSpPr>
-        <p:spPr>
-          <a:xfrm>
-            <a:off x="9134856" y="2267712"/>
-            <a:ext cx="694944" cy="347472"/>
-          </a:xfrm>
-          <a:prstGeom prst="rect">
-            <a:avLst/>
-          </a:prstGeom>
-          <a:noFill/>
-          <a:ln/>
-        </p:spPr>
-        <p:txBody>
-          <a:bodyPr wrap="square" lIns="0" tIns="0" rIns="0" bIns="0" rtlCol="0" anchor="ctr"/>
-          <a:lstStyle/>
-          <a:p>
-            <a:pPr algn="ctr" indent="0" marL="0">
-              <a:buNone/>
-            </a:pPr>
-            <a:r>
-              <a:rPr lang="en-US" sz="900" b="1" dirty="0">
-                <a:solidFill>
-                  <a:srgbClr val="2A2F39"/>
-                </a:solidFill>
-                <a:latin typeface="Calibri" pitchFamily="34" charset="0"/>
-                <a:ea typeface="Calibri" pitchFamily="34" charset="-122"/>
-                <a:cs typeface="Calibri" pitchFamily="34" charset="-120"/>
-              </a:rPr>
-              <a:t>1</a:t>
-            </a:r>
-            <a:endParaRPr lang="en-US" sz="900" dirty="0"/>
-          </a:p>
-        </p:txBody>
-      </p:sp>
-      <p:sp>
-        <p:nvSpPr>
-          <p:cNvPr id="127" name="Shape 125"/>
-          <p:cNvSpPr/>
-          <p:nvPr/>
-        </p:nvSpPr>
-        <p:spPr>
-          <a:xfrm>
-            <a:off x="8842248" y="2139696"/>
-            <a:ext cx="1280160" cy="0"/>
-          </a:xfrm>
-          <a:prstGeom prst="line">
-            <a:avLst/>
-          </a:prstGeom>
-          <a:noFill/>
-          <a:ln w="16510">
-            <a:solidFill>
-              <a:srgbClr val="8A6D16"/>
-            </a:solidFill>
-            <a:prstDash val="solid"/>
-            <a:headEnd type="triangle"/>
-            <a:tailEnd type="triangle"/>
-          </a:ln>
-        </p:spPr>
-      </p:sp>
-      <p:sp>
-        <p:nvSpPr>
-          <p:cNvPr id="128" name="Text 126"/>
-          <p:cNvSpPr/>
-          <p:nvPr/>
-        </p:nvSpPr>
-        <p:spPr>
-          <a:xfrm>
-            <a:off x="8842248" y="1883664"/>
-            <a:ext cx="1280160" cy="219456"/>
-          </a:xfrm>
-          <a:prstGeom prst="rect">
-            <a:avLst/>
-          </a:prstGeom>
-          <a:noFill/>
-          <a:ln/>
-        </p:spPr>
-        <p:txBody>
-          <a:bodyPr wrap="square" lIns="0" tIns="0" rIns="0" bIns="0" rtlCol="0" anchor="ctr"/>
-          <a:lstStyle/>
-          <a:p>
-            <a:pPr algn="ctr" indent="0" marL="0">
-              <a:buNone/>
-            </a:pPr>
-            <a:r>
-              <a:rPr lang="en-US" sz="1100" b="1" dirty="0">
-                <a:solidFill>
-                  <a:srgbClr val="8A6D16"/>
-                </a:solidFill>
-                <a:latin typeface="Calibri" pitchFamily="34" charset="0"/>
-                <a:ea typeface="Calibri" pitchFamily="34" charset="-122"/>
-                <a:cs typeface="Calibri" pitchFamily="34" charset="-120"/>
-              </a:rPr>
-              <a:t>3.0 m</a:t>
-            </a:r>
-            <a:endParaRPr lang="en-US" sz="1100" dirty="0"/>
-          </a:p>
-        </p:txBody>
-      </p:sp>
-      <p:sp>
-        <p:nvSpPr>
-          <p:cNvPr id="129" name="Shape 127"/>
-          <p:cNvSpPr/>
-          <p:nvPr/>
-        </p:nvSpPr>
-        <p:spPr>
-          <a:xfrm>
-            <a:off x="8129016" y="2560320"/>
-            <a:ext cx="0" cy="1828800"/>
-          </a:xfrm>
-          <a:prstGeom prst="line">
-            <a:avLst/>
-          </a:prstGeom>
-          <a:noFill/>
-          <a:ln w="16510">
-            <a:solidFill>
-              <a:srgbClr val="8A6D16"/>
-            </a:solidFill>
-            <a:prstDash val="solid"/>
-            <a:headEnd type="triangle"/>
-            <a:tailEnd type="triangle"/>
-          </a:ln>
-        </p:spPr>
-      </p:sp>
-      <p:sp>
-        <p:nvSpPr>
-          <p:cNvPr id="130" name="Text 128"/>
-          <p:cNvSpPr/>
-          <p:nvPr/>
-        </p:nvSpPr>
-        <p:spPr>
-          <a:xfrm>
-            <a:off x="7488936" y="3355848"/>
-            <a:ext cx="603504" cy="237744"/>
-          </a:xfrm>
-          <a:prstGeom prst="rect">
-            <a:avLst/>
-          </a:prstGeom>
-          <a:noFill/>
-          <a:ln/>
-        </p:spPr>
-        <p:txBody>
-          <a:bodyPr wrap="square" lIns="0" tIns="0" rIns="0" bIns="0" rtlCol="0" anchor="ctr"/>
-          <a:lstStyle/>
-          <a:p>
-            <a:pPr algn="ctr" indent="0" marL="0">
-              <a:buNone/>
-            </a:pPr>
-            <a:r>
-              <a:rPr lang="en-US" sz="900" b="1" dirty="0">
-                <a:solidFill>
-                  <a:srgbClr val="8A6D16"/>
-                </a:solidFill>
-                <a:latin typeface="Calibri" pitchFamily="34" charset="0"/>
-                <a:ea typeface="Calibri" pitchFamily="34" charset="-122"/>
-                <a:cs typeface="Calibri" pitchFamily="34" charset="-120"/>
-              </a:rPr>
-              <a:t>6.0 m</a:t>
-            </a:r>
-            <a:endParaRPr lang="en-US" sz="900" dirty="0"/>
-          </a:p>
-        </p:txBody>
-      </p:sp>
-      <p:sp>
-        <p:nvSpPr>
-          <p:cNvPr id="131" name="Shape 129"/>
-          <p:cNvSpPr/>
-          <p:nvPr/>
-        </p:nvSpPr>
-        <p:spPr>
-          <a:xfrm>
-            <a:off x="8366760" y="4645152"/>
-            <a:ext cx="566928" cy="329184"/>
-          </a:xfrm>
-          <a:prstGeom prst="roundRect">
-            <a:avLst>
-              <a:gd name="adj" fmla="val 13889"/>
-            </a:avLst>
-          </a:prstGeom>
-          <a:solidFill>
-            <a:srgbClr val="E4E7DF"/>
-          </a:solidFill>
-          <a:ln w="13970">
-            <a:solidFill>
-              <a:srgbClr val="566270"/>
-            </a:solidFill>
-            <a:prstDash val="solid"/>
-          </a:ln>
-        </p:spPr>
-      </p:sp>
-      <p:sp>
-        <p:nvSpPr>
-          <p:cNvPr id="132" name="Shape 130"/>
-          <p:cNvSpPr/>
-          <p:nvPr/>
-        </p:nvSpPr>
-        <p:spPr>
-          <a:xfrm>
-            <a:off x="8513796" y="4334256"/>
-            <a:ext cx="64008" cy="310896"/>
-          </a:xfrm>
-          <a:prstGeom prst="rect">
-            <a:avLst/>
-          </a:prstGeom>
-          <a:solidFill>
-            <a:srgbClr val="566270"/>
-          </a:solidFill>
-          <a:ln/>
-        </p:spPr>
-      </p:sp>
-      <p:sp>
-        <p:nvSpPr>
-          <p:cNvPr id="133" name="Shape 131"/>
-          <p:cNvSpPr/>
-          <p:nvPr/>
-        </p:nvSpPr>
-        <p:spPr>
-          <a:xfrm>
-            <a:off x="8722644" y="4334256"/>
-            <a:ext cx="64008" cy="310896"/>
-          </a:xfrm>
-          <a:prstGeom prst="rect">
-            <a:avLst/>
-          </a:prstGeom>
-          <a:solidFill>
-            <a:srgbClr val="566270"/>
-          </a:solidFill>
-          <a:ln/>
-        </p:spPr>
-      </p:sp>
-      <p:sp>
-        <p:nvSpPr>
-          <p:cNvPr id="134" name="Shape 132"/>
-          <p:cNvSpPr/>
-          <p:nvPr/>
-        </p:nvSpPr>
-        <p:spPr>
-          <a:xfrm>
-            <a:off x="8513796" y="4599432"/>
-            <a:ext cx="272857" cy="45720"/>
-          </a:xfrm>
-          <a:prstGeom prst="rect">
-            <a:avLst/>
-          </a:prstGeom>
-          <a:solidFill>
-            <a:srgbClr val="566270"/>
-          </a:solidFill>
-          <a:ln/>
-        </p:spPr>
-      </p:sp>
-      <p:sp>
-        <p:nvSpPr>
-          <p:cNvPr id="135" name="Text 133"/>
-          <p:cNvSpPr/>
-          <p:nvPr/>
-        </p:nvSpPr>
-        <p:spPr>
-          <a:xfrm>
-            <a:off x="8366760" y="4645152"/>
-            <a:ext cx="566928" cy="329184"/>
-          </a:xfrm>
-          <a:prstGeom prst="rect">
-            <a:avLst/>
-          </a:prstGeom>
-          <a:noFill/>
-          <a:ln/>
-        </p:spPr>
-        <p:txBody>
-          <a:bodyPr wrap="square" lIns="0" tIns="0" rIns="0" bIns="0" rtlCol="0" anchor="ctr"/>
-          <a:lstStyle/>
-          <a:p>
-            <a:pPr algn="ctr" indent="0" marL="0">
-              <a:buNone/>
-            </a:pPr>
-            <a:r>
-              <a:rPr lang="en-US" sz="900" b="1" dirty="0">
-                <a:solidFill>
-                  <a:srgbClr val="2A2F39"/>
-                </a:solidFill>
-                <a:latin typeface="Calibri" pitchFamily="34" charset="0"/>
-                <a:ea typeface="Calibri" pitchFamily="34" charset="-122"/>
-                <a:cs typeface="Calibri" pitchFamily="34" charset="-120"/>
-              </a:rPr>
-              <a:t>2</a:t>
-            </a:r>
-            <a:endParaRPr lang="en-US" sz="900" dirty="0"/>
-          </a:p>
-        </p:txBody>
-      </p:sp>
-      <p:sp>
-        <p:nvSpPr>
-          <p:cNvPr id="136" name="Shape 134"/>
-          <p:cNvSpPr/>
-          <p:nvPr/>
-        </p:nvSpPr>
-        <p:spPr>
-          <a:xfrm>
-            <a:off x="10195560" y="4645152"/>
-            <a:ext cx="566928" cy="329184"/>
-          </a:xfrm>
-          <a:prstGeom prst="roundRect">
-            <a:avLst>
-              <a:gd name="adj" fmla="val 13889"/>
-            </a:avLst>
-          </a:prstGeom>
-          <a:solidFill>
-            <a:srgbClr val="E4E7DF"/>
-          </a:solidFill>
-          <a:ln w="13970">
-            <a:solidFill>
-              <a:srgbClr val="566270"/>
-            </a:solidFill>
-            <a:prstDash val="solid"/>
-          </a:ln>
-        </p:spPr>
-      </p:sp>
-      <p:sp>
-        <p:nvSpPr>
-          <p:cNvPr id="137" name="Shape 135"/>
-          <p:cNvSpPr/>
-          <p:nvPr/>
-        </p:nvSpPr>
-        <p:spPr>
-          <a:xfrm>
-            <a:off x="10342596" y="4334256"/>
-            <a:ext cx="64008" cy="310896"/>
-          </a:xfrm>
-          <a:prstGeom prst="rect">
-            <a:avLst/>
-          </a:prstGeom>
-          <a:solidFill>
-            <a:srgbClr val="566270"/>
-          </a:solidFill>
-          <a:ln/>
-        </p:spPr>
-      </p:sp>
-      <p:sp>
-        <p:nvSpPr>
-          <p:cNvPr id="138" name="Shape 136"/>
-          <p:cNvSpPr/>
-          <p:nvPr/>
-        </p:nvSpPr>
-        <p:spPr>
-          <a:xfrm>
-            <a:off x="10551444" y="4334256"/>
-            <a:ext cx="64008" cy="310896"/>
-          </a:xfrm>
-          <a:prstGeom prst="rect">
-            <a:avLst/>
-          </a:prstGeom>
-          <a:solidFill>
-            <a:srgbClr val="566270"/>
-          </a:solidFill>
-          <a:ln/>
-        </p:spPr>
-      </p:sp>
-      <p:sp>
-        <p:nvSpPr>
-          <p:cNvPr id="139" name="Shape 137"/>
-          <p:cNvSpPr/>
-          <p:nvPr/>
-        </p:nvSpPr>
-        <p:spPr>
-          <a:xfrm>
-            <a:off x="10342596" y="4599432"/>
-            <a:ext cx="272857" cy="45720"/>
-          </a:xfrm>
-          <a:prstGeom prst="rect">
-            <a:avLst/>
-          </a:prstGeom>
-          <a:solidFill>
-            <a:srgbClr val="566270"/>
-          </a:solidFill>
-          <a:ln/>
-        </p:spPr>
-      </p:sp>
-      <p:sp>
-        <p:nvSpPr>
-          <p:cNvPr id="140" name="Text 138"/>
-          <p:cNvSpPr/>
-          <p:nvPr/>
-        </p:nvSpPr>
-        <p:spPr>
-          <a:xfrm>
-            <a:off x="10195560" y="4645152"/>
-            <a:ext cx="566928" cy="329184"/>
-          </a:xfrm>
-          <a:prstGeom prst="rect">
-            <a:avLst/>
-          </a:prstGeom>
-          <a:noFill/>
-          <a:ln/>
-        </p:spPr>
-        <p:txBody>
-          <a:bodyPr wrap="square" lIns="0" tIns="0" rIns="0" bIns="0" rtlCol="0" anchor="ctr"/>
-          <a:lstStyle/>
-          <a:p>
-            <a:pPr algn="ctr" indent="0" marL="0">
-              <a:buNone/>
-            </a:pPr>
-            <a:r>
-              <a:rPr lang="en-US" sz="900" b="1" dirty="0">
-                <a:solidFill>
-                  <a:srgbClr val="2A2F39"/>
-                </a:solidFill>
-                <a:latin typeface="Calibri" pitchFamily="34" charset="0"/>
-                <a:ea typeface="Calibri" pitchFamily="34" charset="-122"/>
-                <a:cs typeface="Calibri" pitchFamily="34" charset="-120"/>
-              </a:rPr>
-              <a:t>6</a:t>
-            </a:r>
-            <a:endParaRPr lang="en-US" sz="900" dirty="0"/>
-          </a:p>
-        </p:txBody>
-      </p:sp>
-      <p:sp>
-        <p:nvSpPr>
-          <p:cNvPr id="141" name="Shape 139"/>
-          <p:cNvSpPr/>
-          <p:nvPr/>
-        </p:nvSpPr>
-        <p:spPr>
-          <a:xfrm>
-            <a:off x="9235440" y="4681728"/>
-            <a:ext cx="274320" cy="274320"/>
-          </a:xfrm>
-          <a:prstGeom prst="rect">
-            <a:avLst/>
-          </a:prstGeom>
-          <a:solidFill>
-            <a:srgbClr val="E7E9EC"/>
-          </a:solidFill>
-          <a:ln w="12700">
-            <a:solidFill>
-              <a:srgbClr val="B9BEC6"/>
-            </a:solidFill>
-            <a:prstDash val="solid"/>
-          </a:ln>
-        </p:spPr>
-      </p:sp>
-      <p:sp>
-        <p:nvSpPr>
-          <p:cNvPr id="142" name="Shape 140"/>
-          <p:cNvSpPr/>
-          <p:nvPr/>
-        </p:nvSpPr>
-        <p:spPr>
-          <a:xfrm>
-            <a:off x="9573768" y="4681728"/>
-            <a:ext cx="274320" cy="274320"/>
-          </a:xfrm>
-          <a:prstGeom prst="rect">
-            <a:avLst/>
-          </a:prstGeom>
-          <a:solidFill>
-            <a:srgbClr val="E7E9EC"/>
-          </a:solidFill>
-          <a:ln w="12700">
-            <a:solidFill>
-              <a:srgbClr val="B9BEC6"/>
-            </a:solidFill>
-            <a:prstDash val="solid"/>
-          </a:ln>
-        </p:spPr>
-      </p:sp>
-      <p:sp>
-        <p:nvSpPr>
-          <p:cNvPr id="143" name="Shape 141"/>
-          <p:cNvSpPr/>
-          <p:nvPr/>
-        </p:nvSpPr>
-        <p:spPr>
-          <a:xfrm>
-            <a:off x="594360" y="5230368"/>
-            <a:ext cx="10972800" cy="1097280"/>
-          </a:xfrm>
-          <a:prstGeom prst="roundRect">
-            <a:avLst>
-              <a:gd name="adj" fmla="val 7500"/>
+              <a:gd name="adj" fmla="val 6923"/>
             </a:avLst>
           </a:prstGeom>
           <a:solidFill>
@@ -8813,53 +5283,73 @@
       </p:sp>
       <p:sp>
         <p:nvSpPr>
-          <p:cNvPr id="144" name="Text 142"/>
-          <p:cNvSpPr/>
-          <p:nvPr/>
-        </p:nvSpPr>
-        <p:spPr>
-          <a:xfrm>
-            <a:off x="914400" y="5303520"/>
-            <a:ext cx="10332720" cy="274320"/>
-          </a:xfrm>
-          <a:prstGeom prst="rect">
-            <a:avLst/>
-          </a:prstGeom>
-          <a:noFill/>
-          <a:ln/>
-        </p:spPr>
-        <p:txBody>
-          <a:bodyPr wrap="square" lIns="0" tIns="0" rIns="0" bIns="0" rtlCol="0" anchor="ctr"/>
-          <a:lstStyle/>
-          <a:p>
-            <a:pPr indent="0" marL="0">
-              <a:buNone/>
-            </a:pPr>
-            <a:r>
-              <a:rPr lang="en-US" sz="1200" b="1" dirty="0">
-                <a:solidFill>
-                  <a:srgbClr val="2FA866"/>
-                </a:solidFill>
-                <a:latin typeface="Calibri" pitchFamily="34" charset="0"/>
-                <a:ea typeface="Calibri" pitchFamily="34" charset="-122"/>
-                <a:cs typeface="Calibri" pitchFamily="34" charset="-120"/>
-              </a:rPr>
-              <a:t>✓  Mover el rack 4 además libera un área que usan los mecánicos.</a:t>
-            </a:r>
-            <a:endParaRPr lang="en-US" sz="1200" dirty="0"/>
-          </a:p>
-        </p:txBody>
-      </p:sp>
-      <p:sp>
-        <p:nvSpPr>
-          <p:cNvPr id="145" name="Text 143"/>
-          <p:cNvSpPr/>
-          <p:nvPr/>
-        </p:nvSpPr>
-        <p:spPr>
-          <a:xfrm>
-            <a:off x="914400" y="5614416"/>
-            <a:ext cx="10332720" cy="685800"/>
+          <p:cNvPr id="5" name="Shape 3"/>
+          <p:cNvSpPr/>
+          <p:nvPr/>
+        </p:nvSpPr>
+        <p:spPr>
+          <a:xfrm>
+            <a:off x="594360" y="1783080"/>
+            <a:ext cx="82296" cy="1188720"/>
+          </a:xfrm>
+          <a:prstGeom prst="rect">
+            <a:avLst/>
+          </a:prstGeom>
+          <a:solidFill>
+            <a:srgbClr val="37C3FF"/>
+          </a:solidFill>
+          <a:ln/>
+        </p:spPr>
+      </p:sp>
+      <p:sp>
+        <p:nvSpPr>
+          <p:cNvPr id="6" name="Text 4"/>
+          <p:cNvSpPr/>
+          <p:nvPr/>
+        </p:nvSpPr>
+        <p:spPr>
+          <a:xfrm>
+            <a:off x="914400" y="1965960"/>
+            <a:ext cx="10332720" cy="411480"/>
+          </a:xfrm>
+          <a:prstGeom prst="rect">
+            <a:avLst/>
+          </a:prstGeom>
+          <a:noFill/>
+          <a:ln/>
+        </p:spPr>
+        <p:txBody>
+          <a:bodyPr wrap="square" lIns="0" tIns="0" rIns="0" bIns="0" rtlCol="0" anchor="ctr"/>
+          <a:lstStyle/>
+          <a:p>
+            <a:pPr indent="0" marL="0">
+              <a:buNone/>
+            </a:pPr>
+            <a:r>
+              <a:rPr lang="en-US" sz="1700" b="1" dirty="0">
+                <a:solidFill>
+                  <a:srgbClr val="1A1D23"/>
+                </a:solidFill>
+                <a:latin typeface="Cambria" pitchFamily="34" charset="0"/>
+                <a:ea typeface="Cambria" pitchFamily="34" charset="-122"/>
+                <a:cs typeface="Cambria" pitchFamily="34" charset="-120"/>
+              </a:rPr>
+              <a:t>Reconfigurar espacio muerto</a:t>
+            </a:r>
+            <a:endParaRPr lang="en-US" sz="1700" dirty="0"/>
+          </a:p>
+        </p:txBody>
+      </p:sp>
+      <p:sp>
+        <p:nvSpPr>
+          <p:cNvPr id="7" name="Text 5"/>
+          <p:cNvSpPr/>
+          <p:nvPr/>
+        </p:nvSpPr>
+        <p:spPr>
+          <a:xfrm>
+            <a:off x="914400" y="2386584"/>
+            <a:ext cx="10332720" cy="548640"/>
           </a:xfrm>
           <a:prstGeom prst="rect">
             <a:avLst/>
@@ -8872,13 +5362,10 @@
           <a:lstStyle/>
           <a:p>
             <a:pPr indent="0" marL="0">
-              <a:lnSpc>
-                <a:spcPts val="1400"/>
-              </a:lnSpc>
-              <a:buNone/>
-            </a:pPr>
-            <a:r>
-              <a:rPr lang="en-US" sz="1100" dirty="0">
+              <a:buNone/>
+            </a:pPr>
+            <a:r>
+              <a:rPr lang="en-US" sz="1300" dirty="0">
                 <a:solidFill>
                   <a:srgbClr val="5B6470"/>
                 </a:solidFill>
@@ -8886,19 +5373,126 @@
                 <a:ea typeface="Calibri" pitchFamily="34" charset="-122"/>
                 <a:cs typeface="Calibri" pitchFamily="34" charset="-120"/>
               </a:rPr>
-              <a:t>•  Solo reorganizar estantes para el pasillo de 3.0 × 6.0 m — los racks 3 y 4 siguen accesibles, no se vacían, y todo lo sombreado (espacio en uso) y las mesas se quedan.</a:t>
-            </a:r>
-            <a:endParaRPr lang="en-US" sz="1100" dirty="0"/>
-          </a:p>
-          <a:p>
-            <a:pPr indent="0" marL="0">
-              <a:lnSpc>
-                <a:spcPts val="1400"/>
-              </a:lnSpc>
-              <a:buNone/>
-            </a:pPr>
-            <a:r>
-              <a:rPr lang="en-US" sz="1100" dirty="0">
+              <a:t>En el taller hay espacio muerto ocupado por equipamiento que no se usa y por racks. Reorganizándolo se libera un espacio de 3.0 m de ancho × 6.0 m de largo — sin deshacer el taller.</a:t>
+            </a:r>
+            <a:endParaRPr lang="en-US" sz="1300" dirty="0"/>
+          </a:p>
+        </p:txBody>
+      </p:sp>
+      <p:sp>
+        <p:nvSpPr>
+          <p:cNvPr id="8" name="Shape 6"/>
+          <p:cNvSpPr/>
+          <p:nvPr/>
+        </p:nvSpPr>
+        <p:spPr>
+          <a:xfrm>
+            <a:off x="594360" y="3154680"/>
+            <a:ext cx="10972800" cy="1188720"/>
+          </a:xfrm>
+          <a:prstGeom prst="roundRect">
+            <a:avLst>
+              <a:gd name="adj" fmla="val 6923"/>
+            </a:avLst>
+          </a:prstGeom>
+          <a:solidFill>
+            <a:srgbClr val="FFFFFF"/>
+          </a:solidFill>
+          <a:ln/>
+          <a:effectLst>
+            <a:outerShdw sx="100000" sy="100000" kx="0" ky="0" algn="bl" rotWithShape="0" blurRad="152400" dist="38100" dir="5400000">
+              <a:srgbClr val="000000">
+                <a:alpha val="28000"/>
+              </a:srgbClr>
+            </a:outerShdw>
+          </a:effectLst>
+        </p:spPr>
+      </p:sp>
+      <p:sp>
+        <p:nvSpPr>
+          <p:cNvPr id="9" name="Shape 7"/>
+          <p:cNvSpPr/>
+          <p:nvPr/>
+        </p:nvSpPr>
+        <p:spPr>
+          <a:xfrm>
+            <a:off x="594360" y="3154680"/>
+            <a:ext cx="82296" cy="1188720"/>
+          </a:xfrm>
+          <a:prstGeom prst="rect">
+            <a:avLst/>
+          </a:prstGeom>
+          <a:solidFill>
+            <a:srgbClr val="F5C518"/>
+          </a:solidFill>
+          <a:ln/>
+        </p:spPr>
+      </p:sp>
+      <p:sp>
+        <p:nvSpPr>
+          <p:cNvPr id="10" name="Text 8"/>
+          <p:cNvSpPr/>
+          <p:nvPr/>
+        </p:nvSpPr>
+        <p:spPr>
+          <a:xfrm>
+            <a:off x="914400" y="3337560"/>
+            <a:ext cx="10332720" cy="411480"/>
+          </a:xfrm>
+          <a:prstGeom prst="rect">
+            <a:avLst/>
+          </a:prstGeom>
+          <a:noFill/>
+          <a:ln/>
+        </p:spPr>
+        <p:txBody>
+          <a:bodyPr wrap="square" lIns="0" tIns="0" rIns="0" bIns="0" rtlCol="0" anchor="ctr"/>
+          <a:lstStyle/>
+          <a:p>
+            <a:pPr indent="0" marL="0">
+              <a:buNone/>
+            </a:pPr>
+            <a:r>
+              <a:rPr lang="en-US" sz="1700" b="1" dirty="0">
+                <a:solidFill>
+                  <a:srgbClr val="1A1D23"/>
+                </a:solidFill>
+                <a:latin typeface="Cambria" pitchFamily="34" charset="0"/>
+                <a:ea typeface="Cambria" pitchFamily="34" charset="-122"/>
+                <a:cs typeface="Cambria" pitchFamily="34" charset="-120"/>
+              </a:rPr>
+              <a:t>Un ambiente cerrado y real</a:t>
+            </a:r>
+            <a:endParaRPr lang="en-US" sz="1700" dirty="0"/>
+          </a:p>
+        </p:txBody>
+      </p:sp>
+      <p:sp>
+        <p:nvSpPr>
+          <p:cNvPr id="11" name="Text 9"/>
+          <p:cNvSpPr/>
+          <p:nvPr/>
+        </p:nvSpPr>
+        <p:spPr>
+          <a:xfrm>
+            <a:off x="914400" y="3758184"/>
+            <a:ext cx="10332720" cy="548640"/>
+          </a:xfrm>
+          <a:prstGeom prst="rect">
+            <a:avLst/>
+          </a:prstGeom>
+          <a:noFill/>
+          <a:ln/>
+        </p:spPr>
+        <p:txBody>
+          <a:bodyPr wrap="square" lIns="0" tIns="0" rIns="0" bIns="0" rtlCol="0" anchor="t"/>
+          <a:lstStyle/>
+          <a:p>
+            <a:pPr indent="0" marL="0">
+              <a:buNone/>
+            </a:pPr>
+            <a:r>
+              <a:rPr lang="en-US" sz="1300" dirty="0">
                 <a:solidFill>
                   <a:srgbClr val="5B6470"/>
                 </a:solidFill>
@@ -8906,9 +5500,175 @@
                 <a:ea typeface="Calibri" pitchFamily="34" charset="-122"/>
                 <a:cs typeface="Calibri" pitchFamily="34" charset="-120"/>
               </a:rPr>
-              <a:t>•  Pruebas con el pantógrafo (sin uñas) + un sensor de altura simple y calibrado en las uñas — no viene en el equipo, lo necesitamos, y ya lo resolví al milímetro en Botoni.</a:t>
-            </a:r>
-            <a:endParaRPr lang="en-US" sz="1100" dirty="0"/>
+              <a:t>Es un ambiente cerrado, como el de cualquier almacén de verdad —incluido RETHINK—. Reproduce las condiciones reales donde el equipo va a operar.</a:t>
+            </a:r>
+            <a:endParaRPr lang="en-US" sz="1300" dirty="0"/>
+          </a:p>
+        </p:txBody>
+      </p:sp>
+      <p:sp>
+        <p:nvSpPr>
+          <p:cNvPr id="12" name="Shape 10"/>
+          <p:cNvSpPr/>
+          <p:nvPr/>
+        </p:nvSpPr>
+        <p:spPr>
+          <a:xfrm>
+            <a:off x="594360" y="4526280"/>
+            <a:ext cx="10972800" cy="1188720"/>
+          </a:xfrm>
+          <a:prstGeom prst="roundRect">
+            <a:avLst>
+              <a:gd name="adj" fmla="val 6923"/>
+            </a:avLst>
+          </a:prstGeom>
+          <a:solidFill>
+            <a:srgbClr val="FFFFFF"/>
+          </a:solidFill>
+          <a:ln/>
+          <a:effectLst>
+            <a:outerShdw sx="100000" sy="100000" kx="0" ky="0" algn="bl" rotWithShape="0" blurRad="152400" dist="38100" dir="5400000">
+              <a:srgbClr val="000000">
+                <a:alpha val="28000"/>
+              </a:srgbClr>
+            </a:outerShdw>
+          </a:effectLst>
+        </p:spPr>
+      </p:sp>
+      <p:sp>
+        <p:nvSpPr>
+          <p:cNvPr id="13" name="Shape 11"/>
+          <p:cNvSpPr/>
+          <p:nvPr/>
+        </p:nvSpPr>
+        <p:spPr>
+          <a:xfrm>
+            <a:off x="594360" y="4526280"/>
+            <a:ext cx="82296" cy="1188720"/>
+          </a:xfrm>
+          <a:prstGeom prst="rect">
+            <a:avLst/>
+          </a:prstGeom>
+          <a:solidFill>
+            <a:srgbClr val="39D98A"/>
+          </a:solidFill>
+          <a:ln/>
+        </p:spPr>
+      </p:sp>
+      <p:sp>
+        <p:nvSpPr>
+          <p:cNvPr id="14" name="Text 12"/>
+          <p:cNvSpPr/>
+          <p:nvPr/>
+        </p:nvSpPr>
+        <p:spPr>
+          <a:xfrm>
+            <a:off x="914400" y="4709160"/>
+            <a:ext cx="10332720" cy="411480"/>
+          </a:xfrm>
+          <a:prstGeom prst="rect">
+            <a:avLst/>
+          </a:prstGeom>
+          <a:noFill/>
+          <a:ln/>
+        </p:spPr>
+        <p:txBody>
+          <a:bodyPr wrap="square" lIns="0" tIns="0" rIns="0" bIns="0" rtlCol="0" anchor="ctr"/>
+          <a:lstStyle/>
+          <a:p>
+            <a:pPr indent="0" marL="0">
+              <a:buNone/>
+            </a:pPr>
+            <a:r>
+              <a:rPr lang="en-US" sz="1700" b="1" dirty="0">
+                <a:solidFill>
+                  <a:srgbClr val="1A1D23"/>
+                </a:solidFill>
+                <a:latin typeface="Cambria" pitchFamily="34" charset="0"/>
+                <a:ea typeface="Cambria" pitchFamily="34" charset="-122"/>
+                <a:cs typeface="Cambria" pitchFamily="34" charset="-120"/>
+              </a:rPr>
+              <a:t>La luz inestable juega a favor</a:t>
+            </a:r>
+            <a:endParaRPr lang="en-US" sz="1700" dirty="0"/>
+          </a:p>
+        </p:txBody>
+      </p:sp>
+      <p:sp>
+        <p:nvSpPr>
+          <p:cNvPr id="15" name="Text 13"/>
+          <p:cNvSpPr/>
+          <p:nvPr/>
+        </p:nvSpPr>
+        <p:spPr>
+          <a:xfrm>
+            <a:off x="914400" y="5129784"/>
+            <a:ext cx="10332720" cy="548640"/>
+          </a:xfrm>
+          <a:prstGeom prst="rect">
+            <a:avLst/>
+          </a:prstGeom>
+          <a:noFill/>
+          <a:ln/>
+        </p:spPr>
+        <p:txBody>
+          <a:bodyPr wrap="square" lIns="0" tIns="0" rIns="0" bIns="0" rtlCol="0" anchor="t"/>
+          <a:lstStyle/>
+          <a:p>
+            <a:pPr indent="0" marL="0">
+              <a:buNone/>
+            </a:pPr>
+            <a:r>
+              <a:rPr lang="en-US" sz="1300" dirty="0">
+                <a:solidFill>
+                  <a:srgbClr val="5B6470"/>
+                </a:solidFill>
+                <a:latin typeface="Calibri" pitchFamily="34" charset="0"/>
+                <a:ea typeface="Calibri" pitchFamily="34" charset="-122"/>
+                <a:cs typeface="Calibri" pitchFamily="34" charset="-120"/>
+              </a:rPr>
+              <a:t>La iluminación inestable que tendríamos no es un problema: probar con luz imperfecta hace la visión (ArUco) y la robótica más robustas para el campo.</a:t>
+            </a:r>
+            <a:endParaRPr lang="en-US" sz="1300" dirty="0"/>
+          </a:p>
+        </p:txBody>
+      </p:sp>
+      <p:sp>
+        <p:nvSpPr>
+          <p:cNvPr id="16" name="Text 14"/>
+          <p:cNvSpPr/>
+          <p:nvPr/>
+        </p:nvSpPr>
+        <p:spPr>
+          <a:xfrm>
+            <a:off x="594360" y="5943600"/>
+            <a:ext cx="10972800" cy="365760"/>
+          </a:xfrm>
+          <a:prstGeom prst="rect">
+            <a:avLst/>
+          </a:prstGeom>
+          <a:noFill/>
+          <a:ln/>
+        </p:spPr>
+        <p:txBody>
+          <a:bodyPr wrap="square" lIns="0" tIns="0" rIns="0" bIns="0" rtlCol="0" anchor="ctr"/>
+          <a:lstStyle/>
+          <a:p>
+            <a:pPr indent="0" marL="0">
+              <a:buNone/>
+            </a:pPr>
+            <a:r>
+              <a:rPr lang="en-US" sz="1150" i="1" dirty="0">
+                <a:solidFill>
+                  <a:srgbClr val="5B6470"/>
+                </a:solidFill>
+                <a:latin typeface="Calibri" pitchFamily="34" charset="0"/>
+                <a:ea typeface="Calibri" pitchFamily="34" charset="-122"/>
+                <a:cs typeface="Calibri" pitchFamily="34" charset="-120"/>
+              </a:rPr>
+              <a:t>En esta etapa se prueba el ciclo con el pantógrafo (sin uñas) + un sensor de altura calibrado.</a:t>
+            </a:r>
+            <a:endParaRPr lang="en-US" sz="1150" dirty="0"/>
           </a:p>
         </p:txBody>
       </p:sp>
